--- a/docs/pptx/carbo/jx-carbo-linsubhr-ratio-aki2.pptx
+++ b/docs/pptx/carbo/jx-carbo-linsubhr-ratio-aki2.pptx
@@ -2271,7 +2271,7 @@
           </p:nvSpPr>
           <p:spPr>
             <a:xfrm>
-              <a:off x="817517" y="5114368"/>
+              <a:off x="817517" y="5142518"/>
               <a:ext cx="7799693" cy="0"/>
             </a:xfrm>
             <a:custGeom>
@@ -2314,7 +2314,7 @@
           </p:nvSpPr>
           <p:spPr>
             <a:xfrm>
-              <a:off x="817517" y="4244691"/>
+              <a:off x="817517" y="4313054"/>
               <a:ext cx="7799693" cy="0"/>
             </a:xfrm>
             <a:custGeom>
@@ -2357,7 +2357,7 @@
           </p:nvSpPr>
           <p:spPr>
             <a:xfrm>
-              <a:off x="817517" y="3375014"/>
+              <a:off x="817517" y="3483591"/>
               <a:ext cx="7799693" cy="0"/>
             </a:xfrm>
             <a:custGeom>
@@ -2400,7 +2400,7 @@
           </p:nvSpPr>
           <p:spPr>
             <a:xfrm>
-              <a:off x="817517" y="2505337"/>
+              <a:off x="817517" y="2654127"/>
               <a:ext cx="7799693" cy="0"/>
             </a:xfrm>
             <a:custGeom>
@@ -2443,15 +2443,15 @@
           </p:nvSpPr>
           <p:spPr>
             <a:xfrm>
-              <a:off x="1615213" y="1896563"/>
-              <a:ext cx="0" cy="3826579"/>
+              <a:off x="1615213" y="2073503"/>
+              <a:ext cx="0" cy="3649639"/>
             </a:xfrm>
             <a:custGeom>
               <a:avLst/>
               <a:pathLst>
-                <a:path w="0" h="3826579">
+                <a:path w="0" h="3649639">
                   <a:moveTo>
-                    <a:pt x="0" y="3826579"/>
+                    <a:pt x="0" y="3649639"/>
                   </a:moveTo>
                   <a:lnTo>
                     <a:pt x="0" y="0"/>
@@ -2486,15 +2486,15 @@
           </p:nvSpPr>
           <p:spPr>
             <a:xfrm>
-              <a:off x="3387871" y="1896563"/>
-              <a:ext cx="0" cy="3826579"/>
+              <a:off x="3387871" y="2073503"/>
+              <a:ext cx="0" cy="3649639"/>
             </a:xfrm>
             <a:custGeom>
               <a:avLst/>
               <a:pathLst>
-                <a:path w="0" h="3826579">
+                <a:path w="0" h="3649639">
                   <a:moveTo>
-                    <a:pt x="0" y="3826579"/>
+                    <a:pt x="0" y="3649639"/>
                   </a:moveTo>
                   <a:lnTo>
                     <a:pt x="0" y="0"/>
@@ -2529,15 +2529,15 @@
           </p:nvSpPr>
           <p:spPr>
             <a:xfrm>
-              <a:off x="5160528" y="1896563"/>
-              <a:ext cx="0" cy="3826579"/>
+              <a:off x="5160528" y="2073503"/>
+              <a:ext cx="0" cy="3649639"/>
             </a:xfrm>
             <a:custGeom>
               <a:avLst/>
               <a:pathLst>
-                <a:path w="0" h="3826579">
+                <a:path w="0" h="3649639">
                   <a:moveTo>
-                    <a:pt x="0" y="3826579"/>
+                    <a:pt x="0" y="3649639"/>
                   </a:moveTo>
                   <a:lnTo>
                     <a:pt x="0" y="0"/>
@@ -2572,15 +2572,15 @@
           </p:nvSpPr>
           <p:spPr>
             <a:xfrm>
-              <a:off x="6933186" y="1896563"/>
-              <a:ext cx="0" cy="3826579"/>
+              <a:off x="6933186" y="2073503"/>
+              <a:ext cx="0" cy="3649639"/>
             </a:xfrm>
             <a:custGeom>
               <a:avLst/>
               <a:pathLst>
-                <a:path w="0" h="3826579">
+                <a:path w="0" h="3649639">
                   <a:moveTo>
-                    <a:pt x="0" y="3826579"/>
+                    <a:pt x="0" y="3649639"/>
                   </a:moveTo>
                   <a:lnTo>
                     <a:pt x="0" y="0"/>
@@ -2615,7 +2615,7 @@
           </p:nvSpPr>
           <p:spPr>
             <a:xfrm>
-              <a:off x="817517" y="5549207"/>
+              <a:off x="817517" y="5557249"/>
               <a:ext cx="7799693" cy="0"/>
             </a:xfrm>
             <a:custGeom>
@@ -2658,7 +2658,7 @@
           </p:nvSpPr>
           <p:spPr>
             <a:xfrm>
-              <a:off x="817517" y="4679530"/>
+              <a:off x="817517" y="4727786"/>
               <a:ext cx="7799693" cy="0"/>
             </a:xfrm>
             <a:custGeom>
@@ -2701,7 +2701,7 @@
           </p:nvSpPr>
           <p:spPr>
             <a:xfrm>
-              <a:off x="817517" y="3809853"/>
+              <a:off x="817517" y="3898322"/>
               <a:ext cx="7799693" cy="0"/>
             </a:xfrm>
             <a:custGeom>
@@ -2744,7 +2744,7 @@
           </p:nvSpPr>
           <p:spPr>
             <a:xfrm>
-              <a:off x="817517" y="2940175"/>
+              <a:off x="817517" y="3068859"/>
               <a:ext cx="7799693" cy="0"/>
             </a:xfrm>
             <a:custGeom>
@@ -2787,7 +2787,7 @@
           </p:nvSpPr>
           <p:spPr>
             <a:xfrm>
-              <a:off x="817517" y="2070498"/>
+              <a:off x="817517" y="2239395"/>
               <a:ext cx="7799693" cy="0"/>
             </a:xfrm>
             <a:custGeom>
@@ -2830,15 +2830,15 @@
           </p:nvSpPr>
           <p:spPr>
             <a:xfrm>
-              <a:off x="2501542" y="1896563"/>
-              <a:ext cx="0" cy="3826579"/>
+              <a:off x="2501542" y="2073503"/>
+              <a:ext cx="0" cy="3649639"/>
             </a:xfrm>
             <a:custGeom>
               <a:avLst/>
               <a:pathLst>
-                <a:path w="0" h="3826579">
+                <a:path w="0" h="3649639">
                   <a:moveTo>
-                    <a:pt x="0" y="3826579"/>
+                    <a:pt x="0" y="3649639"/>
                   </a:moveTo>
                   <a:lnTo>
                     <a:pt x="0" y="0"/>
@@ -2873,15 +2873,15 @@
           </p:nvSpPr>
           <p:spPr>
             <a:xfrm>
-              <a:off x="4274200" y="1896563"/>
-              <a:ext cx="0" cy="3826579"/>
+              <a:off x="4274200" y="2073503"/>
+              <a:ext cx="0" cy="3649639"/>
             </a:xfrm>
             <a:custGeom>
               <a:avLst/>
               <a:pathLst>
-                <a:path w="0" h="3826579">
+                <a:path w="0" h="3649639">
                   <a:moveTo>
-                    <a:pt x="0" y="3826579"/>
+                    <a:pt x="0" y="3649639"/>
                   </a:moveTo>
                   <a:lnTo>
                     <a:pt x="0" y="0"/>
@@ -2916,15 +2916,15 @@
           </p:nvSpPr>
           <p:spPr>
             <a:xfrm>
-              <a:off x="6046857" y="1896563"/>
-              <a:ext cx="0" cy="3826579"/>
+              <a:off x="6046857" y="2073503"/>
+              <a:ext cx="0" cy="3649639"/>
             </a:xfrm>
             <a:custGeom>
               <a:avLst/>
               <a:pathLst>
-                <a:path w="0" h="3826579">
+                <a:path w="0" h="3649639">
                   <a:moveTo>
-                    <a:pt x="0" y="3826579"/>
+                    <a:pt x="0" y="3649639"/>
                   </a:moveTo>
                   <a:lnTo>
                     <a:pt x="0" y="0"/>
@@ -2959,15 +2959,15 @@
           </p:nvSpPr>
           <p:spPr>
             <a:xfrm>
-              <a:off x="7819515" y="1896563"/>
-              <a:ext cx="0" cy="3826579"/>
+              <a:off x="7819515" y="2073503"/>
+              <a:ext cx="0" cy="3649639"/>
             </a:xfrm>
             <a:custGeom>
               <a:avLst/>
               <a:pathLst>
-                <a:path w="0" h="3826579">
+                <a:path w="0" h="3649639">
                   <a:moveTo>
-                    <a:pt x="0" y="3826579"/>
+                    <a:pt x="0" y="3649639"/>
                   </a:moveTo>
                   <a:lnTo>
                     <a:pt x="0" y="0"/>
@@ -3002,585 +3002,585 @@
           </p:nvSpPr>
           <p:spPr>
             <a:xfrm>
-              <a:off x="817517" y="1896563"/>
-              <a:ext cx="7403783" cy="3523519"/>
+              <a:off x="817517" y="2073503"/>
+              <a:ext cx="7403783" cy="3360593"/>
             </a:xfrm>
             <a:custGeom>
               <a:avLst/>
               <a:pathLst>
-                <a:path w="7403783" h="3523519">
+                <a:path w="7403783" h="3360593">
                   <a:moveTo>
                     <a:pt x="399714" y="0"/>
                   </a:moveTo>
                   <a:lnTo>
-                    <a:pt x="430221" y="53367"/>
-                  </a:lnTo>
-                  <a:lnTo>
-                    <a:pt x="506853" y="182608"/>
-                  </a:lnTo>
-                  <a:lnTo>
-                    <a:pt x="583486" y="307210"/>
-                  </a:lnTo>
-                  <a:lnTo>
-                    <a:pt x="660118" y="427336"/>
-                  </a:lnTo>
-                  <a:lnTo>
-                    <a:pt x="736751" y="543150"/>
-                  </a:lnTo>
-                  <a:lnTo>
-                    <a:pt x="813384" y="654805"/>
-                  </a:lnTo>
-                  <a:lnTo>
-                    <a:pt x="890016" y="762450"/>
-                  </a:lnTo>
-                  <a:lnTo>
-                    <a:pt x="966649" y="866231"/>
-                  </a:lnTo>
-                  <a:lnTo>
-                    <a:pt x="1043281" y="966284"/>
-                  </a:lnTo>
-                  <a:lnTo>
-                    <a:pt x="1119914" y="1062745"/>
-                  </a:lnTo>
-                  <a:lnTo>
-                    <a:pt x="1196546" y="1155743"/>
-                  </a:lnTo>
-                  <a:lnTo>
-                    <a:pt x="1273179" y="1245401"/>
-                  </a:lnTo>
-                  <a:lnTo>
-                    <a:pt x="1349811" y="1331839"/>
-                  </a:lnTo>
-                  <a:lnTo>
-                    <a:pt x="1426444" y="1415174"/>
-                  </a:lnTo>
-                  <a:lnTo>
-                    <a:pt x="1503076" y="1495517"/>
-                  </a:lnTo>
-                  <a:lnTo>
-                    <a:pt x="1579709" y="1572974"/>
-                  </a:lnTo>
-                  <a:lnTo>
-                    <a:pt x="1656342" y="1647650"/>
-                  </a:lnTo>
-                  <a:lnTo>
-                    <a:pt x="1732974" y="1719645"/>
-                  </a:lnTo>
-                  <a:lnTo>
-                    <a:pt x="1809607" y="1789055"/>
-                  </a:lnTo>
-                  <a:lnTo>
-                    <a:pt x="1886239" y="1855972"/>
-                  </a:lnTo>
-                  <a:lnTo>
-                    <a:pt x="1962872" y="1920486"/>
-                  </a:lnTo>
-                  <a:lnTo>
-                    <a:pt x="2039504" y="1982684"/>
-                  </a:lnTo>
-                  <a:lnTo>
-                    <a:pt x="2116137" y="2042648"/>
-                  </a:lnTo>
-                  <a:lnTo>
-                    <a:pt x="2192769" y="2100460"/>
-                  </a:lnTo>
-                  <a:lnTo>
-                    <a:pt x="2269402" y="2156195"/>
-                  </a:lnTo>
-                  <a:lnTo>
-                    <a:pt x="2346034" y="2209929"/>
-                  </a:lnTo>
-                  <a:lnTo>
-                    <a:pt x="2422667" y="2261734"/>
-                  </a:lnTo>
-                  <a:lnTo>
-                    <a:pt x="2499300" y="2311678"/>
-                  </a:lnTo>
-                  <a:lnTo>
-                    <a:pt x="2575932" y="2359829"/>
-                  </a:lnTo>
-                  <a:lnTo>
-                    <a:pt x="2652565" y="2406251"/>
-                  </a:lnTo>
-                  <a:lnTo>
-                    <a:pt x="2729197" y="2451006"/>
-                  </a:lnTo>
-                  <a:lnTo>
-                    <a:pt x="2805830" y="2494154"/>
-                  </a:lnTo>
-                  <a:lnTo>
-                    <a:pt x="2882462" y="2535753"/>
-                  </a:lnTo>
-                  <a:lnTo>
-                    <a:pt x="2959095" y="2575858"/>
-                  </a:lnTo>
-                  <a:lnTo>
-                    <a:pt x="3035727" y="2614523"/>
-                  </a:lnTo>
-                  <a:lnTo>
-                    <a:pt x="3112360" y="2651799"/>
-                  </a:lnTo>
-                  <a:lnTo>
-                    <a:pt x="3188993" y="2687737"/>
-                  </a:lnTo>
-                  <a:lnTo>
-                    <a:pt x="3265625" y="2722385"/>
-                  </a:lnTo>
-                  <a:lnTo>
-                    <a:pt x="3342258" y="2755789"/>
-                  </a:lnTo>
-                  <a:lnTo>
-                    <a:pt x="3418890" y="2783460"/>
-                  </a:lnTo>
-                  <a:lnTo>
-                    <a:pt x="3495523" y="2786570"/>
-                  </a:lnTo>
-                  <a:lnTo>
-                    <a:pt x="3572155" y="2789669"/>
-                  </a:lnTo>
-                  <a:lnTo>
-                    <a:pt x="3648788" y="2792757"/>
-                  </a:lnTo>
-                  <a:lnTo>
-                    <a:pt x="3725420" y="2795834"/>
-                  </a:lnTo>
-                  <a:lnTo>
-                    <a:pt x="3802053" y="2798899"/>
-                  </a:lnTo>
-                  <a:lnTo>
-                    <a:pt x="3878685" y="2801954"/>
-                  </a:lnTo>
-                  <a:lnTo>
-                    <a:pt x="3955318" y="2804998"/>
-                  </a:lnTo>
-                  <a:lnTo>
-                    <a:pt x="4031951" y="2808031"/>
-                  </a:lnTo>
-                  <a:lnTo>
-                    <a:pt x="4108583" y="2811053"/>
-                  </a:lnTo>
-                  <a:lnTo>
-                    <a:pt x="4185216" y="2814065"/>
-                  </a:lnTo>
-                  <a:lnTo>
-                    <a:pt x="4261848" y="2817065"/>
-                  </a:lnTo>
-                  <a:lnTo>
-                    <a:pt x="4338481" y="2820055"/>
-                  </a:lnTo>
-                  <a:lnTo>
-                    <a:pt x="4415113" y="2823034"/>
-                  </a:lnTo>
-                  <a:lnTo>
-                    <a:pt x="4491746" y="2826002"/>
-                  </a:lnTo>
-                  <a:lnTo>
-                    <a:pt x="4568378" y="2828960"/>
-                  </a:lnTo>
-                  <a:lnTo>
-                    <a:pt x="4645011" y="2831907"/>
-                  </a:lnTo>
-                  <a:lnTo>
-                    <a:pt x="4721644" y="2834844"/>
-                  </a:lnTo>
-                  <a:lnTo>
-                    <a:pt x="4798276" y="2837770"/>
-                  </a:lnTo>
-                  <a:lnTo>
-                    <a:pt x="4874909" y="2840686"/>
-                  </a:lnTo>
-                  <a:lnTo>
-                    <a:pt x="4951541" y="2843591"/>
-                  </a:lnTo>
-                  <a:lnTo>
-                    <a:pt x="5028174" y="2846486"/>
-                  </a:lnTo>
-                  <a:lnTo>
-                    <a:pt x="5104806" y="2849371"/>
-                  </a:lnTo>
-                  <a:lnTo>
-                    <a:pt x="5181439" y="2852245"/>
-                  </a:lnTo>
-                  <a:lnTo>
-                    <a:pt x="5258071" y="2855109"/>
-                  </a:lnTo>
-                  <a:lnTo>
-                    <a:pt x="5334704" y="2857962"/>
-                  </a:lnTo>
-                  <a:lnTo>
-                    <a:pt x="5411336" y="2860806"/>
-                  </a:lnTo>
-                  <a:lnTo>
-                    <a:pt x="5487969" y="2863639"/>
-                  </a:lnTo>
-                  <a:lnTo>
-                    <a:pt x="5564602" y="2866462"/>
-                  </a:lnTo>
-                  <a:lnTo>
-                    <a:pt x="5641234" y="2869275"/>
-                  </a:lnTo>
-                  <a:lnTo>
-                    <a:pt x="5717867" y="2872078"/>
-                  </a:lnTo>
-                  <a:lnTo>
-                    <a:pt x="5794499" y="2874871"/>
-                  </a:lnTo>
-                  <a:lnTo>
-                    <a:pt x="5871132" y="2877654"/>
-                  </a:lnTo>
-                  <a:lnTo>
-                    <a:pt x="5947764" y="2880427"/>
-                  </a:lnTo>
-                  <a:lnTo>
-                    <a:pt x="6024397" y="2883190"/>
-                  </a:lnTo>
-                  <a:lnTo>
-                    <a:pt x="6101029" y="2885944"/>
-                  </a:lnTo>
-                  <a:lnTo>
-                    <a:pt x="6177662" y="2888687"/>
-                  </a:lnTo>
-                  <a:lnTo>
-                    <a:pt x="6254294" y="2891420"/>
-                  </a:lnTo>
-                  <a:lnTo>
-                    <a:pt x="6330927" y="2894144"/>
-                  </a:lnTo>
-                  <a:lnTo>
-                    <a:pt x="6407560" y="2896858"/>
-                  </a:lnTo>
-                  <a:lnTo>
-                    <a:pt x="6484192" y="2899562"/>
-                  </a:lnTo>
-                  <a:lnTo>
-                    <a:pt x="6560825" y="2902257"/>
-                  </a:lnTo>
-                  <a:lnTo>
-                    <a:pt x="6637457" y="2904942"/>
-                  </a:lnTo>
-                  <a:lnTo>
-                    <a:pt x="6714090" y="2907617"/>
-                  </a:lnTo>
-                  <a:lnTo>
-                    <a:pt x="6790722" y="2910283"/>
-                  </a:lnTo>
-                  <a:lnTo>
-                    <a:pt x="6867355" y="2912939"/>
-                  </a:lnTo>
-                  <a:lnTo>
-                    <a:pt x="6943987" y="2915586"/>
-                  </a:lnTo>
-                  <a:lnTo>
-                    <a:pt x="7020620" y="2918223"/>
-                  </a:lnTo>
-                  <a:lnTo>
-                    <a:pt x="7097253" y="2920851"/>
-                  </a:lnTo>
-                  <a:lnTo>
-                    <a:pt x="7173885" y="2923470"/>
-                  </a:lnTo>
-                  <a:lnTo>
-                    <a:pt x="7250518" y="2926079"/>
-                  </a:lnTo>
-                  <a:lnTo>
-                    <a:pt x="7327150" y="2928678"/>
-                  </a:lnTo>
-                  <a:lnTo>
-                    <a:pt x="7403783" y="2931269"/>
-                  </a:lnTo>
-                  <a:lnTo>
-                    <a:pt x="7403783" y="3523519"/>
-                  </a:lnTo>
-                  <a:lnTo>
-                    <a:pt x="7327150" y="3518710"/>
-                  </a:lnTo>
-                  <a:lnTo>
-                    <a:pt x="7250518" y="3513721"/>
-                  </a:lnTo>
-                  <a:lnTo>
-                    <a:pt x="7173885" y="3508547"/>
-                  </a:lnTo>
-                  <a:lnTo>
-                    <a:pt x="7097253" y="3503180"/>
-                  </a:lnTo>
-                  <a:lnTo>
-                    <a:pt x="7020620" y="3497614"/>
-                  </a:lnTo>
-                  <a:lnTo>
-                    <a:pt x="6943987" y="3491839"/>
-                  </a:lnTo>
-                  <a:lnTo>
-                    <a:pt x="6867355" y="3485850"/>
-                  </a:lnTo>
-                  <a:lnTo>
-                    <a:pt x="6790722" y="3479638"/>
-                  </a:lnTo>
-                  <a:lnTo>
-                    <a:pt x="6714090" y="3473194"/>
-                  </a:lnTo>
-                  <a:lnTo>
-                    <a:pt x="6637457" y="3466511"/>
-                  </a:lnTo>
-                  <a:lnTo>
-                    <a:pt x="6560825" y="3459578"/>
-                  </a:lnTo>
-                  <a:lnTo>
-                    <a:pt x="6484192" y="3452388"/>
-                  </a:lnTo>
-                  <a:lnTo>
-                    <a:pt x="6407560" y="3444929"/>
-                  </a:lnTo>
-                  <a:lnTo>
-                    <a:pt x="6330927" y="3437193"/>
-                  </a:lnTo>
-                  <a:lnTo>
-                    <a:pt x="6254294" y="3429168"/>
-                  </a:lnTo>
-                  <a:lnTo>
-                    <a:pt x="6177662" y="3420845"/>
-                  </a:lnTo>
-                  <a:lnTo>
-                    <a:pt x="6101029" y="3412212"/>
-                  </a:lnTo>
-                  <a:lnTo>
-                    <a:pt x="6024397" y="3403257"/>
-                  </a:lnTo>
-                  <a:lnTo>
-                    <a:pt x="5947764" y="3393968"/>
-                  </a:lnTo>
-                  <a:lnTo>
-                    <a:pt x="5871132" y="3384334"/>
-                  </a:lnTo>
-                  <a:lnTo>
-                    <a:pt x="5794499" y="3374341"/>
-                  </a:lnTo>
-                  <a:lnTo>
-                    <a:pt x="5717867" y="3363975"/>
-                  </a:lnTo>
-                  <a:lnTo>
-                    <a:pt x="5641234" y="3353224"/>
-                  </a:lnTo>
-                  <a:lnTo>
-                    <a:pt x="5564602" y="3342072"/>
-                  </a:lnTo>
-                  <a:lnTo>
-                    <a:pt x="5487969" y="3330505"/>
-                  </a:lnTo>
-                  <a:lnTo>
-                    <a:pt x="5411336" y="3318506"/>
-                  </a:lnTo>
-                  <a:lnTo>
-                    <a:pt x="5334704" y="3306061"/>
-                  </a:lnTo>
-                  <a:lnTo>
-                    <a:pt x="5258071" y="3293153"/>
-                  </a:lnTo>
-                  <a:lnTo>
-                    <a:pt x="5181439" y="3279764"/>
-                  </a:lnTo>
-                  <a:lnTo>
-                    <a:pt x="5104806" y="3265876"/>
-                  </a:lnTo>
-                  <a:lnTo>
-                    <a:pt x="5028174" y="3251471"/>
-                  </a:lnTo>
-                  <a:lnTo>
-                    <a:pt x="4951541" y="3236529"/>
-                  </a:lnTo>
-                  <a:lnTo>
-                    <a:pt x="4874909" y="3221031"/>
-                  </a:lnTo>
-                  <a:lnTo>
-                    <a:pt x="4798276" y="3204955"/>
-                  </a:lnTo>
-                  <a:lnTo>
-                    <a:pt x="4721644" y="3188281"/>
-                  </a:lnTo>
-                  <a:lnTo>
-                    <a:pt x="4645011" y="3170986"/>
-                  </a:lnTo>
-                  <a:lnTo>
-                    <a:pt x="4568378" y="3153046"/>
-                  </a:lnTo>
-                  <a:lnTo>
-                    <a:pt x="4491746" y="3134439"/>
-                  </a:lnTo>
-                  <a:lnTo>
-                    <a:pt x="4415113" y="3115138"/>
-                  </a:lnTo>
-                  <a:lnTo>
-                    <a:pt x="4338481" y="3095119"/>
-                  </a:lnTo>
-                  <a:lnTo>
-                    <a:pt x="4261848" y="3074354"/>
-                  </a:lnTo>
-                  <a:lnTo>
-                    <a:pt x="4185216" y="3052815"/>
-                  </a:lnTo>
-                  <a:lnTo>
-                    <a:pt x="4108583" y="3030475"/>
-                  </a:lnTo>
-                  <a:lnTo>
-                    <a:pt x="4031951" y="3007302"/>
-                  </a:lnTo>
-                  <a:lnTo>
-                    <a:pt x="3955318" y="2983266"/>
-                  </a:lnTo>
-                  <a:lnTo>
-                    <a:pt x="3878685" y="2958335"/>
-                  </a:lnTo>
-                  <a:lnTo>
-                    <a:pt x="3802053" y="2932475"/>
-                  </a:lnTo>
-                  <a:lnTo>
-                    <a:pt x="3725420" y="2905653"/>
-                  </a:lnTo>
-                  <a:lnTo>
-                    <a:pt x="3648788" y="2877831"/>
-                  </a:lnTo>
-                  <a:lnTo>
-                    <a:pt x="3572155" y="2848973"/>
-                  </a:lnTo>
-                  <a:lnTo>
-                    <a:pt x="3495523" y="2819040"/>
-                  </a:lnTo>
-                  <a:lnTo>
-                    <a:pt x="3418890" y="2787993"/>
-                  </a:lnTo>
-                  <a:lnTo>
-                    <a:pt x="3342258" y="2780339"/>
-                  </a:lnTo>
-                  <a:lnTo>
-                    <a:pt x="3265625" y="2777207"/>
-                  </a:lnTo>
-                  <a:lnTo>
-                    <a:pt x="3188993" y="2774063"/>
-                  </a:lnTo>
-                  <a:lnTo>
-                    <a:pt x="3112360" y="2770908"/>
-                  </a:lnTo>
-                  <a:lnTo>
-                    <a:pt x="3035727" y="2767742"/>
-                  </a:lnTo>
-                  <a:lnTo>
-                    <a:pt x="2959095" y="2764564"/>
-                  </a:lnTo>
-                  <a:lnTo>
-                    <a:pt x="2882462" y="2761375"/>
-                  </a:lnTo>
-                  <a:lnTo>
-                    <a:pt x="2805830" y="2758174"/>
-                  </a:lnTo>
-                  <a:lnTo>
-                    <a:pt x="2729197" y="2754962"/>
-                  </a:lnTo>
-                  <a:lnTo>
-                    <a:pt x="2652565" y="2751739"/>
-                  </a:lnTo>
-                  <a:lnTo>
-                    <a:pt x="2575932" y="2748504"/>
-                  </a:lnTo>
-                  <a:lnTo>
-                    <a:pt x="2499300" y="2745257"/>
-                  </a:lnTo>
-                  <a:lnTo>
-                    <a:pt x="2422667" y="2741999"/>
-                  </a:lnTo>
-                  <a:lnTo>
-                    <a:pt x="2346034" y="2738729"/>
-                  </a:lnTo>
-                  <a:lnTo>
-                    <a:pt x="2269402" y="2735447"/>
-                  </a:lnTo>
-                  <a:lnTo>
-                    <a:pt x="2192769" y="2732153"/>
-                  </a:lnTo>
-                  <a:lnTo>
-                    <a:pt x="2116137" y="2728848"/>
-                  </a:lnTo>
-                  <a:lnTo>
-                    <a:pt x="2039504" y="2725530"/>
-                  </a:lnTo>
-                  <a:lnTo>
-                    <a:pt x="1962872" y="2722201"/>
-                  </a:lnTo>
-                  <a:lnTo>
-                    <a:pt x="1886239" y="2718860"/>
-                  </a:lnTo>
-                  <a:lnTo>
-                    <a:pt x="1809607" y="2715507"/>
-                  </a:lnTo>
-                  <a:lnTo>
-                    <a:pt x="1732974" y="2712142"/>
-                  </a:lnTo>
-                  <a:lnTo>
-                    <a:pt x="1656342" y="2708764"/>
-                  </a:lnTo>
-                  <a:lnTo>
-                    <a:pt x="1579709" y="2705375"/>
-                  </a:lnTo>
-                  <a:lnTo>
-                    <a:pt x="1503076" y="2701973"/>
-                  </a:lnTo>
-                  <a:lnTo>
-                    <a:pt x="1426444" y="2698559"/>
-                  </a:lnTo>
-                  <a:lnTo>
-                    <a:pt x="1349811" y="2695133"/>
-                  </a:lnTo>
-                  <a:lnTo>
-                    <a:pt x="1273179" y="2691695"/>
-                  </a:lnTo>
-                  <a:lnTo>
-                    <a:pt x="1196546" y="2688244"/>
-                  </a:lnTo>
-                  <a:lnTo>
-                    <a:pt x="1119914" y="2684781"/>
-                  </a:lnTo>
-                  <a:lnTo>
-                    <a:pt x="1043281" y="2681306"/>
-                  </a:lnTo>
-                  <a:lnTo>
-                    <a:pt x="966649" y="2677818"/>
-                  </a:lnTo>
-                  <a:lnTo>
-                    <a:pt x="890016" y="2674317"/>
-                  </a:lnTo>
-                  <a:lnTo>
-                    <a:pt x="813384" y="2670804"/>
-                  </a:lnTo>
-                  <a:lnTo>
-                    <a:pt x="736751" y="2667278"/>
-                  </a:lnTo>
-                  <a:lnTo>
-                    <a:pt x="660118" y="2663740"/>
-                  </a:lnTo>
-                  <a:lnTo>
-                    <a:pt x="583486" y="2660189"/>
-                  </a:lnTo>
-                  <a:lnTo>
-                    <a:pt x="506853" y="2656625"/>
-                  </a:lnTo>
-                  <a:lnTo>
-                    <a:pt x="430221" y="2653048"/>
-                  </a:lnTo>
-                  <a:lnTo>
-                    <a:pt x="353588" y="2649459"/>
-                  </a:lnTo>
-                  <a:lnTo>
-                    <a:pt x="276956" y="2645856"/>
-                  </a:lnTo>
-                  <a:lnTo>
-                    <a:pt x="200323" y="2642241"/>
-                  </a:lnTo>
-                  <a:lnTo>
-                    <a:pt x="123691" y="2638612"/>
-                  </a:lnTo>
-                  <a:lnTo>
-                    <a:pt x="47058" y="2634971"/>
-                  </a:lnTo>
-                  <a:lnTo>
-                    <a:pt x="0" y="2632727"/>
+                    <a:pt x="430221" y="50899"/>
+                  </a:lnTo>
+                  <a:lnTo>
+                    <a:pt x="506853" y="174165"/>
+                  </a:lnTo>
+                  <a:lnTo>
+                    <a:pt x="583486" y="293004"/>
+                  </a:lnTo>
+                  <a:lnTo>
+                    <a:pt x="660118" y="407577"/>
+                  </a:lnTo>
+                  <a:lnTo>
+                    <a:pt x="736751" y="518035"/>
+                  </a:lnTo>
+                  <a:lnTo>
+                    <a:pt x="813384" y="624527"/>
+                  </a:lnTo>
+                  <a:lnTo>
+                    <a:pt x="890016" y="727195"/>
+                  </a:lnTo>
+                  <a:lnTo>
+                    <a:pt x="966649" y="826176"/>
+                  </a:lnTo>
+                  <a:lnTo>
+                    <a:pt x="1043281" y="921604"/>
+                  </a:lnTo>
+                  <a:lnTo>
+                    <a:pt x="1119914" y="1013604"/>
+                  </a:lnTo>
+                  <a:lnTo>
+                    <a:pt x="1196546" y="1102302"/>
+                  </a:lnTo>
+                  <a:lnTo>
+                    <a:pt x="1273179" y="1187814"/>
+                  </a:lnTo>
+                  <a:lnTo>
+                    <a:pt x="1349811" y="1270256"/>
+                  </a:lnTo>
+                  <a:lnTo>
+                    <a:pt x="1426444" y="1349737"/>
+                  </a:lnTo>
+                  <a:lnTo>
+                    <a:pt x="1503076" y="1426364"/>
+                  </a:lnTo>
+                  <a:lnTo>
+                    <a:pt x="1579709" y="1500240"/>
+                  </a:lnTo>
+                  <a:lnTo>
+                    <a:pt x="1656342" y="1571463"/>
+                  </a:lnTo>
+                  <a:lnTo>
+                    <a:pt x="1732974" y="1640129"/>
+                  </a:lnTo>
+                  <a:lnTo>
+                    <a:pt x="1809607" y="1706329"/>
+                  </a:lnTo>
+                  <a:lnTo>
+                    <a:pt x="1886239" y="1770152"/>
+                  </a:lnTo>
+                  <a:lnTo>
+                    <a:pt x="1962872" y="1831684"/>
+                  </a:lnTo>
+                  <a:lnTo>
+                    <a:pt x="2039504" y="1891005"/>
+                  </a:lnTo>
+                  <a:lnTo>
+                    <a:pt x="2116137" y="1948197"/>
+                  </a:lnTo>
+                  <a:lnTo>
+                    <a:pt x="2192769" y="2003335"/>
+                  </a:lnTo>
+                  <a:lnTo>
+                    <a:pt x="2269402" y="2056493"/>
+                  </a:lnTo>
+                  <a:lnTo>
+                    <a:pt x="2346034" y="2107743"/>
+                  </a:lnTo>
+                  <a:lnTo>
+                    <a:pt x="2422667" y="2157152"/>
+                  </a:lnTo>
+                  <a:lnTo>
+                    <a:pt x="2499300" y="2204787"/>
+                  </a:lnTo>
+                  <a:lnTo>
+                    <a:pt x="2575932" y="2250711"/>
+                  </a:lnTo>
+                  <a:lnTo>
+                    <a:pt x="2652565" y="2294987"/>
+                  </a:lnTo>
+                  <a:lnTo>
+                    <a:pt x="2729197" y="2337673"/>
+                  </a:lnTo>
+                  <a:lnTo>
+                    <a:pt x="2805830" y="2378826"/>
+                  </a:lnTo>
+                  <a:lnTo>
+                    <a:pt x="2882462" y="2418501"/>
+                  </a:lnTo>
+                  <a:lnTo>
+                    <a:pt x="2959095" y="2456751"/>
+                  </a:lnTo>
+                  <a:lnTo>
+                    <a:pt x="3035727" y="2493628"/>
+                  </a:lnTo>
+                  <a:lnTo>
+                    <a:pt x="3112360" y="2529181"/>
+                  </a:lnTo>
+                  <a:lnTo>
+                    <a:pt x="3188993" y="2563457"/>
+                  </a:lnTo>
+                  <a:lnTo>
+                    <a:pt x="3265625" y="2596503"/>
+                  </a:lnTo>
+                  <a:lnTo>
+                    <a:pt x="3342258" y="2628362"/>
+                  </a:lnTo>
+                  <a:lnTo>
+                    <a:pt x="3418890" y="2654754"/>
+                  </a:lnTo>
+                  <a:lnTo>
+                    <a:pt x="3495523" y="2657720"/>
+                  </a:lnTo>
+                  <a:lnTo>
+                    <a:pt x="3572155" y="2660676"/>
+                  </a:lnTo>
+                  <a:lnTo>
+                    <a:pt x="3648788" y="2663621"/>
+                  </a:lnTo>
+                  <a:lnTo>
+                    <a:pt x="3725420" y="2666555"/>
+                  </a:lnTo>
+                  <a:lnTo>
+                    <a:pt x="3802053" y="2669479"/>
+                  </a:lnTo>
+                  <a:lnTo>
+                    <a:pt x="3878685" y="2672393"/>
+                  </a:lnTo>
+                  <a:lnTo>
+                    <a:pt x="3955318" y="2675296"/>
+                  </a:lnTo>
+                  <a:lnTo>
+                    <a:pt x="4031951" y="2678189"/>
+                  </a:lnTo>
+                  <a:lnTo>
+                    <a:pt x="4108583" y="2681071"/>
+                  </a:lnTo>
+                  <a:lnTo>
+                    <a:pt x="4185216" y="2683943"/>
+                  </a:lnTo>
+                  <a:lnTo>
+                    <a:pt x="4261848" y="2686805"/>
+                  </a:lnTo>
+                  <a:lnTo>
+                    <a:pt x="4338481" y="2689657"/>
+                  </a:lnTo>
+                  <a:lnTo>
+                    <a:pt x="4415113" y="2692498"/>
+                  </a:lnTo>
+                  <a:lnTo>
+                    <a:pt x="4491746" y="2695329"/>
+                  </a:lnTo>
+                  <a:lnTo>
+                    <a:pt x="4568378" y="2698150"/>
+                  </a:lnTo>
+                  <a:lnTo>
+                    <a:pt x="4645011" y="2700961"/>
+                  </a:lnTo>
+                  <a:lnTo>
+                    <a:pt x="4721644" y="2703762"/>
+                  </a:lnTo>
+                  <a:lnTo>
+                    <a:pt x="4798276" y="2706553"/>
+                  </a:lnTo>
+                  <a:lnTo>
+                    <a:pt x="4874909" y="2709334"/>
+                  </a:lnTo>
+                  <a:lnTo>
+                    <a:pt x="4951541" y="2712105"/>
+                  </a:lnTo>
+                  <a:lnTo>
+                    <a:pt x="5028174" y="2714866"/>
+                  </a:lnTo>
+                  <a:lnTo>
+                    <a:pt x="5104806" y="2717617"/>
+                  </a:lnTo>
+                  <a:lnTo>
+                    <a:pt x="5181439" y="2720358"/>
+                  </a:lnTo>
+                  <a:lnTo>
+                    <a:pt x="5258071" y="2723090"/>
+                  </a:lnTo>
+                  <a:lnTo>
+                    <a:pt x="5334704" y="2725811"/>
+                  </a:lnTo>
+                  <a:lnTo>
+                    <a:pt x="5411336" y="2728523"/>
+                  </a:lnTo>
+                  <a:lnTo>
+                    <a:pt x="5487969" y="2731226"/>
+                  </a:lnTo>
+                  <a:lnTo>
+                    <a:pt x="5564602" y="2733918"/>
+                  </a:lnTo>
+                  <a:lnTo>
+                    <a:pt x="5641234" y="2736601"/>
+                  </a:lnTo>
+                  <a:lnTo>
+                    <a:pt x="5717867" y="2739275"/>
+                  </a:lnTo>
+                  <a:lnTo>
+                    <a:pt x="5794499" y="2741938"/>
+                  </a:lnTo>
+                  <a:lnTo>
+                    <a:pt x="5871132" y="2744593"/>
+                  </a:lnTo>
+                  <a:lnTo>
+                    <a:pt x="5947764" y="2747237"/>
+                  </a:lnTo>
+                  <a:lnTo>
+                    <a:pt x="6024397" y="2749873"/>
+                  </a:lnTo>
+                  <a:lnTo>
+                    <a:pt x="6101029" y="2752499"/>
+                  </a:lnTo>
+                  <a:lnTo>
+                    <a:pt x="6177662" y="2755115"/>
+                  </a:lnTo>
+                  <a:lnTo>
+                    <a:pt x="6254294" y="2757722"/>
+                  </a:lnTo>
+                  <a:lnTo>
+                    <a:pt x="6330927" y="2760320"/>
+                  </a:lnTo>
+                  <a:lnTo>
+                    <a:pt x="6407560" y="2762908"/>
+                  </a:lnTo>
+                  <a:lnTo>
+                    <a:pt x="6484192" y="2765488"/>
+                  </a:lnTo>
+                  <a:lnTo>
+                    <a:pt x="6560825" y="2768058"/>
+                  </a:lnTo>
+                  <a:lnTo>
+                    <a:pt x="6637457" y="2770619"/>
+                  </a:lnTo>
+                  <a:lnTo>
+                    <a:pt x="6714090" y="2773170"/>
+                  </a:lnTo>
+                  <a:lnTo>
+                    <a:pt x="6790722" y="2775713"/>
+                  </a:lnTo>
+                  <a:lnTo>
+                    <a:pt x="6867355" y="2778246"/>
+                  </a:lnTo>
+                  <a:lnTo>
+                    <a:pt x="6943987" y="2780770"/>
+                  </a:lnTo>
+                  <a:lnTo>
+                    <a:pt x="7020620" y="2783286"/>
+                  </a:lnTo>
+                  <a:lnTo>
+                    <a:pt x="7097253" y="2785792"/>
+                  </a:lnTo>
+                  <a:lnTo>
+                    <a:pt x="7173885" y="2788290"/>
+                  </a:lnTo>
+                  <a:lnTo>
+                    <a:pt x="7250518" y="2790778"/>
+                  </a:lnTo>
+                  <a:lnTo>
+                    <a:pt x="7327150" y="2793257"/>
+                  </a:lnTo>
+                  <a:lnTo>
+                    <a:pt x="7403783" y="2795728"/>
+                  </a:lnTo>
+                  <a:lnTo>
+                    <a:pt x="7403783" y="3360593"/>
+                  </a:lnTo>
+                  <a:lnTo>
+                    <a:pt x="7327150" y="3356006"/>
+                  </a:lnTo>
+                  <a:lnTo>
+                    <a:pt x="7250518" y="3351248"/>
+                  </a:lnTo>
+                  <a:lnTo>
+                    <a:pt x="7173885" y="3346313"/>
+                  </a:lnTo>
+                  <a:lnTo>
+                    <a:pt x="7097253" y="3341195"/>
+                  </a:lnTo>
+                  <a:lnTo>
+                    <a:pt x="7020620" y="3335885"/>
+                  </a:lnTo>
+                  <a:lnTo>
+                    <a:pt x="6943987" y="3330378"/>
+                  </a:lnTo>
+                  <a:lnTo>
+                    <a:pt x="6867355" y="3324666"/>
+                  </a:lnTo>
+                  <a:lnTo>
+                    <a:pt x="6790722" y="3318741"/>
+                  </a:lnTo>
+                  <a:lnTo>
+                    <a:pt x="6714090" y="3312595"/>
+                  </a:lnTo>
+                  <a:lnTo>
+                    <a:pt x="6637457" y="3306221"/>
+                  </a:lnTo>
+                  <a:lnTo>
+                    <a:pt x="6560825" y="3299609"/>
+                  </a:lnTo>
+                  <a:lnTo>
+                    <a:pt x="6484192" y="3292750"/>
+                  </a:lnTo>
+                  <a:lnTo>
+                    <a:pt x="6407560" y="3285637"/>
+                  </a:lnTo>
+                  <a:lnTo>
+                    <a:pt x="6330927" y="3278258"/>
+                  </a:lnTo>
+                  <a:lnTo>
+                    <a:pt x="6254294" y="3270605"/>
+                  </a:lnTo>
+                  <a:lnTo>
+                    <a:pt x="6177662" y="3262666"/>
+                  </a:lnTo>
+                  <a:lnTo>
+                    <a:pt x="6101029" y="3254432"/>
+                  </a:lnTo>
+                  <a:lnTo>
+                    <a:pt x="6024397" y="3245891"/>
+                  </a:lnTo>
+                  <a:lnTo>
+                    <a:pt x="5947764" y="3237032"/>
+                  </a:lnTo>
+                  <a:lnTo>
+                    <a:pt x="5871132" y="3227843"/>
+                  </a:lnTo>
+                  <a:lnTo>
+                    <a:pt x="5794499" y="3218312"/>
+                  </a:lnTo>
+                  <a:lnTo>
+                    <a:pt x="5717867" y="3208426"/>
+                  </a:lnTo>
+                  <a:lnTo>
+                    <a:pt x="5641234" y="3198172"/>
+                  </a:lnTo>
+                  <a:lnTo>
+                    <a:pt x="5564602" y="3187536"/>
+                  </a:lnTo>
+                  <a:lnTo>
+                    <a:pt x="5487969" y="3176503"/>
+                  </a:lnTo>
+                  <a:lnTo>
+                    <a:pt x="5411336" y="3165060"/>
+                  </a:lnTo>
+                  <a:lnTo>
+                    <a:pt x="5334704" y="3153190"/>
+                  </a:lnTo>
+                  <a:lnTo>
+                    <a:pt x="5258071" y="3140879"/>
+                  </a:lnTo>
+                  <a:lnTo>
+                    <a:pt x="5181439" y="3128109"/>
+                  </a:lnTo>
+                  <a:lnTo>
+                    <a:pt x="5104806" y="3114863"/>
+                  </a:lnTo>
+                  <a:lnTo>
+                    <a:pt x="5028174" y="3101124"/>
+                  </a:lnTo>
+                  <a:lnTo>
+                    <a:pt x="4951541" y="3086873"/>
+                  </a:lnTo>
+                  <a:lnTo>
+                    <a:pt x="4874909" y="3072091"/>
+                  </a:lnTo>
+                  <a:lnTo>
+                    <a:pt x="4798276" y="3056759"/>
+                  </a:lnTo>
+                  <a:lnTo>
+                    <a:pt x="4721644" y="3040856"/>
+                  </a:lnTo>
+                  <a:lnTo>
+                    <a:pt x="4645011" y="3024361"/>
+                  </a:lnTo>
+                  <a:lnTo>
+                    <a:pt x="4568378" y="3007251"/>
+                  </a:lnTo>
+                  <a:lnTo>
+                    <a:pt x="4491746" y="2989503"/>
+                  </a:lnTo>
+                  <a:lnTo>
+                    <a:pt x="4415113" y="2971095"/>
+                  </a:lnTo>
+                  <a:lnTo>
+                    <a:pt x="4338481" y="2952002"/>
+                  </a:lnTo>
+                  <a:lnTo>
+                    <a:pt x="4261848" y="2932197"/>
+                  </a:lnTo>
+                  <a:lnTo>
+                    <a:pt x="4185216" y="2911654"/>
+                  </a:lnTo>
+                  <a:lnTo>
+                    <a:pt x="4108583" y="2890347"/>
+                  </a:lnTo>
+                  <a:lnTo>
+                    <a:pt x="4031951" y="2868245"/>
+                  </a:lnTo>
+                  <a:lnTo>
+                    <a:pt x="3955318" y="2845321"/>
+                  </a:lnTo>
+                  <a:lnTo>
+                    <a:pt x="3878685" y="2821543"/>
+                  </a:lnTo>
+                  <a:lnTo>
+                    <a:pt x="3802053" y="2796879"/>
+                  </a:lnTo>
+                  <a:lnTo>
+                    <a:pt x="3725420" y="2771296"/>
+                  </a:lnTo>
+                  <a:lnTo>
+                    <a:pt x="3648788" y="2744761"/>
+                  </a:lnTo>
+                  <a:lnTo>
+                    <a:pt x="3572155" y="2717237"/>
+                  </a:lnTo>
+                  <a:lnTo>
+                    <a:pt x="3495523" y="2688689"/>
+                  </a:lnTo>
+                  <a:lnTo>
+                    <a:pt x="3418890" y="2659077"/>
+                  </a:lnTo>
+                  <a:lnTo>
+                    <a:pt x="3342258" y="2651777"/>
+                  </a:lnTo>
+                  <a:lnTo>
+                    <a:pt x="3265625" y="2648790"/>
+                  </a:lnTo>
+                  <a:lnTo>
+                    <a:pt x="3188993" y="2645791"/>
+                  </a:lnTo>
+                  <a:lnTo>
+                    <a:pt x="3112360" y="2642782"/>
+                  </a:lnTo>
+                  <a:lnTo>
+                    <a:pt x="3035727" y="2639762"/>
+                  </a:lnTo>
+                  <a:lnTo>
+                    <a:pt x="2959095" y="2636732"/>
+                  </a:lnTo>
+                  <a:lnTo>
+                    <a:pt x="2882462" y="2633690"/>
+                  </a:lnTo>
+                  <a:lnTo>
+                    <a:pt x="2805830" y="2630637"/>
+                  </a:lnTo>
+                  <a:lnTo>
+                    <a:pt x="2729197" y="2627574"/>
+                  </a:lnTo>
+                  <a:lnTo>
+                    <a:pt x="2652565" y="2624500"/>
+                  </a:lnTo>
+                  <a:lnTo>
+                    <a:pt x="2575932" y="2621414"/>
+                  </a:lnTo>
+                  <a:lnTo>
+                    <a:pt x="2499300" y="2618317"/>
+                  </a:lnTo>
+                  <a:lnTo>
+                    <a:pt x="2422667" y="2615210"/>
+                  </a:lnTo>
+                  <a:lnTo>
+                    <a:pt x="2346034" y="2612091"/>
+                  </a:lnTo>
+                  <a:lnTo>
+                    <a:pt x="2269402" y="2608961"/>
+                  </a:lnTo>
+                  <a:lnTo>
+                    <a:pt x="2192769" y="2605819"/>
+                  </a:lnTo>
+                  <a:lnTo>
+                    <a:pt x="2116137" y="2602667"/>
+                  </a:lnTo>
+                  <a:lnTo>
+                    <a:pt x="2039504" y="2599503"/>
+                  </a:lnTo>
+                  <a:lnTo>
+                    <a:pt x="1962872" y="2596328"/>
+                  </a:lnTo>
+                  <a:lnTo>
+                    <a:pt x="1886239" y="2593141"/>
+                  </a:lnTo>
+                  <a:lnTo>
+                    <a:pt x="1809607" y="2589943"/>
+                  </a:lnTo>
+                  <a:lnTo>
+                    <a:pt x="1732974" y="2586733"/>
+                  </a:lnTo>
+                  <a:lnTo>
+                    <a:pt x="1656342" y="2583512"/>
+                  </a:lnTo>
+                  <a:lnTo>
+                    <a:pt x="1579709" y="2580279"/>
+                  </a:lnTo>
+                  <a:lnTo>
+                    <a:pt x="1503076" y="2577035"/>
+                  </a:lnTo>
+                  <a:lnTo>
+                    <a:pt x="1426444" y="2573779"/>
+                  </a:lnTo>
+                  <a:lnTo>
+                    <a:pt x="1349811" y="2570511"/>
+                  </a:lnTo>
+                  <a:lnTo>
+                    <a:pt x="1273179" y="2567232"/>
+                  </a:lnTo>
+                  <a:lnTo>
+                    <a:pt x="1196546" y="2563941"/>
+                  </a:lnTo>
+                  <a:lnTo>
+                    <a:pt x="1119914" y="2560638"/>
+                  </a:lnTo>
+                  <a:lnTo>
+                    <a:pt x="1043281" y="2557323"/>
+                  </a:lnTo>
+                  <a:lnTo>
+                    <a:pt x="966649" y="2553996"/>
+                  </a:lnTo>
+                  <a:lnTo>
+                    <a:pt x="890016" y="2550658"/>
+                  </a:lnTo>
+                  <a:lnTo>
+                    <a:pt x="813384" y="2547307"/>
+                  </a:lnTo>
+                  <a:lnTo>
+                    <a:pt x="736751" y="2543944"/>
+                  </a:lnTo>
+                  <a:lnTo>
+                    <a:pt x="660118" y="2540569"/>
+                  </a:lnTo>
+                  <a:lnTo>
+                    <a:pt x="583486" y="2537182"/>
+                  </a:lnTo>
+                  <a:lnTo>
+                    <a:pt x="506853" y="2533783"/>
+                  </a:lnTo>
+                  <a:lnTo>
+                    <a:pt x="430221" y="2530372"/>
+                  </a:lnTo>
+                  <a:lnTo>
+                    <a:pt x="353588" y="2526949"/>
+                  </a:lnTo>
+                  <a:lnTo>
+                    <a:pt x="276956" y="2523513"/>
+                  </a:lnTo>
+                  <a:lnTo>
+                    <a:pt x="200323" y="2520065"/>
+                  </a:lnTo>
+                  <a:lnTo>
+                    <a:pt x="123691" y="2516604"/>
+                  </a:lnTo>
+                  <a:lnTo>
+                    <a:pt x="47058" y="2513131"/>
+                  </a:lnTo>
+                  <a:lnTo>
+                    <a:pt x="0" y="2510991"/>
                   </a:lnTo>
                   <a:close/>
                 </a:path>
@@ -3606,291 +3606,291 @@
           </p:nvSpPr>
           <p:spPr>
             <a:xfrm>
-              <a:off x="1217231" y="1896563"/>
-              <a:ext cx="7004069" cy="2931269"/>
+              <a:off x="1217231" y="2073503"/>
+              <a:ext cx="7004069" cy="2795728"/>
             </a:xfrm>
             <a:custGeom>
               <a:avLst/>
               <a:pathLst>
-                <a:path w="7004069" h="2931269">
+                <a:path w="7004069" h="2795728">
                   <a:moveTo>
                     <a:pt x="0" y="0"/>
                   </a:moveTo>
                   <a:lnTo>
-                    <a:pt x="30507" y="53367"/>
-                  </a:lnTo>
-                  <a:lnTo>
-                    <a:pt x="107139" y="182608"/>
-                  </a:lnTo>
-                  <a:lnTo>
-                    <a:pt x="183772" y="307210"/>
-                  </a:lnTo>
-                  <a:lnTo>
-                    <a:pt x="260404" y="427336"/>
-                  </a:lnTo>
-                  <a:lnTo>
-                    <a:pt x="337037" y="543150"/>
-                  </a:lnTo>
-                  <a:lnTo>
-                    <a:pt x="413669" y="654805"/>
-                  </a:lnTo>
-                  <a:lnTo>
-                    <a:pt x="490302" y="762450"/>
-                  </a:lnTo>
-                  <a:lnTo>
-                    <a:pt x="566935" y="866231"/>
-                  </a:lnTo>
-                  <a:lnTo>
-                    <a:pt x="643567" y="966284"/>
-                  </a:lnTo>
-                  <a:lnTo>
-                    <a:pt x="720200" y="1062745"/>
-                  </a:lnTo>
-                  <a:lnTo>
-                    <a:pt x="796832" y="1155743"/>
-                  </a:lnTo>
-                  <a:lnTo>
-                    <a:pt x="873465" y="1245401"/>
-                  </a:lnTo>
-                  <a:lnTo>
-                    <a:pt x="950097" y="1331839"/>
-                  </a:lnTo>
-                  <a:lnTo>
-                    <a:pt x="1026730" y="1415174"/>
-                  </a:lnTo>
-                  <a:lnTo>
-                    <a:pt x="1103362" y="1495517"/>
-                  </a:lnTo>
-                  <a:lnTo>
-                    <a:pt x="1179995" y="1572974"/>
-                  </a:lnTo>
-                  <a:lnTo>
-                    <a:pt x="1256627" y="1647650"/>
-                  </a:lnTo>
-                  <a:lnTo>
-                    <a:pt x="1333260" y="1719645"/>
-                  </a:lnTo>
-                  <a:lnTo>
-                    <a:pt x="1409893" y="1789055"/>
-                  </a:lnTo>
-                  <a:lnTo>
-                    <a:pt x="1486525" y="1855972"/>
-                  </a:lnTo>
-                  <a:lnTo>
-                    <a:pt x="1563158" y="1920486"/>
-                  </a:lnTo>
-                  <a:lnTo>
-                    <a:pt x="1639790" y="1982684"/>
-                  </a:lnTo>
-                  <a:lnTo>
-                    <a:pt x="1716423" y="2042648"/>
-                  </a:lnTo>
-                  <a:lnTo>
-                    <a:pt x="1793055" y="2100460"/>
-                  </a:lnTo>
-                  <a:lnTo>
-                    <a:pt x="1869688" y="2156195"/>
-                  </a:lnTo>
-                  <a:lnTo>
-                    <a:pt x="1946320" y="2209929"/>
-                  </a:lnTo>
-                  <a:lnTo>
-                    <a:pt x="2022953" y="2261734"/>
-                  </a:lnTo>
-                  <a:lnTo>
-                    <a:pt x="2099586" y="2311678"/>
-                  </a:lnTo>
-                  <a:lnTo>
-                    <a:pt x="2176218" y="2359829"/>
-                  </a:lnTo>
-                  <a:lnTo>
-                    <a:pt x="2252851" y="2406251"/>
-                  </a:lnTo>
-                  <a:lnTo>
-                    <a:pt x="2329483" y="2451006"/>
-                  </a:lnTo>
-                  <a:lnTo>
-                    <a:pt x="2406116" y="2494154"/>
-                  </a:lnTo>
-                  <a:lnTo>
-                    <a:pt x="2482748" y="2535753"/>
-                  </a:lnTo>
-                  <a:lnTo>
-                    <a:pt x="2559381" y="2575858"/>
-                  </a:lnTo>
-                  <a:lnTo>
-                    <a:pt x="2636013" y="2614523"/>
-                  </a:lnTo>
-                  <a:lnTo>
-                    <a:pt x="2712646" y="2651799"/>
-                  </a:lnTo>
-                  <a:lnTo>
-                    <a:pt x="2789278" y="2687737"/>
-                  </a:lnTo>
-                  <a:lnTo>
-                    <a:pt x="2865911" y="2722385"/>
-                  </a:lnTo>
-                  <a:lnTo>
-                    <a:pt x="2942544" y="2755789"/>
-                  </a:lnTo>
-                  <a:lnTo>
-                    <a:pt x="3019176" y="2783460"/>
-                  </a:lnTo>
-                  <a:lnTo>
-                    <a:pt x="3095809" y="2786570"/>
-                  </a:lnTo>
-                  <a:lnTo>
-                    <a:pt x="3172441" y="2789669"/>
-                  </a:lnTo>
-                  <a:lnTo>
-                    <a:pt x="3249074" y="2792757"/>
-                  </a:lnTo>
-                  <a:lnTo>
-                    <a:pt x="3325706" y="2795834"/>
-                  </a:lnTo>
-                  <a:lnTo>
-                    <a:pt x="3402339" y="2798899"/>
-                  </a:lnTo>
-                  <a:lnTo>
-                    <a:pt x="3478971" y="2801954"/>
-                  </a:lnTo>
-                  <a:lnTo>
-                    <a:pt x="3555604" y="2804998"/>
-                  </a:lnTo>
-                  <a:lnTo>
-                    <a:pt x="3632237" y="2808031"/>
-                  </a:lnTo>
-                  <a:lnTo>
-                    <a:pt x="3708869" y="2811053"/>
-                  </a:lnTo>
-                  <a:lnTo>
-                    <a:pt x="3785502" y="2814065"/>
-                  </a:lnTo>
-                  <a:lnTo>
-                    <a:pt x="3862134" y="2817065"/>
-                  </a:lnTo>
-                  <a:lnTo>
-                    <a:pt x="3938767" y="2820055"/>
-                  </a:lnTo>
-                  <a:lnTo>
-                    <a:pt x="4015399" y="2823034"/>
-                  </a:lnTo>
-                  <a:lnTo>
-                    <a:pt x="4092032" y="2826002"/>
-                  </a:lnTo>
-                  <a:lnTo>
-                    <a:pt x="4168664" y="2828960"/>
-                  </a:lnTo>
-                  <a:lnTo>
-                    <a:pt x="4245297" y="2831907"/>
-                  </a:lnTo>
-                  <a:lnTo>
-                    <a:pt x="4321929" y="2834844"/>
-                  </a:lnTo>
-                  <a:lnTo>
-                    <a:pt x="4398562" y="2837770"/>
-                  </a:lnTo>
-                  <a:lnTo>
-                    <a:pt x="4475195" y="2840686"/>
-                  </a:lnTo>
-                  <a:lnTo>
-                    <a:pt x="4551827" y="2843591"/>
-                  </a:lnTo>
-                  <a:lnTo>
-                    <a:pt x="4628460" y="2846486"/>
-                  </a:lnTo>
-                  <a:lnTo>
-                    <a:pt x="4705092" y="2849371"/>
-                  </a:lnTo>
-                  <a:lnTo>
-                    <a:pt x="4781725" y="2852245"/>
-                  </a:lnTo>
-                  <a:lnTo>
-                    <a:pt x="4858357" y="2855109"/>
-                  </a:lnTo>
-                  <a:lnTo>
-                    <a:pt x="4934990" y="2857962"/>
-                  </a:lnTo>
-                  <a:lnTo>
-                    <a:pt x="5011622" y="2860806"/>
-                  </a:lnTo>
-                  <a:lnTo>
-                    <a:pt x="5088255" y="2863639"/>
-                  </a:lnTo>
-                  <a:lnTo>
-                    <a:pt x="5164887" y="2866462"/>
-                  </a:lnTo>
-                  <a:lnTo>
-                    <a:pt x="5241520" y="2869275"/>
-                  </a:lnTo>
-                  <a:lnTo>
-                    <a:pt x="5318153" y="2872078"/>
-                  </a:lnTo>
-                  <a:lnTo>
-                    <a:pt x="5394785" y="2874871"/>
-                  </a:lnTo>
-                  <a:lnTo>
-                    <a:pt x="5471418" y="2877654"/>
-                  </a:lnTo>
-                  <a:lnTo>
-                    <a:pt x="5548050" y="2880427"/>
-                  </a:lnTo>
-                  <a:lnTo>
-                    <a:pt x="5624683" y="2883190"/>
-                  </a:lnTo>
-                  <a:lnTo>
-                    <a:pt x="5701315" y="2885944"/>
-                  </a:lnTo>
-                  <a:lnTo>
-                    <a:pt x="5777948" y="2888687"/>
-                  </a:lnTo>
-                  <a:lnTo>
-                    <a:pt x="5854580" y="2891420"/>
-                  </a:lnTo>
-                  <a:lnTo>
-                    <a:pt x="5931213" y="2894144"/>
-                  </a:lnTo>
-                  <a:lnTo>
-                    <a:pt x="6007846" y="2896858"/>
-                  </a:lnTo>
-                  <a:lnTo>
-                    <a:pt x="6084478" y="2899562"/>
-                  </a:lnTo>
-                  <a:lnTo>
-                    <a:pt x="6161111" y="2902257"/>
-                  </a:lnTo>
-                  <a:lnTo>
-                    <a:pt x="6237743" y="2904942"/>
-                  </a:lnTo>
-                  <a:lnTo>
-                    <a:pt x="6314376" y="2907617"/>
-                  </a:lnTo>
-                  <a:lnTo>
-                    <a:pt x="6391008" y="2910283"/>
-                  </a:lnTo>
-                  <a:lnTo>
-                    <a:pt x="6467641" y="2912939"/>
-                  </a:lnTo>
-                  <a:lnTo>
-                    <a:pt x="6544273" y="2915586"/>
-                  </a:lnTo>
-                  <a:lnTo>
-                    <a:pt x="6620906" y="2918223"/>
-                  </a:lnTo>
-                  <a:lnTo>
-                    <a:pt x="6697538" y="2920851"/>
-                  </a:lnTo>
-                  <a:lnTo>
-                    <a:pt x="6774171" y="2923470"/>
-                  </a:lnTo>
-                  <a:lnTo>
-                    <a:pt x="6850804" y="2926079"/>
-                  </a:lnTo>
-                  <a:lnTo>
-                    <a:pt x="6927436" y="2928678"/>
-                  </a:lnTo>
-                  <a:lnTo>
-                    <a:pt x="7004069" y="2931269"/>
+                    <a:pt x="30507" y="50899"/>
+                  </a:lnTo>
+                  <a:lnTo>
+                    <a:pt x="107139" y="174165"/>
+                  </a:lnTo>
+                  <a:lnTo>
+                    <a:pt x="183772" y="293004"/>
+                  </a:lnTo>
+                  <a:lnTo>
+                    <a:pt x="260404" y="407577"/>
+                  </a:lnTo>
+                  <a:lnTo>
+                    <a:pt x="337037" y="518035"/>
+                  </a:lnTo>
+                  <a:lnTo>
+                    <a:pt x="413669" y="624527"/>
+                  </a:lnTo>
+                  <a:lnTo>
+                    <a:pt x="490302" y="727195"/>
+                  </a:lnTo>
+                  <a:lnTo>
+                    <a:pt x="566935" y="826176"/>
+                  </a:lnTo>
+                  <a:lnTo>
+                    <a:pt x="643567" y="921604"/>
+                  </a:lnTo>
+                  <a:lnTo>
+                    <a:pt x="720200" y="1013604"/>
+                  </a:lnTo>
+                  <a:lnTo>
+                    <a:pt x="796832" y="1102302"/>
+                  </a:lnTo>
+                  <a:lnTo>
+                    <a:pt x="873465" y="1187814"/>
+                  </a:lnTo>
+                  <a:lnTo>
+                    <a:pt x="950097" y="1270256"/>
+                  </a:lnTo>
+                  <a:lnTo>
+                    <a:pt x="1026730" y="1349737"/>
+                  </a:lnTo>
+                  <a:lnTo>
+                    <a:pt x="1103362" y="1426364"/>
+                  </a:lnTo>
+                  <a:lnTo>
+                    <a:pt x="1179995" y="1500240"/>
+                  </a:lnTo>
+                  <a:lnTo>
+                    <a:pt x="1256627" y="1571463"/>
+                  </a:lnTo>
+                  <a:lnTo>
+                    <a:pt x="1333260" y="1640129"/>
+                  </a:lnTo>
+                  <a:lnTo>
+                    <a:pt x="1409893" y="1706329"/>
+                  </a:lnTo>
+                  <a:lnTo>
+                    <a:pt x="1486525" y="1770152"/>
+                  </a:lnTo>
+                  <a:lnTo>
+                    <a:pt x="1563158" y="1831684"/>
+                  </a:lnTo>
+                  <a:lnTo>
+                    <a:pt x="1639790" y="1891005"/>
+                  </a:lnTo>
+                  <a:lnTo>
+                    <a:pt x="1716423" y="1948197"/>
+                  </a:lnTo>
+                  <a:lnTo>
+                    <a:pt x="1793055" y="2003335"/>
+                  </a:lnTo>
+                  <a:lnTo>
+                    <a:pt x="1869688" y="2056493"/>
+                  </a:lnTo>
+                  <a:lnTo>
+                    <a:pt x="1946320" y="2107743"/>
+                  </a:lnTo>
+                  <a:lnTo>
+                    <a:pt x="2022953" y="2157152"/>
+                  </a:lnTo>
+                  <a:lnTo>
+                    <a:pt x="2099586" y="2204787"/>
+                  </a:lnTo>
+                  <a:lnTo>
+                    <a:pt x="2176218" y="2250711"/>
+                  </a:lnTo>
+                  <a:lnTo>
+                    <a:pt x="2252851" y="2294987"/>
+                  </a:lnTo>
+                  <a:lnTo>
+                    <a:pt x="2329483" y="2337673"/>
+                  </a:lnTo>
+                  <a:lnTo>
+                    <a:pt x="2406116" y="2378826"/>
+                  </a:lnTo>
+                  <a:lnTo>
+                    <a:pt x="2482748" y="2418501"/>
+                  </a:lnTo>
+                  <a:lnTo>
+                    <a:pt x="2559381" y="2456751"/>
+                  </a:lnTo>
+                  <a:lnTo>
+                    <a:pt x="2636013" y="2493628"/>
+                  </a:lnTo>
+                  <a:lnTo>
+                    <a:pt x="2712646" y="2529181"/>
+                  </a:lnTo>
+                  <a:lnTo>
+                    <a:pt x="2789278" y="2563457"/>
+                  </a:lnTo>
+                  <a:lnTo>
+                    <a:pt x="2865911" y="2596503"/>
+                  </a:lnTo>
+                  <a:lnTo>
+                    <a:pt x="2942544" y="2628362"/>
+                  </a:lnTo>
+                  <a:lnTo>
+                    <a:pt x="3019176" y="2654754"/>
+                  </a:lnTo>
+                  <a:lnTo>
+                    <a:pt x="3095809" y="2657720"/>
+                  </a:lnTo>
+                  <a:lnTo>
+                    <a:pt x="3172441" y="2660676"/>
+                  </a:lnTo>
+                  <a:lnTo>
+                    <a:pt x="3249074" y="2663621"/>
+                  </a:lnTo>
+                  <a:lnTo>
+                    <a:pt x="3325706" y="2666555"/>
+                  </a:lnTo>
+                  <a:lnTo>
+                    <a:pt x="3402339" y="2669479"/>
+                  </a:lnTo>
+                  <a:lnTo>
+                    <a:pt x="3478971" y="2672393"/>
+                  </a:lnTo>
+                  <a:lnTo>
+                    <a:pt x="3555604" y="2675296"/>
+                  </a:lnTo>
+                  <a:lnTo>
+                    <a:pt x="3632237" y="2678189"/>
+                  </a:lnTo>
+                  <a:lnTo>
+                    <a:pt x="3708869" y="2681071"/>
+                  </a:lnTo>
+                  <a:lnTo>
+                    <a:pt x="3785502" y="2683943"/>
+                  </a:lnTo>
+                  <a:lnTo>
+                    <a:pt x="3862134" y="2686805"/>
+                  </a:lnTo>
+                  <a:lnTo>
+                    <a:pt x="3938767" y="2689657"/>
+                  </a:lnTo>
+                  <a:lnTo>
+                    <a:pt x="4015399" y="2692498"/>
+                  </a:lnTo>
+                  <a:lnTo>
+                    <a:pt x="4092032" y="2695329"/>
+                  </a:lnTo>
+                  <a:lnTo>
+                    <a:pt x="4168664" y="2698150"/>
+                  </a:lnTo>
+                  <a:lnTo>
+                    <a:pt x="4245297" y="2700961"/>
+                  </a:lnTo>
+                  <a:lnTo>
+                    <a:pt x="4321929" y="2703762"/>
+                  </a:lnTo>
+                  <a:lnTo>
+                    <a:pt x="4398562" y="2706553"/>
+                  </a:lnTo>
+                  <a:lnTo>
+                    <a:pt x="4475195" y="2709334"/>
+                  </a:lnTo>
+                  <a:lnTo>
+                    <a:pt x="4551827" y="2712105"/>
+                  </a:lnTo>
+                  <a:lnTo>
+                    <a:pt x="4628460" y="2714866"/>
+                  </a:lnTo>
+                  <a:lnTo>
+                    <a:pt x="4705092" y="2717617"/>
+                  </a:lnTo>
+                  <a:lnTo>
+                    <a:pt x="4781725" y="2720358"/>
+                  </a:lnTo>
+                  <a:lnTo>
+                    <a:pt x="4858357" y="2723090"/>
+                  </a:lnTo>
+                  <a:lnTo>
+                    <a:pt x="4934990" y="2725811"/>
+                  </a:lnTo>
+                  <a:lnTo>
+                    <a:pt x="5011622" y="2728523"/>
+                  </a:lnTo>
+                  <a:lnTo>
+                    <a:pt x="5088255" y="2731226"/>
+                  </a:lnTo>
+                  <a:lnTo>
+                    <a:pt x="5164887" y="2733918"/>
+                  </a:lnTo>
+                  <a:lnTo>
+                    <a:pt x="5241520" y="2736601"/>
+                  </a:lnTo>
+                  <a:lnTo>
+                    <a:pt x="5318153" y="2739275"/>
+                  </a:lnTo>
+                  <a:lnTo>
+                    <a:pt x="5394785" y="2741938"/>
+                  </a:lnTo>
+                  <a:lnTo>
+                    <a:pt x="5471418" y="2744593"/>
+                  </a:lnTo>
+                  <a:lnTo>
+                    <a:pt x="5548050" y="2747237"/>
+                  </a:lnTo>
+                  <a:lnTo>
+                    <a:pt x="5624683" y="2749873"/>
+                  </a:lnTo>
+                  <a:lnTo>
+                    <a:pt x="5701315" y="2752499"/>
+                  </a:lnTo>
+                  <a:lnTo>
+                    <a:pt x="5777948" y="2755115"/>
+                  </a:lnTo>
+                  <a:lnTo>
+                    <a:pt x="5854580" y="2757722"/>
+                  </a:lnTo>
+                  <a:lnTo>
+                    <a:pt x="5931213" y="2760320"/>
+                  </a:lnTo>
+                  <a:lnTo>
+                    <a:pt x="6007846" y="2762908"/>
+                  </a:lnTo>
+                  <a:lnTo>
+                    <a:pt x="6084478" y="2765488"/>
+                  </a:lnTo>
+                  <a:lnTo>
+                    <a:pt x="6161111" y="2768058"/>
+                  </a:lnTo>
+                  <a:lnTo>
+                    <a:pt x="6237743" y="2770619"/>
+                  </a:lnTo>
+                  <a:lnTo>
+                    <a:pt x="6314376" y="2773170"/>
+                  </a:lnTo>
+                  <a:lnTo>
+                    <a:pt x="6391008" y="2775713"/>
+                  </a:lnTo>
+                  <a:lnTo>
+                    <a:pt x="6467641" y="2778246"/>
+                  </a:lnTo>
+                  <a:lnTo>
+                    <a:pt x="6544273" y="2780770"/>
+                  </a:lnTo>
+                  <a:lnTo>
+                    <a:pt x="6620906" y="2783286"/>
+                  </a:lnTo>
+                  <a:lnTo>
+                    <a:pt x="6697538" y="2785792"/>
+                  </a:lnTo>
+                  <a:lnTo>
+                    <a:pt x="6774171" y="2788290"/>
+                  </a:lnTo>
+                  <a:lnTo>
+                    <a:pt x="6850804" y="2790778"/>
+                  </a:lnTo>
+                  <a:lnTo>
+                    <a:pt x="6927436" y="2793257"/>
+                  </a:lnTo>
+                  <a:lnTo>
+                    <a:pt x="7004069" y="2795728"/>
                   </a:lnTo>
                 </a:path>
               </a:pathLst>
@@ -3910,303 +3910,303 @@
           </p:nvSpPr>
           <p:spPr>
             <a:xfrm>
-              <a:off x="817517" y="4529290"/>
-              <a:ext cx="7403783" cy="890791"/>
+              <a:off x="817517" y="4584494"/>
+              <a:ext cx="7403783" cy="849602"/>
             </a:xfrm>
             <a:custGeom>
               <a:avLst/>
               <a:pathLst>
-                <a:path w="7403783" h="890791">
+                <a:path w="7403783" h="849602">
                   <a:moveTo>
-                    <a:pt x="7403783" y="890791"/>
+                    <a:pt x="7403783" y="849602"/>
                   </a:moveTo>
                   <a:lnTo>
-                    <a:pt x="7327150" y="885982"/>
-                  </a:lnTo>
-                  <a:lnTo>
-                    <a:pt x="7250518" y="880994"/>
-                  </a:lnTo>
-                  <a:lnTo>
-                    <a:pt x="7173885" y="875820"/>
-                  </a:lnTo>
-                  <a:lnTo>
-                    <a:pt x="7097253" y="870453"/>
-                  </a:lnTo>
-                  <a:lnTo>
-                    <a:pt x="7020620" y="864886"/>
-                  </a:lnTo>
-                  <a:lnTo>
-                    <a:pt x="6943987" y="859112"/>
-                  </a:lnTo>
-                  <a:lnTo>
-                    <a:pt x="6867355" y="853123"/>
-                  </a:lnTo>
-                  <a:lnTo>
-                    <a:pt x="6790722" y="846911"/>
-                  </a:lnTo>
-                  <a:lnTo>
-                    <a:pt x="6714090" y="840467"/>
-                  </a:lnTo>
-                  <a:lnTo>
-                    <a:pt x="6637457" y="833783"/>
-                  </a:lnTo>
-                  <a:lnTo>
-                    <a:pt x="6560825" y="826851"/>
-                  </a:lnTo>
-                  <a:lnTo>
-                    <a:pt x="6484192" y="819660"/>
-                  </a:lnTo>
-                  <a:lnTo>
-                    <a:pt x="6407560" y="812202"/>
-                  </a:lnTo>
-                  <a:lnTo>
-                    <a:pt x="6330927" y="804465"/>
-                  </a:lnTo>
-                  <a:lnTo>
-                    <a:pt x="6254294" y="796441"/>
-                  </a:lnTo>
-                  <a:lnTo>
-                    <a:pt x="6177662" y="788117"/>
-                  </a:lnTo>
-                  <a:lnTo>
-                    <a:pt x="6101029" y="779484"/>
-                  </a:lnTo>
-                  <a:lnTo>
-                    <a:pt x="6024397" y="770529"/>
-                  </a:lnTo>
-                  <a:lnTo>
-                    <a:pt x="5947764" y="761241"/>
-                  </a:lnTo>
-                  <a:lnTo>
-                    <a:pt x="5871132" y="751606"/>
-                  </a:lnTo>
-                  <a:lnTo>
-                    <a:pt x="5794499" y="741613"/>
-                  </a:lnTo>
-                  <a:lnTo>
-                    <a:pt x="5717867" y="731248"/>
-                  </a:lnTo>
-                  <a:lnTo>
-                    <a:pt x="5641234" y="720496"/>
-                  </a:lnTo>
-                  <a:lnTo>
-                    <a:pt x="5564602" y="709344"/>
-                  </a:lnTo>
-                  <a:lnTo>
-                    <a:pt x="5487969" y="697777"/>
-                  </a:lnTo>
-                  <a:lnTo>
-                    <a:pt x="5411336" y="685779"/>
-                  </a:lnTo>
-                  <a:lnTo>
-                    <a:pt x="5334704" y="673334"/>
-                  </a:lnTo>
-                  <a:lnTo>
-                    <a:pt x="5258071" y="660425"/>
-                  </a:lnTo>
-                  <a:lnTo>
-                    <a:pt x="5181439" y="647036"/>
-                  </a:lnTo>
-                  <a:lnTo>
-                    <a:pt x="5104806" y="633148"/>
-                  </a:lnTo>
-                  <a:lnTo>
-                    <a:pt x="5028174" y="618743"/>
-                  </a:lnTo>
-                  <a:lnTo>
-                    <a:pt x="4951541" y="603801"/>
-                  </a:lnTo>
-                  <a:lnTo>
-                    <a:pt x="4874909" y="588303"/>
-                  </a:lnTo>
-                  <a:lnTo>
-                    <a:pt x="4798276" y="572228"/>
-                  </a:lnTo>
-                  <a:lnTo>
-                    <a:pt x="4721644" y="555553"/>
-                  </a:lnTo>
-                  <a:lnTo>
-                    <a:pt x="4645011" y="538258"/>
-                  </a:lnTo>
-                  <a:lnTo>
-                    <a:pt x="4568378" y="520319"/>
-                  </a:lnTo>
-                  <a:lnTo>
-                    <a:pt x="4491746" y="501711"/>
-                  </a:lnTo>
-                  <a:lnTo>
-                    <a:pt x="4415113" y="482411"/>
-                  </a:lnTo>
-                  <a:lnTo>
-                    <a:pt x="4338481" y="462391"/>
-                  </a:lnTo>
-                  <a:lnTo>
-                    <a:pt x="4261848" y="441626"/>
-                  </a:lnTo>
-                  <a:lnTo>
-                    <a:pt x="4185216" y="420088"/>
-                  </a:lnTo>
-                  <a:lnTo>
-                    <a:pt x="4108583" y="397747"/>
-                  </a:lnTo>
-                  <a:lnTo>
-                    <a:pt x="4031951" y="374574"/>
-                  </a:lnTo>
-                  <a:lnTo>
-                    <a:pt x="3955318" y="350539"/>
-                  </a:lnTo>
-                  <a:lnTo>
-                    <a:pt x="3878685" y="325607"/>
-                  </a:lnTo>
-                  <a:lnTo>
-                    <a:pt x="3802053" y="299748"/>
-                  </a:lnTo>
-                  <a:lnTo>
-                    <a:pt x="3725420" y="272925"/>
-                  </a:lnTo>
-                  <a:lnTo>
-                    <a:pt x="3648788" y="245103"/>
-                  </a:lnTo>
-                  <a:lnTo>
-                    <a:pt x="3572155" y="216245"/>
-                  </a:lnTo>
-                  <a:lnTo>
-                    <a:pt x="3495523" y="186313"/>
-                  </a:lnTo>
-                  <a:lnTo>
-                    <a:pt x="3418890" y="155265"/>
-                  </a:lnTo>
-                  <a:lnTo>
-                    <a:pt x="3342258" y="147611"/>
-                  </a:lnTo>
-                  <a:lnTo>
-                    <a:pt x="3265625" y="144479"/>
-                  </a:lnTo>
-                  <a:lnTo>
-                    <a:pt x="3188993" y="141335"/>
-                  </a:lnTo>
-                  <a:lnTo>
-                    <a:pt x="3112360" y="138180"/>
-                  </a:lnTo>
-                  <a:lnTo>
-                    <a:pt x="3035727" y="135014"/>
-                  </a:lnTo>
-                  <a:lnTo>
-                    <a:pt x="2959095" y="131837"/>
-                  </a:lnTo>
-                  <a:lnTo>
-                    <a:pt x="2882462" y="128647"/>
-                  </a:lnTo>
-                  <a:lnTo>
-                    <a:pt x="2805830" y="125447"/>
-                  </a:lnTo>
-                  <a:lnTo>
-                    <a:pt x="2729197" y="122235"/>
-                  </a:lnTo>
-                  <a:lnTo>
-                    <a:pt x="2652565" y="119011"/>
-                  </a:lnTo>
-                  <a:lnTo>
-                    <a:pt x="2575932" y="115776"/>
-                  </a:lnTo>
-                  <a:lnTo>
-                    <a:pt x="2499300" y="112530"/>
-                  </a:lnTo>
-                  <a:lnTo>
-                    <a:pt x="2422667" y="109271"/>
-                  </a:lnTo>
-                  <a:lnTo>
-                    <a:pt x="2346034" y="106001"/>
-                  </a:lnTo>
-                  <a:lnTo>
-                    <a:pt x="2269402" y="102719"/>
-                  </a:lnTo>
-                  <a:lnTo>
-                    <a:pt x="2192769" y="99426"/>
-                  </a:lnTo>
-                  <a:lnTo>
-                    <a:pt x="2116137" y="96120"/>
-                  </a:lnTo>
-                  <a:lnTo>
-                    <a:pt x="2039504" y="92803"/>
-                  </a:lnTo>
-                  <a:lnTo>
-                    <a:pt x="1962872" y="89474"/>
-                  </a:lnTo>
-                  <a:lnTo>
-                    <a:pt x="1886239" y="86132"/>
-                  </a:lnTo>
-                  <a:lnTo>
-                    <a:pt x="1809607" y="82779"/>
-                  </a:lnTo>
-                  <a:lnTo>
-                    <a:pt x="1732974" y="79414"/>
-                  </a:lnTo>
-                  <a:lnTo>
-                    <a:pt x="1656342" y="76037"/>
-                  </a:lnTo>
-                  <a:lnTo>
-                    <a:pt x="1579709" y="72647"/>
-                  </a:lnTo>
-                  <a:lnTo>
-                    <a:pt x="1503076" y="69246"/>
-                  </a:lnTo>
-                  <a:lnTo>
-                    <a:pt x="1426444" y="65832"/>
-                  </a:lnTo>
-                  <a:lnTo>
-                    <a:pt x="1349811" y="62406"/>
-                  </a:lnTo>
-                  <a:lnTo>
-                    <a:pt x="1273179" y="58967"/>
-                  </a:lnTo>
-                  <a:lnTo>
-                    <a:pt x="1196546" y="55517"/>
-                  </a:lnTo>
-                  <a:lnTo>
-                    <a:pt x="1119914" y="52054"/>
-                  </a:lnTo>
-                  <a:lnTo>
-                    <a:pt x="1043281" y="48578"/>
-                  </a:lnTo>
-                  <a:lnTo>
-                    <a:pt x="966649" y="45090"/>
-                  </a:lnTo>
-                  <a:lnTo>
-                    <a:pt x="890016" y="41589"/>
-                  </a:lnTo>
-                  <a:lnTo>
-                    <a:pt x="813384" y="38076"/>
-                  </a:lnTo>
-                  <a:lnTo>
-                    <a:pt x="736751" y="34551"/>
-                  </a:lnTo>
-                  <a:lnTo>
-                    <a:pt x="660118" y="31012"/>
-                  </a:lnTo>
-                  <a:lnTo>
-                    <a:pt x="583486" y="27461"/>
-                  </a:lnTo>
-                  <a:lnTo>
-                    <a:pt x="506853" y="23897"/>
-                  </a:lnTo>
-                  <a:lnTo>
-                    <a:pt x="430221" y="20321"/>
-                  </a:lnTo>
-                  <a:lnTo>
-                    <a:pt x="353588" y="16731"/>
-                  </a:lnTo>
-                  <a:lnTo>
-                    <a:pt x="276956" y="13129"/>
-                  </a:lnTo>
-                  <a:lnTo>
-                    <a:pt x="200323" y="9513"/>
-                  </a:lnTo>
-                  <a:lnTo>
-                    <a:pt x="123691" y="5885"/>
-                  </a:lnTo>
-                  <a:lnTo>
-                    <a:pt x="47058" y="2244"/>
+                    <a:pt x="7327150" y="845015"/>
+                  </a:lnTo>
+                  <a:lnTo>
+                    <a:pt x="7250518" y="840257"/>
+                  </a:lnTo>
+                  <a:lnTo>
+                    <a:pt x="7173885" y="835322"/>
+                  </a:lnTo>
+                  <a:lnTo>
+                    <a:pt x="7097253" y="830203"/>
+                  </a:lnTo>
+                  <a:lnTo>
+                    <a:pt x="7020620" y="824894"/>
+                  </a:lnTo>
+                  <a:lnTo>
+                    <a:pt x="6943987" y="819387"/>
+                  </a:lnTo>
+                  <a:lnTo>
+                    <a:pt x="6867355" y="813675"/>
+                  </a:lnTo>
+                  <a:lnTo>
+                    <a:pt x="6790722" y="807750"/>
+                  </a:lnTo>
+                  <a:lnTo>
+                    <a:pt x="6714090" y="801604"/>
+                  </a:lnTo>
+                  <a:lnTo>
+                    <a:pt x="6637457" y="795229"/>
+                  </a:lnTo>
+                  <a:lnTo>
+                    <a:pt x="6560825" y="788618"/>
+                  </a:lnTo>
+                  <a:lnTo>
+                    <a:pt x="6484192" y="781759"/>
+                  </a:lnTo>
+                  <a:lnTo>
+                    <a:pt x="6407560" y="774646"/>
+                  </a:lnTo>
+                  <a:lnTo>
+                    <a:pt x="6330927" y="767267"/>
+                  </a:lnTo>
+                  <a:lnTo>
+                    <a:pt x="6254294" y="759614"/>
+                  </a:lnTo>
+                  <a:lnTo>
+                    <a:pt x="6177662" y="751675"/>
+                  </a:lnTo>
+                  <a:lnTo>
+                    <a:pt x="6101029" y="743441"/>
+                  </a:lnTo>
+                  <a:lnTo>
+                    <a:pt x="6024397" y="734900"/>
+                  </a:lnTo>
+                  <a:lnTo>
+                    <a:pt x="5947764" y="726041"/>
+                  </a:lnTo>
+                  <a:lnTo>
+                    <a:pt x="5871132" y="716852"/>
+                  </a:lnTo>
+                  <a:lnTo>
+                    <a:pt x="5794499" y="707321"/>
+                  </a:lnTo>
+                  <a:lnTo>
+                    <a:pt x="5717867" y="697435"/>
+                  </a:lnTo>
+                  <a:lnTo>
+                    <a:pt x="5641234" y="687181"/>
+                  </a:lnTo>
+                  <a:lnTo>
+                    <a:pt x="5564602" y="676544"/>
+                  </a:lnTo>
+                  <a:lnTo>
+                    <a:pt x="5487969" y="665512"/>
+                  </a:lnTo>
+                  <a:lnTo>
+                    <a:pt x="5411336" y="654069"/>
+                  </a:lnTo>
+                  <a:lnTo>
+                    <a:pt x="5334704" y="642199"/>
+                  </a:lnTo>
+                  <a:lnTo>
+                    <a:pt x="5258071" y="629888"/>
+                  </a:lnTo>
+                  <a:lnTo>
+                    <a:pt x="5181439" y="617117"/>
+                  </a:lnTo>
+                  <a:lnTo>
+                    <a:pt x="5104806" y="603872"/>
+                  </a:lnTo>
+                  <a:lnTo>
+                    <a:pt x="5028174" y="590133"/>
+                  </a:lnTo>
+                  <a:lnTo>
+                    <a:pt x="4951541" y="575882"/>
+                  </a:lnTo>
+                  <a:lnTo>
+                    <a:pt x="4874909" y="561100"/>
+                  </a:lnTo>
+                  <a:lnTo>
+                    <a:pt x="4798276" y="545768"/>
+                  </a:lnTo>
+                  <a:lnTo>
+                    <a:pt x="4721644" y="529865"/>
+                  </a:lnTo>
+                  <a:lnTo>
+                    <a:pt x="4645011" y="513369"/>
+                  </a:lnTo>
+                  <a:lnTo>
+                    <a:pt x="4568378" y="496259"/>
+                  </a:lnTo>
+                  <a:lnTo>
+                    <a:pt x="4491746" y="478512"/>
+                  </a:lnTo>
+                  <a:lnTo>
+                    <a:pt x="4415113" y="460104"/>
+                  </a:lnTo>
+                  <a:lnTo>
+                    <a:pt x="4338481" y="441010"/>
+                  </a:lnTo>
+                  <a:lnTo>
+                    <a:pt x="4261848" y="421206"/>
+                  </a:lnTo>
+                  <a:lnTo>
+                    <a:pt x="4185216" y="400663"/>
+                  </a:lnTo>
+                  <a:lnTo>
+                    <a:pt x="4108583" y="379355"/>
+                  </a:lnTo>
+                  <a:lnTo>
+                    <a:pt x="4031951" y="357254"/>
+                  </a:lnTo>
+                  <a:lnTo>
+                    <a:pt x="3955318" y="334330"/>
+                  </a:lnTo>
+                  <a:lnTo>
+                    <a:pt x="3878685" y="310551"/>
+                  </a:lnTo>
+                  <a:lnTo>
+                    <a:pt x="3802053" y="285888"/>
+                  </a:lnTo>
+                  <a:lnTo>
+                    <a:pt x="3725420" y="260305"/>
+                  </a:lnTo>
+                  <a:lnTo>
+                    <a:pt x="3648788" y="233770"/>
+                  </a:lnTo>
+                  <a:lnTo>
+                    <a:pt x="3572155" y="206246"/>
+                  </a:lnTo>
+                  <a:lnTo>
+                    <a:pt x="3495523" y="177698"/>
+                  </a:lnTo>
+                  <a:lnTo>
+                    <a:pt x="3418890" y="148086"/>
+                  </a:lnTo>
+                  <a:lnTo>
+                    <a:pt x="3342258" y="140786"/>
+                  </a:lnTo>
+                  <a:lnTo>
+                    <a:pt x="3265625" y="137798"/>
+                  </a:lnTo>
+                  <a:lnTo>
+                    <a:pt x="3188993" y="134800"/>
+                  </a:lnTo>
+                  <a:lnTo>
+                    <a:pt x="3112360" y="131791"/>
+                  </a:lnTo>
+                  <a:lnTo>
+                    <a:pt x="3035727" y="128771"/>
+                  </a:lnTo>
+                  <a:lnTo>
+                    <a:pt x="2959095" y="125740"/>
+                  </a:lnTo>
+                  <a:lnTo>
+                    <a:pt x="2882462" y="122699"/>
+                  </a:lnTo>
+                  <a:lnTo>
+                    <a:pt x="2805830" y="119646"/>
+                  </a:lnTo>
+                  <a:lnTo>
+                    <a:pt x="2729197" y="116583"/>
+                  </a:lnTo>
+                  <a:lnTo>
+                    <a:pt x="2652565" y="113508"/>
+                  </a:lnTo>
+                  <a:lnTo>
+                    <a:pt x="2575932" y="110423"/>
+                  </a:lnTo>
+                  <a:lnTo>
+                    <a:pt x="2499300" y="107326"/>
+                  </a:lnTo>
+                  <a:lnTo>
+                    <a:pt x="2422667" y="104219"/>
+                  </a:lnTo>
+                  <a:lnTo>
+                    <a:pt x="2346034" y="101100"/>
+                  </a:lnTo>
+                  <a:lnTo>
+                    <a:pt x="2269402" y="97970"/>
+                  </a:lnTo>
+                  <a:lnTo>
+                    <a:pt x="2192769" y="94828"/>
+                  </a:lnTo>
+                  <a:lnTo>
+                    <a:pt x="2116137" y="91676"/>
+                  </a:lnTo>
+                  <a:lnTo>
+                    <a:pt x="2039504" y="88512"/>
+                  </a:lnTo>
+                  <a:lnTo>
+                    <a:pt x="1962872" y="85336"/>
+                  </a:lnTo>
+                  <a:lnTo>
+                    <a:pt x="1886239" y="82150"/>
+                  </a:lnTo>
+                  <a:lnTo>
+                    <a:pt x="1809607" y="78952"/>
+                  </a:lnTo>
+                  <a:lnTo>
+                    <a:pt x="1732974" y="75742"/>
+                  </a:lnTo>
+                  <a:lnTo>
+                    <a:pt x="1656342" y="72521"/>
+                  </a:lnTo>
+                  <a:lnTo>
+                    <a:pt x="1579709" y="69288"/>
+                  </a:lnTo>
+                  <a:lnTo>
+                    <a:pt x="1503076" y="66044"/>
+                  </a:lnTo>
+                  <a:lnTo>
+                    <a:pt x="1426444" y="62788"/>
+                  </a:lnTo>
+                  <a:lnTo>
+                    <a:pt x="1349811" y="59520"/>
+                  </a:lnTo>
+                  <a:lnTo>
+                    <a:pt x="1273179" y="56241"/>
+                  </a:lnTo>
+                  <a:lnTo>
+                    <a:pt x="1196546" y="52950"/>
+                  </a:lnTo>
+                  <a:lnTo>
+                    <a:pt x="1119914" y="49647"/>
+                  </a:lnTo>
+                  <a:lnTo>
+                    <a:pt x="1043281" y="46332"/>
+                  </a:lnTo>
+                  <a:lnTo>
+                    <a:pt x="966649" y="43005"/>
+                  </a:lnTo>
+                  <a:lnTo>
+                    <a:pt x="890016" y="39666"/>
+                  </a:lnTo>
+                  <a:lnTo>
+                    <a:pt x="813384" y="36316"/>
+                  </a:lnTo>
+                  <a:lnTo>
+                    <a:pt x="736751" y="32953"/>
+                  </a:lnTo>
+                  <a:lnTo>
+                    <a:pt x="660118" y="29578"/>
+                  </a:lnTo>
+                  <a:lnTo>
+                    <a:pt x="583486" y="26191"/>
+                  </a:lnTo>
+                  <a:lnTo>
+                    <a:pt x="506853" y="22792"/>
+                  </a:lnTo>
+                  <a:lnTo>
+                    <a:pt x="430221" y="19381"/>
+                  </a:lnTo>
+                  <a:lnTo>
+                    <a:pt x="353588" y="15957"/>
+                  </a:lnTo>
+                  <a:lnTo>
+                    <a:pt x="276956" y="12522"/>
+                  </a:lnTo>
+                  <a:lnTo>
+                    <a:pt x="200323" y="9073"/>
+                  </a:lnTo>
+                  <a:lnTo>
+                    <a:pt x="123691" y="5613"/>
+                  </a:lnTo>
+                  <a:lnTo>
+                    <a:pt x="47058" y="2140"/>
                   </a:lnTo>
                   <a:lnTo>
                     <a:pt x="0" y="0"/>
@@ -4229,306 +4229,306 @@
           </p:nvSpPr>
           <p:spPr>
             <a:xfrm>
-              <a:off x="817517" y="3426011"/>
-              <a:ext cx="7403783" cy="1817995"/>
+              <a:off x="817517" y="3532230"/>
+              <a:ext cx="7403783" cy="1733932"/>
             </a:xfrm>
             <a:custGeom>
               <a:avLst/>
               <a:pathLst>
-                <a:path w="7403783" h="1817995">
+                <a:path w="7403783" h="1733932">
                   <a:moveTo>
                     <a:pt x="0" y="0"/>
                   </a:moveTo>
                   <a:lnTo>
-                    <a:pt x="47058" y="26115"/>
-                  </a:lnTo>
-                  <a:lnTo>
-                    <a:pt x="123691" y="67797"/>
-                  </a:lnTo>
-                  <a:lnTo>
-                    <a:pt x="200323" y="108650"/>
-                  </a:lnTo>
-                  <a:lnTo>
-                    <a:pt x="276956" y="148692"/>
-                  </a:lnTo>
-                  <a:lnTo>
-                    <a:pt x="353588" y="187937"/>
-                  </a:lnTo>
-                  <a:lnTo>
-                    <a:pt x="430221" y="226403"/>
-                  </a:lnTo>
-                  <a:lnTo>
-                    <a:pt x="506853" y="264104"/>
-                  </a:lnTo>
-                  <a:lnTo>
-                    <a:pt x="583486" y="301056"/>
-                  </a:lnTo>
-                  <a:lnTo>
-                    <a:pt x="660118" y="337273"/>
-                  </a:lnTo>
-                  <a:lnTo>
-                    <a:pt x="736751" y="372770"/>
-                  </a:lnTo>
-                  <a:lnTo>
-                    <a:pt x="813384" y="407562"/>
-                  </a:lnTo>
-                  <a:lnTo>
-                    <a:pt x="890016" y="441662"/>
-                  </a:lnTo>
-                  <a:lnTo>
-                    <a:pt x="966649" y="475085"/>
-                  </a:lnTo>
-                  <a:lnTo>
-                    <a:pt x="1043281" y="507843"/>
-                  </a:lnTo>
-                  <a:lnTo>
-                    <a:pt x="1119914" y="539950"/>
-                  </a:lnTo>
-                  <a:lnTo>
-                    <a:pt x="1196546" y="571419"/>
-                  </a:lnTo>
-                  <a:lnTo>
-                    <a:pt x="1273179" y="602262"/>
-                  </a:lnTo>
-                  <a:lnTo>
-                    <a:pt x="1349811" y="632493"/>
-                  </a:lnTo>
-                  <a:lnTo>
-                    <a:pt x="1426444" y="662122"/>
-                  </a:lnTo>
-                  <a:lnTo>
-                    <a:pt x="1503076" y="691163"/>
-                  </a:lnTo>
-                  <a:lnTo>
-                    <a:pt x="1579709" y="719626"/>
-                  </a:lnTo>
-                  <a:lnTo>
-                    <a:pt x="1656342" y="747524"/>
-                  </a:lnTo>
-                  <a:lnTo>
-                    <a:pt x="1732974" y="774867"/>
-                  </a:lnTo>
-                  <a:lnTo>
-                    <a:pt x="1809607" y="801667"/>
-                  </a:lnTo>
-                  <a:lnTo>
-                    <a:pt x="1886239" y="827934"/>
-                  </a:lnTo>
-                  <a:lnTo>
-                    <a:pt x="1962872" y="853679"/>
-                  </a:lnTo>
-                  <a:lnTo>
-                    <a:pt x="2039504" y="878912"/>
-                  </a:lnTo>
-                  <a:lnTo>
-                    <a:pt x="2116137" y="903643"/>
-                  </a:lnTo>
-                  <a:lnTo>
-                    <a:pt x="2192769" y="927883"/>
-                  </a:lnTo>
-                  <a:lnTo>
-                    <a:pt x="2269402" y="951642"/>
-                  </a:lnTo>
-                  <a:lnTo>
-                    <a:pt x="2346034" y="974928"/>
-                  </a:lnTo>
-                  <a:lnTo>
-                    <a:pt x="2422667" y="997751"/>
-                  </a:lnTo>
-                  <a:lnTo>
-                    <a:pt x="2499300" y="1020120"/>
-                  </a:lnTo>
-                  <a:lnTo>
-                    <a:pt x="2575932" y="1042045"/>
-                  </a:lnTo>
-                  <a:lnTo>
-                    <a:pt x="2652565" y="1063535"/>
-                  </a:lnTo>
-                  <a:lnTo>
-                    <a:pt x="2729197" y="1084597"/>
-                  </a:lnTo>
-                  <a:lnTo>
-                    <a:pt x="2805830" y="1105240"/>
-                  </a:lnTo>
-                  <a:lnTo>
-                    <a:pt x="2882462" y="1125473"/>
-                  </a:lnTo>
-                  <a:lnTo>
-                    <a:pt x="2959095" y="1145304"/>
-                  </a:lnTo>
-                  <a:lnTo>
-                    <a:pt x="3035727" y="1164741"/>
-                  </a:lnTo>
-                  <a:lnTo>
-                    <a:pt x="3112360" y="1183791"/>
-                  </a:lnTo>
-                  <a:lnTo>
-                    <a:pt x="3188993" y="1202463"/>
-                  </a:lnTo>
-                  <a:lnTo>
-                    <a:pt x="3265625" y="1220764"/>
-                  </a:lnTo>
-                  <a:lnTo>
-                    <a:pt x="3342258" y="1238701"/>
-                  </a:lnTo>
-                  <a:lnTo>
-                    <a:pt x="3418890" y="1256281"/>
-                  </a:lnTo>
-                  <a:lnTo>
-                    <a:pt x="3495523" y="1273512"/>
-                  </a:lnTo>
-                  <a:lnTo>
-                    <a:pt x="3572155" y="1290400"/>
-                  </a:lnTo>
-                  <a:lnTo>
-                    <a:pt x="3648788" y="1306953"/>
-                  </a:lnTo>
-                  <a:lnTo>
-                    <a:pt x="3725420" y="1323177"/>
-                  </a:lnTo>
-                  <a:lnTo>
-                    <a:pt x="3802053" y="1339078"/>
-                  </a:lnTo>
-                  <a:lnTo>
-                    <a:pt x="3878685" y="1354664"/>
-                  </a:lnTo>
-                  <a:lnTo>
-                    <a:pt x="3955318" y="1369939"/>
-                  </a:lnTo>
-                  <a:lnTo>
-                    <a:pt x="4031951" y="1384911"/>
-                  </a:lnTo>
-                  <a:lnTo>
-                    <a:pt x="4108583" y="1399585"/>
-                  </a:lnTo>
-                  <a:lnTo>
-                    <a:pt x="4185216" y="1413968"/>
-                  </a:lnTo>
-                  <a:lnTo>
-                    <a:pt x="4261848" y="1428065"/>
-                  </a:lnTo>
-                  <a:lnTo>
-                    <a:pt x="4338481" y="1441881"/>
-                  </a:lnTo>
-                  <a:lnTo>
-                    <a:pt x="4415113" y="1455423"/>
-                  </a:lnTo>
-                  <a:lnTo>
-                    <a:pt x="4491746" y="1468696"/>
-                  </a:lnTo>
-                  <a:lnTo>
-                    <a:pt x="4568378" y="1481705"/>
-                  </a:lnTo>
-                  <a:lnTo>
-                    <a:pt x="4645011" y="1494455"/>
-                  </a:lnTo>
-                  <a:lnTo>
-                    <a:pt x="4721644" y="1506952"/>
-                  </a:lnTo>
-                  <a:lnTo>
-                    <a:pt x="4798276" y="1519201"/>
-                  </a:lnTo>
-                  <a:lnTo>
-                    <a:pt x="4874909" y="1531206"/>
-                  </a:lnTo>
-                  <a:lnTo>
-                    <a:pt x="4951541" y="1542972"/>
-                  </a:lnTo>
-                  <a:lnTo>
-                    <a:pt x="5028174" y="1554505"/>
-                  </a:lnTo>
-                  <a:lnTo>
-                    <a:pt x="5104806" y="1565808"/>
-                  </a:lnTo>
-                  <a:lnTo>
-                    <a:pt x="5181439" y="1576887"/>
-                  </a:lnTo>
-                  <a:lnTo>
-                    <a:pt x="5258071" y="1587746"/>
-                  </a:lnTo>
-                  <a:lnTo>
-                    <a:pt x="5334704" y="1598388"/>
-                  </a:lnTo>
-                  <a:lnTo>
-                    <a:pt x="5411336" y="1608820"/>
-                  </a:lnTo>
-                  <a:lnTo>
-                    <a:pt x="5487969" y="1619043"/>
-                  </a:lnTo>
-                  <a:lnTo>
-                    <a:pt x="5564602" y="1629064"/>
-                  </a:lnTo>
-                  <a:lnTo>
-                    <a:pt x="5641234" y="1638885"/>
-                  </a:lnTo>
-                  <a:lnTo>
-                    <a:pt x="5717867" y="1648512"/>
-                  </a:lnTo>
-                  <a:lnTo>
-                    <a:pt x="5794499" y="1657947"/>
-                  </a:lnTo>
-                  <a:lnTo>
-                    <a:pt x="5871132" y="1667194"/>
-                  </a:lnTo>
-                  <a:lnTo>
-                    <a:pt x="5947764" y="1676258"/>
-                  </a:lnTo>
-                  <a:lnTo>
-                    <a:pt x="6024397" y="1685141"/>
-                  </a:lnTo>
-                  <a:lnTo>
-                    <a:pt x="6101029" y="1693848"/>
-                  </a:lnTo>
-                  <a:lnTo>
-                    <a:pt x="6177662" y="1702382"/>
-                  </a:lnTo>
-                  <a:lnTo>
-                    <a:pt x="6254294" y="1710746"/>
-                  </a:lnTo>
-                  <a:lnTo>
-                    <a:pt x="6330927" y="1718944"/>
-                  </a:lnTo>
-                  <a:lnTo>
-                    <a:pt x="6407560" y="1726979"/>
-                  </a:lnTo>
-                  <a:lnTo>
-                    <a:pt x="6484192" y="1734854"/>
-                  </a:lnTo>
-                  <a:lnTo>
-                    <a:pt x="6560825" y="1742573"/>
-                  </a:lnTo>
-                  <a:lnTo>
-                    <a:pt x="6637457" y="1750138"/>
-                  </a:lnTo>
-                  <a:lnTo>
-                    <a:pt x="6714090" y="1757553"/>
-                  </a:lnTo>
-                  <a:lnTo>
-                    <a:pt x="6790722" y="1764821"/>
-                  </a:lnTo>
-                  <a:lnTo>
-                    <a:pt x="6867355" y="1771944"/>
-                  </a:lnTo>
-                  <a:lnTo>
-                    <a:pt x="6943987" y="1778925"/>
-                  </a:lnTo>
-                  <a:lnTo>
-                    <a:pt x="7020620" y="1785768"/>
-                  </a:lnTo>
-                  <a:lnTo>
-                    <a:pt x="7097253" y="1792475"/>
-                  </a:lnTo>
-                  <a:lnTo>
-                    <a:pt x="7173885" y="1799048"/>
-                  </a:lnTo>
-                  <a:lnTo>
-                    <a:pt x="7250518" y="1805491"/>
-                  </a:lnTo>
-                  <a:lnTo>
-                    <a:pt x="7327150" y="1811806"/>
-                  </a:lnTo>
-                  <a:lnTo>
-                    <a:pt x="7403783" y="1817995"/>
+                    <a:pt x="47058" y="24907"/>
+                  </a:lnTo>
+                  <a:lnTo>
+                    <a:pt x="123691" y="64662"/>
+                  </a:lnTo>
+                  <a:lnTo>
+                    <a:pt x="200323" y="103626"/>
+                  </a:lnTo>
+                  <a:lnTo>
+                    <a:pt x="276956" y="141816"/>
+                  </a:lnTo>
+                  <a:lnTo>
+                    <a:pt x="353588" y="179247"/>
+                  </a:lnTo>
+                  <a:lnTo>
+                    <a:pt x="430221" y="215934"/>
+                  </a:lnTo>
+                  <a:lnTo>
+                    <a:pt x="506853" y="251892"/>
+                  </a:lnTo>
+                  <a:lnTo>
+                    <a:pt x="583486" y="287135"/>
+                  </a:lnTo>
+                  <a:lnTo>
+                    <a:pt x="660118" y="321677"/>
+                  </a:lnTo>
+                  <a:lnTo>
+                    <a:pt x="736751" y="355533"/>
+                  </a:lnTo>
+                  <a:lnTo>
+                    <a:pt x="813384" y="388717"/>
+                  </a:lnTo>
+                  <a:lnTo>
+                    <a:pt x="890016" y="421240"/>
+                  </a:lnTo>
+                  <a:lnTo>
+                    <a:pt x="966649" y="453117"/>
+                  </a:lnTo>
+                  <a:lnTo>
+                    <a:pt x="1043281" y="484361"/>
+                  </a:lnTo>
+                  <a:lnTo>
+                    <a:pt x="1119914" y="514983"/>
+                  </a:lnTo>
+                  <a:lnTo>
+                    <a:pt x="1196546" y="544997"/>
+                  </a:lnTo>
+                  <a:lnTo>
+                    <a:pt x="1273179" y="574414"/>
+                  </a:lnTo>
+                  <a:lnTo>
+                    <a:pt x="1349811" y="603247"/>
+                  </a:lnTo>
+                  <a:lnTo>
+                    <a:pt x="1426444" y="631506"/>
+                  </a:lnTo>
+                  <a:lnTo>
+                    <a:pt x="1503076" y="659204"/>
+                  </a:lnTo>
+                  <a:lnTo>
+                    <a:pt x="1579709" y="686351"/>
+                  </a:lnTo>
+                  <a:lnTo>
+                    <a:pt x="1656342" y="712959"/>
+                  </a:lnTo>
+                  <a:lnTo>
+                    <a:pt x="1732974" y="739037"/>
+                  </a:lnTo>
+                  <a:lnTo>
+                    <a:pt x="1809607" y="764598"/>
+                  </a:lnTo>
+                  <a:lnTo>
+                    <a:pt x="1886239" y="789650"/>
+                  </a:lnTo>
+                  <a:lnTo>
+                    <a:pt x="1962872" y="814205"/>
+                  </a:lnTo>
+                  <a:lnTo>
+                    <a:pt x="2039504" y="838271"/>
+                  </a:lnTo>
+                  <a:lnTo>
+                    <a:pt x="2116137" y="861859"/>
+                  </a:lnTo>
+                  <a:lnTo>
+                    <a:pt x="2192769" y="884978"/>
+                  </a:lnTo>
+                  <a:lnTo>
+                    <a:pt x="2269402" y="907638"/>
+                  </a:lnTo>
+                  <a:lnTo>
+                    <a:pt x="2346034" y="929847"/>
+                  </a:lnTo>
+                  <a:lnTo>
+                    <a:pt x="2422667" y="951615"/>
+                  </a:lnTo>
+                  <a:lnTo>
+                    <a:pt x="2499300" y="972950"/>
+                  </a:lnTo>
+                  <a:lnTo>
+                    <a:pt x="2575932" y="993862"/>
+                  </a:lnTo>
+                  <a:lnTo>
+                    <a:pt x="2652565" y="1014357"/>
+                  </a:lnTo>
+                  <a:lnTo>
+                    <a:pt x="2729197" y="1034445"/>
+                  </a:lnTo>
+                  <a:lnTo>
+                    <a:pt x="2805830" y="1054134"/>
+                  </a:lnTo>
+                  <a:lnTo>
+                    <a:pt x="2882462" y="1073432"/>
+                  </a:lnTo>
+                  <a:lnTo>
+                    <a:pt x="2959095" y="1092346"/>
+                  </a:lnTo>
+                  <a:lnTo>
+                    <a:pt x="3035727" y="1110884"/>
+                  </a:lnTo>
+                  <a:lnTo>
+                    <a:pt x="3112360" y="1129053"/>
+                  </a:lnTo>
+                  <a:lnTo>
+                    <a:pt x="3188993" y="1146862"/>
+                  </a:lnTo>
+                  <a:lnTo>
+                    <a:pt x="3265625" y="1164316"/>
+                  </a:lnTo>
+                  <a:lnTo>
+                    <a:pt x="3342258" y="1181423"/>
+                  </a:lnTo>
+                  <a:lnTo>
+                    <a:pt x="3418890" y="1198191"/>
+                  </a:lnTo>
+                  <a:lnTo>
+                    <a:pt x="3495523" y="1214625"/>
+                  </a:lnTo>
+                  <a:lnTo>
+                    <a:pt x="3572155" y="1230733"/>
+                  </a:lnTo>
+                  <a:lnTo>
+                    <a:pt x="3648788" y="1246520"/>
+                  </a:lnTo>
+                  <a:lnTo>
+                    <a:pt x="3725420" y="1261994"/>
+                  </a:lnTo>
+                  <a:lnTo>
+                    <a:pt x="3802053" y="1277160"/>
+                  </a:lnTo>
+                  <a:lnTo>
+                    <a:pt x="3878685" y="1292024"/>
+                  </a:lnTo>
+                  <a:lnTo>
+                    <a:pt x="3955318" y="1306594"/>
+                  </a:lnTo>
+                  <a:lnTo>
+                    <a:pt x="4031951" y="1320873"/>
+                  </a:lnTo>
+                  <a:lnTo>
+                    <a:pt x="4108583" y="1334869"/>
+                  </a:lnTo>
+                  <a:lnTo>
+                    <a:pt x="4185216" y="1348586"/>
+                  </a:lnTo>
+                  <a:lnTo>
+                    <a:pt x="4261848" y="1362031"/>
+                  </a:lnTo>
+                  <a:lnTo>
+                    <a:pt x="4338481" y="1375209"/>
+                  </a:lnTo>
+                  <a:lnTo>
+                    <a:pt x="4415113" y="1388125"/>
+                  </a:lnTo>
+                  <a:lnTo>
+                    <a:pt x="4491746" y="1400784"/>
+                  </a:lnTo>
+                  <a:lnTo>
+                    <a:pt x="4568378" y="1413191"/>
+                  </a:lnTo>
+                  <a:lnTo>
+                    <a:pt x="4645011" y="1425352"/>
+                  </a:lnTo>
+                  <a:lnTo>
+                    <a:pt x="4721644" y="1437271"/>
+                  </a:lnTo>
+                  <a:lnTo>
+                    <a:pt x="4798276" y="1448953"/>
+                  </a:lnTo>
+                  <a:lnTo>
+                    <a:pt x="4874909" y="1460403"/>
+                  </a:lnTo>
+                  <a:lnTo>
+                    <a:pt x="4951541" y="1471626"/>
+                  </a:lnTo>
+                  <a:lnTo>
+                    <a:pt x="5028174" y="1482625"/>
+                  </a:lnTo>
+                  <a:lnTo>
+                    <a:pt x="5104806" y="1493406"/>
+                  </a:lnTo>
+                  <a:lnTo>
+                    <a:pt x="5181439" y="1503972"/>
+                  </a:lnTo>
+                  <a:lnTo>
+                    <a:pt x="5258071" y="1514329"/>
+                  </a:lnTo>
+                  <a:lnTo>
+                    <a:pt x="5334704" y="1524479"/>
+                  </a:lnTo>
+                  <a:lnTo>
+                    <a:pt x="5411336" y="1534428"/>
+                  </a:lnTo>
+                  <a:lnTo>
+                    <a:pt x="5487969" y="1544179"/>
+                  </a:lnTo>
+                  <a:lnTo>
+                    <a:pt x="5564602" y="1553737"/>
+                  </a:lnTo>
+                  <a:lnTo>
+                    <a:pt x="5641234" y="1563104"/>
+                  </a:lnTo>
+                  <a:lnTo>
+                    <a:pt x="5717867" y="1572285"/>
+                  </a:lnTo>
+                  <a:lnTo>
+                    <a:pt x="5794499" y="1581284"/>
+                  </a:lnTo>
+                  <a:lnTo>
+                    <a:pt x="5871132" y="1590104"/>
+                  </a:lnTo>
+                  <a:lnTo>
+                    <a:pt x="5947764" y="1598748"/>
+                  </a:lnTo>
+                  <a:lnTo>
+                    <a:pt x="6024397" y="1607221"/>
+                  </a:lnTo>
+                  <a:lnTo>
+                    <a:pt x="6101029" y="1615525"/>
+                  </a:lnTo>
+                  <a:lnTo>
+                    <a:pt x="6177662" y="1623664"/>
+                  </a:lnTo>
+                  <a:lnTo>
+                    <a:pt x="6254294" y="1631642"/>
+                  </a:lnTo>
+                  <a:lnTo>
+                    <a:pt x="6330927" y="1639460"/>
+                  </a:lnTo>
+                  <a:lnTo>
+                    <a:pt x="6407560" y="1647124"/>
+                  </a:lnTo>
+                  <a:lnTo>
+                    <a:pt x="6484192" y="1654635"/>
+                  </a:lnTo>
+                  <a:lnTo>
+                    <a:pt x="6560825" y="1661997"/>
+                  </a:lnTo>
+                  <a:lnTo>
+                    <a:pt x="6637457" y="1669212"/>
+                  </a:lnTo>
+                  <a:lnTo>
+                    <a:pt x="6714090" y="1676284"/>
+                  </a:lnTo>
+                  <a:lnTo>
+                    <a:pt x="6790722" y="1683216"/>
+                  </a:lnTo>
+                  <a:lnTo>
+                    <a:pt x="6867355" y="1690010"/>
+                  </a:lnTo>
+                  <a:lnTo>
+                    <a:pt x="6943987" y="1696668"/>
+                  </a:lnTo>
+                  <a:lnTo>
+                    <a:pt x="7020620" y="1703195"/>
+                  </a:lnTo>
+                  <a:lnTo>
+                    <a:pt x="7097253" y="1709591"/>
+                  </a:lnTo>
+                  <a:lnTo>
+                    <a:pt x="7173885" y="1715861"/>
+                  </a:lnTo>
+                  <a:lnTo>
+                    <a:pt x="7250518" y="1722006"/>
+                  </a:lnTo>
+                  <a:lnTo>
+                    <a:pt x="7327150" y="1728029"/>
+                  </a:lnTo>
+                  <a:lnTo>
+                    <a:pt x="7403783" y="1733932"/>
                   </a:lnTo>
                 </a:path>
               </a:pathLst>
@@ -4557,7 +4557,7 @@
           </p:nvSpPr>
           <p:spPr>
             <a:xfrm>
-              <a:off x="817517" y="4679530"/>
+              <a:off x="817517" y="4727786"/>
               <a:ext cx="7799693" cy="0"/>
             </a:xfrm>
             <a:custGeom>
@@ -4600,15 +4600,15 @@
           </p:nvSpPr>
           <p:spPr>
             <a:xfrm>
-              <a:off x="4224261" y="1896563"/>
-              <a:ext cx="0" cy="3826579"/>
+              <a:off x="4224261" y="2073503"/>
+              <a:ext cx="0" cy="3649639"/>
             </a:xfrm>
             <a:custGeom>
               <a:avLst/>
               <a:pathLst>
-                <a:path w="0" h="3826579">
+                <a:path w="0" h="3649639">
                   <a:moveTo>
-                    <a:pt x="0" y="3826579"/>
+                    <a:pt x="0" y="3649639"/>
                   </a:moveTo>
                   <a:lnTo>
                     <a:pt x="0" y="0"/>
@@ -4643,7 +4643,7 @@
           </p:nvSpPr>
           <p:spPr>
             <a:xfrm>
-              <a:off x="692708" y="5509156"/>
+              <a:off x="692708" y="5517199"/>
               <a:ext cx="62179" cy="80101"/>
             </a:xfrm>
             <a:prstGeom prst="rect">
@@ -4689,7 +4689,7 @@
           </p:nvSpPr>
           <p:spPr>
             <a:xfrm>
-              <a:off x="692708" y="4639479"/>
+              <a:off x="692708" y="4687735"/>
               <a:ext cx="62179" cy="80101"/>
             </a:xfrm>
             <a:prstGeom prst="rect">
@@ -4735,7 +4735,7 @@
           </p:nvSpPr>
           <p:spPr>
             <a:xfrm>
-              <a:off x="692708" y="3769802"/>
+              <a:off x="692708" y="3858272"/>
               <a:ext cx="62179" cy="80101"/>
             </a:xfrm>
             <a:prstGeom prst="rect">
@@ -4781,7 +4781,7 @@
           </p:nvSpPr>
           <p:spPr>
             <a:xfrm>
-              <a:off x="692708" y="2900125"/>
+              <a:off x="692708" y="3028808"/>
               <a:ext cx="62179" cy="80101"/>
             </a:xfrm>
             <a:prstGeom prst="rect">
@@ -4827,7 +4827,7 @@
           </p:nvSpPr>
           <p:spPr>
             <a:xfrm>
-              <a:off x="692708" y="2030448"/>
+              <a:off x="692708" y="2199345"/>
               <a:ext cx="62179" cy="80101"/>
             </a:xfrm>
             <a:prstGeom prst="rect">
@@ -5103,7 +5103,7 @@
           </p:nvSpPr>
           <p:spPr>
             <a:xfrm rot="-5400000">
-              <a:off x="68446" y="3759743"/>
+              <a:off x="68446" y="3848213"/>
               <a:ext cx="1016904" cy="100218"/>
             </a:xfrm>
             <a:prstGeom prst="rect">
@@ -5144,6 +5144,52 @@
         <p:sp>
           <p:nvSpPr>
             <p:cNvPr id="38" name="tx38"/>
+            <p:cNvSpPr/>
+            <p:nvPr/>
+          </p:nvSpPr>
+          <p:spPr>
+            <a:xfrm>
+              <a:off x="817517" y="1896563"/>
+              <a:ext cx="5626211" cy="82021"/>
+            </a:xfrm>
+            <a:prstGeom prst="rect">
+              <a:avLst/>
+            </a:prstGeom>
+            <a:noFill/>
+          </p:spPr>
+          <p:txBody>
+            <a:bodyPr lIns="0" rIns="0" tIns="0" bIns="0" anchorCtr="1" anchor="ctr" wrap="none"/>
+            <a:lstStyle/>
+            <a:p>
+              <a:pPr algn="l" marL="0" marR="0" indent="0">
+                <a:lnSpc>
+                  <a:spcPts val="900"/>
+                </a:lnSpc>
+                <a:spcBef>
+                  <a:spcPts val="0"/>
+                </a:spcBef>
+                <a:spcAft>
+                  <a:spcPts val="0"/>
+                </a:spcAft>
+              </a:pPr>
+              <a:r>
+                <a:rPr sz="900">
+                  <a:solidFill>
+                    <a:srgbClr val="404040">
+                      <a:alpha val="100000"/>
+                    </a:srgbClr>
+                  </a:solidFill>
+                  <a:latin typeface="Helvetica"/>
+                  <a:cs typeface="Helvetica"/>
+                </a:rPr>
+                <a:t>subHR per 0.1 ratio decline: 1.26 (1.04-1.53)  |  per IQR decline (Δ = 0.30): 2.00 (1.13-3.54)  |  IQR: [0.85, 1.15]</a:t>
+              </a:r>
+            </a:p>
+          </p:txBody>
+        </p:sp>
+        <p:sp>
+          <p:nvSpPr>
+            <p:cNvPr id="39" name="tx39"/>
             <p:cNvSpPr/>
             <p:nvPr/>
           </p:nvSpPr>

--- a/docs/pptx/carbo/jx-carbo-linsubhr-ratio-aki2.pptx
+++ b/docs/pptx/carbo/jx-carbo-linsubhr-ratio-aki2.pptx
@@ -5150,7 +5150,7 @@
           <p:spPr>
             <a:xfrm>
               <a:off x="817517" y="1896563"/>
-              <a:ext cx="5626211" cy="82021"/>
+              <a:ext cx="6169365" cy="82021"/>
             </a:xfrm>
             <a:prstGeom prst="rect">
               <a:avLst/>
@@ -5182,7 +5182,7 @@
                   <a:latin typeface="Helvetica"/>
                   <a:cs typeface="Helvetica"/>
                 </a:rPr>
-                <a:t>subHR per 0.1 ratio decline: 1.26 (1.04-1.53)  |  per IQR decline (Δ = 0.30): 2.00 (1.13-3.54)  |  IQR: [0.85, 1.15]</a:t>
+                <a:t>subHR per 0.1 ratio decline: 1.26 (1.04-1.53), p = 0.017  |  per IQR decline (Δ = 0.30): 2.00 (1.13-3.54)  |  IQR: [0.85, 1.15]</a:t>
               </a:r>
             </a:p>
           </p:txBody>

--- a/docs/pptx/carbo/jx-carbo-linsubhr-ratio-aki2.pptx
+++ b/docs/pptx/carbo/jx-carbo-linsubhr-ratio-aki2.pptx
@@ -5150,7 +5150,7 @@
           <p:spPr>
             <a:xfrm>
               <a:off x="817517" y="1896563"/>
-              <a:ext cx="6169365" cy="82021"/>
+              <a:ext cx="6833128" cy="82021"/>
             </a:xfrm>
             <a:prstGeom prst="rect">
               <a:avLst/>
@@ -5182,7 +5182,7 @@
                   <a:latin typeface="Helvetica"/>
                   <a:cs typeface="Helvetica"/>
                 </a:rPr>
-                <a:t>subHR per 0.1 ratio decline: 1.26 (1.04-1.53), p = 0.017  |  per IQR decline (Δ = 0.30): 2.00 (1.13-3.54)  |  IQR: [0.85, 1.15]</a:t>
+                <a:t>subHR per 0.1 ratio decline: 1.26 (1.04-1.53), p_Bonf = 0.102 (n = 6)  |  per IQR decline (Δ = 0.30): 2.00 (1.13-3.54)  |  IQR: [0.85, 1.15]</a:t>
               </a:r>
             </a:p>
           </p:txBody>

--- a/docs/pptx/carbo/jx-carbo-linsubhr-ratio-aki2.pptx
+++ b/docs/pptx/carbo/jx-carbo-linsubhr-ratio-aki2.pptx
@@ -2443,7 +2443,7 @@
           </p:nvSpPr>
           <p:spPr>
             <a:xfrm>
-              <a:off x="1615213" y="2073503"/>
+              <a:off x="1467192" y="2073503"/>
               <a:ext cx="0" cy="3649639"/>
             </a:xfrm>
             <a:custGeom>
@@ -2486,7 +2486,7 @@
           </p:nvSpPr>
           <p:spPr>
             <a:xfrm>
-              <a:off x="3387871" y="2073503"/>
+              <a:off x="3538150" y="2073503"/>
               <a:ext cx="0" cy="3649639"/>
             </a:xfrm>
             <a:custGeom>
@@ -2529,7 +2529,7 @@
           </p:nvSpPr>
           <p:spPr>
             <a:xfrm>
-              <a:off x="5160528" y="2073503"/>
+              <a:off x="5609107" y="2073503"/>
               <a:ext cx="0" cy="3649639"/>
             </a:xfrm>
             <a:custGeom>
@@ -2572,7 +2572,7 @@
           </p:nvSpPr>
           <p:spPr>
             <a:xfrm>
-              <a:off x="6933186" y="2073503"/>
+              <a:off x="7680065" y="2073503"/>
               <a:ext cx="0" cy="3649639"/>
             </a:xfrm>
             <a:custGeom>
@@ -2830,7 +2830,7 @@
           </p:nvSpPr>
           <p:spPr>
             <a:xfrm>
-              <a:off x="2501542" y="2073503"/>
+              <a:off x="2502671" y="2073503"/>
               <a:ext cx="0" cy="3649639"/>
             </a:xfrm>
             <a:custGeom>
@@ -2873,7 +2873,7 @@
           </p:nvSpPr>
           <p:spPr>
             <a:xfrm>
-              <a:off x="4274200" y="2073503"/>
+              <a:off x="4573628" y="2073503"/>
               <a:ext cx="0" cy="3649639"/>
             </a:xfrm>
             <a:custGeom>
@@ -2916,7 +2916,7 @@
           </p:nvSpPr>
           <p:spPr>
             <a:xfrm>
-              <a:off x="6046857" y="2073503"/>
+              <a:off x="6644586" y="2073503"/>
               <a:ext cx="0" cy="3649639"/>
             </a:xfrm>
             <a:custGeom>
@@ -2953,634 +2953,597 @@
         </p:sp>
         <p:sp>
           <p:nvSpPr>
-            <p:cNvPr id="20" name="pl20"/>
+            <p:cNvPr id="20" name="pg20"/>
             <p:cNvSpPr/>
             <p:nvPr/>
           </p:nvSpPr>
           <p:spPr>
             <a:xfrm>
-              <a:off x="7819515" y="2073503"/>
-              <a:ext cx="0" cy="3649639"/>
+              <a:off x="1172049" y="2073503"/>
+              <a:ext cx="7090630" cy="3360593"/>
             </a:xfrm>
             <a:custGeom>
               <a:avLst/>
               <a:pathLst>
-                <a:path w="0" h="3649639">
+                <a:path w="7090630" h="3360593">
                   <a:moveTo>
-                    <a:pt x="0" y="3649639"/>
+                    <a:pt x="544467" y="0"/>
                   </a:moveTo>
                   <a:lnTo>
-                    <a:pt x="0" y="0"/>
-                  </a:lnTo>
-                  <a:lnTo>
-                    <a:pt x="0" y="0"/>
-                  </a:lnTo>
-                </a:path>
-              </a:pathLst>
-            </a:custGeom>
-            <a:ln w="13550" cap="flat">
-              <a:solidFill>
-                <a:srgbClr val="EBEBEB">
-                  <a:alpha val="100000"/>
-                </a:srgbClr>
-              </a:solidFill>
-              <a:prstDash val="solid"/>
-              <a:round/>
-            </a:ln>
-          </p:spPr>
-          <p:txBody>
-            <a:bodyPr/>
-            <a:lstStyle/>
-            <a:p/>
-          </p:txBody>
-        </p:sp>
-        <p:sp>
-          <p:nvSpPr>
-            <p:cNvPr id="21" name="pg21"/>
-            <p:cNvSpPr/>
-            <p:nvPr/>
-          </p:nvSpPr>
-          <p:spPr>
-            <a:xfrm>
-              <a:off x="817517" y="2073503"/>
-              <a:ext cx="7403783" cy="3360593"/>
-            </a:xfrm>
-            <a:custGeom>
-              <a:avLst/>
-              <a:pathLst>
-                <a:path w="7403783" h="3360593">
-                  <a:moveTo>
-                    <a:pt x="399714" y="0"/>
-                  </a:moveTo>
-                  <a:lnTo>
-                    <a:pt x="430221" y="50899"/>
-                  </a:lnTo>
-                  <a:lnTo>
-                    <a:pt x="506853" y="174165"/>
-                  </a:lnTo>
-                  <a:lnTo>
-                    <a:pt x="583486" y="293004"/>
-                  </a:lnTo>
-                  <a:lnTo>
-                    <a:pt x="660118" y="407577"/>
-                  </a:lnTo>
-                  <a:lnTo>
-                    <a:pt x="736751" y="518035"/>
-                  </a:lnTo>
-                  <a:lnTo>
-                    <a:pt x="813384" y="624527"/>
-                  </a:lnTo>
-                  <a:lnTo>
-                    <a:pt x="890016" y="727195"/>
-                  </a:lnTo>
-                  <a:lnTo>
-                    <a:pt x="966649" y="826176"/>
-                  </a:lnTo>
-                  <a:lnTo>
-                    <a:pt x="1043281" y="921604"/>
-                  </a:lnTo>
-                  <a:lnTo>
-                    <a:pt x="1119914" y="1013604"/>
-                  </a:lnTo>
-                  <a:lnTo>
-                    <a:pt x="1196546" y="1102302"/>
-                  </a:lnTo>
-                  <a:lnTo>
-                    <a:pt x="1273179" y="1187814"/>
-                  </a:lnTo>
-                  <a:lnTo>
-                    <a:pt x="1349811" y="1270256"/>
-                  </a:lnTo>
-                  <a:lnTo>
-                    <a:pt x="1426444" y="1349737"/>
-                  </a:lnTo>
-                  <a:lnTo>
-                    <a:pt x="1503076" y="1426364"/>
-                  </a:lnTo>
-                  <a:lnTo>
-                    <a:pt x="1579709" y="1500240"/>
-                  </a:lnTo>
-                  <a:lnTo>
-                    <a:pt x="1656342" y="1571463"/>
-                  </a:lnTo>
-                  <a:lnTo>
-                    <a:pt x="1732974" y="1640129"/>
-                  </a:lnTo>
-                  <a:lnTo>
-                    <a:pt x="1809607" y="1706329"/>
-                  </a:lnTo>
-                  <a:lnTo>
-                    <a:pt x="1886239" y="1770152"/>
-                  </a:lnTo>
-                  <a:lnTo>
-                    <a:pt x="1962872" y="1831684"/>
-                  </a:lnTo>
-                  <a:lnTo>
-                    <a:pt x="2039504" y="1891005"/>
-                  </a:lnTo>
-                  <a:lnTo>
-                    <a:pt x="2116137" y="1948197"/>
-                  </a:lnTo>
-                  <a:lnTo>
-                    <a:pt x="2192769" y="2003335"/>
-                  </a:lnTo>
-                  <a:lnTo>
-                    <a:pt x="2269402" y="2056493"/>
-                  </a:lnTo>
-                  <a:lnTo>
-                    <a:pt x="2346034" y="2107743"/>
-                  </a:lnTo>
-                  <a:lnTo>
-                    <a:pt x="2422667" y="2157152"/>
-                  </a:lnTo>
-                  <a:lnTo>
-                    <a:pt x="2499300" y="2204787"/>
-                  </a:lnTo>
-                  <a:lnTo>
-                    <a:pt x="2575932" y="2250711"/>
-                  </a:lnTo>
-                  <a:lnTo>
-                    <a:pt x="2652565" y="2294987"/>
-                  </a:lnTo>
-                  <a:lnTo>
-                    <a:pt x="2729197" y="2337673"/>
-                  </a:lnTo>
-                  <a:lnTo>
-                    <a:pt x="2805830" y="2378826"/>
-                  </a:lnTo>
-                  <a:lnTo>
-                    <a:pt x="2882462" y="2418501"/>
-                  </a:lnTo>
-                  <a:lnTo>
-                    <a:pt x="2959095" y="2456751"/>
-                  </a:lnTo>
-                  <a:lnTo>
-                    <a:pt x="3035727" y="2493628"/>
-                  </a:lnTo>
-                  <a:lnTo>
-                    <a:pt x="3112360" y="2529181"/>
-                  </a:lnTo>
-                  <a:lnTo>
-                    <a:pt x="3188993" y="2563457"/>
-                  </a:lnTo>
-                  <a:lnTo>
-                    <a:pt x="3265625" y="2596503"/>
-                  </a:lnTo>
-                  <a:lnTo>
-                    <a:pt x="3342258" y="2628362"/>
-                  </a:lnTo>
-                  <a:lnTo>
-                    <a:pt x="3418890" y="2654754"/>
-                  </a:lnTo>
-                  <a:lnTo>
-                    <a:pt x="3495523" y="2657720"/>
-                  </a:lnTo>
-                  <a:lnTo>
-                    <a:pt x="3572155" y="2660676"/>
-                  </a:lnTo>
-                  <a:lnTo>
-                    <a:pt x="3648788" y="2663621"/>
-                  </a:lnTo>
-                  <a:lnTo>
-                    <a:pt x="3725420" y="2666555"/>
-                  </a:lnTo>
-                  <a:lnTo>
-                    <a:pt x="3802053" y="2669479"/>
-                  </a:lnTo>
-                  <a:lnTo>
-                    <a:pt x="3878685" y="2672393"/>
-                  </a:lnTo>
-                  <a:lnTo>
-                    <a:pt x="3955318" y="2675296"/>
-                  </a:lnTo>
-                  <a:lnTo>
-                    <a:pt x="4031951" y="2678189"/>
-                  </a:lnTo>
-                  <a:lnTo>
-                    <a:pt x="4108583" y="2681071"/>
-                  </a:lnTo>
-                  <a:lnTo>
-                    <a:pt x="4185216" y="2683943"/>
-                  </a:lnTo>
-                  <a:lnTo>
-                    <a:pt x="4261848" y="2686805"/>
-                  </a:lnTo>
-                  <a:lnTo>
-                    <a:pt x="4338481" y="2689657"/>
-                  </a:lnTo>
-                  <a:lnTo>
-                    <a:pt x="4415113" y="2692498"/>
-                  </a:lnTo>
-                  <a:lnTo>
-                    <a:pt x="4491746" y="2695329"/>
-                  </a:lnTo>
-                  <a:lnTo>
-                    <a:pt x="4568378" y="2698150"/>
-                  </a:lnTo>
-                  <a:lnTo>
-                    <a:pt x="4645011" y="2700961"/>
-                  </a:lnTo>
-                  <a:lnTo>
-                    <a:pt x="4721644" y="2703762"/>
-                  </a:lnTo>
-                  <a:lnTo>
-                    <a:pt x="4798276" y="2706553"/>
-                  </a:lnTo>
-                  <a:lnTo>
-                    <a:pt x="4874909" y="2709334"/>
-                  </a:lnTo>
-                  <a:lnTo>
-                    <a:pt x="4951541" y="2712105"/>
-                  </a:lnTo>
-                  <a:lnTo>
-                    <a:pt x="5028174" y="2714866"/>
-                  </a:lnTo>
-                  <a:lnTo>
-                    <a:pt x="5104806" y="2717617"/>
-                  </a:lnTo>
-                  <a:lnTo>
-                    <a:pt x="5181439" y="2720358"/>
-                  </a:lnTo>
-                  <a:lnTo>
-                    <a:pt x="5258071" y="2723090"/>
-                  </a:lnTo>
-                  <a:lnTo>
-                    <a:pt x="5334704" y="2725811"/>
-                  </a:lnTo>
-                  <a:lnTo>
-                    <a:pt x="5411336" y="2728523"/>
-                  </a:lnTo>
-                  <a:lnTo>
-                    <a:pt x="5487969" y="2731226"/>
-                  </a:lnTo>
-                  <a:lnTo>
-                    <a:pt x="5564602" y="2733918"/>
-                  </a:lnTo>
-                  <a:lnTo>
-                    <a:pt x="5641234" y="2736601"/>
-                  </a:lnTo>
-                  <a:lnTo>
-                    <a:pt x="5717867" y="2739275"/>
-                  </a:lnTo>
-                  <a:lnTo>
-                    <a:pt x="5794499" y="2741938"/>
-                  </a:lnTo>
-                  <a:lnTo>
-                    <a:pt x="5871132" y="2744593"/>
-                  </a:lnTo>
-                  <a:lnTo>
-                    <a:pt x="5947764" y="2747237"/>
-                  </a:lnTo>
-                  <a:lnTo>
-                    <a:pt x="6024397" y="2749873"/>
-                  </a:lnTo>
-                  <a:lnTo>
-                    <a:pt x="6101029" y="2752499"/>
-                  </a:lnTo>
-                  <a:lnTo>
-                    <a:pt x="6177662" y="2755115"/>
-                  </a:lnTo>
-                  <a:lnTo>
-                    <a:pt x="6254294" y="2757722"/>
-                  </a:lnTo>
-                  <a:lnTo>
-                    <a:pt x="6330927" y="2760320"/>
-                  </a:lnTo>
-                  <a:lnTo>
-                    <a:pt x="6407560" y="2762908"/>
-                  </a:lnTo>
-                  <a:lnTo>
-                    <a:pt x="6484192" y="2765488"/>
-                  </a:lnTo>
-                  <a:lnTo>
-                    <a:pt x="6560825" y="2768058"/>
-                  </a:lnTo>
-                  <a:lnTo>
-                    <a:pt x="6637457" y="2770619"/>
-                  </a:lnTo>
-                  <a:lnTo>
-                    <a:pt x="6714090" y="2773170"/>
-                  </a:lnTo>
-                  <a:lnTo>
-                    <a:pt x="6790722" y="2775713"/>
-                  </a:lnTo>
-                  <a:lnTo>
-                    <a:pt x="6867355" y="2778246"/>
-                  </a:lnTo>
-                  <a:lnTo>
-                    <a:pt x="6943987" y="2780770"/>
-                  </a:lnTo>
-                  <a:lnTo>
-                    <a:pt x="7020620" y="2783286"/>
-                  </a:lnTo>
-                  <a:lnTo>
-                    <a:pt x="7097253" y="2785792"/>
-                  </a:lnTo>
-                  <a:lnTo>
-                    <a:pt x="7173885" y="2788290"/>
-                  </a:lnTo>
-                  <a:lnTo>
-                    <a:pt x="7250518" y="2790778"/>
-                  </a:lnTo>
-                  <a:lnTo>
-                    <a:pt x="7327150" y="2793257"/>
-                  </a:lnTo>
-                  <a:lnTo>
-                    <a:pt x="7403783" y="2795728"/>
-                  </a:lnTo>
-                  <a:lnTo>
-                    <a:pt x="7403783" y="3360593"/>
-                  </a:lnTo>
-                  <a:lnTo>
-                    <a:pt x="7327150" y="3356006"/>
-                  </a:lnTo>
-                  <a:lnTo>
-                    <a:pt x="7250518" y="3351248"/>
-                  </a:lnTo>
-                  <a:lnTo>
-                    <a:pt x="7173885" y="3346313"/>
-                  </a:lnTo>
-                  <a:lnTo>
-                    <a:pt x="7097253" y="3341195"/>
-                  </a:lnTo>
-                  <a:lnTo>
-                    <a:pt x="7020620" y="3335885"/>
-                  </a:lnTo>
-                  <a:lnTo>
-                    <a:pt x="6943987" y="3330378"/>
-                  </a:lnTo>
-                  <a:lnTo>
-                    <a:pt x="6867355" y="3324666"/>
-                  </a:lnTo>
-                  <a:lnTo>
-                    <a:pt x="6790722" y="3318741"/>
-                  </a:lnTo>
-                  <a:lnTo>
-                    <a:pt x="6714090" y="3312595"/>
-                  </a:lnTo>
-                  <a:lnTo>
-                    <a:pt x="6637457" y="3306221"/>
-                  </a:lnTo>
-                  <a:lnTo>
-                    <a:pt x="6560825" y="3299609"/>
-                  </a:lnTo>
-                  <a:lnTo>
-                    <a:pt x="6484192" y="3292750"/>
-                  </a:lnTo>
-                  <a:lnTo>
-                    <a:pt x="6407560" y="3285637"/>
-                  </a:lnTo>
-                  <a:lnTo>
-                    <a:pt x="6330927" y="3278258"/>
-                  </a:lnTo>
-                  <a:lnTo>
-                    <a:pt x="6254294" y="3270605"/>
-                  </a:lnTo>
-                  <a:lnTo>
-                    <a:pt x="6177662" y="3262666"/>
-                  </a:lnTo>
-                  <a:lnTo>
-                    <a:pt x="6101029" y="3254432"/>
-                  </a:lnTo>
-                  <a:lnTo>
-                    <a:pt x="6024397" y="3245891"/>
-                  </a:lnTo>
-                  <a:lnTo>
-                    <a:pt x="5947764" y="3237032"/>
-                  </a:lnTo>
-                  <a:lnTo>
-                    <a:pt x="5871132" y="3227843"/>
-                  </a:lnTo>
-                  <a:lnTo>
-                    <a:pt x="5794499" y="3218312"/>
-                  </a:lnTo>
-                  <a:lnTo>
-                    <a:pt x="5717867" y="3208426"/>
-                  </a:lnTo>
-                  <a:lnTo>
-                    <a:pt x="5641234" y="3198172"/>
-                  </a:lnTo>
-                  <a:lnTo>
-                    <a:pt x="5564602" y="3187536"/>
-                  </a:lnTo>
-                  <a:lnTo>
-                    <a:pt x="5487969" y="3176503"/>
-                  </a:lnTo>
-                  <a:lnTo>
-                    <a:pt x="5411336" y="3165060"/>
-                  </a:lnTo>
-                  <a:lnTo>
-                    <a:pt x="5334704" y="3153190"/>
-                  </a:lnTo>
-                  <a:lnTo>
-                    <a:pt x="5258071" y="3140879"/>
-                  </a:lnTo>
-                  <a:lnTo>
-                    <a:pt x="5181439" y="3128109"/>
-                  </a:lnTo>
-                  <a:lnTo>
-                    <a:pt x="5104806" y="3114863"/>
-                  </a:lnTo>
-                  <a:lnTo>
-                    <a:pt x="5028174" y="3101124"/>
-                  </a:lnTo>
-                  <a:lnTo>
-                    <a:pt x="4951541" y="3086873"/>
-                  </a:lnTo>
-                  <a:lnTo>
-                    <a:pt x="4874909" y="3072091"/>
-                  </a:lnTo>
-                  <a:lnTo>
-                    <a:pt x="4798276" y="3056759"/>
-                  </a:lnTo>
-                  <a:lnTo>
-                    <a:pt x="4721644" y="3040856"/>
-                  </a:lnTo>
-                  <a:lnTo>
-                    <a:pt x="4645011" y="3024361"/>
-                  </a:lnTo>
-                  <a:lnTo>
-                    <a:pt x="4568378" y="3007251"/>
-                  </a:lnTo>
-                  <a:lnTo>
-                    <a:pt x="4491746" y="2989503"/>
-                  </a:lnTo>
-                  <a:lnTo>
-                    <a:pt x="4415113" y="2971095"/>
-                  </a:lnTo>
-                  <a:lnTo>
-                    <a:pt x="4338481" y="2952002"/>
-                  </a:lnTo>
-                  <a:lnTo>
-                    <a:pt x="4261848" y="2932197"/>
-                  </a:lnTo>
-                  <a:lnTo>
-                    <a:pt x="4185216" y="2911654"/>
-                  </a:lnTo>
-                  <a:lnTo>
-                    <a:pt x="4108583" y="2890347"/>
-                  </a:lnTo>
-                  <a:lnTo>
-                    <a:pt x="4031951" y="2868245"/>
-                  </a:lnTo>
-                  <a:lnTo>
-                    <a:pt x="3955318" y="2845321"/>
-                  </a:lnTo>
-                  <a:lnTo>
-                    <a:pt x="3878685" y="2821543"/>
-                  </a:lnTo>
-                  <a:lnTo>
-                    <a:pt x="3802053" y="2796879"/>
-                  </a:lnTo>
-                  <a:lnTo>
-                    <a:pt x="3725420" y="2771296"/>
-                  </a:lnTo>
-                  <a:lnTo>
-                    <a:pt x="3648788" y="2744761"/>
-                  </a:lnTo>
-                  <a:lnTo>
-                    <a:pt x="3572155" y="2717237"/>
-                  </a:lnTo>
-                  <a:lnTo>
-                    <a:pt x="3495523" y="2688689"/>
-                  </a:lnTo>
-                  <a:lnTo>
-                    <a:pt x="3418890" y="2659077"/>
-                  </a:lnTo>
-                  <a:lnTo>
-                    <a:pt x="3342258" y="2651777"/>
-                  </a:lnTo>
-                  <a:lnTo>
-                    <a:pt x="3265625" y="2648790"/>
-                  </a:lnTo>
-                  <a:lnTo>
-                    <a:pt x="3188993" y="2645791"/>
-                  </a:lnTo>
-                  <a:lnTo>
-                    <a:pt x="3112360" y="2642782"/>
-                  </a:lnTo>
-                  <a:lnTo>
-                    <a:pt x="3035727" y="2639762"/>
-                  </a:lnTo>
-                  <a:lnTo>
-                    <a:pt x="2959095" y="2636732"/>
-                  </a:lnTo>
-                  <a:lnTo>
-                    <a:pt x="2882462" y="2633690"/>
-                  </a:lnTo>
-                  <a:lnTo>
-                    <a:pt x="2805830" y="2630637"/>
-                  </a:lnTo>
-                  <a:lnTo>
-                    <a:pt x="2729197" y="2627574"/>
-                  </a:lnTo>
-                  <a:lnTo>
-                    <a:pt x="2652565" y="2624500"/>
-                  </a:lnTo>
-                  <a:lnTo>
-                    <a:pt x="2575932" y="2621414"/>
-                  </a:lnTo>
-                  <a:lnTo>
-                    <a:pt x="2499300" y="2618317"/>
-                  </a:lnTo>
-                  <a:lnTo>
-                    <a:pt x="2422667" y="2615210"/>
-                  </a:lnTo>
-                  <a:lnTo>
-                    <a:pt x="2346034" y="2612091"/>
-                  </a:lnTo>
-                  <a:lnTo>
-                    <a:pt x="2269402" y="2608961"/>
-                  </a:lnTo>
-                  <a:lnTo>
-                    <a:pt x="2192769" y="2605819"/>
-                  </a:lnTo>
-                  <a:lnTo>
-                    <a:pt x="2116137" y="2602667"/>
-                  </a:lnTo>
-                  <a:lnTo>
-                    <a:pt x="2039504" y="2599503"/>
-                  </a:lnTo>
-                  <a:lnTo>
-                    <a:pt x="1962872" y="2596328"/>
-                  </a:lnTo>
-                  <a:lnTo>
-                    <a:pt x="1886239" y="2593141"/>
-                  </a:lnTo>
-                  <a:lnTo>
-                    <a:pt x="1809607" y="2589943"/>
-                  </a:lnTo>
-                  <a:lnTo>
-                    <a:pt x="1732974" y="2586733"/>
-                  </a:lnTo>
-                  <a:lnTo>
-                    <a:pt x="1656342" y="2583512"/>
-                  </a:lnTo>
-                  <a:lnTo>
-                    <a:pt x="1579709" y="2580279"/>
-                  </a:lnTo>
-                  <a:lnTo>
-                    <a:pt x="1503076" y="2577035"/>
-                  </a:lnTo>
-                  <a:lnTo>
-                    <a:pt x="1426444" y="2573779"/>
-                  </a:lnTo>
-                  <a:lnTo>
-                    <a:pt x="1349811" y="2570511"/>
-                  </a:lnTo>
-                  <a:lnTo>
-                    <a:pt x="1273179" y="2567232"/>
-                  </a:lnTo>
-                  <a:lnTo>
-                    <a:pt x="1196546" y="2563941"/>
-                  </a:lnTo>
-                  <a:lnTo>
-                    <a:pt x="1119914" y="2560638"/>
-                  </a:lnTo>
-                  <a:lnTo>
-                    <a:pt x="1043281" y="2557323"/>
-                  </a:lnTo>
-                  <a:lnTo>
-                    <a:pt x="966649" y="2553996"/>
-                  </a:lnTo>
-                  <a:lnTo>
-                    <a:pt x="890016" y="2550658"/>
-                  </a:lnTo>
-                  <a:lnTo>
-                    <a:pt x="813384" y="2547307"/>
-                  </a:lnTo>
-                  <a:lnTo>
-                    <a:pt x="736751" y="2543944"/>
-                  </a:lnTo>
-                  <a:lnTo>
-                    <a:pt x="660118" y="2540569"/>
-                  </a:lnTo>
-                  <a:lnTo>
-                    <a:pt x="583486" y="2537182"/>
-                  </a:lnTo>
-                  <a:lnTo>
-                    <a:pt x="506853" y="2533783"/>
-                  </a:lnTo>
-                  <a:lnTo>
-                    <a:pt x="430221" y="2530372"/>
-                  </a:lnTo>
-                  <a:lnTo>
-                    <a:pt x="353588" y="2526949"/>
-                  </a:lnTo>
-                  <a:lnTo>
-                    <a:pt x="276956" y="2523513"/>
-                  </a:lnTo>
-                  <a:lnTo>
-                    <a:pt x="200323" y="2520065"/>
-                  </a:lnTo>
-                  <a:lnTo>
-                    <a:pt x="123691" y="2516604"/>
-                  </a:lnTo>
-                  <a:lnTo>
-                    <a:pt x="47058" y="2513131"/>
-                  </a:lnTo>
-                  <a:lnTo>
-                    <a:pt x="0" y="2510991"/>
+                    <a:pt x="572980" y="50899"/>
+                  </a:lnTo>
+                  <a:lnTo>
+                    <a:pt x="644602" y="174165"/>
+                  </a:lnTo>
+                  <a:lnTo>
+                    <a:pt x="716225" y="293004"/>
+                  </a:lnTo>
+                  <a:lnTo>
+                    <a:pt x="787847" y="407577"/>
+                  </a:lnTo>
+                  <a:lnTo>
+                    <a:pt x="859470" y="518035"/>
+                  </a:lnTo>
+                  <a:lnTo>
+                    <a:pt x="931092" y="624527"/>
+                  </a:lnTo>
+                  <a:lnTo>
+                    <a:pt x="1002715" y="727195"/>
+                  </a:lnTo>
+                  <a:lnTo>
+                    <a:pt x="1074337" y="826176"/>
+                  </a:lnTo>
+                  <a:lnTo>
+                    <a:pt x="1145960" y="921604"/>
+                  </a:lnTo>
+                  <a:lnTo>
+                    <a:pt x="1217582" y="1013604"/>
+                  </a:lnTo>
+                  <a:lnTo>
+                    <a:pt x="1289205" y="1102302"/>
+                  </a:lnTo>
+                  <a:lnTo>
+                    <a:pt x="1360827" y="1187814"/>
+                  </a:lnTo>
+                  <a:lnTo>
+                    <a:pt x="1432450" y="1270256"/>
+                  </a:lnTo>
+                  <a:lnTo>
+                    <a:pt x="1504073" y="1349737"/>
+                  </a:lnTo>
+                  <a:lnTo>
+                    <a:pt x="1575695" y="1426364"/>
+                  </a:lnTo>
+                  <a:lnTo>
+                    <a:pt x="1647318" y="1500240"/>
+                  </a:lnTo>
+                  <a:lnTo>
+                    <a:pt x="1718940" y="1571463"/>
+                  </a:lnTo>
+                  <a:lnTo>
+                    <a:pt x="1790563" y="1640129"/>
+                  </a:lnTo>
+                  <a:lnTo>
+                    <a:pt x="1862185" y="1706329"/>
+                  </a:lnTo>
+                  <a:lnTo>
+                    <a:pt x="1933808" y="1770152"/>
+                  </a:lnTo>
+                  <a:lnTo>
+                    <a:pt x="2005430" y="1831684"/>
+                  </a:lnTo>
+                  <a:lnTo>
+                    <a:pt x="2077053" y="1891005"/>
+                  </a:lnTo>
+                  <a:lnTo>
+                    <a:pt x="2148675" y="1948197"/>
+                  </a:lnTo>
+                  <a:lnTo>
+                    <a:pt x="2220298" y="2003335"/>
+                  </a:lnTo>
+                  <a:lnTo>
+                    <a:pt x="2291920" y="2056493"/>
+                  </a:lnTo>
+                  <a:lnTo>
+                    <a:pt x="2363543" y="2107743"/>
+                  </a:lnTo>
+                  <a:lnTo>
+                    <a:pt x="2435165" y="2157152"/>
+                  </a:lnTo>
+                  <a:lnTo>
+                    <a:pt x="2506788" y="2204787"/>
+                  </a:lnTo>
+                  <a:lnTo>
+                    <a:pt x="2578410" y="2250711"/>
+                  </a:lnTo>
+                  <a:lnTo>
+                    <a:pt x="2650033" y="2294987"/>
+                  </a:lnTo>
+                  <a:lnTo>
+                    <a:pt x="2721655" y="2337673"/>
+                  </a:lnTo>
+                  <a:lnTo>
+                    <a:pt x="2793278" y="2378826"/>
+                  </a:lnTo>
+                  <a:lnTo>
+                    <a:pt x="2864901" y="2418501"/>
+                  </a:lnTo>
+                  <a:lnTo>
+                    <a:pt x="2936523" y="2456751"/>
+                  </a:lnTo>
+                  <a:lnTo>
+                    <a:pt x="3008146" y="2493628"/>
+                  </a:lnTo>
+                  <a:lnTo>
+                    <a:pt x="3079768" y="2529181"/>
+                  </a:lnTo>
+                  <a:lnTo>
+                    <a:pt x="3151391" y="2563457"/>
+                  </a:lnTo>
+                  <a:lnTo>
+                    <a:pt x="3223013" y="2596503"/>
+                  </a:lnTo>
+                  <a:lnTo>
+                    <a:pt x="3294636" y="2628362"/>
+                  </a:lnTo>
+                  <a:lnTo>
+                    <a:pt x="3366258" y="2654754"/>
+                  </a:lnTo>
+                  <a:lnTo>
+                    <a:pt x="3437881" y="2657720"/>
+                  </a:lnTo>
+                  <a:lnTo>
+                    <a:pt x="3509503" y="2660676"/>
+                  </a:lnTo>
+                  <a:lnTo>
+                    <a:pt x="3581126" y="2663621"/>
+                  </a:lnTo>
+                  <a:lnTo>
+                    <a:pt x="3652748" y="2666555"/>
+                  </a:lnTo>
+                  <a:lnTo>
+                    <a:pt x="3724371" y="2669479"/>
+                  </a:lnTo>
+                  <a:lnTo>
+                    <a:pt x="3795993" y="2672393"/>
+                  </a:lnTo>
+                  <a:lnTo>
+                    <a:pt x="3867616" y="2675296"/>
+                  </a:lnTo>
+                  <a:lnTo>
+                    <a:pt x="3939238" y="2678189"/>
+                  </a:lnTo>
+                  <a:lnTo>
+                    <a:pt x="4010861" y="2681071"/>
+                  </a:lnTo>
+                  <a:lnTo>
+                    <a:pt x="4082483" y="2683943"/>
+                  </a:lnTo>
+                  <a:lnTo>
+                    <a:pt x="4154106" y="2686805"/>
+                  </a:lnTo>
+                  <a:lnTo>
+                    <a:pt x="4225729" y="2689657"/>
+                  </a:lnTo>
+                  <a:lnTo>
+                    <a:pt x="4297351" y="2692498"/>
+                  </a:lnTo>
+                  <a:lnTo>
+                    <a:pt x="4368974" y="2695329"/>
+                  </a:lnTo>
+                  <a:lnTo>
+                    <a:pt x="4440596" y="2698150"/>
+                  </a:lnTo>
+                  <a:lnTo>
+                    <a:pt x="4512219" y="2700961"/>
+                  </a:lnTo>
+                  <a:lnTo>
+                    <a:pt x="4583841" y="2703762"/>
+                  </a:lnTo>
+                  <a:lnTo>
+                    <a:pt x="4655464" y="2706553"/>
+                  </a:lnTo>
+                  <a:lnTo>
+                    <a:pt x="4727086" y="2709334"/>
+                  </a:lnTo>
+                  <a:lnTo>
+                    <a:pt x="4798709" y="2712105"/>
+                  </a:lnTo>
+                  <a:lnTo>
+                    <a:pt x="4870331" y="2714866"/>
+                  </a:lnTo>
+                  <a:lnTo>
+                    <a:pt x="4941954" y="2717617"/>
+                  </a:lnTo>
+                  <a:lnTo>
+                    <a:pt x="5013576" y="2720358"/>
+                  </a:lnTo>
+                  <a:lnTo>
+                    <a:pt x="5085199" y="2723090"/>
+                  </a:lnTo>
+                  <a:lnTo>
+                    <a:pt x="5156821" y="2725811"/>
+                  </a:lnTo>
+                  <a:lnTo>
+                    <a:pt x="5228444" y="2728523"/>
+                  </a:lnTo>
+                  <a:lnTo>
+                    <a:pt x="5300066" y="2731226"/>
+                  </a:lnTo>
+                  <a:lnTo>
+                    <a:pt x="5371689" y="2733918"/>
+                  </a:lnTo>
+                  <a:lnTo>
+                    <a:pt x="5443311" y="2736601"/>
+                  </a:lnTo>
+                  <a:lnTo>
+                    <a:pt x="5514934" y="2739275"/>
+                  </a:lnTo>
+                  <a:lnTo>
+                    <a:pt x="5586557" y="2741938"/>
+                  </a:lnTo>
+                  <a:lnTo>
+                    <a:pt x="5658179" y="2744593"/>
+                  </a:lnTo>
+                  <a:lnTo>
+                    <a:pt x="5729802" y="2747237"/>
+                  </a:lnTo>
+                  <a:lnTo>
+                    <a:pt x="5801424" y="2749873"/>
+                  </a:lnTo>
+                  <a:lnTo>
+                    <a:pt x="5873047" y="2752499"/>
+                  </a:lnTo>
+                  <a:lnTo>
+                    <a:pt x="5944669" y="2755115"/>
+                  </a:lnTo>
+                  <a:lnTo>
+                    <a:pt x="6016292" y="2757722"/>
+                  </a:lnTo>
+                  <a:lnTo>
+                    <a:pt x="6087914" y="2760320"/>
+                  </a:lnTo>
+                  <a:lnTo>
+                    <a:pt x="6159537" y="2762908"/>
+                  </a:lnTo>
+                  <a:lnTo>
+                    <a:pt x="6231159" y="2765488"/>
+                  </a:lnTo>
+                  <a:lnTo>
+                    <a:pt x="6302782" y="2768058"/>
+                  </a:lnTo>
+                  <a:lnTo>
+                    <a:pt x="6374404" y="2770619"/>
+                  </a:lnTo>
+                  <a:lnTo>
+                    <a:pt x="6446027" y="2773170"/>
+                  </a:lnTo>
+                  <a:lnTo>
+                    <a:pt x="6517649" y="2775713"/>
+                  </a:lnTo>
+                  <a:lnTo>
+                    <a:pt x="6589272" y="2778246"/>
+                  </a:lnTo>
+                  <a:lnTo>
+                    <a:pt x="6660894" y="2780770"/>
+                  </a:lnTo>
+                  <a:lnTo>
+                    <a:pt x="6732517" y="2783286"/>
+                  </a:lnTo>
+                  <a:lnTo>
+                    <a:pt x="6804139" y="2785792"/>
+                  </a:lnTo>
+                  <a:lnTo>
+                    <a:pt x="6875762" y="2788290"/>
+                  </a:lnTo>
+                  <a:lnTo>
+                    <a:pt x="6947385" y="2790778"/>
+                  </a:lnTo>
+                  <a:lnTo>
+                    <a:pt x="7019007" y="2793257"/>
+                  </a:lnTo>
+                  <a:lnTo>
+                    <a:pt x="7090630" y="2795728"/>
+                  </a:lnTo>
+                  <a:lnTo>
+                    <a:pt x="7090630" y="3360593"/>
+                  </a:lnTo>
+                  <a:lnTo>
+                    <a:pt x="7019007" y="3356006"/>
+                  </a:lnTo>
+                  <a:lnTo>
+                    <a:pt x="6947385" y="3351248"/>
+                  </a:lnTo>
+                  <a:lnTo>
+                    <a:pt x="6875762" y="3346313"/>
+                  </a:lnTo>
+                  <a:lnTo>
+                    <a:pt x="6804139" y="3341195"/>
+                  </a:lnTo>
+                  <a:lnTo>
+                    <a:pt x="6732517" y="3335885"/>
+                  </a:lnTo>
+                  <a:lnTo>
+                    <a:pt x="6660894" y="3330378"/>
+                  </a:lnTo>
+                  <a:lnTo>
+                    <a:pt x="6589272" y="3324666"/>
+                  </a:lnTo>
+                  <a:lnTo>
+                    <a:pt x="6517649" y="3318741"/>
+                  </a:lnTo>
+                  <a:lnTo>
+                    <a:pt x="6446027" y="3312595"/>
+                  </a:lnTo>
+                  <a:lnTo>
+                    <a:pt x="6374404" y="3306221"/>
+                  </a:lnTo>
+                  <a:lnTo>
+                    <a:pt x="6302782" y="3299609"/>
+                  </a:lnTo>
+                  <a:lnTo>
+                    <a:pt x="6231159" y="3292750"/>
+                  </a:lnTo>
+                  <a:lnTo>
+                    <a:pt x="6159537" y="3285637"/>
+                  </a:lnTo>
+                  <a:lnTo>
+                    <a:pt x="6087914" y="3278258"/>
+                  </a:lnTo>
+                  <a:lnTo>
+                    <a:pt x="6016292" y="3270605"/>
+                  </a:lnTo>
+                  <a:lnTo>
+                    <a:pt x="5944669" y="3262666"/>
+                  </a:lnTo>
+                  <a:lnTo>
+                    <a:pt x="5873047" y="3254432"/>
+                  </a:lnTo>
+                  <a:lnTo>
+                    <a:pt x="5801424" y="3245891"/>
+                  </a:lnTo>
+                  <a:lnTo>
+                    <a:pt x="5729802" y="3237032"/>
+                  </a:lnTo>
+                  <a:lnTo>
+                    <a:pt x="5658179" y="3227843"/>
+                  </a:lnTo>
+                  <a:lnTo>
+                    <a:pt x="5586557" y="3218312"/>
+                  </a:lnTo>
+                  <a:lnTo>
+                    <a:pt x="5514934" y="3208426"/>
+                  </a:lnTo>
+                  <a:lnTo>
+                    <a:pt x="5443311" y="3198172"/>
+                  </a:lnTo>
+                  <a:lnTo>
+                    <a:pt x="5371689" y="3187536"/>
+                  </a:lnTo>
+                  <a:lnTo>
+                    <a:pt x="5300066" y="3176503"/>
+                  </a:lnTo>
+                  <a:lnTo>
+                    <a:pt x="5228444" y="3165060"/>
+                  </a:lnTo>
+                  <a:lnTo>
+                    <a:pt x="5156821" y="3153190"/>
+                  </a:lnTo>
+                  <a:lnTo>
+                    <a:pt x="5085199" y="3140879"/>
+                  </a:lnTo>
+                  <a:lnTo>
+                    <a:pt x="5013576" y="3128109"/>
+                  </a:lnTo>
+                  <a:lnTo>
+                    <a:pt x="4941954" y="3114863"/>
+                  </a:lnTo>
+                  <a:lnTo>
+                    <a:pt x="4870331" y="3101124"/>
+                  </a:lnTo>
+                  <a:lnTo>
+                    <a:pt x="4798709" y="3086873"/>
+                  </a:lnTo>
+                  <a:lnTo>
+                    <a:pt x="4727086" y="3072091"/>
+                  </a:lnTo>
+                  <a:lnTo>
+                    <a:pt x="4655464" y="3056759"/>
+                  </a:lnTo>
+                  <a:lnTo>
+                    <a:pt x="4583841" y="3040856"/>
+                  </a:lnTo>
+                  <a:lnTo>
+                    <a:pt x="4512219" y="3024361"/>
+                  </a:lnTo>
+                  <a:lnTo>
+                    <a:pt x="4440596" y="3007251"/>
+                  </a:lnTo>
+                  <a:lnTo>
+                    <a:pt x="4368974" y="2989503"/>
+                  </a:lnTo>
+                  <a:lnTo>
+                    <a:pt x="4297351" y="2971095"/>
+                  </a:lnTo>
+                  <a:lnTo>
+                    <a:pt x="4225729" y="2952002"/>
+                  </a:lnTo>
+                  <a:lnTo>
+                    <a:pt x="4154106" y="2932197"/>
+                  </a:lnTo>
+                  <a:lnTo>
+                    <a:pt x="4082483" y="2911654"/>
+                  </a:lnTo>
+                  <a:lnTo>
+                    <a:pt x="4010861" y="2890347"/>
+                  </a:lnTo>
+                  <a:lnTo>
+                    <a:pt x="3939238" y="2868245"/>
+                  </a:lnTo>
+                  <a:lnTo>
+                    <a:pt x="3867616" y="2845321"/>
+                  </a:lnTo>
+                  <a:lnTo>
+                    <a:pt x="3795993" y="2821543"/>
+                  </a:lnTo>
+                  <a:lnTo>
+                    <a:pt x="3724371" y="2796879"/>
+                  </a:lnTo>
+                  <a:lnTo>
+                    <a:pt x="3652748" y="2771296"/>
+                  </a:lnTo>
+                  <a:lnTo>
+                    <a:pt x="3581126" y="2744761"/>
+                  </a:lnTo>
+                  <a:lnTo>
+                    <a:pt x="3509503" y="2717237"/>
+                  </a:lnTo>
+                  <a:lnTo>
+                    <a:pt x="3437881" y="2688689"/>
+                  </a:lnTo>
+                  <a:lnTo>
+                    <a:pt x="3366258" y="2659077"/>
+                  </a:lnTo>
+                  <a:lnTo>
+                    <a:pt x="3294636" y="2651777"/>
+                  </a:lnTo>
+                  <a:lnTo>
+                    <a:pt x="3223013" y="2648790"/>
+                  </a:lnTo>
+                  <a:lnTo>
+                    <a:pt x="3151391" y="2645791"/>
+                  </a:lnTo>
+                  <a:lnTo>
+                    <a:pt x="3079768" y="2642782"/>
+                  </a:lnTo>
+                  <a:lnTo>
+                    <a:pt x="3008146" y="2639762"/>
+                  </a:lnTo>
+                  <a:lnTo>
+                    <a:pt x="2936523" y="2636732"/>
+                  </a:lnTo>
+                  <a:lnTo>
+                    <a:pt x="2864901" y="2633690"/>
+                  </a:lnTo>
+                  <a:lnTo>
+                    <a:pt x="2793278" y="2630637"/>
+                  </a:lnTo>
+                  <a:lnTo>
+                    <a:pt x="2721655" y="2627574"/>
+                  </a:lnTo>
+                  <a:lnTo>
+                    <a:pt x="2650033" y="2624500"/>
+                  </a:lnTo>
+                  <a:lnTo>
+                    <a:pt x="2578410" y="2621414"/>
+                  </a:lnTo>
+                  <a:lnTo>
+                    <a:pt x="2506788" y="2618317"/>
+                  </a:lnTo>
+                  <a:lnTo>
+                    <a:pt x="2435165" y="2615210"/>
+                  </a:lnTo>
+                  <a:lnTo>
+                    <a:pt x="2363543" y="2612091"/>
+                  </a:lnTo>
+                  <a:lnTo>
+                    <a:pt x="2291920" y="2608961"/>
+                  </a:lnTo>
+                  <a:lnTo>
+                    <a:pt x="2220298" y="2605819"/>
+                  </a:lnTo>
+                  <a:lnTo>
+                    <a:pt x="2148675" y="2602667"/>
+                  </a:lnTo>
+                  <a:lnTo>
+                    <a:pt x="2077053" y="2599503"/>
+                  </a:lnTo>
+                  <a:lnTo>
+                    <a:pt x="2005430" y="2596328"/>
+                  </a:lnTo>
+                  <a:lnTo>
+                    <a:pt x="1933808" y="2593141"/>
+                  </a:lnTo>
+                  <a:lnTo>
+                    <a:pt x="1862185" y="2589943"/>
+                  </a:lnTo>
+                  <a:lnTo>
+                    <a:pt x="1790563" y="2586733"/>
+                  </a:lnTo>
+                  <a:lnTo>
+                    <a:pt x="1718940" y="2583512"/>
+                  </a:lnTo>
+                  <a:lnTo>
+                    <a:pt x="1647318" y="2580279"/>
+                  </a:lnTo>
+                  <a:lnTo>
+                    <a:pt x="1575695" y="2577035"/>
+                  </a:lnTo>
+                  <a:lnTo>
+                    <a:pt x="1504073" y="2573779"/>
+                  </a:lnTo>
+                  <a:lnTo>
+                    <a:pt x="1432450" y="2570511"/>
+                  </a:lnTo>
+                  <a:lnTo>
+                    <a:pt x="1360827" y="2567232"/>
+                  </a:lnTo>
+                  <a:lnTo>
+                    <a:pt x="1289205" y="2563941"/>
+                  </a:lnTo>
+                  <a:lnTo>
+                    <a:pt x="1217582" y="2560638"/>
+                  </a:lnTo>
+                  <a:lnTo>
+                    <a:pt x="1145960" y="2557323"/>
+                  </a:lnTo>
+                  <a:lnTo>
+                    <a:pt x="1074337" y="2553996"/>
+                  </a:lnTo>
+                  <a:lnTo>
+                    <a:pt x="1002715" y="2550658"/>
+                  </a:lnTo>
+                  <a:lnTo>
+                    <a:pt x="931092" y="2547307"/>
+                  </a:lnTo>
+                  <a:lnTo>
+                    <a:pt x="859470" y="2543944"/>
+                  </a:lnTo>
+                  <a:lnTo>
+                    <a:pt x="787847" y="2540569"/>
+                  </a:lnTo>
+                  <a:lnTo>
+                    <a:pt x="716225" y="2537182"/>
+                  </a:lnTo>
+                  <a:lnTo>
+                    <a:pt x="644602" y="2533783"/>
+                  </a:lnTo>
+                  <a:lnTo>
+                    <a:pt x="572980" y="2530372"/>
+                  </a:lnTo>
+                  <a:lnTo>
+                    <a:pt x="501357" y="2526949"/>
+                  </a:lnTo>
+                  <a:lnTo>
+                    <a:pt x="429735" y="2523513"/>
+                  </a:lnTo>
+                  <a:lnTo>
+                    <a:pt x="358112" y="2520065"/>
+                  </a:lnTo>
+                  <a:lnTo>
+                    <a:pt x="286490" y="2516604"/>
+                  </a:lnTo>
+                  <a:lnTo>
+                    <a:pt x="214867" y="2513131"/>
+                  </a:lnTo>
+                  <a:lnTo>
+                    <a:pt x="143245" y="2509646"/>
+                  </a:lnTo>
+                  <a:lnTo>
+                    <a:pt x="71622" y="2506148"/>
+                  </a:lnTo>
+                  <a:lnTo>
+                    <a:pt x="0" y="2502637"/>
                   </a:lnTo>
                   <a:close/>
                 </a:path>
@@ -3600,297 +3563,622 @@
         </p:sp>
         <p:sp>
           <p:nvSpPr>
+            <p:cNvPr id="21" name="pl21"/>
+            <p:cNvSpPr/>
+            <p:nvPr/>
+          </p:nvSpPr>
+          <p:spPr>
+            <a:xfrm>
+              <a:off x="1716516" y="2073503"/>
+              <a:ext cx="6546162" cy="2795728"/>
+            </a:xfrm>
+            <a:custGeom>
+              <a:avLst/>
+              <a:pathLst>
+                <a:path w="6546162" h="2795728">
+                  <a:moveTo>
+                    <a:pt x="0" y="0"/>
+                  </a:moveTo>
+                  <a:lnTo>
+                    <a:pt x="28512" y="50899"/>
+                  </a:lnTo>
+                  <a:lnTo>
+                    <a:pt x="100135" y="174165"/>
+                  </a:lnTo>
+                  <a:lnTo>
+                    <a:pt x="171757" y="293004"/>
+                  </a:lnTo>
+                  <a:lnTo>
+                    <a:pt x="243380" y="407577"/>
+                  </a:lnTo>
+                  <a:lnTo>
+                    <a:pt x="315002" y="518035"/>
+                  </a:lnTo>
+                  <a:lnTo>
+                    <a:pt x="386625" y="624527"/>
+                  </a:lnTo>
+                  <a:lnTo>
+                    <a:pt x="458247" y="727195"/>
+                  </a:lnTo>
+                  <a:lnTo>
+                    <a:pt x="529870" y="826176"/>
+                  </a:lnTo>
+                  <a:lnTo>
+                    <a:pt x="601492" y="921604"/>
+                  </a:lnTo>
+                  <a:lnTo>
+                    <a:pt x="673115" y="1013604"/>
+                  </a:lnTo>
+                  <a:lnTo>
+                    <a:pt x="744737" y="1102302"/>
+                  </a:lnTo>
+                  <a:lnTo>
+                    <a:pt x="816360" y="1187814"/>
+                  </a:lnTo>
+                  <a:lnTo>
+                    <a:pt x="887983" y="1270256"/>
+                  </a:lnTo>
+                  <a:lnTo>
+                    <a:pt x="959605" y="1349737"/>
+                  </a:lnTo>
+                  <a:lnTo>
+                    <a:pt x="1031228" y="1426364"/>
+                  </a:lnTo>
+                  <a:lnTo>
+                    <a:pt x="1102850" y="1500240"/>
+                  </a:lnTo>
+                  <a:lnTo>
+                    <a:pt x="1174473" y="1571463"/>
+                  </a:lnTo>
+                  <a:lnTo>
+                    <a:pt x="1246095" y="1640129"/>
+                  </a:lnTo>
+                  <a:lnTo>
+                    <a:pt x="1317718" y="1706329"/>
+                  </a:lnTo>
+                  <a:lnTo>
+                    <a:pt x="1389340" y="1770152"/>
+                  </a:lnTo>
+                  <a:lnTo>
+                    <a:pt x="1460963" y="1831684"/>
+                  </a:lnTo>
+                  <a:lnTo>
+                    <a:pt x="1532585" y="1891005"/>
+                  </a:lnTo>
+                  <a:lnTo>
+                    <a:pt x="1604208" y="1948197"/>
+                  </a:lnTo>
+                  <a:lnTo>
+                    <a:pt x="1675830" y="2003335"/>
+                  </a:lnTo>
+                  <a:lnTo>
+                    <a:pt x="1747453" y="2056493"/>
+                  </a:lnTo>
+                  <a:lnTo>
+                    <a:pt x="1819075" y="2107743"/>
+                  </a:lnTo>
+                  <a:lnTo>
+                    <a:pt x="1890698" y="2157152"/>
+                  </a:lnTo>
+                  <a:lnTo>
+                    <a:pt x="1962320" y="2204787"/>
+                  </a:lnTo>
+                  <a:lnTo>
+                    <a:pt x="2033943" y="2250711"/>
+                  </a:lnTo>
+                  <a:lnTo>
+                    <a:pt x="2105565" y="2294987"/>
+                  </a:lnTo>
+                  <a:lnTo>
+                    <a:pt x="2177188" y="2337673"/>
+                  </a:lnTo>
+                  <a:lnTo>
+                    <a:pt x="2248811" y="2378826"/>
+                  </a:lnTo>
+                  <a:lnTo>
+                    <a:pt x="2320433" y="2418501"/>
+                  </a:lnTo>
+                  <a:lnTo>
+                    <a:pt x="2392056" y="2456751"/>
+                  </a:lnTo>
+                  <a:lnTo>
+                    <a:pt x="2463678" y="2493628"/>
+                  </a:lnTo>
+                  <a:lnTo>
+                    <a:pt x="2535301" y="2529181"/>
+                  </a:lnTo>
+                  <a:lnTo>
+                    <a:pt x="2606923" y="2563457"/>
+                  </a:lnTo>
+                  <a:lnTo>
+                    <a:pt x="2678546" y="2596503"/>
+                  </a:lnTo>
+                  <a:lnTo>
+                    <a:pt x="2750168" y="2628362"/>
+                  </a:lnTo>
+                  <a:lnTo>
+                    <a:pt x="2821791" y="2654754"/>
+                  </a:lnTo>
+                  <a:lnTo>
+                    <a:pt x="2893413" y="2657720"/>
+                  </a:lnTo>
+                  <a:lnTo>
+                    <a:pt x="2965036" y="2660676"/>
+                  </a:lnTo>
+                  <a:lnTo>
+                    <a:pt x="3036658" y="2663621"/>
+                  </a:lnTo>
+                  <a:lnTo>
+                    <a:pt x="3108281" y="2666555"/>
+                  </a:lnTo>
+                  <a:lnTo>
+                    <a:pt x="3179903" y="2669479"/>
+                  </a:lnTo>
+                  <a:lnTo>
+                    <a:pt x="3251526" y="2672393"/>
+                  </a:lnTo>
+                  <a:lnTo>
+                    <a:pt x="3323148" y="2675296"/>
+                  </a:lnTo>
+                  <a:lnTo>
+                    <a:pt x="3394771" y="2678189"/>
+                  </a:lnTo>
+                  <a:lnTo>
+                    <a:pt x="3466393" y="2681071"/>
+                  </a:lnTo>
+                  <a:lnTo>
+                    <a:pt x="3538016" y="2683943"/>
+                  </a:lnTo>
+                  <a:lnTo>
+                    <a:pt x="3609639" y="2686805"/>
+                  </a:lnTo>
+                  <a:lnTo>
+                    <a:pt x="3681261" y="2689657"/>
+                  </a:lnTo>
+                  <a:lnTo>
+                    <a:pt x="3752884" y="2692498"/>
+                  </a:lnTo>
+                  <a:lnTo>
+                    <a:pt x="3824506" y="2695329"/>
+                  </a:lnTo>
+                  <a:lnTo>
+                    <a:pt x="3896129" y="2698150"/>
+                  </a:lnTo>
+                  <a:lnTo>
+                    <a:pt x="3967751" y="2700961"/>
+                  </a:lnTo>
+                  <a:lnTo>
+                    <a:pt x="4039374" y="2703762"/>
+                  </a:lnTo>
+                  <a:lnTo>
+                    <a:pt x="4110996" y="2706553"/>
+                  </a:lnTo>
+                  <a:lnTo>
+                    <a:pt x="4182619" y="2709334"/>
+                  </a:lnTo>
+                  <a:lnTo>
+                    <a:pt x="4254241" y="2712105"/>
+                  </a:lnTo>
+                  <a:lnTo>
+                    <a:pt x="4325864" y="2714866"/>
+                  </a:lnTo>
+                  <a:lnTo>
+                    <a:pt x="4397486" y="2717617"/>
+                  </a:lnTo>
+                  <a:lnTo>
+                    <a:pt x="4469109" y="2720358"/>
+                  </a:lnTo>
+                  <a:lnTo>
+                    <a:pt x="4540731" y="2723090"/>
+                  </a:lnTo>
+                  <a:lnTo>
+                    <a:pt x="4612354" y="2725811"/>
+                  </a:lnTo>
+                  <a:lnTo>
+                    <a:pt x="4683976" y="2728523"/>
+                  </a:lnTo>
+                  <a:lnTo>
+                    <a:pt x="4755599" y="2731226"/>
+                  </a:lnTo>
+                  <a:lnTo>
+                    <a:pt x="4827221" y="2733918"/>
+                  </a:lnTo>
+                  <a:lnTo>
+                    <a:pt x="4898844" y="2736601"/>
+                  </a:lnTo>
+                  <a:lnTo>
+                    <a:pt x="4970467" y="2739275"/>
+                  </a:lnTo>
+                  <a:lnTo>
+                    <a:pt x="5042089" y="2741938"/>
+                  </a:lnTo>
+                  <a:lnTo>
+                    <a:pt x="5113712" y="2744593"/>
+                  </a:lnTo>
+                  <a:lnTo>
+                    <a:pt x="5185334" y="2747237"/>
+                  </a:lnTo>
+                  <a:lnTo>
+                    <a:pt x="5256957" y="2749873"/>
+                  </a:lnTo>
+                  <a:lnTo>
+                    <a:pt x="5328579" y="2752499"/>
+                  </a:lnTo>
+                  <a:lnTo>
+                    <a:pt x="5400202" y="2755115"/>
+                  </a:lnTo>
+                  <a:lnTo>
+                    <a:pt x="5471824" y="2757722"/>
+                  </a:lnTo>
+                  <a:lnTo>
+                    <a:pt x="5543447" y="2760320"/>
+                  </a:lnTo>
+                  <a:lnTo>
+                    <a:pt x="5615069" y="2762908"/>
+                  </a:lnTo>
+                  <a:lnTo>
+                    <a:pt x="5686692" y="2765488"/>
+                  </a:lnTo>
+                  <a:lnTo>
+                    <a:pt x="5758314" y="2768058"/>
+                  </a:lnTo>
+                  <a:lnTo>
+                    <a:pt x="5829937" y="2770619"/>
+                  </a:lnTo>
+                  <a:lnTo>
+                    <a:pt x="5901559" y="2773170"/>
+                  </a:lnTo>
+                  <a:lnTo>
+                    <a:pt x="5973182" y="2775713"/>
+                  </a:lnTo>
+                  <a:lnTo>
+                    <a:pt x="6044804" y="2778246"/>
+                  </a:lnTo>
+                  <a:lnTo>
+                    <a:pt x="6116427" y="2780770"/>
+                  </a:lnTo>
+                  <a:lnTo>
+                    <a:pt x="6188049" y="2783286"/>
+                  </a:lnTo>
+                  <a:lnTo>
+                    <a:pt x="6259672" y="2785792"/>
+                  </a:lnTo>
+                  <a:lnTo>
+                    <a:pt x="6331295" y="2788290"/>
+                  </a:lnTo>
+                  <a:lnTo>
+                    <a:pt x="6402917" y="2790778"/>
+                  </a:lnTo>
+                  <a:lnTo>
+                    <a:pt x="6474540" y="2793257"/>
+                  </a:lnTo>
+                  <a:lnTo>
+                    <a:pt x="6546162" y="2795728"/>
+                  </a:lnTo>
+                </a:path>
+              </a:pathLst>
+            </a:custGeom>
+          </p:spPr>
+          <p:txBody>
+            <a:bodyPr/>
+            <a:lstStyle/>
+            <a:p/>
+          </p:txBody>
+        </p:sp>
+        <p:sp>
+          <p:nvSpPr>
             <p:cNvPr id="22" name="pl22"/>
             <p:cNvSpPr/>
             <p:nvPr/>
           </p:nvSpPr>
           <p:spPr>
             <a:xfrm>
-              <a:off x="1217231" y="2073503"/>
-              <a:ext cx="7004069" cy="2795728"/>
+              <a:off x="1172049" y="4576140"/>
+              <a:ext cx="7090630" cy="857955"/>
             </a:xfrm>
             <a:custGeom>
               <a:avLst/>
               <a:pathLst>
-                <a:path w="7004069" h="2795728">
+                <a:path w="7090630" h="857955">
                   <a:moveTo>
+                    <a:pt x="7090630" y="857955"/>
+                  </a:moveTo>
+                  <a:lnTo>
+                    <a:pt x="7019007" y="853368"/>
+                  </a:lnTo>
+                  <a:lnTo>
+                    <a:pt x="6947385" y="848611"/>
+                  </a:lnTo>
+                  <a:lnTo>
+                    <a:pt x="6875762" y="843676"/>
+                  </a:lnTo>
+                  <a:lnTo>
+                    <a:pt x="6804139" y="838557"/>
+                  </a:lnTo>
+                  <a:lnTo>
+                    <a:pt x="6732517" y="833248"/>
+                  </a:lnTo>
+                  <a:lnTo>
+                    <a:pt x="6660894" y="827740"/>
+                  </a:lnTo>
+                  <a:lnTo>
+                    <a:pt x="6589272" y="822028"/>
+                  </a:lnTo>
+                  <a:lnTo>
+                    <a:pt x="6517649" y="816103"/>
+                  </a:lnTo>
+                  <a:lnTo>
+                    <a:pt x="6446027" y="809958"/>
+                  </a:lnTo>
+                  <a:lnTo>
+                    <a:pt x="6374404" y="803583"/>
+                  </a:lnTo>
+                  <a:lnTo>
+                    <a:pt x="6302782" y="796971"/>
+                  </a:lnTo>
+                  <a:lnTo>
+                    <a:pt x="6231159" y="790113"/>
+                  </a:lnTo>
+                  <a:lnTo>
+                    <a:pt x="6159537" y="782999"/>
+                  </a:lnTo>
+                  <a:lnTo>
+                    <a:pt x="6087914" y="775621"/>
+                  </a:lnTo>
+                  <a:lnTo>
+                    <a:pt x="6016292" y="767967"/>
+                  </a:lnTo>
+                  <a:lnTo>
+                    <a:pt x="5944669" y="760029"/>
+                  </a:lnTo>
+                  <a:lnTo>
+                    <a:pt x="5873047" y="751795"/>
+                  </a:lnTo>
+                  <a:lnTo>
+                    <a:pt x="5801424" y="743254"/>
+                  </a:lnTo>
+                  <a:lnTo>
+                    <a:pt x="5729802" y="734395"/>
+                  </a:lnTo>
+                  <a:lnTo>
+                    <a:pt x="5658179" y="725206"/>
+                  </a:lnTo>
+                  <a:lnTo>
+                    <a:pt x="5586557" y="715675"/>
+                  </a:lnTo>
+                  <a:lnTo>
+                    <a:pt x="5514934" y="705789"/>
+                  </a:lnTo>
+                  <a:lnTo>
+                    <a:pt x="5443311" y="695534"/>
+                  </a:lnTo>
+                  <a:lnTo>
+                    <a:pt x="5371689" y="684898"/>
+                  </a:lnTo>
+                  <a:lnTo>
+                    <a:pt x="5300066" y="673866"/>
+                  </a:lnTo>
+                  <a:lnTo>
+                    <a:pt x="5228444" y="662422"/>
+                  </a:lnTo>
+                  <a:lnTo>
+                    <a:pt x="5156821" y="650553"/>
+                  </a:lnTo>
+                  <a:lnTo>
+                    <a:pt x="5085199" y="638241"/>
+                  </a:lnTo>
+                  <a:lnTo>
+                    <a:pt x="5013576" y="625471"/>
+                  </a:lnTo>
+                  <a:lnTo>
+                    <a:pt x="4941954" y="612225"/>
+                  </a:lnTo>
+                  <a:lnTo>
+                    <a:pt x="4870331" y="598486"/>
+                  </a:lnTo>
+                  <a:lnTo>
+                    <a:pt x="4798709" y="584235"/>
+                  </a:lnTo>
+                  <a:lnTo>
+                    <a:pt x="4727086" y="569454"/>
+                  </a:lnTo>
+                  <a:lnTo>
+                    <a:pt x="4655464" y="554122"/>
+                  </a:lnTo>
+                  <a:lnTo>
+                    <a:pt x="4583841" y="538218"/>
+                  </a:lnTo>
+                  <a:lnTo>
+                    <a:pt x="4512219" y="521723"/>
+                  </a:lnTo>
+                  <a:lnTo>
+                    <a:pt x="4440596" y="504613"/>
+                  </a:lnTo>
+                  <a:lnTo>
+                    <a:pt x="4368974" y="486866"/>
+                  </a:lnTo>
+                  <a:lnTo>
+                    <a:pt x="4297351" y="468458"/>
+                  </a:lnTo>
+                  <a:lnTo>
+                    <a:pt x="4225729" y="449364"/>
+                  </a:lnTo>
+                  <a:lnTo>
+                    <a:pt x="4154106" y="429559"/>
+                  </a:lnTo>
+                  <a:lnTo>
+                    <a:pt x="4082483" y="409017"/>
+                  </a:lnTo>
+                  <a:lnTo>
+                    <a:pt x="4010861" y="387709"/>
+                  </a:lnTo>
+                  <a:lnTo>
+                    <a:pt x="3939238" y="365608"/>
+                  </a:lnTo>
+                  <a:lnTo>
+                    <a:pt x="3867616" y="342683"/>
+                  </a:lnTo>
+                  <a:lnTo>
+                    <a:pt x="3795993" y="318905"/>
+                  </a:lnTo>
+                  <a:lnTo>
+                    <a:pt x="3724371" y="294241"/>
+                  </a:lnTo>
+                  <a:lnTo>
+                    <a:pt x="3652748" y="268659"/>
+                  </a:lnTo>
+                  <a:lnTo>
+                    <a:pt x="3581126" y="242123"/>
+                  </a:lnTo>
+                  <a:lnTo>
+                    <a:pt x="3509503" y="214600"/>
+                  </a:lnTo>
+                  <a:lnTo>
+                    <a:pt x="3437881" y="186051"/>
+                  </a:lnTo>
+                  <a:lnTo>
+                    <a:pt x="3366258" y="156439"/>
+                  </a:lnTo>
+                  <a:lnTo>
+                    <a:pt x="3294636" y="149140"/>
+                  </a:lnTo>
+                  <a:lnTo>
+                    <a:pt x="3223013" y="146152"/>
+                  </a:lnTo>
+                  <a:lnTo>
+                    <a:pt x="3151391" y="143154"/>
+                  </a:lnTo>
+                  <a:lnTo>
+                    <a:pt x="3079768" y="140145"/>
+                  </a:lnTo>
+                  <a:lnTo>
+                    <a:pt x="3008146" y="137125"/>
+                  </a:lnTo>
+                  <a:lnTo>
+                    <a:pt x="2936523" y="134094"/>
+                  </a:lnTo>
+                  <a:lnTo>
+                    <a:pt x="2864901" y="131052"/>
+                  </a:lnTo>
+                  <a:lnTo>
+                    <a:pt x="2793278" y="128000"/>
+                  </a:lnTo>
+                  <a:lnTo>
+                    <a:pt x="2721655" y="124936"/>
+                  </a:lnTo>
+                  <a:lnTo>
+                    <a:pt x="2650033" y="121862"/>
+                  </a:lnTo>
+                  <a:lnTo>
+                    <a:pt x="2578410" y="118776"/>
+                  </a:lnTo>
+                  <a:lnTo>
+                    <a:pt x="2506788" y="115680"/>
+                  </a:lnTo>
+                  <a:lnTo>
+                    <a:pt x="2435165" y="112572"/>
+                  </a:lnTo>
+                  <a:lnTo>
+                    <a:pt x="2363543" y="109453"/>
+                  </a:lnTo>
+                  <a:lnTo>
+                    <a:pt x="2291920" y="106323"/>
+                  </a:lnTo>
+                  <a:lnTo>
+                    <a:pt x="2220298" y="103182"/>
+                  </a:lnTo>
+                  <a:lnTo>
+                    <a:pt x="2148675" y="100029"/>
+                  </a:lnTo>
+                  <a:lnTo>
+                    <a:pt x="2077053" y="96865"/>
+                  </a:lnTo>
+                  <a:lnTo>
+                    <a:pt x="2005430" y="93690"/>
+                  </a:lnTo>
+                  <a:lnTo>
+                    <a:pt x="1933808" y="90503"/>
+                  </a:lnTo>
+                  <a:lnTo>
+                    <a:pt x="1862185" y="87305"/>
+                  </a:lnTo>
+                  <a:lnTo>
+                    <a:pt x="1790563" y="84096"/>
+                  </a:lnTo>
+                  <a:lnTo>
+                    <a:pt x="1718940" y="80874"/>
+                  </a:lnTo>
+                  <a:lnTo>
+                    <a:pt x="1647318" y="77642"/>
+                  </a:lnTo>
+                  <a:lnTo>
+                    <a:pt x="1575695" y="74397"/>
+                  </a:lnTo>
+                  <a:lnTo>
+                    <a:pt x="1504073" y="71141"/>
+                  </a:lnTo>
+                  <a:lnTo>
+                    <a:pt x="1432450" y="67874"/>
+                  </a:lnTo>
+                  <a:lnTo>
+                    <a:pt x="1360827" y="64594"/>
+                  </a:lnTo>
+                  <a:lnTo>
+                    <a:pt x="1289205" y="61303"/>
+                  </a:lnTo>
+                  <a:lnTo>
+                    <a:pt x="1217582" y="58000"/>
+                  </a:lnTo>
+                  <a:lnTo>
+                    <a:pt x="1145960" y="54685"/>
+                  </a:lnTo>
+                  <a:lnTo>
+                    <a:pt x="1074337" y="51359"/>
+                  </a:lnTo>
+                  <a:lnTo>
+                    <a:pt x="1002715" y="48020"/>
+                  </a:lnTo>
+                  <a:lnTo>
+                    <a:pt x="931092" y="44669"/>
+                  </a:lnTo>
+                  <a:lnTo>
+                    <a:pt x="859470" y="41307"/>
+                  </a:lnTo>
+                  <a:lnTo>
+                    <a:pt x="787847" y="37932"/>
+                  </a:lnTo>
+                  <a:lnTo>
+                    <a:pt x="716225" y="34545"/>
+                  </a:lnTo>
+                  <a:lnTo>
+                    <a:pt x="644602" y="31146"/>
+                  </a:lnTo>
+                  <a:lnTo>
+                    <a:pt x="572980" y="27734"/>
+                  </a:lnTo>
+                  <a:lnTo>
+                    <a:pt x="501357" y="24311"/>
+                  </a:lnTo>
+                  <a:lnTo>
+                    <a:pt x="429735" y="20875"/>
+                  </a:lnTo>
+                  <a:lnTo>
+                    <a:pt x="358112" y="17427"/>
+                  </a:lnTo>
+                  <a:lnTo>
+                    <a:pt x="286490" y="13966"/>
+                  </a:lnTo>
+                  <a:lnTo>
+                    <a:pt x="214867" y="10493"/>
+                  </a:lnTo>
+                  <a:lnTo>
+                    <a:pt x="143245" y="7008"/>
+                  </a:lnTo>
+                  <a:lnTo>
+                    <a:pt x="71622" y="3510"/>
+                  </a:lnTo>
+                  <a:lnTo>
                     <a:pt x="0" y="0"/>
-                  </a:moveTo>
-                  <a:lnTo>
-                    <a:pt x="30507" y="50899"/>
-                  </a:lnTo>
-                  <a:lnTo>
-                    <a:pt x="107139" y="174165"/>
-                  </a:lnTo>
-                  <a:lnTo>
-                    <a:pt x="183772" y="293004"/>
-                  </a:lnTo>
-                  <a:lnTo>
-                    <a:pt x="260404" y="407577"/>
-                  </a:lnTo>
-                  <a:lnTo>
-                    <a:pt x="337037" y="518035"/>
-                  </a:lnTo>
-                  <a:lnTo>
-                    <a:pt x="413669" y="624527"/>
-                  </a:lnTo>
-                  <a:lnTo>
-                    <a:pt x="490302" y="727195"/>
-                  </a:lnTo>
-                  <a:lnTo>
-                    <a:pt x="566935" y="826176"/>
-                  </a:lnTo>
-                  <a:lnTo>
-                    <a:pt x="643567" y="921604"/>
-                  </a:lnTo>
-                  <a:lnTo>
-                    <a:pt x="720200" y="1013604"/>
-                  </a:lnTo>
-                  <a:lnTo>
-                    <a:pt x="796832" y="1102302"/>
-                  </a:lnTo>
-                  <a:lnTo>
-                    <a:pt x="873465" y="1187814"/>
-                  </a:lnTo>
-                  <a:lnTo>
-                    <a:pt x="950097" y="1270256"/>
-                  </a:lnTo>
-                  <a:lnTo>
-                    <a:pt x="1026730" y="1349737"/>
-                  </a:lnTo>
-                  <a:lnTo>
-                    <a:pt x="1103362" y="1426364"/>
-                  </a:lnTo>
-                  <a:lnTo>
-                    <a:pt x="1179995" y="1500240"/>
-                  </a:lnTo>
-                  <a:lnTo>
-                    <a:pt x="1256627" y="1571463"/>
-                  </a:lnTo>
-                  <a:lnTo>
-                    <a:pt x="1333260" y="1640129"/>
-                  </a:lnTo>
-                  <a:lnTo>
-                    <a:pt x="1409893" y="1706329"/>
-                  </a:lnTo>
-                  <a:lnTo>
-                    <a:pt x="1486525" y="1770152"/>
-                  </a:lnTo>
-                  <a:lnTo>
-                    <a:pt x="1563158" y="1831684"/>
-                  </a:lnTo>
-                  <a:lnTo>
-                    <a:pt x="1639790" y="1891005"/>
-                  </a:lnTo>
-                  <a:lnTo>
-                    <a:pt x="1716423" y="1948197"/>
-                  </a:lnTo>
-                  <a:lnTo>
-                    <a:pt x="1793055" y="2003335"/>
-                  </a:lnTo>
-                  <a:lnTo>
-                    <a:pt x="1869688" y="2056493"/>
-                  </a:lnTo>
-                  <a:lnTo>
-                    <a:pt x="1946320" y="2107743"/>
-                  </a:lnTo>
-                  <a:lnTo>
-                    <a:pt x="2022953" y="2157152"/>
-                  </a:lnTo>
-                  <a:lnTo>
-                    <a:pt x="2099586" y="2204787"/>
-                  </a:lnTo>
-                  <a:lnTo>
-                    <a:pt x="2176218" y="2250711"/>
-                  </a:lnTo>
-                  <a:lnTo>
-                    <a:pt x="2252851" y="2294987"/>
-                  </a:lnTo>
-                  <a:lnTo>
-                    <a:pt x="2329483" y="2337673"/>
-                  </a:lnTo>
-                  <a:lnTo>
-                    <a:pt x="2406116" y="2378826"/>
-                  </a:lnTo>
-                  <a:lnTo>
-                    <a:pt x="2482748" y="2418501"/>
-                  </a:lnTo>
-                  <a:lnTo>
-                    <a:pt x="2559381" y="2456751"/>
-                  </a:lnTo>
-                  <a:lnTo>
-                    <a:pt x="2636013" y="2493628"/>
-                  </a:lnTo>
-                  <a:lnTo>
-                    <a:pt x="2712646" y="2529181"/>
-                  </a:lnTo>
-                  <a:lnTo>
-                    <a:pt x="2789278" y="2563457"/>
-                  </a:lnTo>
-                  <a:lnTo>
-                    <a:pt x="2865911" y="2596503"/>
-                  </a:lnTo>
-                  <a:lnTo>
-                    <a:pt x="2942544" y="2628362"/>
-                  </a:lnTo>
-                  <a:lnTo>
-                    <a:pt x="3019176" y="2654754"/>
-                  </a:lnTo>
-                  <a:lnTo>
-                    <a:pt x="3095809" y="2657720"/>
-                  </a:lnTo>
-                  <a:lnTo>
-                    <a:pt x="3172441" y="2660676"/>
-                  </a:lnTo>
-                  <a:lnTo>
-                    <a:pt x="3249074" y="2663621"/>
-                  </a:lnTo>
-                  <a:lnTo>
-                    <a:pt x="3325706" y="2666555"/>
-                  </a:lnTo>
-                  <a:lnTo>
-                    <a:pt x="3402339" y="2669479"/>
-                  </a:lnTo>
-                  <a:lnTo>
-                    <a:pt x="3478971" y="2672393"/>
-                  </a:lnTo>
-                  <a:lnTo>
-                    <a:pt x="3555604" y="2675296"/>
-                  </a:lnTo>
-                  <a:lnTo>
-                    <a:pt x="3632237" y="2678189"/>
-                  </a:lnTo>
-                  <a:lnTo>
-                    <a:pt x="3708869" y="2681071"/>
-                  </a:lnTo>
-                  <a:lnTo>
-                    <a:pt x="3785502" y="2683943"/>
-                  </a:lnTo>
-                  <a:lnTo>
-                    <a:pt x="3862134" y="2686805"/>
-                  </a:lnTo>
-                  <a:lnTo>
-                    <a:pt x="3938767" y="2689657"/>
-                  </a:lnTo>
-                  <a:lnTo>
-                    <a:pt x="4015399" y="2692498"/>
-                  </a:lnTo>
-                  <a:lnTo>
-                    <a:pt x="4092032" y="2695329"/>
-                  </a:lnTo>
-                  <a:lnTo>
-                    <a:pt x="4168664" y="2698150"/>
-                  </a:lnTo>
-                  <a:lnTo>
-                    <a:pt x="4245297" y="2700961"/>
-                  </a:lnTo>
-                  <a:lnTo>
-                    <a:pt x="4321929" y="2703762"/>
-                  </a:lnTo>
-                  <a:lnTo>
-                    <a:pt x="4398562" y="2706553"/>
-                  </a:lnTo>
-                  <a:lnTo>
-                    <a:pt x="4475195" y="2709334"/>
-                  </a:lnTo>
-                  <a:lnTo>
-                    <a:pt x="4551827" y="2712105"/>
-                  </a:lnTo>
-                  <a:lnTo>
-                    <a:pt x="4628460" y="2714866"/>
-                  </a:lnTo>
-                  <a:lnTo>
-                    <a:pt x="4705092" y="2717617"/>
-                  </a:lnTo>
-                  <a:lnTo>
-                    <a:pt x="4781725" y="2720358"/>
-                  </a:lnTo>
-                  <a:lnTo>
-                    <a:pt x="4858357" y="2723090"/>
-                  </a:lnTo>
-                  <a:lnTo>
-                    <a:pt x="4934990" y="2725811"/>
-                  </a:lnTo>
-                  <a:lnTo>
-                    <a:pt x="5011622" y="2728523"/>
-                  </a:lnTo>
-                  <a:lnTo>
-                    <a:pt x="5088255" y="2731226"/>
-                  </a:lnTo>
-                  <a:lnTo>
-                    <a:pt x="5164887" y="2733918"/>
-                  </a:lnTo>
-                  <a:lnTo>
-                    <a:pt x="5241520" y="2736601"/>
-                  </a:lnTo>
-                  <a:lnTo>
-                    <a:pt x="5318153" y="2739275"/>
-                  </a:lnTo>
-                  <a:lnTo>
-                    <a:pt x="5394785" y="2741938"/>
-                  </a:lnTo>
-                  <a:lnTo>
-                    <a:pt x="5471418" y="2744593"/>
-                  </a:lnTo>
-                  <a:lnTo>
-                    <a:pt x="5548050" y="2747237"/>
-                  </a:lnTo>
-                  <a:lnTo>
-                    <a:pt x="5624683" y="2749873"/>
-                  </a:lnTo>
-                  <a:lnTo>
-                    <a:pt x="5701315" y="2752499"/>
-                  </a:lnTo>
-                  <a:lnTo>
-                    <a:pt x="5777948" y="2755115"/>
-                  </a:lnTo>
-                  <a:lnTo>
-                    <a:pt x="5854580" y="2757722"/>
-                  </a:lnTo>
-                  <a:lnTo>
-                    <a:pt x="5931213" y="2760320"/>
-                  </a:lnTo>
-                  <a:lnTo>
-                    <a:pt x="6007846" y="2762908"/>
-                  </a:lnTo>
-                  <a:lnTo>
-                    <a:pt x="6084478" y="2765488"/>
-                  </a:lnTo>
-                  <a:lnTo>
-                    <a:pt x="6161111" y="2768058"/>
-                  </a:lnTo>
-                  <a:lnTo>
-                    <a:pt x="6237743" y="2770619"/>
-                  </a:lnTo>
-                  <a:lnTo>
-                    <a:pt x="6314376" y="2773170"/>
-                  </a:lnTo>
-                  <a:lnTo>
-                    <a:pt x="6391008" y="2775713"/>
-                  </a:lnTo>
-                  <a:lnTo>
-                    <a:pt x="6467641" y="2778246"/>
-                  </a:lnTo>
-                  <a:lnTo>
-                    <a:pt x="6544273" y="2780770"/>
-                  </a:lnTo>
-                  <a:lnTo>
-                    <a:pt x="6620906" y="2783286"/>
-                  </a:lnTo>
-                  <a:lnTo>
-                    <a:pt x="6697538" y="2785792"/>
-                  </a:lnTo>
-                  <a:lnTo>
-                    <a:pt x="6774171" y="2788290"/>
-                  </a:lnTo>
-                  <a:lnTo>
-                    <a:pt x="6850804" y="2790778"/>
-                  </a:lnTo>
-                  <a:lnTo>
-                    <a:pt x="6927436" y="2793257"/>
-                  </a:lnTo>
-                  <a:lnTo>
-                    <a:pt x="7004069" y="2795728"/>
                   </a:lnTo>
                 </a:path>
               </a:pathLst>
@@ -3910,625 +4198,312 @@
           </p:nvSpPr>
           <p:spPr>
             <a:xfrm>
-              <a:off x="817517" y="4584494"/>
-              <a:ext cx="7403783" cy="849602"/>
+              <a:off x="1172049" y="3432971"/>
+              <a:ext cx="7090630" cy="1833191"/>
             </a:xfrm>
             <a:custGeom>
               <a:avLst/>
               <a:pathLst>
-                <a:path w="7403783" h="849602">
-                  <a:moveTo>
-                    <a:pt x="7403783" y="849602"/>
-                  </a:moveTo>
-                  <a:lnTo>
-                    <a:pt x="7327150" y="845015"/>
-                  </a:lnTo>
-                  <a:lnTo>
-                    <a:pt x="7250518" y="840257"/>
-                  </a:lnTo>
-                  <a:lnTo>
-                    <a:pt x="7173885" y="835322"/>
-                  </a:lnTo>
-                  <a:lnTo>
-                    <a:pt x="7097253" y="830203"/>
-                  </a:lnTo>
-                  <a:lnTo>
-                    <a:pt x="7020620" y="824894"/>
-                  </a:lnTo>
-                  <a:lnTo>
-                    <a:pt x="6943987" y="819387"/>
-                  </a:lnTo>
-                  <a:lnTo>
-                    <a:pt x="6867355" y="813675"/>
-                  </a:lnTo>
-                  <a:lnTo>
-                    <a:pt x="6790722" y="807750"/>
-                  </a:lnTo>
-                  <a:lnTo>
-                    <a:pt x="6714090" y="801604"/>
-                  </a:lnTo>
-                  <a:lnTo>
-                    <a:pt x="6637457" y="795229"/>
-                  </a:lnTo>
-                  <a:lnTo>
-                    <a:pt x="6560825" y="788618"/>
-                  </a:lnTo>
-                  <a:lnTo>
-                    <a:pt x="6484192" y="781759"/>
-                  </a:lnTo>
-                  <a:lnTo>
-                    <a:pt x="6407560" y="774646"/>
-                  </a:lnTo>
-                  <a:lnTo>
-                    <a:pt x="6330927" y="767267"/>
-                  </a:lnTo>
-                  <a:lnTo>
-                    <a:pt x="6254294" y="759614"/>
-                  </a:lnTo>
-                  <a:lnTo>
-                    <a:pt x="6177662" y="751675"/>
-                  </a:lnTo>
-                  <a:lnTo>
-                    <a:pt x="6101029" y="743441"/>
-                  </a:lnTo>
-                  <a:lnTo>
-                    <a:pt x="6024397" y="734900"/>
-                  </a:lnTo>
-                  <a:lnTo>
-                    <a:pt x="5947764" y="726041"/>
-                  </a:lnTo>
-                  <a:lnTo>
-                    <a:pt x="5871132" y="716852"/>
-                  </a:lnTo>
-                  <a:lnTo>
-                    <a:pt x="5794499" y="707321"/>
-                  </a:lnTo>
-                  <a:lnTo>
-                    <a:pt x="5717867" y="697435"/>
-                  </a:lnTo>
-                  <a:lnTo>
-                    <a:pt x="5641234" y="687181"/>
-                  </a:lnTo>
-                  <a:lnTo>
-                    <a:pt x="5564602" y="676544"/>
-                  </a:lnTo>
-                  <a:lnTo>
-                    <a:pt x="5487969" y="665512"/>
-                  </a:lnTo>
-                  <a:lnTo>
-                    <a:pt x="5411336" y="654069"/>
-                  </a:lnTo>
-                  <a:lnTo>
-                    <a:pt x="5334704" y="642199"/>
-                  </a:lnTo>
-                  <a:lnTo>
-                    <a:pt x="5258071" y="629888"/>
-                  </a:lnTo>
-                  <a:lnTo>
-                    <a:pt x="5181439" y="617117"/>
-                  </a:lnTo>
-                  <a:lnTo>
-                    <a:pt x="5104806" y="603872"/>
-                  </a:lnTo>
-                  <a:lnTo>
-                    <a:pt x="5028174" y="590133"/>
-                  </a:lnTo>
-                  <a:lnTo>
-                    <a:pt x="4951541" y="575882"/>
-                  </a:lnTo>
-                  <a:lnTo>
-                    <a:pt x="4874909" y="561100"/>
-                  </a:lnTo>
-                  <a:lnTo>
-                    <a:pt x="4798276" y="545768"/>
-                  </a:lnTo>
-                  <a:lnTo>
-                    <a:pt x="4721644" y="529865"/>
-                  </a:lnTo>
-                  <a:lnTo>
-                    <a:pt x="4645011" y="513369"/>
-                  </a:lnTo>
-                  <a:lnTo>
-                    <a:pt x="4568378" y="496259"/>
-                  </a:lnTo>
-                  <a:lnTo>
-                    <a:pt x="4491746" y="478512"/>
-                  </a:lnTo>
-                  <a:lnTo>
-                    <a:pt x="4415113" y="460104"/>
-                  </a:lnTo>
-                  <a:lnTo>
-                    <a:pt x="4338481" y="441010"/>
-                  </a:lnTo>
-                  <a:lnTo>
-                    <a:pt x="4261848" y="421206"/>
-                  </a:lnTo>
-                  <a:lnTo>
-                    <a:pt x="4185216" y="400663"/>
-                  </a:lnTo>
-                  <a:lnTo>
-                    <a:pt x="4108583" y="379355"/>
-                  </a:lnTo>
-                  <a:lnTo>
-                    <a:pt x="4031951" y="357254"/>
-                  </a:lnTo>
-                  <a:lnTo>
-                    <a:pt x="3955318" y="334330"/>
-                  </a:lnTo>
-                  <a:lnTo>
-                    <a:pt x="3878685" y="310551"/>
-                  </a:lnTo>
-                  <a:lnTo>
-                    <a:pt x="3802053" y="285888"/>
-                  </a:lnTo>
-                  <a:lnTo>
-                    <a:pt x="3725420" y="260305"/>
-                  </a:lnTo>
-                  <a:lnTo>
-                    <a:pt x="3648788" y="233770"/>
-                  </a:lnTo>
-                  <a:lnTo>
-                    <a:pt x="3572155" y="206246"/>
-                  </a:lnTo>
-                  <a:lnTo>
-                    <a:pt x="3495523" y="177698"/>
-                  </a:lnTo>
-                  <a:lnTo>
-                    <a:pt x="3418890" y="148086"/>
-                  </a:lnTo>
-                  <a:lnTo>
-                    <a:pt x="3342258" y="140786"/>
-                  </a:lnTo>
-                  <a:lnTo>
-                    <a:pt x="3265625" y="137798"/>
-                  </a:lnTo>
-                  <a:lnTo>
-                    <a:pt x="3188993" y="134800"/>
-                  </a:lnTo>
-                  <a:lnTo>
-                    <a:pt x="3112360" y="131791"/>
-                  </a:lnTo>
-                  <a:lnTo>
-                    <a:pt x="3035727" y="128771"/>
-                  </a:lnTo>
-                  <a:lnTo>
-                    <a:pt x="2959095" y="125740"/>
-                  </a:lnTo>
-                  <a:lnTo>
-                    <a:pt x="2882462" y="122699"/>
-                  </a:lnTo>
-                  <a:lnTo>
-                    <a:pt x="2805830" y="119646"/>
-                  </a:lnTo>
-                  <a:lnTo>
-                    <a:pt x="2729197" y="116583"/>
-                  </a:lnTo>
-                  <a:lnTo>
-                    <a:pt x="2652565" y="113508"/>
-                  </a:lnTo>
-                  <a:lnTo>
-                    <a:pt x="2575932" y="110423"/>
-                  </a:lnTo>
-                  <a:lnTo>
-                    <a:pt x="2499300" y="107326"/>
-                  </a:lnTo>
-                  <a:lnTo>
-                    <a:pt x="2422667" y="104219"/>
-                  </a:lnTo>
-                  <a:lnTo>
-                    <a:pt x="2346034" y="101100"/>
-                  </a:lnTo>
-                  <a:lnTo>
-                    <a:pt x="2269402" y="97970"/>
-                  </a:lnTo>
-                  <a:lnTo>
-                    <a:pt x="2192769" y="94828"/>
-                  </a:lnTo>
-                  <a:lnTo>
-                    <a:pt x="2116137" y="91676"/>
-                  </a:lnTo>
-                  <a:lnTo>
-                    <a:pt x="2039504" y="88512"/>
-                  </a:lnTo>
-                  <a:lnTo>
-                    <a:pt x="1962872" y="85336"/>
-                  </a:lnTo>
-                  <a:lnTo>
-                    <a:pt x="1886239" y="82150"/>
-                  </a:lnTo>
-                  <a:lnTo>
-                    <a:pt x="1809607" y="78952"/>
-                  </a:lnTo>
-                  <a:lnTo>
-                    <a:pt x="1732974" y="75742"/>
-                  </a:lnTo>
-                  <a:lnTo>
-                    <a:pt x="1656342" y="72521"/>
-                  </a:lnTo>
-                  <a:lnTo>
-                    <a:pt x="1579709" y="69288"/>
-                  </a:lnTo>
-                  <a:lnTo>
-                    <a:pt x="1503076" y="66044"/>
-                  </a:lnTo>
-                  <a:lnTo>
-                    <a:pt x="1426444" y="62788"/>
-                  </a:lnTo>
-                  <a:lnTo>
-                    <a:pt x="1349811" y="59520"/>
-                  </a:lnTo>
-                  <a:lnTo>
-                    <a:pt x="1273179" y="56241"/>
-                  </a:lnTo>
-                  <a:lnTo>
-                    <a:pt x="1196546" y="52950"/>
-                  </a:lnTo>
-                  <a:lnTo>
-                    <a:pt x="1119914" y="49647"/>
-                  </a:lnTo>
-                  <a:lnTo>
-                    <a:pt x="1043281" y="46332"/>
-                  </a:lnTo>
-                  <a:lnTo>
-                    <a:pt x="966649" y="43005"/>
-                  </a:lnTo>
-                  <a:lnTo>
-                    <a:pt x="890016" y="39666"/>
-                  </a:lnTo>
-                  <a:lnTo>
-                    <a:pt x="813384" y="36316"/>
-                  </a:lnTo>
-                  <a:lnTo>
-                    <a:pt x="736751" y="32953"/>
-                  </a:lnTo>
-                  <a:lnTo>
-                    <a:pt x="660118" y="29578"/>
-                  </a:lnTo>
-                  <a:lnTo>
-                    <a:pt x="583486" y="26191"/>
-                  </a:lnTo>
-                  <a:lnTo>
-                    <a:pt x="506853" y="22792"/>
-                  </a:lnTo>
-                  <a:lnTo>
-                    <a:pt x="430221" y="19381"/>
-                  </a:lnTo>
-                  <a:lnTo>
-                    <a:pt x="353588" y="15957"/>
-                  </a:lnTo>
-                  <a:lnTo>
-                    <a:pt x="276956" y="12522"/>
-                  </a:lnTo>
-                  <a:lnTo>
-                    <a:pt x="200323" y="9073"/>
-                  </a:lnTo>
-                  <a:lnTo>
-                    <a:pt x="123691" y="5613"/>
-                  </a:lnTo>
-                  <a:lnTo>
-                    <a:pt x="47058" y="2140"/>
-                  </a:lnTo>
-                  <a:lnTo>
-                    <a:pt x="0" y="0"/>
-                  </a:lnTo>
-                </a:path>
-              </a:pathLst>
-            </a:custGeom>
-          </p:spPr>
-          <p:txBody>
-            <a:bodyPr/>
-            <a:lstStyle/>
-            <a:p/>
-          </p:txBody>
-        </p:sp>
-        <p:sp>
-          <p:nvSpPr>
-            <p:cNvPr id="24" name="pl24"/>
-            <p:cNvSpPr/>
-            <p:nvPr/>
-          </p:nvSpPr>
-          <p:spPr>
-            <a:xfrm>
-              <a:off x="817517" y="3532230"/>
-              <a:ext cx="7403783" cy="1733932"/>
-            </a:xfrm>
-            <a:custGeom>
-              <a:avLst/>
-              <a:pathLst>
-                <a:path w="7403783" h="1733932">
+                <a:path w="7090630" h="1833191">
                   <a:moveTo>
                     <a:pt x="0" y="0"/>
                   </a:moveTo>
                   <a:lnTo>
-                    <a:pt x="47058" y="24907"/>
-                  </a:lnTo>
-                  <a:lnTo>
-                    <a:pt x="123691" y="64662"/>
-                  </a:lnTo>
-                  <a:lnTo>
-                    <a:pt x="200323" y="103626"/>
-                  </a:lnTo>
-                  <a:lnTo>
-                    <a:pt x="276956" y="141816"/>
-                  </a:lnTo>
-                  <a:lnTo>
-                    <a:pt x="353588" y="179247"/>
-                  </a:lnTo>
-                  <a:lnTo>
-                    <a:pt x="430221" y="215934"/>
-                  </a:lnTo>
-                  <a:lnTo>
-                    <a:pt x="506853" y="251892"/>
-                  </a:lnTo>
-                  <a:lnTo>
-                    <a:pt x="583486" y="287135"/>
-                  </a:lnTo>
-                  <a:lnTo>
-                    <a:pt x="660118" y="321677"/>
-                  </a:lnTo>
-                  <a:lnTo>
-                    <a:pt x="736751" y="355533"/>
-                  </a:lnTo>
-                  <a:lnTo>
-                    <a:pt x="813384" y="388717"/>
-                  </a:lnTo>
-                  <a:lnTo>
-                    <a:pt x="890016" y="421240"/>
-                  </a:lnTo>
-                  <a:lnTo>
-                    <a:pt x="966649" y="453117"/>
-                  </a:lnTo>
-                  <a:lnTo>
-                    <a:pt x="1043281" y="484361"/>
-                  </a:lnTo>
-                  <a:lnTo>
-                    <a:pt x="1119914" y="514983"/>
-                  </a:lnTo>
-                  <a:lnTo>
-                    <a:pt x="1196546" y="544997"/>
-                  </a:lnTo>
-                  <a:lnTo>
-                    <a:pt x="1273179" y="574414"/>
-                  </a:lnTo>
-                  <a:lnTo>
-                    <a:pt x="1349811" y="603247"/>
-                  </a:lnTo>
-                  <a:lnTo>
-                    <a:pt x="1426444" y="631506"/>
-                  </a:lnTo>
-                  <a:lnTo>
-                    <a:pt x="1503076" y="659204"/>
-                  </a:lnTo>
-                  <a:lnTo>
-                    <a:pt x="1579709" y="686351"/>
-                  </a:lnTo>
-                  <a:lnTo>
-                    <a:pt x="1656342" y="712959"/>
-                  </a:lnTo>
-                  <a:lnTo>
-                    <a:pt x="1732974" y="739037"/>
-                  </a:lnTo>
-                  <a:lnTo>
-                    <a:pt x="1809607" y="764598"/>
-                  </a:lnTo>
-                  <a:lnTo>
-                    <a:pt x="1886239" y="789650"/>
-                  </a:lnTo>
-                  <a:lnTo>
-                    <a:pt x="1962872" y="814205"/>
-                  </a:lnTo>
-                  <a:lnTo>
-                    <a:pt x="2039504" y="838271"/>
-                  </a:lnTo>
-                  <a:lnTo>
-                    <a:pt x="2116137" y="861859"/>
-                  </a:lnTo>
-                  <a:lnTo>
-                    <a:pt x="2192769" y="884978"/>
-                  </a:lnTo>
-                  <a:lnTo>
-                    <a:pt x="2269402" y="907638"/>
-                  </a:lnTo>
-                  <a:lnTo>
-                    <a:pt x="2346034" y="929847"/>
-                  </a:lnTo>
-                  <a:lnTo>
-                    <a:pt x="2422667" y="951615"/>
-                  </a:lnTo>
-                  <a:lnTo>
-                    <a:pt x="2499300" y="972950"/>
-                  </a:lnTo>
-                  <a:lnTo>
-                    <a:pt x="2575932" y="993862"/>
-                  </a:lnTo>
-                  <a:lnTo>
-                    <a:pt x="2652565" y="1014357"/>
-                  </a:lnTo>
-                  <a:lnTo>
-                    <a:pt x="2729197" y="1034445"/>
-                  </a:lnTo>
-                  <a:lnTo>
-                    <a:pt x="2805830" y="1054134"/>
-                  </a:lnTo>
-                  <a:lnTo>
-                    <a:pt x="2882462" y="1073432"/>
-                  </a:lnTo>
-                  <a:lnTo>
-                    <a:pt x="2959095" y="1092346"/>
-                  </a:lnTo>
-                  <a:lnTo>
-                    <a:pt x="3035727" y="1110884"/>
-                  </a:lnTo>
-                  <a:lnTo>
-                    <a:pt x="3112360" y="1129053"/>
-                  </a:lnTo>
-                  <a:lnTo>
-                    <a:pt x="3188993" y="1146862"/>
-                  </a:lnTo>
-                  <a:lnTo>
-                    <a:pt x="3265625" y="1164316"/>
-                  </a:lnTo>
-                  <a:lnTo>
-                    <a:pt x="3342258" y="1181423"/>
-                  </a:lnTo>
-                  <a:lnTo>
-                    <a:pt x="3418890" y="1198191"/>
-                  </a:lnTo>
-                  <a:lnTo>
-                    <a:pt x="3495523" y="1214625"/>
-                  </a:lnTo>
-                  <a:lnTo>
-                    <a:pt x="3572155" y="1230733"/>
-                  </a:lnTo>
-                  <a:lnTo>
-                    <a:pt x="3648788" y="1246520"/>
-                  </a:lnTo>
-                  <a:lnTo>
-                    <a:pt x="3725420" y="1261994"/>
-                  </a:lnTo>
-                  <a:lnTo>
-                    <a:pt x="3802053" y="1277160"/>
-                  </a:lnTo>
-                  <a:lnTo>
-                    <a:pt x="3878685" y="1292024"/>
-                  </a:lnTo>
-                  <a:lnTo>
-                    <a:pt x="3955318" y="1306594"/>
-                  </a:lnTo>
-                  <a:lnTo>
-                    <a:pt x="4031951" y="1320873"/>
-                  </a:lnTo>
-                  <a:lnTo>
-                    <a:pt x="4108583" y="1334869"/>
-                  </a:lnTo>
-                  <a:lnTo>
-                    <a:pt x="4185216" y="1348586"/>
-                  </a:lnTo>
-                  <a:lnTo>
-                    <a:pt x="4261848" y="1362031"/>
-                  </a:lnTo>
-                  <a:lnTo>
-                    <a:pt x="4338481" y="1375209"/>
-                  </a:lnTo>
-                  <a:lnTo>
-                    <a:pt x="4415113" y="1388125"/>
-                  </a:lnTo>
-                  <a:lnTo>
-                    <a:pt x="4491746" y="1400784"/>
-                  </a:lnTo>
-                  <a:lnTo>
-                    <a:pt x="4568378" y="1413191"/>
-                  </a:lnTo>
-                  <a:lnTo>
-                    <a:pt x="4645011" y="1425352"/>
-                  </a:lnTo>
-                  <a:lnTo>
-                    <a:pt x="4721644" y="1437271"/>
-                  </a:lnTo>
-                  <a:lnTo>
-                    <a:pt x="4798276" y="1448953"/>
-                  </a:lnTo>
-                  <a:lnTo>
-                    <a:pt x="4874909" y="1460403"/>
-                  </a:lnTo>
-                  <a:lnTo>
-                    <a:pt x="4951541" y="1471626"/>
-                  </a:lnTo>
-                  <a:lnTo>
-                    <a:pt x="5028174" y="1482625"/>
-                  </a:lnTo>
-                  <a:lnTo>
-                    <a:pt x="5104806" y="1493406"/>
-                  </a:lnTo>
-                  <a:lnTo>
-                    <a:pt x="5181439" y="1503972"/>
-                  </a:lnTo>
-                  <a:lnTo>
-                    <a:pt x="5258071" y="1514329"/>
-                  </a:lnTo>
-                  <a:lnTo>
-                    <a:pt x="5334704" y="1524479"/>
-                  </a:lnTo>
-                  <a:lnTo>
-                    <a:pt x="5411336" y="1534428"/>
-                  </a:lnTo>
-                  <a:lnTo>
-                    <a:pt x="5487969" y="1544179"/>
-                  </a:lnTo>
-                  <a:lnTo>
-                    <a:pt x="5564602" y="1553737"/>
-                  </a:lnTo>
-                  <a:lnTo>
-                    <a:pt x="5641234" y="1563104"/>
-                  </a:lnTo>
-                  <a:lnTo>
-                    <a:pt x="5717867" y="1572285"/>
-                  </a:lnTo>
-                  <a:lnTo>
-                    <a:pt x="5794499" y="1581284"/>
-                  </a:lnTo>
-                  <a:lnTo>
-                    <a:pt x="5871132" y="1590104"/>
-                  </a:lnTo>
-                  <a:lnTo>
-                    <a:pt x="5947764" y="1598748"/>
-                  </a:lnTo>
-                  <a:lnTo>
-                    <a:pt x="6024397" y="1607221"/>
-                  </a:lnTo>
-                  <a:lnTo>
-                    <a:pt x="6101029" y="1615525"/>
-                  </a:lnTo>
-                  <a:lnTo>
-                    <a:pt x="6177662" y="1623664"/>
-                  </a:lnTo>
-                  <a:lnTo>
-                    <a:pt x="6254294" y="1631642"/>
-                  </a:lnTo>
-                  <a:lnTo>
-                    <a:pt x="6330927" y="1639460"/>
-                  </a:lnTo>
-                  <a:lnTo>
-                    <a:pt x="6407560" y="1647124"/>
-                  </a:lnTo>
-                  <a:lnTo>
-                    <a:pt x="6484192" y="1654635"/>
-                  </a:lnTo>
-                  <a:lnTo>
-                    <a:pt x="6560825" y="1661997"/>
-                  </a:lnTo>
-                  <a:lnTo>
-                    <a:pt x="6637457" y="1669212"/>
-                  </a:lnTo>
-                  <a:lnTo>
-                    <a:pt x="6714090" y="1676284"/>
-                  </a:lnTo>
-                  <a:lnTo>
-                    <a:pt x="6790722" y="1683216"/>
-                  </a:lnTo>
-                  <a:lnTo>
-                    <a:pt x="6867355" y="1690010"/>
-                  </a:lnTo>
-                  <a:lnTo>
-                    <a:pt x="6943987" y="1696668"/>
-                  </a:lnTo>
-                  <a:lnTo>
-                    <a:pt x="7020620" y="1703195"/>
-                  </a:lnTo>
-                  <a:lnTo>
-                    <a:pt x="7097253" y="1709591"/>
-                  </a:lnTo>
-                  <a:lnTo>
-                    <a:pt x="7173885" y="1715861"/>
-                  </a:lnTo>
-                  <a:lnTo>
-                    <a:pt x="7250518" y="1722006"/>
-                  </a:lnTo>
-                  <a:lnTo>
-                    <a:pt x="7327150" y="1728029"/>
-                  </a:lnTo>
-                  <a:lnTo>
-                    <a:pt x="7403783" y="1733932"/>
+                    <a:pt x="71622" y="42222"/>
+                  </a:lnTo>
+                  <a:lnTo>
+                    <a:pt x="143245" y="83606"/>
+                  </a:lnTo>
+                  <a:lnTo>
+                    <a:pt x="214867" y="124166"/>
+                  </a:lnTo>
+                  <a:lnTo>
+                    <a:pt x="286490" y="163921"/>
+                  </a:lnTo>
+                  <a:lnTo>
+                    <a:pt x="358112" y="202885"/>
+                  </a:lnTo>
+                  <a:lnTo>
+                    <a:pt x="429735" y="241075"/>
+                  </a:lnTo>
+                  <a:lnTo>
+                    <a:pt x="501357" y="278506"/>
+                  </a:lnTo>
+                  <a:lnTo>
+                    <a:pt x="572980" y="315193"/>
+                  </a:lnTo>
+                  <a:lnTo>
+                    <a:pt x="644602" y="351151"/>
+                  </a:lnTo>
+                  <a:lnTo>
+                    <a:pt x="716225" y="386394"/>
+                  </a:lnTo>
+                  <a:lnTo>
+                    <a:pt x="787847" y="420937"/>
+                  </a:lnTo>
+                  <a:lnTo>
+                    <a:pt x="859470" y="454793"/>
+                  </a:lnTo>
+                  <a:lnTo>
+                    <a:pt x="931092" y="487976"/>
+                  </a:lnTo>
+                  <a:lnTo>
+                    <a:pt x="1002715" y="520499"/>
+                  </a:lnTo>
+                  <a:lnTo>
+                    <a:pt x="1074337" y="552376"/>
+                  </a:lnTo>
+                  <a:lnTo>
+                    <a:pt x="1145960" y="583620"/>
+                  </a:lnTo>
+                  <a:lnTo>
+                    <a:pt x="1217582" y="614242"/>
+                  </a:lnTo>
+                  <a:lnTo>
+                    <a:pt x="1289205" y="644256"/>
+                  </a:lnTo>
+                  <a:lnTo>
+                    <a:pt x="1360827" y="673673"/>
+                  </a:lnTo>
+                  <a:lnTo>
+                    <a:pt x="1432450" y="702506"/>
+                  </a:lnTo>
+                  <a:lnTo>
+                    <a:pt x="1504073" y="730765"/>
+                  </a:lnTo>
+                  <a:lnTo>
+                    <a:pt x="1575695" y="758463"/>
+                  </a:lnTo>
+                  <a:lnTo>
+                    <a:pt x="1647318" y="785610"/>
+                  </a:lnTo>
+                  <a:lnTo>
+                    <a:pt x="1718940" y="812218"/>
+                  </a:lnTo>
+                  <a:lnTo>
+                    <a:pt x="1790563" y="838297"/>
+                  </a:lnTo>
+                  <a:lnTo>
+                    <a:pt x="1862185" y="863857"/>
+                  </a:lnTo>
+                  <a:lnTo>
+                    <a:pt x="1933808" y="888910"/>
+                  </a:lnTo>
+                  <a:lnTo>
+                    <a:pt x="2005430" y="913464"/>
+                  </a:lnTo>
+                  <a:lnTo>
+                    <a:pt x="2077053" y="937530"/>
+                  </a:lnTo>
+                  <a:lnTo>
+                    <a:pt x="2148675" y="961118"/>
+                  </a:lnTo>
+                  <a:lnTo>
+                    <a:pt x="2220298" y="984238"/>
+                  </a:lnTo>
+                  <a:lnTo>
+                    <a:pt x="2291920" y="1006897"/>
+                  </a:lnTo>
+                  <a:lnTo>
+                    <a:pt x="2363543" y="1029107"/>
+                  </a:lnTo>
+                  <a:lnTo>
+                    <a:pt x="2435165" y="1050874"/>
+                  </a:lnTo>
+                  <a:lnTo>
+                    <a:pt x="2506788" y="1072210"/>
+                  </a:lnTo>
+                  <a:lnTo>
+                    <a:pt x="2578410" y="1093121"/>
+                  </a:lnTo>
+                  <a:lnTo>
+                    <a:pt x="2650033" y="1113616"/>
+                  </a:lnTo>
+                  <a:lnTo>
+                    <a:pt x="2721655" y="1133704"/>
+                  </a:lnTo>
+                  <a:lnTo>
+                    <a:pt x="2793278" y="1153393"/>
+                  </a:lnTo>
+                  <a:lnTo>
+                    <a:pt x="2864901" y="1172691"/>
+                  </a:lnTo>
+                  <a:lnTo>
+                    <a:pt x="2936523" y="1191605"/>
+                  </a:lnTo>
+                  <a:lnTo>
+                    <a:pt x="3008146" y="1210143"/>
+                  </a:lnTo>
+                  <a:lnTo>
+                    <a:pt x="3079768" y="1228312"/>
+                  </a:lnTo>
+                  <a:lnTo>
+                    <a:pt x="3151391" y="1246121"/>
+                  </a:lnTo>
+                  <a:lnTo>
+                    <a:pt x="3223013" y="1263575"/>
+                  </a:lnTo>
+                  <a:lnTo>
+                    <a:pt x="3294636" y="1280683"/>
+                  </a:lnTo>
+                  <a:lnTo>
+                    <a:pt x="3366258" y="1297450"/>
+                  </a:lnTo>
+                  <a:lnTo>
+                    <a:pt x="3437881" y="1313884"/>
+                  </a:lnTo>
+                  <a:lnTo>
+                    <a:pt x="3509503" y="1329992"/>
+                  </a:lnTo>
+                  <a:lnTo>
+                    <a:pt x="3581126" y="1345779"/>
+                  </a:lnTo>
+                  <a:lnTo>
+                    <a:pt x="3652748" y="1361253"/>
+                  </a:lnTo>
+                  <a:lnTo>
+                    <a:pt x="3724371" y="1376419"/>
+                  </a:lnTo>
+                  <a:lnTo>
+                    <a:pt x="3795993" y="1391284"/>
+                  </a:lnTo>
+                  <a:lnTo>
+                    <a:pt x="3867616" y="1405853"/>
+                  </a:lnTo>
+                  <a:lnTo>
+                    <a:pt x="3939238" y="1420132"/>
+                  </a:lnTo>
+                  <a:lnTo>
+                    <a:pt x="4010861" y="1434128"/>
+                  </a:lnTo>
+                  <a:lnTo>
+                    <a:pt x="4082483" y="1447846"/>
+                  </a:lnTo>
+                  <a:lnTo>
+                    <a:pt x="4154106" y="1461291"/>
+                  </a:lnTo>
+                  <a:lnTo>
+                    <a:pt x="4225729" y="1474468"/>
+                  </a:lnTo>
+                  <a:lnTo>
+                    <a:pt x="4297351" y="1487384"/>
+                  </a:lnTo>
+                  <a:lnTo>
+                    <a:pt x="4368974" y="1500043"/>
+                  </a:lnTo>
+                  <a:lnTo>
+                    <a:pt x="4440596" y="1512451"/>
+                  </a:lnTo>
+                  <a:lnTo>
+                    <a:pt x="4512219" y="1524611"/>
+                  </a:lnTo>
+                  <a:lnTo>
+                    <a:pt x="4583841" y="1536531"/>
+                  </a:lnTo>
+                  <a:lnTo>
+                    <a:pt x="4655464" y="1548213"/>
+                  </a:lnTo>
+                  <a:lnTo>
+                    <a:pt x="4727086" y="1559663"/>
+                  </a:lnTo>
+                  <a:lnTo>
+                    <a:pt x="4798709" y="1570885"/>
+                  </a:lnTo>
+                  <a:lnTo>
+                    <a:pt x="4870331" y="1581884"/>
+                  </a:lnTo>
+                  <a:lnTo>
+                    <a:pt x="4941954" y="1592665"/>
+                  </a:lnTo>
+                  <a:lnTo>
+                    <a:pt x="5013576" y="1603232"/>
+                  </a:lnTo>
+                  <a:lnTo>
+                    <a:pt x="5085199" y="1613588"/>
+                  </a:lnTo>
+                  <a:lnTo>
+                    <a:pt x="5156821" y="1623739"/>
+                  </a:lnTo>
+                  <a:lnTo>
+                    <a:pt x="5228444" y="1633688"/>
+                  </a:lnTo>
+                  <a:lnTo>
+                    <a:pt x="5300066" y="1643439"/>
+                  </a:lnTo>
+                  <a:lnTo>
+                    <a:pt x="5371689" y="1652996"/>
+                  </a:lnTo>
+                  <a:lnTo>
+                    <a:pt x="5443311" y="1662363"/>
+                  </a:lnTo>
+                  <a:lnTo>
+                    <a:pt x="5514934" y="1671544"/>
+                  </a:lnTo>
+                  <a:lnTo>
+                    <a:pt x="5586557" y="1680543"/>
+                  </a:lnTo>
+                  <a:lnTo>
+                    <a:pt x="5658179" y="1689363"/>
+                  </a:lnTo>
+                  <a:lnTo>
+                    <a:pt x="5729802" y="1698007"/>
+                  </a:lnTo>
+                  <a:lnTo>
+                    <a:pt x="5801424" y="1706480"/>
+                  </a:lnTo>
+                  <a:lnTo>
+                    <a:pt x="5873047" y="1714784"/>
+                  </a:lnTo>
+                  <a:lnTo>
+                    <a:pt x="5944669" y="1722923"/>
+                  </a:lnTo>
+                  <a:lnTo>
+                    <a:pt x="6016292" y="1730901"/>
+                  </a:lnTo>
+                  <a:lnTo>
+                    <a:pt x="6087914" y="1738720"/>
+                  </a:lnTo>
+                  <a:lnTo>
+                    <a:pt x="6159537" y="1746383"/>
+                  </a:lnTo>
+                  <a:lnTo>
+                    <a:pt x="6231159" y="1753894"/>
+                  </a:lnTo>
+                  <a:lnTo>
+                    <a:pt x="6302782" y="1761256"/>
+                  </a:lnTo>
+                  <a:lnTo>
+                    <a:pt x="6374404" y="1768472"/>
+                  </a:lnTo>
+                  <a:lnTo>
+                    <a:pt x="6446027" y="1775544"/>
+                  </a:lnTo>
+                  <a:lnTo>
+                    <a:pt x="6517649" y="1782475"/>
+                  </a:lnTo>
+                  <a:lnTo>
+                    <a:pt x="6589272" y="1789269"/>
+                  </a:lnTo>
+                  <a:lnTo>
+                    <a:pt x="6660894" y="1795928"/>
+                  </a:lnTo>
+                  <a:lnTo>
+                    <a:pt x="6732517" y="1802454"/>
+                  </a:lnTo>
+                  <a:lnTo>
+                    <a:pt x="6804139" y="1808851"/>
+                  </a:lnTo>
+                  <a:lnTo>
+                    <a:pt x="6875762" y="1815120"/>
+                  </a:lnTo>
+                  <a:lnTo>
+                    <a:pt x="6947385" y="1821265"/>
+                  </a:lnTo>
+                  <a:lnTo>
+                    <a:pt x="7019007" y="1827288"/>
+                  </a:lnTo>
+                  <a:lnTo>
+                    <a:pt x="7090630" y="1833191"/>
                   </a:lnTo>
                 </a:path>
               </a:pathLst>
@@ -4551,7 +4526,7 @@
         </p:sp>
         <p:sp>
           <p:nvSpPr>
-            <p:cNvPr id="25" name="pl25"/>
+            <p:cNvPr id="24" name="pl24"/>
             <p:cNvSpPr/>
             <p:nvPr/>
           </p:nvSpPr>
@@ -4594,13 +4569,13 @@
         </p:sp>
         <p:sp>
           <p:nvSpPr>
-            <p:cNvPr id="26" name="pl26"/>
+            <p:cNvPr id="25" name="pl25"/>
             <p:cNvSpPr/>
             <p:nvPr/>
           </p:nvSpPr>
           <p:spPr>
             <a:xfrm>
-              <a:off x="4224261" y="2073503"/>
+              <a:off x="4526955" y="2073503"/>
               <a:ext cx="0" cy="3649639"/>
             </a:xfrm>
             <a:custGeom>
@@ -4637,7 +4612,7 @@
         </p:sp>
         <p:sp>
           <p:nvSpPr>
-            <p:cNvPr id="27" name="tx27"/>
+            <p:cNvPr id="26" name="tx26"/>
             <p:cNvSpPr/>
             <p:nvPr/>
           </p:nvSpPr>
@@ -4683,7 +4658,7 @@
         </p:sp>
         <p:sp>
           <p:nvSpPr>
-            <p:cNvPr id="28" name="tx28"/>
+            <p:cNvPr id="27" name="tx27"/>
             <p:cNvSpPr/>
             <p:nvPr/>
           </p:nvSpPr>
@@ -4729,7 +4704,7 @@
         </p:sp>
         <p:sp>
           <p:nvSpPr>
-            <p:cNvPr id="29" name="tx29"/>
+            <p:cNvPr id="28" name="tx28"/>
             <p:cNvSpPr/>
             <p:nvPr/>
           </p:nvSpPr>
@@ -4775,7 +4750,7 @@
         </p:sp>
         <p:sp>
           <p:nvSpPr>
-            <p:cNvPr id="30" name="tx30"/>
+            <p:cNvPr id="29" name="tx29"/>
             <p:cNvSpPr/>
             <p:nvPr/>
           </p:nvSpPr>
@@ -4821,7 +4796,7 @@
         </p:sp>
         <p:sp>
           <p:nvSpPr>
-            <p:cNvPr id="31" name="tx31"/>
+            <p:cNvPr id="30" name="tx30"/>
             <p:cNvSpPr/>
             <p:nvPr/>
           </p:nvSpPr>
@@ -4867,14 +4842,14 @@
         </p:sp>
         <p:sp>
           <p:nvSpPr>
-            <p:cNvPr id="32" name="tx32"/>
+            <p:cNvPr id="31" name="tx31"/>
             <p:cNvSpPr/>
             <p:nvPr/>
           </p:nvSpPr>
           <p:spPr>
             <a:xfrm>
-              <a:off x="2423864" y="5785772"/>
-              <a:ext cx="155356" cy="80101"/>
+              <a:off x="2421884" y="5785772"/>
+              <a:ext cx="161574" cy="80101"/>
             </a:xfrm>
             <a:prstGeom prst="rect">
               <a:avLst/>
@@ -4906,21 +4881,21 @@
                   <a:latin typeface="Helvetica"/>
                   <a:cs typeface="Helvetica"/>
                 </a:rPr>
-                <a:t>0.8</a:t>
+                <a:t>-25</a:t>
               </a:r>
             </a:p>
           </p:txBody>
         </p:sp>
         <p:sp>
           <p:nvSpPr>
-            <p:cNvPr id="33" name="tx33"/>
+            <p:cNvPr id="32" name="tx32"/>
             <p:cNvSpPr/>
             <p:nvPr/>
           </p:nvSpPr>
           <p:spPr>
             <a:xfrm>
-              <a:off x="4196521" y="5785772"/>
-              <a:ext cx="155356" cy="80101"/>
+              <a:off x="4542539" y="5785772"/>
+              <a:ext cx="62179" cy="80101"/>
             </a:xfrm>
             <a:prstGeom prst="rect">
               <a:avLst/>
@@ -4952,21 +4927,21 @@
                   <a:latin typeface="Helvetica"/>
                   <a:cs typeface="Helvetica"/>
                 </a:rPr>
-                <a:t>1.0</a:t>
+                <a:t>0</a:t>
               </a:r>
             </a:p>
           </p:txBody>
         </p:sp>
         <p:sp>
           <p:nvSpPr>
-            <p:cNvPr id="34" name="tx34"/>
+            <p:cNvPr id="33" name="tx33"/>
             <p:cNvSpPr/>
             <p:nvPr/>
           </p:nvSpPr>
           <p:spPr>
             <a:xfrm>
-              <a:off x="5969179" y="5785772"/>
-              <a:ext cx="155356" cy="80101"/>
+              <a:off x="6582407" y="5785772"/>
+              <a:ext cx="124358" cy="80101"/>
             </a:xfrm>
             <a:prstGeom prst="rect">
               <a:avLst/>
@@ -4998,67 +4973,21 @@
                   <a:latin typeface="Helvetica"/>
                   <a:cs typeface="Helvetica"/>
                 </a:rPr>
-                <a:t>1.2</a:t>
+                <a:t>25</a:t>
               </a:r>
             </a:p>
           </p:txBody>
         </p:sp>
         <p:sp>
           <p:nvSpPr>
-            <p:cNvPr id="35" name="tx35"/>
+            <p:cNvPr id="34" name="tx34"/>
             <p:cNvSpPr/>
             <p:nvPr/>
           </p:nvSpPr>
           <p:spPr>
             <a:xfrm>
-              <a:off x="7741836" y="5785772"/>
-              <a:ext cx="155356" cy="80101"/>
-            </a:xfrm>
-            <a:prstGeom prst="rect">
-              <a:avLst/>
-            </a:prstGeom>
-            <a:noFill/>
-          </p:spPr>
-          <p:txBody>
-            <a:bodyPr lIns="0" rIns="0" tIns="0" bIns="0" anchorCtr="1" anchor="ctr" wrap="none"/>
-            <a:lstStyle/>
-            <a:p>
-              <a:pPr algn="l" marL="0" marR="0" indent="0">
-                <a:lnSpc>
-                  <a:spcPts val="880"/>
-                </a:lnSpc>
-                <a:spcBef>
-                  <a:spcPts val="0"/>
-                </a:spcBef>
-                <a:spcAft>
-                  <a:spcPts val="0"/>
-                </a:spcAft>
-              </a:pPr>
-              <a:r>
-                <a:rPr sz="880">
-                  <a:solidFill>
-                    <a:srgbClr val="4D4D4D">
-                      <a:alpha val="100000"/>
-                    </a:srgbClr>
-                  </a:solidFill>
-                  <a:latin typeface="Helvetica"/>
-                  <a:cs typeface="Helvetica"/>
-                </a:rPr>
-                <a:t>1.4</a:t>
-              </a:r>
-            </a:p>
-          </p:txBody>
-        </p:sp>
-        <p:sp>
-          <p:nvSpPr>
-            <p:cNvPr id="36" name="tx36"/>
-            <p:cNvSpPr/>
-            <p:nvPr/>
-          </p:nvSpPr>
-          <p:spPr>
-            <a:xfrm>
-              <a:off x="3879271" y="5925448"/>
-              <a:ext cx="1676186" cy="100218"/>
+              <a:off x="2928340" y="5925448"/>
+              <a:ext cx="3578047" cy="100218"/>
             </a:xfrm>
             <a:prstGeom prst="rect">
               <a:avLst/>
@@ -5090,14 +5019,14 @@
                   <a:latin typeface="Helvetica"/>
                   <a:cs typeface="Helvetica"/>
                 </a:rPr>
-                <a:t>CKD-EPI Cr-Cys / CG ratio</a:t>
+                <a:t>eGFR difference (%): 100 × (CKD-EPI Cr-Cys − CG) / CG</a:t>
               </a:r>
             </a:p>
           </p:txBody>
         </p:sp>
         <p:sp>
           <p:nvSpPr>
-            <p:cNvPr id="37" name="tx37"/>
+            <p:cNvPr id="35" name="tx35"/>
             <p:cNvSpPr/>
             <p:nvPr/>
           </p:nvSpPr>
@@ -5143,14 +5072,14 @@
         </p:sp>
         <p:sp>
           <p:nvSpPr>
-            <p:cNvPr id="38" name="tx38"/>
+            <p:cNvPr id="36" name="tx36"/>
             <p:cNvSpPr/>
             <p:nvPr/>
           </p:nvSpPr>
           <p:spPr>
             <a:xfrm>
               <a:off x="817517" y="1896563"/>
-              <a:ext cx="6833128" cy="82021"/>
+              <a:ext cx="6985375" cy="82021"/>
             </a:xfrm>
             <a:prstGeom prst="rect">
               <a:avLst/>
@@ -5182,14 +5111,14 @@
                   <a:latin typeface="Helvetica"/>
                   <a:cs typeface="Helvetica"/>
                 </a:rPr>
-                <a:t>subHR per 0.1 ratio decline: 1.26 (1.04-1.53), p_Bonf = 0.102 (n = 6)  |  per IQR decline (Δ = 0.30): 2.00 (1.13-3.54)  |  IQR: [0.85, 1.15]</a:t>
+                <a:t>subHR per 10 % decline: 1.26 (1.04-1.53), p_Bonf = 0.102 (n = 6)  |  per IQR decline (Δ = 29.9 %): 2.00 (1.13-3.54)  |  IQR: [-15.0, 14.9] %</a:t>
               </a:r>
             </a:p>
           </p:txBody>
         </p:sp>
         <p:sp>
           <p:nvSpPr>
-            <p:cNvPr id="39" name="tx39"/>
+            <p:cNvPr id="37" name="tx37"/>
             <p:cNvSpPr/>
             <p:nvPr/>
           </p:nvSpPr>

--- a/docs/pptx/carbo/jx-carbo-linsubhr-ratio-aki2.pptx
+++ b/docs/pptx/carbo/jx-carbo-linsubhr-ratio-aki2.pptx
@@ -2265,34 +2265,26 @@
         </p:sp>
         <p:sp>
           <p:nvSpPr>
-            <p:cNvPr id="4" name="pl4"/>
+            <p:cNvPr id="4" name="rc4"/>
             <p:cNvSpPr/>
             <p:nvPr/>
           </p:nvSpPr>
           <p:spPr>
             <a:xfrm>
-              <a:off x="817517" y="5142518"/>
-              <a:ext cx="7799693" cy="0"/>
+              <a:off x="457200" y="1600200"/>
+              <a:ext cx="8229600" cy="4525962"/>
             </a:xfrm>
-            <a:custGeom>
+            <a:prstGeom prst="rect">
               <a:avLst/>
-              <a:pathLst>
-                <a:path w="7799693" h="0">
-                  <a:moveTo>
-                    <a:pt x="0" y="0"/>
-                  </a:moveTo>
-                  <a:lnTo>
-                    <a:pt x="7799693" y="0"/>
-                  </a:lnTo>
-                  <a:lnTo>
-                    <a:pt x="7799693" y="0"/>
-                  </a:lnTo>
-                </a:path>
-              </a:pathLst>
-            </a:custGeom>
-            <a:ln w="6775" cap="flat">
+            </a:prstGeom>
+            <a:solidFill>
+              <a:srgbClr val="FFFFFF">
+                <a:alpha val="100000"/>
+              </a:srgbClr>
+            </a:solidFill>
+            <a:ln w="13550" cap="rnd">
               <a:solidFill>
-                <a:srgbClr val="EBEBEB">
+                <a:srgbClr val="FFFFFF">
                   <a:alpha val="100000"/>
                 </a:srgbClr>
               </a:solidFill>
@@ -2314,21 +2306,21 @@
           </p:nvSpPr>
           <p:spPr>
             <a:xfrm>
-              <a:off x="817517" y="4313054"/>
-              <a:ext cx="7799693" cy="0"/>
+              <a:off x="887106" y="3250627"/>
+              <a:ext cx="7660515" cy="0"/>
             </a:xfrm>
             <a:custGeom>
               <a:avLst/>
               <a:pathLst>
-                <a:path w="7799693" h="0">
+                <a:path w="7660515" h="0">
                   <a:moveTo>
                     <a:pt x="0" y="0"/>
                   </a:moveTo>
                   <a:lnTo>
-                    <a:pt x="7799693" y="0"/>
-                  </a:lnTo>
-                  <a:lnTo>
-                    <a:pt x="7799693" y="0"/>
+                    <a:pt x="7660515" y="0"/>
+                  </a:lnTo>
+                  <a:lnTo>
+                    <a:pt x="7660515" y="0"/>
                   </a:lnTo>
                 </a:path>
               </a:pathLst>
@@ -2357,21 +2349,21 @@
           </p:nvSpPr>
           <p:spPr>
             <a:xfrm>
-              <a:off x="817517" y="3483591"/>
-              <a:ext cx="7799693" cy="0"/>
+              <a:off x="887106" y="2951293"/>
+              <a:ext cx="7660515" cy="0"/>
             </a:xfrm>
             <a:custGeom>
               <a:avLst/>
               <a:pathLst>
-                <a:path w="7799693" h="0">
+                <a:path w="7660515" h="0">
                   <a:moveTo>
                     <a:pt x="0" y="0"/>
                   </a:moveTo>
                   <a:lnTo>
-                    <a:pt x="7799693" y="0"/>
-                  </a:lnTo>
-                  <a:lnTo>
-                    <a:pt x="7799693" y="0"/>
+                    <a:pt x="7660515" y="0"/>
+                  </a:lnTo>
+                  <a:lnTo>
+                    <a:pt x="7660515" y="0"/>
                   </a:lnTo>
                 </a:path>
               </a:pathLst>
@@ -2400,21 +2392,21 @@
           </p:nvSpPr>
           <p:spPr>
             <a:xfrm>
-              <a:off x="817517" y="2654127"/>
-              <a:ext cx="7799693" cy="0"/>
+              <a:off x="887106" y="2651959"/>
+              <a:ext cx="7660515" cy="0"/>
             </a:xfrm>
             <a:custGeom>
               <a:avLst/>
               <a:pathLst>
-                <a:path w="7799693" h="0">
+                <a:path w="7660515" h="0">
                   <a:moveTo>
                     <a:pt x="0" y="0"/>
                   </a:moveTo>
                   <a:lnTo>
-                    <a:pt x="7799693" y="0"/>
-                  </a:lnTo>
-                  <a:lnTo>
-                    <a:pt x="7799693" y="0"/>
+                    <a:pt x="7660515" y="0"/>
+                  </a:lnTo>
+                  <a:lnTo>
+                    <a:pt x="7660515" y="0"/>
                   </a:lnTo>
                 </a:path>
               </a:pathLst>
@@ -2443,21 +2435,21 @@
           </p:nvSpPr>
           <p:spPr>
             <a:xfrm>
-              <a:off x="1467192" y="2073503"/>
-              <a:ext cx="0" cy="3649639"/>
+              <a:off x="887106" y="2352625"/>
+              <a:ext cx="7660515" cy="0"/>
             </a:xfrm>
             <a:custGeom>
               <a:avLst/>
               <a:pathLst>
-                <a:path w="0" h="3649639">
+                <a:path w="7660515" h="0">
                   <a:moveTo>
-                    <a:pt x="0" y="3649639"/>
+                    <a:pt x="0" y="0"/>
                   </a:moveTo>
                   <a:lnTo>
-                    <a:pt x="0" y="0"/>
-                  </a:lnTo>
-                  <a:lnTo>
-                    <a:pt x="0" y="0"/>
+                    <a:pt x="7660515" y="0"/>
+                  </a:lnTo>
+                  <a:lnTo>
+                    <a:pt x="7660515" y="0"/>
                   </a:lnTo>
                 </a:path>
               </a:pathLst>
@@ -2486,15 +2478,15 @@
           </p:nvSpPr>
           <p:spPr>
             <a:xfrm>
-              <a:off x="3538150" y="2073503"/>
-              <a:ext cx="0" cy="3649639"/>
+              <a:off x="1525188" y="2143092"/>
+              <a:ext cx="0" cy="1317069"/>
             </a:xfrm>
             <a:custGeom>
               <a:avLst/>
               <a:pathLst>
-                <a:path w="0" h="3649639">
+                <a:path w="0" h="1317069">
                   <a:moveTo>
-                    <a:pt x="0" y="3649639"/>
+                    <a:pt x="0" y="1317069"/>
                   </a:moveTo>
                   <a:lnTo>
                     <a:pt x="0" y="0"/>
@@ -2529,15 +2521,15 @@
           </p:nvSpPr>
           <p:spPr>
             <a:xfrm>
-              <a:off x="5609107" y="2073503"/>
-              <a:ext cx="0" cy="3649639"/>
+              <a:off x="3559192" y="2143092"/>
+              <a:ext cx="0" cy="1317069"/>
             </a:xfrm>
             <a:custGeom>
               <a:avLst/>
               <a:pathLst>
-                <a:path w="0" h="3649639">
+                <a:path w="0" h="1317069">
                   <a:moveTo>
-                    <a:pt x="0" y="3649639"/>
+                    <a:pt x="0" y="1317069"/>
                   </a:moveTo>
                   <a:lnTo>
                     <a:pt x="0" y="0"/>
@@ -2572,15 +2564,15 @@
           </p:nvSpPr>
           <p:spPr>
             <a:xfrm>
-              <a:off x="7680065" y="2073503"/>
-              <a:ext cx="0" cy="3649639"/>
+              <a:off x="5593195" y="2143092"/>
+              <a:ext cx="0" cy="1317069"/>
             </a:xfrm>
             <a:custGeom>
               <a:avLst/>
               <a:pathLst>
-                <a:path w="0" h="3649639">
+                <a:path w="0" h="1317069">
                   <a:moveTo>
-                    <a:pt x="0" y="3649639"/>
+                    <a:pt x="0" y="1317069"/>
                   </a:moveTo>
                   <a:lnTo>
                     <a:pt x="0" y="0"/>
@@ -2615,26 +2607,26 @@
           </p:nvSpPr>
           <p:spPr>
             <a:xfrm>
-              <a:off x="817517" y="5557249"/>
-              <a:ext cx="7799693" cy="0"/>
+              <a:off x="7627198" y="2143092"/>
+              <a:ext cx="0" cy="1317069"/>
             </a:xfrm>
             <a:custGeom>
               <a:avLst/>
               <a:pathLst>
-                <a:path w="7799693" h="0">
+                <a:path w="0" h="1317069">
                   <a:moveTo>
+                    <a:pt x="0" y="1317069"/>
+                  </a:moveTo>
+                  <a:lnTo>
                     <a:pt x="0" y="0"/>
-                  </a:moveTo>
-                  <a:lnTo>
-                    <a:pt x="7799693" y="0"/>
-                  </a:lnTo>
-                  <a:lnTo>
-                    <a:pt x="7799693" y="0"/>
+                  </a:lnTo>
+                  <a:lnTo>
+                    <a:pt x="0" y="0"/>
                   </a:lnTo>
                 </a:path>
               </a:pathLst>
             </a:custGeom>
-            <a:ln w="13550" cap="flat">
+            <a:ln w="6775" cap="flat">
               <a:solidFill>
                 <a:srgbClr val="EBEBEB">
                   <a:alpha val="100000"/>
@@ -2658,21 +2650,21 @@
           </p:nvSpPr>
           <p:spPr>
             <a:xfrm>
-              <a:off x="817517" y="4727786"/>
-              <a:ext cx="7799693" cy="0"/>
+              <a:off x="887106" y="3400294"/>
+              <a:ext cx="7660515" cy="0"/>
             </a:xfrm>
             <a:custGeom>
               <a:avLst/>
               <a:pathLst>
-                <a:path w="7799693" h="0">
+                <a:path w="7660515" h="0">
                   <a:moveTo>
                     <a:pt x="0" y="0"/>
                   </a:moveTo>
                   <a:lnTo>
-                    <a:pt x="7799693" y="0"/>
-                  </a:lnTo>
-                  <a:lnTo>
-                    <a:pt x="7799693" y="0"/>
+                    <a:pt x="7660515" y="0"/>
+                  </a:lnTo>
+                  <a:lnTo>
+                    <a:pt x="7660515" y="0"/>
                   </a:lnTo>
                 </a:path>
               </a:pathLst>
@@ -2701,21 +2693,21 @@
           </p:nvSpPr>
           <p:spPr>
             <a:xfrm>
-              <a:off x="817517" y="3898322"/>
-              <a:ext cx="7799693" cy="0"/>
+              <a:off x="887106" y="3100960"/>
+              <a:ext cx="7660515" cy="0"/>
             </a:xfrm>
             <a:custGeom>
               <a:avLst/>
               <a:pathLst>
-                <a:path w="7799693" h="0">
+                <a:path w="7660515" h="0">
                   <a:moveTo>
                     <a:pt x="0" y="0"/>
                   </a:moveTo>
                   <a:lnTo>
-                    <a:pt x="7799693" y="0"/>
-                  </a:lnTo>
-                  <a:lnTo>
-                    <a:pt x="7799693" y="0"/>
+                    <a:pt x="7660515" y="0"/>
+                  </a:lnTo>
+                  <a:lnTo>
+                    <a:pt x="7660515" y="0"/>
                   </a:lnTo>
                 </a:path>
               </a:pathLst>
@@ -2744,21 +2736,21 @@
           </p:nvSpPr>
           <p:spPr>
             <a:xfrm>
-              <a:off x="817517" y="3068859"/>
-              <a:ext cx="7799693" cy="0"/>
+              <a:off x="887106" y="2801626"/>
+              <a:ext cx="7660515" cy="0"/>
             </a:xfrm>
             <a:custGeom>
               <a:avLst/>
               <a:pathLst>
-                <a:path w="7799693" h="0">
+                <a:path w="7660515" h="0">
                   <a:moveTo>
                     <a:pt x="0" y="0"/>
                   </a:moveTo>
                   <a:lnTo>
-                    <a:pt x="7799693" y="0"/>
-                  </a:lnTo>
-                  <a:lnTo>
-                    <a:pt x="7799693" y="0"/>
+                    <a:pt x="7660515" y="0"/>
+                  </a:lnTo>
+                  <a:lnTo>
+                    <a:pt x="7660515" y="0"/>
                   </a:lnTo>
                 </a:path>
               </a:pathLst>
@@ -2787,21 +2779,21 @@
           </p:nvSpPr>
           <p:spPr>
             <a:xfrm>
-              <a:off x="817517" y="2239395"/>
-              <a:ext cx="7799693" cy="0"/>
+              <a:off x="887106" y="2502292"/>
+              <a:ext cx="7660515" cy="0"/>
             </a:xfrm>
             <a:custGeom>
               <a:avLst/>
               <a:pathLst>
-                <a:path w="7799693" h="0">
+                <a:path w="7660515" h="0">
                   <a:moveTo>
                     <a:pt x="0" y="0"/>
                   </a:moveTo>
                   <a:lnTo>
-                    <a:pt x="7799693" y="0"/>
-                  </a:lnTo>
-                  <a:lnTo>
-                    <a:pt x="7799693" y="0"/>
+                    <a:pt x="7660515" y="0"/>
+                  </a:lnTo>
+                  <a:lnTo>
+                    <a:pt x="7660515" y="0"/>
                   </a:lnTo>
                 </a:path>
               </a:pathLst>
@@ -2830,21 +2822,21 @@
           </p:nvSpPr>
           <p:spPr>
             <a:xfrm>
-              <a:off x="2502671" y="2073503"/>
-              <a:ext cx="0" cy="3649639"/>
+              <a:off x="887106" y="2202958"/>
+              <a:ext cx="7660515" cy="0"/>
             </a:xfrm>
             <a:custGeom>
               <a:avLst/>
               <a:pathLst>
-                <a:path w="0" h="3649639">
+                <a:path w="7660515" h="0">
                   <a:moveTo>
-                    <a:pt x="0" y="3649639"/>
+                    <a:pt x="0" y="0"/>
                   </a:moveTo>
                   <a:lnTo>
-                    <a:pt x="0" y="0"/>
-                  </a:lnTo>
-                  <a:lnTo>
-                    <a:pt x="0" y="0"/>
+                    <a:pt x="7660515" y="0"/>
+                  </a:lnTo>
+                  <a:lnTo>
+                    <a:pt x="7660515" y="0"/>
                   </a:lnTo>
                 </a:path>
               </a:pathLst>
@@ -2873,15 +2865,15 @@
           </p:nvSpPr>
           <p:spPr>
             <a:xfrm>
-              <a:off x="4573628" y="2073503"/>
-              <a:ext cx="0" cy="3649639"/>
+              <a:off x="2542190" y="2143092"/>
+              <a:ext cx="0" cy="1317069"/>
             </a:xfrm>
             <a:custGeom>
               <a:avLst/>
               <a:pathLst>
-                <a:path w="0" h="3649639">
+                <a:path w="0" h="1317069">
                   <a:moveTo>
-                    <a:pt x="0" y="3649639"/>
+                    <a:pt x="0" y="1317069"/>
                   </a:moveTo>
                   <a:lnTo>
                     <a:pt x="0" y="0"/>
@@ -2916,15 +2908,15 @@
           </p:nvSpPr>
           <p:spPr>
             <a:xfrm>
-              <a:off x="6644586" y="2073503"/>
-              <a:ext cx="0" cy="3649639"/>
+              <a:off x="4576193" y="2143092"/>
+              <a:ext cx="0" cy="1317069"/>
             </a:xfrm>
             <a:custGeom>
               <a:avLst/>
               <a:pathLst>
-                <a:path w="0" h="3649639">
+                <a:path w="0" h="1317069">
                   <a:moveTo>
-                    <a:pt x="0" y="3649639"/>
+                    <a:pt x="0" y="1317069"/>
                   </a:moveTo>
                   <a:lnTo>
                     <a:pt x="0" y="0"/>
@@ -2953,597 +2945,640 @@
         </p:sp>
         <p:sp>
           <p:nvSpPr>
-            <p:cNvPr id="20" name="pg20"/>
+            <p:cNvPr id="20" name="pl20"/>
             <p:cNvSpPr/>
             <p:nvPr/>
           </p:nvSpPr>
           <p:spPr>
             <a:xfrm>
-              <a:off x="1172049" y="2073503"/>
-              <a:ext cx="7090630" cy="3360593"/>
+              <a:off x="6610197" y="2143092"/>
+              <a:ext cx="0" cy="1317069"/>
             </a:xfrm>
             <a:custGeom>
               <a:avLst/>
               <a:pathLst>
-                <a:path w="7090630" h="3360593">
+                <a:path w="0" h="1317069">
                   <a:moveTo>
-                    <a:pt x="544467" y="0"/>
+                    <a:pt x="0" y="1317069"/>
                   </a:moveTo>
                   <a:lnTo>
-                    <a:pt x="572980" y="50899"/>
-                  </a:lnTo>
-                  <a:lnTo>
-                    <a:pt x="644602" y="174165"/>
-                  </a:lnTo>
-                  <a:lnTo>
-                    <a:pt x="716225" y="293004"/>
-                  </a:lnTo>
-                  <a:lnTo>
-                    <a:pt x="787847" y="407577"/>
-                  </a:lnTo>
-                  <a:lnTo>
-                    <a:pt x="859470" y="518035"/>
-                  </a:lnTo>
-                  <a:lnTo>
-                    <a:pt x="931092" y="624527"/>
-                  </a:lnTo>
-                  <a:lnTo>
-                    <a:pt x="1002715" y="727195"/>
-                  </a:lnTo>
-                  <a:lnTo>
-                    <a:pt x="1074337" y="826176"/>
-                  </a:lnTo>
-                  <a:lnTo>
-                    <a:pt x="1145960" y="921604"/>
-                  </a:lnTo>
-                  <a:lnTo>
-                    <a:pt x="1217582" y="1013604"/>
-                  </a:lnTo>
-                  <a:lnTo>
-                    <a:pt x="1289205" y="1102302"/>
-                  </a:lnTo>
-                  <a:lnTo>
-                    <a:pt x="1360827" y="1187814"/>
-                  </a:lnTo>
-                  <a:lnTo>
-                    <a:pt x="1432450" y="1270256"/>
-                  </a:lnTo>
-                  <a:lnTo>
-                    <a:pt x="1504073" y="1349737"/>
-                  </a:lnTo>
-                  <a:lnTo>
-                    <a:pt x="1575695" y="1426364"/>
-                  </a:lnTo>
-                  <a:lnTo>
-                    <a:pt x="1647318" y="1500240"/>
-                  </a:lnTo>
-                  <a:lnTo>
-                    <a:pt x="1718940" y="1571463"/>
-                  </a:lnTo>
-                  <a:lnTo>
-                    <a:pt x="1790563" y="1640129"/>
-                  </a:lnTo>
-                  <a:lnTo>
-                    <a:pt x="1862185" y="1706329"/>
-                  </a:lnTo>
-                  <a:lnTo>
-                    <a:pt x="1933808" y="1770152"/>
-                  </a:lnTo>
-                  <a:lnTo>
-                    <a:pt x="2005430" y="1831684"/>
-                  </a:lnTo>
-                  <a:lnTo>
-                    <a:pt x="2077053" y="1891005"/>
-                  </a:lnTo>
-                  <a:lnTo>
-                    <a:pt x="2148675" y="1948197"/>
-                  </a:lnTo>
-                  <a:lnTo>
-                    <a:pt x="2220298" y="2003335"/>
-                  </a:lnTo>
-                  <a:lnTo>
-                    <a:pt x="2291920" y="2056493"/>
-                  </a:lnTo>
-                  <a:lnTo>
-                    <a:pt x="2363543" y="2107743"/>
-                  </a:lnTo>
-                  <a:lnTo>
-                    <a:pt x="2435165" y="2157152"/>
-                  </a:lnTo>
-                  <a:lnTo>
-                    <a:pt x="2506788" y="2204787"/>
-                  </a:lnTo>
-                  <a:lnTo>
-                    <a:pt x="2578410" y="2250711"/>
-                  </a:lnTo>
-                  <a:lnTo>
-                    <a:pt x="2650033" y="2294987"/>
-                  </a:lnTo>
-                  <a:lnTo>
-                    <a:pt x="2721655" y="2337673"/>
-                  </a:lnTo>
-                  <a:lnTo>
-                    <a:pt x="2793278" y="2378826"/>
-                  </a:lnTo>
-                  <a:lnTo>
-                    <a:pt x="2864901" y="2418501"/>
-                  </a:lnTo>
-                  <a:lnTo>
-                    <a:pt x="2936523" y="2456751"/>
-                  </a:lnTo>
-                  <a:lnTo>
-                    <a:pt x="3008146" y="2493628"/>
-                  </a:lnTo>
-                  <a:lnTo>
-                    <a:pt x="3079768" y="2529181"/>
-                  </a:lnTo>
-                  <a:lnTo>
-                    <a:pt x="3151391" y="2563457"/>
-                  </a:lnTo>
-                  <a:lnTo>
-                    <a:pt x="3223013" y="2596503"/>
-                  </a:lnTo>
-                  <a:lnTo>
-                    <a:pt x="3294636" y="2628362"/>
-                  </a:lnTo>
-                  <a:lnTo>
-                    <a:pt x="3366258" y="2654754"/>
-                  </a:lnTo>
-                  <a:lnTo>
-                    <a:pt x="3437881" y="2657720"/>
-                  </a:lnTo>
-                  <a:lnTo>
-                    <a:pt x="3509503" y="2660676"/>
-                  </a:lnTo>
-                  <a:lnTo>
-                    <a:pt x="3581126" y="2663621"/>
-                  </a:lnTo>
-                  <a:lnTo>
-                    <a:pt x="3652748" y="2666555"/>
-                  </a:lnTo>
-                  <a:lnTo>
-                    <a:pt x="3724371" y="2669479"/>
-                  </a:lnTo>
-                  <a:lnTo>
-                    <a:pt x="3795993" y="2672393"/>
-                  </a:lnTo>
-                  <a:lnTo>
-                    <a:pt x="3867616" y="2675296"/>
-                  </a:lnTo>
-                  <a:lnTo>
-                    <a:pt x="3939238" y="2678189"/>
-                  </a:lnTo>
-                  <a:lnTo>
-                    <a:pt x="4010861" y="2681071"/>
-                  </a:lnTo>
-                  <a:lnTo>
-                    <a:pt x="4082483" y="2683943"/>
-                  </a:lnTo>
-                  <a:lnTo>
-                    <a:pt x="4154106" y="2686805"/>
-                  </a:lnTo>
-                  <a:lnTo>
-                    <a:pt x="4225729" y="2689657"/>
-                  </a:lnTo>
-                  <a:lnTo>
-                    <a:pt x="4297351" y="2692498"/>
-                  </a:lnTo>
-                  <a:lnTo>
-                    <a:pt x="4368974" y="2695329"/>
-                  </a:lnTo>
-                  <a:lnTo>
-                    <a:pt x="4440596" y="2698150"/>
-                  </a:lnTo>
-                  <a:lnTo>
-                    <a:pt x="4512219" y="2700961"/>
-                  </a:lnTo>
-                  <a:lnTo>
-                    <a:pt x="4583841" y="2703762"/>
-                  </a:lnTo>
-                  <a:lnTo>
-                    <a:pt x="4655464" y="2706553"/>
-                  </a:lnTo>
-                  <a:lnTo>
-                    <a:pt x="4727086" y="2709334"/>
-                  </a:lnTo>
-                  <a:lnTo>
-                    <a:pt x="4798709" y="2712105"/>
-                  </a:lnTo>
-                  <a:lnTo>
-                    <a:pt x="4870331" y="2714866"/>
-                  </a:lnTo>
-                  <a:lnTo>
-                    <a:pt x="4941954" y="2717617"/>
-                  </a:lnTo>
-                  <a:lnTo>
-                    <a:pt x="5013576" y="2720358"/>
-                  </a:lnTo>
-                  <a:lnTo>
-                    <a:pt x="5085199" y="2723090"/>
-                  </a:lnTo>
-                  <a:lnTo>
-                    <a:pt x="5156821" y="2725811"/>
-                  </a:lnTo>
-                  <a:lnTo>
-                    <a:pt x="5228444" y="2728523"/>
-                  </a:lnTo>
-                  <a:lnTo>
-                    <a:pt x="5300066" y="2731226"/>
-                  </a:lnTo>
-                  <a:lnTo>
-                    <a:pt x="5371689" y="2733918"/>
-                  </a:lnTo>
-                  <a:lnTo>
-                    <a:pt x="5443311" y="2736601"/>
-                  </a:lnTo>
-                  <a:lnTo>
-                    <a:pt x="5514934" y="2739275"/>
-                  </a:lnTo>
-                  <a:lnTo>
-                    <a:pt x="5586557" y="2741938"/>
-                  </a:lnTo>
-                  <a:lnTo>
-                    <a:pt x="5658179" y="2744593"/>
-                  </a:lnTo>
-                  <a:lnTo>
-                    <a:pt x="5729802" y="2747237"/>
-                  </a:lnTo>
-                  <a:lnTo>
-                    <a:pt x="5801424" y="2749873"/>
-                  </a:lnTo>
-                  <a:lnTo>
-                    <a:pt x="5873047" y="2752499"/>
-                  </a:lnTo>
-                  <a:lnTo>
-                    <a:pt x="5944669" y="2755115"/>
-                  </a:lnTo>
-                  <a:lnTo>
-                    <a:pt x="6016292" y="2757722"/>
-                  </a:lnTo>
-                  <a:lnTo>
-                    <a:pt x="6087914" y="2760320"/>
-                  </a:lnTo>
-                  <a:lnTo>
-                    <a:pt x="6159537" y="2762908"/>
-                  </a:lnTo>
-                  <a:lnTo>
-                    <a:pt x="6231159" y="2765488"/>
-                  </a:lnTo>
-                  <a:lnTo>
-                    <a:pt x="6302782" y="2768058"/>
-                  </a:lnTo>
-                  <a:lnTo>
-                    <a:pt x="6374404" y="2770619"/>
-                  </a:lnTo>
-                  <a:lnTo>
-                    <a:pt x="6446027" y="2773170"/>
-                  </a:lnTo>
-                  <a:lnTo>
-                    <a:pt x="6517649" y="2775713"/>
-                  </a:lnTo>
-                  <a:lnTo>
-                    <a:pt x="6589272" y="2778246"/>
-                  </a:lnTo>
-                  <a:lnTo>
-                    <a:pt x="6660894" y="2780770"/>
-                  </a:lnTo>
-                  <a:lnTo>
-                    <a:pt x="6732517" y="2783286"/>
-                  </a:lnTo>
-                  <a:lnTo>
-                    <a:pt x="6804139" y="2785792"/>
-                  </a:lnTo>
-                  <a:lnTo>
-                    <a:pt x="6875762" y="2788290"/>
-                  </a:lnTo>
-                  <a:lnTo>
-                    <a:pt x="6947385" y="2790778"/>
-                  </a:lnTo>
-                  <a:lnTo>
-                    <a:pt x="7019007" y="2793257"/>
-                  </a:lnTo>
-                  <a:lnTo>
-                    <a:pt x="7090630" y="2795728"/>
-                  </a:lnTo>
-                  <a:lnTo>
-                    <a:pt x="7090630" y="3360593"/>
-                  </a:lnTo>
-                  <a:lnTo>
-                    <a:pt x="7019007" y="3356006"/>
-                  </a:lnTo>
-                  <a:lnTo>
-                    <a:pt x="6947385" y="3351248"/>
-                  </a:lnTo>
-                  <a:lnTo>
-                    <a:pt x="6875762" y="3346313"/>
-                  </a:lnTo>
-                  <a:lnTo>
-                    <a:pt x="6804139" y="3341195"/>
-                  </a:lnTo>
-                  <a:lnTo>
-                    <a:pt x="6732517" y="3335885"/>
-                  </a:lnTo>
-                  <a:lnTo>
-                    <a:pt x="6660894" y="3330378"/>
-                  </a:lnTo>
-                  <a:lnTo>
-                    <a:pt x="6589272" y="3324666"/>
-                  </a:lnTo>
-                  <a:lnTo>
-                    <a:pt x="6517649" y="3318741"/>
-                  </a:lnTo>
-                  <a:lnTo>
-                    <a:pt x="6446027" y="3312595"/>
-                  </a:lnTo>
-                  <a:lnTo>
-                    <a:pt x="6374404" y="3306221"/>
-                  </a:lnTo>
-                  <a:lnTo>
-                    <a:pt x="6302782" y="3299609"/>
-                  </a:lnTo>
-                  <a:lnTo>
-                    <a:pt x="6231159" y="3292750"/>
-                  </a:lnTo>
-                  <a:lnTo>
-                    <a:pt x="6159537" y="3285637"/>
-                  </a:lnTo>
-                  <a:lnTo>
-                    <a:pt x="6087914" y="3278258"/>
-                  </a:lnTo>
-                  <a:lnTo>
-                    <a:pt x="6016292" y="3270605"/>
-                  </a:lnTo>
-                  <a:lnTo>
-                    <a:pt x="5944669" y="3262666"/>
-                  </a:lnTo>
-                  <a:lnTo>
-                    <a:pt x="5873047" y="3254432"/>
-                  </a:lnTo>
-                  <a:lnTo>
-                    <a:pt x="5801424" y="3245891"/>
-                  </a:lnTo>
-                  <a:lnTo>
-                    <a:pt x="5729802" y="3237032"/>
-                  </a:lnTo>
-                  <a:lnTo>
-                    <a:pt x="5658179" y="3227843"/>
-                  </a:lnTo>
-                  <a:lnTo>
-                    <a:pt x="5586557" y="3218312"/>
-                  </a:lnTo>
-                  <a:lnTo>
-                    <a:pt x="5514934" y="3208426"/>
-                  </a:lnTo>
-                  <a:lnTo>
-                    <a:pt x="5443311" y="3198172"/>
-                  </a:lnTo>
-                  <a:lnTo>
-                    <a:pt x="5371689" y="3187536"/>
-                  </a:lnTo>
-                  <a:lnTo>
-                    <a:pt x="5300066" y="3176503"/>
-                  </a:lnTo>
-                  <a:lnTo>
-                    <a:pt x="5228444" y="3165060"/>
-                  </a:lnTo>
-                  <a:lnTo>
-                    <a:pt x="5156821" y="3153190"/>
-                  </a:lnTo>
-                  <a:lnTo>
-                    <a:pt x="5085199" y="3140879"/>
-                  </a:lnTo>
-                  <a:lnTo>
-                    <a:pt x="5013576" y="3128109"/>
-                  </a:lnTo>
-                  <a:lnTo>
-                    <a:pt x="4941954" y="3114863"/>
-                  </a:lnTo>
-                  <a:lnTo>
-                    <a:pt x="4870331" y="3101124"/>
-                  </a:lnTo>
-                  <a:lnTo>
-                    <a:pt x="4798709" y="3086873"/>
-                  </a:lnTo>
-                  <a:lnTo>
-                    <a:pt x="4727086" y="3072091"/>
-                  </a:lnTo>
-                  <a:lnTo>
-                    <a:pt x="4655464" y="3056759"/>
-                  </a:lnTo>
-                  <a:lnTo>
-                    <a:pt x="4583841" y="3040856"/>
-                  </a:lnTo>
-                  <a:lnTo>
-                    <a:pt x="4512219" y="3024361"/>
-                  </a:lnTo>
-                  <a:lnTo>
-                    <a:pt x="4440596" y="3007251"/>
-                  </a:lnTo>
-                  <a:lnTo>
-                    <a:pt x="4368974" y="2989503"/>
-                  </a:lnTo>
-                  <a:lnTo>
-                    <a:pt x="4297351" y="2971095"/>
-                  </a:lnTo>
-                  <a:lnTo>
-                    <a:pt x="4225729" y="2952002"/>
-                  </a:lnTo>
-                  <a:lnTo>
-                    <a:pt x="4154106" y="2932197"/>
-                  </a:lnTo>
-                  <a:lnTo>
-                    <a:pt x="4082483" y="2911654"/>
-                  </a:lnTo>
-                  <a:lnTo>
-                    <a:pt x="4010861" y="2890347"/>
-                  </a:lnTo>
-                  <a:lnTo>
-                    <a:pt x="3939238" y="2868245"/>
-                  </a:lnTo>
-                  <a:lnTo>
-                    <a:pt x="3867616" y="2845321"/>
-                  </a:lnTo>
-                  <a:lnTo>
-                    <a:pt x="3795993" y="2821543"/>
-                  </a:lnTo>
-                  <a:lnTo>
-                    <a:pt x="3724371" y="2796879"/>
-                  </a:lnTo>
-                  <a:lnTo>
-                    <a:pt x="3652748" y="2771296"/>
-                  </a:lnTo>
-                  <a:lnTo>
-                    <a:pt x="3581126" y="2744761"/>
-                  </a:lnTo>
-                  <a:lnTo>
-                    <a:pt x="3509503" y="2717237"/>
-                  </a:lnTo>
-                  <a:lnTo>
-                    <a:pt x="3437881" y="2688689"/>
-                  </a:lnTo>
-                  <a:lnTo>
-                    <a:pt x="3366258" y="2659077"/>
-                  </a:lnTo>
-                  <a:lnTo>
-                    <a:pt x="3294636" y="2651777"/>
-                  </a:lnTo>
-                  <a:lnTo>
-                    <a:pt x="3223013" y="2648790"/>
-                  </a:lnTo>
-                  <a:lnTo>
-                    <a:pt x="3151391" y="2645791"/>
-                  </a:lnTo>
-                  <a:lnTo>
-                    <a:pt x="3079768" y="2642782"/>
-                  </a:lnTo>
-                  <a:lnTo>
-                    <a:pt x="3008146" y="2639762"/>
-                  </a:lnTo>
-                  <a:lnTo>
-                    <a:pt x="2936523" y="2636732"/>
-                  </a:lnTo>
-                  <a:lnTo>
-                    <a:pt x="2864901" y="2633690"/>
-                  </a:lnTo>
-                  <a:lnTo>
-                    <a:pt x="2793278" y="2630637"/>
-                  </a:lnTo>
-                  <a:lnTo>
-                    <a:pt x="2721655" y="2627574"/>
-                  </a:lnTo>
-                  <a:lnTo>
-                    <a:pt x="2650033" y="2624500"/>
-                  </a:lnTo>
-                  <a:lnTo>
-                    <a:pt x="2578410" y="2621414"/>
-                  </a:lnTo>
-                  <a:lnTo>
-                    <a:pt x="2506788" y="2618317"/>
-                  </a:lnTo>
-                  <a:lnTo>
-                    <a:pt x="2435165" y="2615210"/>
-                  </a:lnTo>
-                  <a:lnTo>
-                    <a:pt x="2363543" y="2612091"/>
-                  </a:lnTo>
-                  <a:lnTo>
-                    <a:pt x="2291920" y="2608961"/>
-                  </a:lnTo>
-                  <a:lnTo>
-                    <a:pt x="2220298" y="2605819"/>
-                  </a:lnTo>
-                  <a:lnTo>
-                    <a:pt x="2148675" y="2602667"/>
-                  </a:lnTo>
-                  <a:lnTo>
-                    <a:pt x="2077053" y="2599503"/>
-                  </a:lnTo>
-                  <a:lnTo>
-                    <a:pt x="2005430" y="2596328"/>
-                  </a:lnTo>
-                  <a:lnTo>
-                    <a:pt x="1933808" y="2593141"/>
-                  </a:lnTo>
-                  <a:lnTo>
-                    <a:pt x="1862185" y="2589943"/>
-                  </a:lnTo>
-                  <a:lnTo>
-                    <a:pt x="1790563" y="2586733"/>
-                  </a:lnTo>
-                  <a:lnTo>
-                    <a:pt x="1718940" y="2583512"/>
-                  </a:lnTo>
-                  <a:lnTo>
-                    <a:pt x="1647318" y="2580279"/>
-                  </a:lnTo>
-                  <a:lnTo>
-                    <a:pt x="1575695" y="2577035"/>
-                  </a:lnTo>
-                  <a:lnTo>
-                    <a:pt x="1504073" y="2573779"/>
-                  </a:lnTo>
-                  <a:lnTo>
-                    <a:pt x="1432450" y="2570511"/>
-                  </a:lnTo>
-                  <a:lnTo>
-                    <a:pt x="1360827" y="2567232"/>
-                  </a:lnTo>
-                  <a:lnTo>
-                    <a:pt x="1289205" y="2563941"/>
-                  </a:lnTo>
-                  <a:lnTo>
-                    <a:pt x="1217582" y="2560638"/>
-                  </a:lnTo>
-                  <a:lnTo>
-                    <a:pt x="1145960" y="2557323"/>
-                  </a:lnTo>
-                  <a:lnTo>
-                    <a:pt x="1074337" y="2553996"/>
-                  </a:lnTo>
-                  <a:lnTo>
-                    <a:pt x="1002715" y="2550658"/>
-                  </a:lnTo>
-                  <a:lnTo>
-                    <a:pt x="931092" y="2547307"/>
-                  </a:lnTo>
-                  <a:lnTo>
-                    <a:pt x="859470" y="2543944"/>
-                  </a:lnTo>
-                  <a:lnTo>
-                    <a:pt x="787847" y="2540569"/>
-                  </a:lnTo>
-                  <a:lnTo>
-                    <a:pt x="716225" y="2537182"/>
-                  </a:lnTo>
-                  <a:lnTo>
-                    <a:pt x="644602" y="2533783"/>
-                  </a:lnTo>
-                  <a:lnTo>
-                    <a:pt x="572980" y="2530372"/>
-                  </a:lnTo>
-                  <a:lnTo>
-                    <a:pt x="501357" y="2526949"/>
-                  </a:lnTo>
-                  <a:lnTo>
-                    <a:pt x="429735" y="2523513"/>
-                  </a:lnTo>
-                  <a:lnTo>
-                    <a:pt x="358112" y="2520065"/>
-                  </a:lnTo>
-                  <a:lnTo>
-                    <a:pt x="286490" y="2516604"/>
-                  </a:lnTo>
-                  <a:lnTo>
-                    <a:pt x="214867" y="2513131"/>
-                  </a:lnTo>
-                  <a:lnTo>
-                    <a:pt x="143245" y="2509646"/>
-                  </a:lnTo>
-                  <a:lnTo>
-                    <a:pt x="71622" y="2506148"/>
-                  </a:lnTo>
-                  <a:lnTo>
-                    <a:pt x="0" y="2502637"/>
+                    <a:pt x="0" y="0"/>
+                  </a:lnTo>
+                  <a:lnTo>
+                    <a:pt x="0" y="0"/>
+                  </a:lnTo>
+                </a:path>
+              </a:pathLst>
+            </a:custGeom>
+            <a:ln w="13550" cap="flat">
+              <a:solidFill>
+                <a:srgbClr val="EBEBEB">
+                  <a:alpha val="100000"/>
+                </a:srgbClr>
+              </a:solidFill>
+              <a:prstDash val="solid"/>
+              <a:round/>
+            </a:ln>
+          </p:spPr>
+          <p:txBody>
+            <a:bodyPr/>
+            <a:lstStyle/>
+            <a:p/>
+          </p:txBody>
+        </p:sp>
+        <p:sp>
+          <p:nvSpPr>
+            <p:cNvPr id="21" name="pg21"/>
+            <p:cNvSpPr/>
+            <p:nvPr/>
+          </p:nvSpPr>
+          <p:spPr>
+            <a:xfrm>
+              <a:off x="1235312" y="2143092"/>
+              <a:ext cx="6964104" cy="1212759"/>
+            </a:xfrm>
+            <a:custGeom>
+              <a:avLst/>
+              <a:pathLst>
+                <a:path w="6964104" h="1212759">
+                  <a:moveTo>
+                    <a:pt x="534751" y="0"/>
+                  </a:moveTo>
+                  <a:lnTo>
+                    <a:pt x="562755" y="18368"/>
+                  </a:lnTo>
+                  <a:lnTo>
+                    <a:pt x="633100" y="62852"/>
+                  </a:lnTo>
+                  <a:lnTo>
+                    <a:pt x="703444" y="105738"/>
+                  </a:lnTo>
+                  <a:lnTo>
+                    <a:pt x="773789" y="147084"/>
+                  </a:lnTo>
+                  <a:lnTo>
+                    <a:pt x="844133" y="186946"/>
+                  </a:lnTo>
+                  <a:lnTo>
+                    <a:pt x="914478" y="225377"/>
+                  </a:lnTo>
+                  <a:lnTo>
+                    <a:pt x="984822" y="262427"/>
+                  </a:lnTo>
+                  <a:lnTo>
+                    <a:pt x="1055167" y="298147"/>
+                  </a:lnTo>
+                  <a:lnTo>
+                    <a:pt x="1125511" y="332585"/>
+                  </a:lnTo>
+                  <a:lnTo>
+                    <a:pt x="1195856" y="365786"/>
+                  </a:lnTo>
+                  <a:lnTo>
+                    <a:pt x="1266200" y="397794"/>
+                  </a:lnTo>
+                  <a:lnTo>
+                    <a:pt x="1336545" y="428654"/>
+                  </a:lnTo>
+                  <a:lnTo>
+                    <a:pt x="1406889" y="458405"/>
+                  </a:lnTo>
+                  <a:lnTo>
+                    <a:pt x="1477234" y="487088"/>
+                  </a:lnTo>
+                  <a:lnTo>
+                    <a:pt x="1547578" y="514741"/>
+                  </a:lnTo>
+                  <a:lnTo>
+                    <a:pt x="1617923" y="541401"/>
+                  </a:lnTo>
+                  <a:lnTo>
+                    <a:pt x="1688267" y="567104"/>
+                  </a:lnTo>
+                  <a:lnTo>
+                    <a:pt x="1758612" y="591884"/>
+                  </a:lnTo>
+                  <a:lnTo>
+                    <a:pt x="1828956" y="615774"/>
+                  </a:lnTo>
+                  <a:lnTo>
+                    <a:pt x="1899301" y="638806"/>
+                  </a:lnTo>
+                  <a:lnTo>
+                    <a:pt x="1969645" y="661011"/>
+                  </a:lnTo>
+                  <a:lnTo>
+                    <a:pt x="2039990" y="682419"/>
+                  </a:lnTo>
+                  <a:lnTo>
+                    <a:pt x="2110334" y="703058"/>
+                  </a:lnTo>
+                  <a:lnTo>
+                    <a:pt x="2180679" y="722956"/>
+                  </a:lnTo>
+                  <a:lnTo>
+                    <a:pt x="2251023" y="742140"/>
+                  </a:lnTo>
+                  <a:lnTo>
+                    <a:pt x="2321368" y="760634"/>
+                  </a:lnTo>
+                  <a:lnTo>
+                    <a:pt x="2391712" y="778465"/>
+                  </a:lnTo>
+                  <a:lnTo>
+                    <a:pt x="2462057" y="795655"/>
+                  </a:lnTo>
+                  <a:lnTo>
+                    <a:pt x="2532401" y="812228"/>
+                  </a:lnTo>
+                  <a:lnTo>
+                    <a:pt x="2602746" y="828206"/>
+                  </a:lnTo>
+                  <a:lnTo>
+                    <a:pt x="2673090" y="843611"/>
+                  </a:lnTo>
+                  <a:lnTo>
+                    <a:pt x="2743435" y="858462"/>
+                  </a:lnTo>
+                  <a:lnTo>
+                    <a:pt x="2813779" y="872780"/>
+                  </a:lnTo>
+                  <a:lnTo>
+                    <a:pt x="2884124" y="886583"/>
+                  </a:lnTo>
+                  <a:lnTo>
+                    <a:pt x="2954468" y="899891"/>
+                  </a:lnTo>
+                  <a:lnTo>
+                    <a:pt x="3024813" y="912722"/>
+                  </a:lnTo>
+                  <a:lnTo>
+                    <a:pt x="3095157" y="925091"/>
+                  </a:lnTo>
+                  <a:lnTo>
+                    <a:pt x="3165502" y="937017"/>
+                  </a:lnTo>
+                  <a:lnTo>
+                    <a:pt x="3235846" y="948514"/>
+                  </a:lnTo>
+                  <a:lnTo>
+                    <a:pt x="3306191" y="958038"/>
+                  </a:lnTo>
+                  <a:lnTo>
+                    <a:pt x="3376535" y="959108"/>
+                  </a:lnTo>
+                  <a:lnTo>
+                    <a:pt x="3446880" y="960175"/>
+                  </a:lnTo>
+                  <a:lnTo>
+                    <a:pt x="3517224" y="961238"/>
+                  </a:lnTo>
+                  <a:lnTo>
+                    <a:pt x="3587569" y="962297"/>
+                  </a:lnTo>
+                  <a:lnTo>
+                    <a:pt x="3657913" y="963352"/>
+                  </a:lnTo>
+                  <a:lnTo>
+                    <a:pt x="3728257" y="964403"/>
+                  </a:lnTo>
+                  <a:lnTo>
+                    <a:pt x="3798602" y="965451"/>
+                  </a:lnTo>
+                  <a:lnTo>
+                    <a:pt x="3868946" y="966495"/>
+                  </a:lnTo>
+                  <a:lnTo>
+                    <a:pt x="3939291" y="967535"/>
+                  </a:lnTo>
+                  <a:lnTo>
+                    <a:pt x="4009635" y="968572"/>
+                  </a:lnTo>
+                  <a:lnTo>
+                    <a:pt x="4079980" y="969604"/>
+                  </a:lnTo>
+                  <a:lnTo>
+                    <a:pt x="4150324" y="970633"/>
+                  </a:lnTo>
+                  <a:lnTo>
+                    <a:pt x="4220669" y="971659"/>
+                  </a:lnTo>
+                  <a:lnTo>
+                    <a:pt x="4291013" y="972681"/>
+                  </a:lnTo>
+                  <a:lnTo>
+                    <a:pt x="4361358" y="973699"/>
+                  </a:lnTo>
+                  <a:lnTo>
+                    <a:pt x="4431702" y="974713"/>
+                  </a:lnTo>
+                  <a:lnTo>
+                    <a:pt x="4502047" y="975724"/>
+                  </a:lnTo>
+                  <a:lnTo>
+                    <a:pt x="4572391" y="976731"/>
+                  </a:lnTo>
+                  <a:lnTo>
+                    <a:pt x="4642736" y="977734"/>
+                  </a:lnTo>
+                  <a:lnTo>
+                    <a:pt x="4713080" y="978734"/>
+                  </a:lnTo>
+                  <a:lnTo>
+                    <a:pt x="4783425" y="979731"/>
+                  </a:lnTo>
+                  <a:lnTo>
+                    <a:pt x="4853769" y="980724"/>
+                  </a:lnTo>
+                  <a:lnTo>
+                    <a:pt x="4924114" y="981713"/>
+                  </a:lnTo>
+                  <a:lnTo>
+                    <a:pt x="4994458" y="982699"/>
+                  </a:lnTo>
+                  <a:lnTo>
+                    <a:pt x="5064803" y="983681"/>
+                  </a:lnTo>
+                  <a:lnTo>
+                    <a:pt x="5135147" y="984660"/>
+                  </a:lnTo>
+                  <a:lnTo>
+                    <a:pt x="5205492" y="985635"/>
+                  </a:lnTo>
+                  <a:lnTo>
+                    <a:pt x="5275836" y="986606"/>
+                  </a:lnTo>
+                  <a:lnTo>
+                    <a:pt x="5346181" y="987575"/>
+                  </a:lnTo>
+                  <a:lnTo>
+                    <a:pt x="5416525" y="988539"/>
+                  </a:lnTo>
+                  <a:lnTo>
+                    <a:pt x="5486870" y="989501"/>
+                  </a:lnTo>
+                  <a:lnTo>
+                    <a:pt x="5557214" y="990459"/>
+                  </a:lnTo>
+                  <a:lnTo>
+                    <a:pt x="5627559" y="991413"/>
+                  </a:lnTo>
+                  <a:lnTo>
+                    <a:pt x="5697903" y="992364"/>
+                  </a:lnTo>
+                  <a:lnTo>
+                    <a:pt x="5768248" y="993312"/>
+                  </a:lnTo>
+                  <a:lnTo>
+                    <a:pt x="5838592" y="994256"/>
+                  </a:lnTo>
+                  <a:lnTo>
+                    <a:pt x="5908937" y="995197"/>
+                  </a:lnTo>
+                  <a:lnTo>
+                    <a:pt x="5979281" y="996134"/>
+                  </a:lnTo>
+                  <a:lnTo>
+                    <a:pt x="6049626" y="997068"/>
+                  </a:lnTo>
+                  <a:lnTo>
+                    <a:pt x="6119970" y="997999"/>
+                  </a:lnTo>
+                  <a:lnTo>
+                    <a:pt x="6190315" y="998927"/>
+                  </a:lnTo>
+                  <a:lnTo>
+                    <a:pt x="6260659" y="999851"/>
+                  </a:lnTo>
+                  <a:lnTo>
+                    <a:pt x="6331004" y="1000772"/>
+                  </a:lnTo>
+                  <a:lnTo>
+                    <a:pt x="6401348" y="1001689"/>
+                  </a:lnTo>
+                  <a:lnTo>
+                    <a:pt x="6471693" y="1002603"/>
+                  </a:lnTo>
+                  <a:lnTo>
+                    <a:pt x="6542037" y="1003514"/>
+                  </a:lnTo>
+                  <a:lnTo>
+                    <a:pt x="6612382" y="1004422"/>
+                  </a:lnTo>
+                  <a:lnTo>
+                    <a:pt x="6682726" y="1005327"/>
+                  </a:lnTo>
+                  <a:lnTo>
+                    <a:pt x="6753071" y="1006228"/>
+                  </a:lnTo>
+                  <a:lnTo>
+                    <a:pt x="6823415" y="1007126"/>
+                  </a:lnTo>
+                  <a:lnTo>
+                    <a:pt x="6893760" y="1008021"/>
+                  </a:lnTo>
+                  <a:lnTo>
+                    <a:pt x="6964104" y="1008912"/>
+                  </a:lnTo>
+                  <a:lnTo>
+                    <a:pt x="6964104" y="1212759"/>
+                  </a:lnTo>
+                  <a:lnTo>
+                    <a:pt x="6893760" y="1211103"/>
+                  </a:lnTo>
+                  <a:lnTo>
+                    <a:pt x="6823415" y="1209386"/>
+                  </a:lnTo>
+                  <a:lnTo>
+                    <a:pt x="6753071" y="1207605"/>
+                  </a:lnTo>
+                  <a:lnTo>
+                    <a:pt x="6682726" y="1205758"/>
+                  </a:lnTo>
+                  <a:lnTo>
+                    <a:pt x="6612382" y="1203842"/>
+                  </a:lnTo>
+                  <a:lnTo>
+                    <a:pt x="6542037" y="1201855"/>
+                  </a:lnTo>
+                  <a:lnTo>
+                    <a:pt x="6471693" y="1199793"/>
+                  </a:lnTo>
+                  <a:lnTo>
+                    <a:pt x="6401348" y="1197655"/>
+                  </a:lnTo>
+                  <a:lnTo>
+                    <a:pt x="6331004" y="1195437"/>
+                  </a:lnTo>
+                  <a:lnTo>
+                    <a:pt x="6260659" y="1193137"/>
+                  </a:lnTo>
+                  <a:lnTo>
+                    <a:pt x="6190315" y="1190751"/>
+                  </a:lnTo>
+                  <a:lnTo>
+                    <a:pt x="6119970" y="1188276"/>
+                  </a:lnTo>
+                  <a:lnTo>
+                    <a:pt x="6049626" y="1185709"/>
+                  </a:lnTo>
+                  <a:lnTo>
+                    <a:pt x="5979281" y="1183046"/>
+                  </a:lnTo>
+                  <a:lnTo>
+                    <a:pt x="5908937" y="1180284"/>
+                  </a:lnTo>
+                  <a:lnTo>
+                    <a:pt x="5838592" y="1177419"/>
+                  </a:lnTo>
+                  <a:lnTo>
+                    <a:pt x="5768248" y="1174448"/>
+                  </a:lnTo>
+                  <a:lnTo>
+                    <a:pt x="5697903" y="1171365"/>
+                  </a:lnTo>
+                  <a:lnTo>
+                    <a:pt x="5627559" y="1168169"/>
+                  </a:lnTo>
+                  <a:lnTo>
+                    <a:pt x="5557214" y="1164852"/>
+                  </a:lnTo>
+                  <a:lnTo>
+                    <a:pt x="5486870" y="1161413"/>
+                  </a:lnTo>
+                  <a:lnTo>
+                    <a:pt x="5416525" y="1157845"/>
+                  </a:lnTo>
+                  <a:lnTo>
+                    <a:pt x="5346181" y="1154145"/>
+                  </a:lnTo>
+                  <a:lnTo>
+                    <a:pt x="5275836" y="1150306"/>
+                  </a:lnTo>
+                  <a:lnTo>
+                    <a:pt x="5205492" y="1146325"/>
+                  </a:lnTo>
+                  <a:lnTo>
+                    <a:pt x="5135147" y="1142195"/>
+                  </a:lnTo>
+                  <a:lnTo>
+                    <a:pt x="5064803" y="1137912"/>
+                  </a:lnTo>
+                  <a:lnTo>
+                    <a:pt x="4994458" y="1133469"/>
+                  </a:lnTo>
+                  <a:lnTo>
+                    <a:pt x="4924114" y="1128860"/>
+                  </a:lnTo>
+                  <a:lnTo>
+                    <a:pt x="4853769" y="1124080"/>
+                  </a:lnTo>
+                  <a:lnTo>
+                    <a:pt x="4783425" y="1119122"/>
+                  </a:lnTo>
+                  <a:lnTo>
+                    <a:pt x="4713080" y="1113980"/>
+                  </a:lnTo>
+                  <a:lnTo>
+                    <a:pt x="4642736" y="1108645"/>
+                  </a:lnTo>
+                  <a:lnTo>
+                    <a:pt x="4572391" y="1103112"/>
+                  </a:lnTo>
+                  <a:lnTo>
+                    <a:pt x="4502047" y="1097373"/>
+                  </a:lnTo>
+                  <a:lnTo>
+                    <a:pt x="4431702" y="1091420"/>
+                  </a:lnTo>
+                  <a:lnTo>
+                    <a:pt x="4361358" y="1085246"/>
+                  </a:lnTo>
+                  <a:lnTo>
+                    <a:pt x="4291013" y="1078841"/>
+                  </a:lnTo>
+                  <a:lnTo>
+                    <a:pt x="4220669" y="1072198"/>
+                  </a:lnTo>
+                  <a:lnTo>
+                    <a:pt x="4150324" y="1065308"/>
+                  </a:lnTo>
+                  <a:lnTo>
+                    <a:pt x="4079980" y="1058160"/>
+                  </a:lnTo>
+                  <a:lnTo>
+                    <a:pt x="4009635" y="1050747"/>
+                  </a:lnTo>
+                  <a:lnTo>
+                    <a:pt x="3939291" y="1043058"/>
+                  </a:lnTo>
+                  <a:lnTo>
+                    <a:pt x="3868946" y="1035082"/>
+                  </a:lnTo>
+                  <a:lnTo>
+                    <a:pt x="3798602" y="1026809"/>
+                  </a:lnTo>
+                  <a:lnTo>
+                    <a:pt x="3728257" y="1018228"/>
+                  </a:lnTo>
+                  <a:lnTo>
+                    <a:pt x="3657913" y="1009327"/>
+                  </a:lnTo>
+                  <a:lnTo>
+                    <a:pt x="3587569" y="1000095"/>
+                  </a:lnTo>
+                  <a:lnTo>
+                    <a:pt x="3517224" y="990519"/>
+                  </a:lnTo>
+                  <a:lnTo>
+                    <a:pt x="3446880" y="980587"/>
+                  </a:lnTo>
+                  <a:lnTo>
+                    <a:pt x="3376535" y="970284"/>
+                  </a:lnTo>
+                  <a:lnTo>
+                    <a:pt x="3306191" y="959598"/>
+                  </a:lnTo>
+                  <a:lnTo>
+                    <a:pt x="3235846" y="956964"/>
+                  </a:lnTo>
+                  <a:lnTo>
+                    <a:pt x="3165502" y="955886"/>
+                  </a:lnTo>
+                  <a:lnTo>
+                    <a:pt x="3095157" y="954803"/>
+                  </a:lnTo>
+                  <a:lnTo>
+                    <a:pt x="3024813" y="953718"/>
+                  </a:lnTo>
+                  <a:lnTo>
+                    <a:pt x="2954468" y="952628"/>
+                  </a:lnTo>
+                  <a:lnTo>
+                    <a:pt x="2884124" y="951534"/>
+                  </a:lnTo>
+                  <a:lnTo>
+                    <a:pt x="2813779" y="950436"/>
+                  </a:lnTo>
+                  <a:lnTo>
+                    <a:pt x="2743435" y="949335"/>
+                  </a:lnTo>
+                  <a:lnTo>
+                    <a:pt x="2673090" y="948229"/>
+                  </a:lnTo>
+                  <a:lnTo>
+                    <a:pt x="2602746" y="947120"/>
+                  </a:lnTo>
+                  <a:lnTo>
+                    <a:pt x="2532401" y="946006"/>
+                  </a:lnTo>
+                  <a:lnTo>
+                    <a:pt x="2462057" y="944889"/>
+                  </a:lnTo>
+                  <a:lnTo>
+                    <a:pt x="2391712" y="943767"/>
+                  </a:lnTo>
+                  <a:lnTo>
+                    <a:pt x="2321368" y="942642"/>
+                  </a:lnTo>
+                  <a:lnTo>
+                    <a:pt x="2251023" y="941512"/>
+                  </a:lnTo>
+                  <a:lnTo>
+                    <a:pt x="2180679" y="940379"/>
+                  </a:lnTo>
+                  <a:lnTo>
+                    <a:pt x="2110334" y="939241"/>
+                  </a:lnTo>
+                  <a:lnTo>
+                    <a:pt x="2039990" y="938099"/>
+                  </a:lnTo>
+                  <a:lnTo>
+                    <a:pt x="1969645" y="936953"/>
+                  </a:lnTo>
+                  <a:lnTo>
+                    <a:pt x="1899301" y="935803"/>
+                  </a:lnTo>
+                  <a:lnTo>
+                    <a:pt x="1828956" y="934649"/>
+                  </a:lnTo>
+                  <a:lnTo>
+                    <a:pt x="1758612" y="933491"/>
+                  </a:lnTo>
+                  <a:lnTo>
+                    <a:pt x="1688267" y="932328"/>
+                  </a:lnTo>
+                  <a:lnTo>
+                    <a:pt x="1617923" y="931162"/>
+                  </a:lnTo>
+                  <a:lnTo>
+                    <a:pt x="1547578" y="929991"/>
+                  </a:lnTo>
+                  <a:lnTo>
+                    <a:pt x="1477234" y="928816"/>
+                  </a:lnTo>
+                  <a:lnTo>
+                    <a:pt x="1406889" y="927637"/>
+                  </a:lnTo>
+                  <a:lnTo>
+                    <a:pt x="1336545" y="926453"/>
+                  </a:lnTo>
+                  <a:lnTo>
+                    <a:pt x="1266200" y="925266"/>
+                  </a:lnTo>
+                  <a:lnTo>
+                    <a:pt x="1195856" y="924074"/>
+                  </a:lnTo>
+                  <a:lnTo>
+                    <a:pt x="1125511" y="922877"/>
+                  </a:lnTo>
+                  <a:lnTo>
+                    <a:pt x="1055167" y="921677"/>
+                  </a:lnTo>
+                  <a:lnTo>
+                    <a:pt x="984822" y="920472"/>
+                  </a:lnTo>
+                  <a:lnTo>
+                    <a:pt x="914478" y="919263"/>
+                  </a:lnTo>
+                  <a:lnTo>
+                    <a:pt x="844133" y="918049"/>
+                  </a:lnTo>
+                  <a:lnTo>
+                    <a:pt x="773789" y="916831"/>
+                  </a:lnTo>
+                  <a:lnTo>
+                    <a:pt x="703444" y="915609"/>
+                  </a:lnTo>
+                  <a:lnTo>
+                    <a:pt x="633100" y="914382"/>
+                  </a:lnTo>
+                  <a:lnTo>
+                    <a:pt x="562755" y="913151"/>
+                  </a:lnTo>
+                  <a:lnTo>
+                    <a:pt x="492411" y="911916"/>
+                  </a:lnTo>
+                  <a:lnTo>
+                    <a:pt x="422066" y="910676"/>
+                  </a:lnTo>
+                  <a:lnTo>
+                    <a:pt x="351722" y="909432"/>
+                  </a:lnTo>
+                  <a:lnTo>
+                    <a:pt x="281377" y="908183"/>
+                  </a:lnTo>
+                  <a:lnTo>
+                    <a:pt x="211033" y="906930"/>
+                  </a:lnTo>
+                  <a:lnTo>
+                    <a:pt x="140688" y="905672"/>
+                  </a:lnTo>
+                  <a:lnTo>
+                    <a:pt x="70344" y="904409"/>
+                  </a:lnTo>
+                  <a:lnTo>
+                    <a:pt x="0" y="903143"/>
                   </a:lnTo>
                   <a:close/>
                 </a:path>
@@ -3563,622 +3598,297 @@
         </p:sp>
         <p:sp>
           <p:nvSpPr>
-            <p:cNvPr id="21" name="pl21"/>
-            <p:cNvSpPr/>
-            <p:nvPr/>
-          </p:nvSpPr>
-          <p:spPr>
-            <a:xfrm>
-              <a:off x="1716516" y="2073503"/>
-              <a:ext cx="6546162" cy="2795728"/>
-            </a:xfrm>
-            <a:custGeom>
-              <a:avLst/>
-              <a:pathLst>
-                <a:path w="6546162" h="2795728">
-                  <a:moveTo>
-                    <a:pt x="0" y="0"/>
-                  </a:moveTo>
-                  <a:lnTo>
-                    <a:pt x="28512" y="50899"/>
-                  </a:lnTo>
-                  <a:lnTo>
-                    <a:pt x="100135" y="174165"/>
-                  </a:lnTo>
-                  <a:lnTo>
-                    <a:pt x="171757" y="293004"/>
-                  </a:lnTo>
-                  <a:lnTo>
-                    <a:pt x="243380" y="407577"/>
-                  </a:lnTo>
-                  <a:lnTo>
-                    <a:pt x="315002" y="518035"/>
-                  </a:lnTo>
-                  <a:lnTo>
-                    <a:pt x="386625" y="624527"/>
-                  </a:lnTo>
-                  <a:lnTo>
-                    <a:pt x="458247" y="727195"/>
-                  </a:lnTo>
-                  <a:lnTo>
-                    <a:pt x="529870" y="826176"/>
-                  </a:lnTo>
-                  <a:lnTo>
-                    <a:pt x="601492" y="921604"/>
-                  </a:lnTo>
-                  <a:lnTo>
-                    <a:pt x="673115" y="1013604"/>
-                  </a:lnTo>
-                  <a:lnTo>
-                    <a:pt x="744737" y="1102302"/>
-                  </a:lnTo>
-                  <a:lnTo>
-                    <a:pt x="816360" y="1187814"/>
-                  </a:lnTo>
-                  <a:lnTo>
-                    <a:pt x="887983" y="1270256"/>
-                  </a:lnTo>
-                  <a:lnTo>
-                    <a:pt x="959605" y="1349737"/>
-                  </a:lnTo>
-                  <a:lnTo>
-                    <a:pt x="1031228" y="1426364"/>
-                  </a:lnTo>
-                  <a:lnTo>
-                    <a:pt x="1102850" y="1500240"/>
-                  </a:lnTo>
-                  <a:lnTo>
-                    <a:pt x="1174473" y="1571463"/>
-                  </a:lnTo>
-                  <a:lnTo>
-                    <a:pt x="1246095" y="1640129"/>
-                  </a:lnTo>
-                  <a:lnTo>
-                    <a:pt x="1317718" y="1706329"/>
-                  </a:lnTo>
-                  <a:lnTo>
-                    <a:pt x="1389340" y="1770152"/>
-                  </a:lnTo>
-                  <a:lnTo>
-                    <a:pt x="1460963" y="1831684"/>
-                  </a:lnTo>
-                  <a:lnTo>
-                    <a:pt x="1532585" y="1891005"/>
-                  </a:lnTo>
-                  <a:lnTo>
-                    <a:pt x="1604208" y="1948197"/>
-                  </a:lnTo>
-                  <a:lnTo>
-                    <a:pt x="1675830" y="2003335"/>
-                  </a:lnTo>
-                  <a:lnTo>
-                    <a:pt x="1747453" y="2056493"/>
-                  </a:lnTo>
-                  <a:lnTo>
-                    <a:pt x="1819075" y="2107743"/>
-                  </a:lnTo>
-                  <a:lnTo>
-                    <a:pt x="1890698" y="2157152"/>
-                  </a:lnTo>
-                  <a:lnTo>
-                    <a:pt x="1962320" y="2204787"/>
-                  </a:lnTo>
-                  <a:lnTo>
-                    <a:pt x="2033943" y="2250711"/>
-                  </a:lnTo>
-                  <a:lnTo>
-                    <a:pt x="2105565" y="2294987"/>
-                  </a:lnTo>
-                  <a:lnTo>
-                    <a:pt x="2177188" y="2337673"/>
-                  </a:lnTo>
-                  <a:lnTo>
-                    <a:pt x="2248811" y="2378826"/>
-                  </a:lnTo>
-                  <a:lnTo>
-                    <a:pt x="2320433" y="2418501"/>
-                  </a:lnTo>
-                  <a:lnTo>
-                    <a:pt x="2392056" y="2456751"/>
-                  </a:lnTo>
-                  <a:lnTo>
-                    <a:pt x="2463678" y="2493628"/>
-                  </a:lnTo>
-                  <a:lnTo>
-                    <a:pt x="2535301" y="2529181"/>
-                  </a:lnTo>
-                  <a:lnTo>
-                    <a:pt x="2606923" y="2563457"/>
-                  </a:lnTo>
-                  <a:lnTo>
-                    <a:pt x="2678546" y="2596503"/>
-                  </a:lnTo>
-                  <a:lnTo>
-                    <a:pt x="2750168" y="2628362"/>
-                  </a:lnTo>
-                  <a:lnTo>
-                    <a:pt x="2821791" y="2654754"/>
-                  </a:lnTo>
-                  <a:lnTo>
-                    <a:pt x="2893413" y="2657720"/>
-                  </a:lnTo>
-                  <a:lnTo>
-                    <a:pt x="2965036" y="2660676"/>
-                  </a:lnTo>
-                  <a:lnTo>
-                    <a:pt x="3036658" y="2663621"/>
-                  </a:lnTo>
-                  <a:lnTo>
-                    <a:pt x="3108281" y="2666555"/>
-                  </a:lnTo>
-                  <a:lnTo>
-                    <a:pt x="3179903" y="2669479"/>
-                  </a:lnTo>
-                  <a:lnTo>
-                    <a:pt x="3251526" y="2672393"/>
-                  </a:lnTo>
-                  <a:lnTo>
-                    <a:pt x="3323148" y="2675296"/>
-                  </a:lnTo>
-                  <a:lnTo>
-                    <a:pt x="3394771" y="2678189"/>
-                  </a:lnTo>
-                  <a:lnTo>
-                    <a:pt x="3466393" y="2681071"/>
-                  </a:lnTo>
-                  <a:lnTo>
-                    <a:pt x="3538016" y="2683943"/>
-                  </a:lnTo>
-                  <a:lnTo>
-                    <a:pt x="3609639" y="2686805"/>
-                  </a:lnTo>
-                  <a:lnTo>
-                    <a:pt x="3681261" y="2689657"/>
-                  </a:lnTo>
-                  <a:lnTo>
-                    <a:pt x="3752884" y="2692498"/>
-                  </a:lnTo>
-                  <a:lnTo>
-                    <a:pt x="3824506" y="2695329"/>
-                  </a:lnTo>
-                  <a:lnTo>
-                    <a:pt x="3896129" y="2698150"/>
-                  </a:lnTo>
-                  <a:lnTo>
-                    <a:pt x="3967751" y="2700961"/>
-                  </a:lnTo>
-                  <a:lnTo>
-                    <a:pt x="4039374" y="2703762"/>
-                  </a:lnTo>
-                  <a:lnTo>
-                    <a:pt x="4110996" y="2706553"/>
-                  </a:lnTo>
-                  <a:lnTo>
-                    <a:pt x="4182619" y="2709334"/>
-                  </a:lnTo>
-                  <a:lnTo>
-                    <a:pt x="4254241" y="2712105"/>
-                  </a:lnTo>
-                  <a:lnTo>
-                    <a:pt x="4325864" y="2714866"/>
-                  </a:lnTo>
-                  <a:lnTo>
-                    <a:pt x="4397486" y="2717617"/>
-                  </a:lnTo>
-                  <a:lnTo>
-                    <a:pt x="4469109" y="2720358"/>
-                  </a:lnTo>
-                  <a:lnTo>
-                    <a:pt x="4540731" y="2723090"/>
-                  </a:lnTo>
-                  <a:lnTo>
-                    <a:pt x="4612354" y="2725811"/>
-                  </a:lnTo>
-                  <a:lnTo>
-                    <a:pt x="4683976" y="2728523"/>
-                  </a:lnTo>
-                  <a:lnTo>
-                    <a:pt x="4755599" y="2731226"/>
-                  </a:lnTo>
-                  <a:lnTo>
-                    <a:pt x="4827221" y="2733918"/>
-                  </a:lnTo>
-                  <a:lnTo>
-                    <a:pt x="4898844" y="2736601"/>
-                  </a:lnTo>
-                  <a:lnTo>
-                    <a:pt x="4970467" y="2739275"/>
-                  </a:lnTo>
-                  <a:lnTo>
-                    <a:pt x="5042089" y="2741938"/>
-                  </a:lnTo>
-                  <a:lnTo>
-                    <a:pt x="5113712" y="2744593"/>
-                  </a:lnTo>
-                  <a:lnTo>
-                    <a:pt x="5185334" y="2747237"/>
-                  </a:lnTo>
-                  <a:lnTo>
-                    <a:pt x="5256957" y="2749873"/>
-                  </a:lnTo>
-                  <a:lnTo>
-                    <a:pt x="5328579" y="2752499"/>
-                  </a:lnTo>
-                  <a:lnTo>
-                    <a:pt x="5400202" y="2755115"/>
-                  </a:lnTo>
-                  <a:lnTo>
-                    <a:pt x="5471824" y="2757722"/>
-                  </a:lnTo>
-                  <a:lnTo>
-                    <a:pt x="5543447" y="2760320"/>
-                  </a:lnTo>
-                  <a:lnTo>
-                    <a:pt x="5615069" y="2762908"/>
-                  </a:lnTo>
-                  <a:lnTo>
-                    <a:pt x="5686692" y="2765488"/>
-                  </a:lnTo>
-                  <a:lnTo>
-                    <a:pt x="5758314" y="2768058"/>
-                  </a:lnTo>
-                  <a:lnTo>
-                    <a:pt x="5829937" y="2770619"/>
-                  </a:lnTo>
-                  <a:lnTo>
-                    <a:pt x="5901559" y="2773170"/>
-                  </a:lnTo>
-                  <a:lnTo>
-                    <a:pt x="5973182" y="2775713"/>
-                  </a:lnTo>
-                  <a:lnTo>
-                    <a:pt x="6044804" y="2778246"/>
-                  </a:lnTo>
-                  <a:lnTo>
-                    <a:pt x="6116427" y="2780770"/>
-                  </a:lnTo>
-                  <a:lnTo>
-                    <a:pt x="6188049" y="2783286"/>
-                  </a:lnTo>
-                  <a:lnTo>
-                    <a:pt x="6259672" y="2785792"/>
-                  </a:lnTo>
-                  <a:lnTo>
-                    <a:pt x="6331295" y="2788290"/>
-                  </a:lnTo>
-                  <a:lnTo>
-                    <a:pt x="6402917" y="2790778"/>
-                  </a:lnTo>
-                  <a:lnTo>
-                    <a:pt x="6474540" y="2793257"/>
-                  </a:lnTo>
-                  <a:lnTo>
-                    <a:pt x="6546162" y="2795728"/>
-                  </a:lnTo>
-                </a:path>
-              </a:pathLst>
-            </a:custGeom>
-          </p:spPr>
-          <p:txBody>
-            <a:bodyPr/>
-            <a:lstStyle/>
-            <a:p/>
-          </p:txBody>
-        </p:sp>
-        <p:sp>
-          <p:nvSpPr>
             <p:cNvPr id="22" name="pl22"/>
             <p:cNvSpPr/>
             <p:nvPr/>
           </p:nvSpPr>
           <p:spPr>
             <a:xfrm>
-              <a:off x="1172049" y="4576140"/>
-              <a:ext cx="7090630" cy="857955"/>
+              <a:off x="1770064" y="2143092"/>
+              <a:ext cx="6429352" cy="1008912"/>
             </a:xfrm>
             <a:custGeom>
               <a:avLst/>
               <a:pathLst>
-                <a:path w="7090630" h="857955">
+                <a:path w="6429352" h="1008912">
                   <a:moveTo>
-                    <a:pt x="7090630" y="857955"/>
+                    <a:pt x="0" y="0"/>
                   </a:moveTo>
                   <a:lnTo>
-                    <a:pt x="7019007" y="853368"/>
-                  </a:lnTo>
-                  <a:lnTo>
-                    <a:pt x="6947385" y="848611"/>
-                  </a:lnTo>
-                  <a:lnTo>
-                    <a:pt x="6875762" y="843676"/>
-                  </a:lnTo>
-                  <a:lnTo>
-                    <a:pt x="6804139" y="838557"/>
-                  </a:lnTo>
-                  <a:lnTo>
-                    <a:pt x="6732517" y="833248"/>
-                  </a:lnTo>
-                  <a:lnTo>
-                    <a:pt x="6660894" y="827740"/>
-                  </a:lnTo>
-                  <a:lnTo>
-                    <a:pt x="6589272" y="822028"/>
-                  </a:lnTo>
-                  <a:lnTo>
-                    <a:pt x="6517649" y="816103"/>
-                  </a:lnTo>
-                  <a:lnTo>
-                    <a:pt x="6446027" y="809958"/>
-                  </a:lnTo>
-                  <a:lnTo>
-                    <a:pt x="6374404" y="803583"/>
-                  </a:lnTo>
-                  <a:lnTo>
-                    <a:pt x="6302782" y="796971"/>
-                  </a:lnTo>
-                  <a:lnTo>
-                    <a:pt x="6231159" y="790113"/>
-                  </a:lnTo>
-                  <a:lnTo>
-                    <a:pt x="6159537" y="782999"/>
-                  </a:lnTo>
-                  <a:lnTo>
-                    <a:pt x="6087914" y="775621"/>
-                  </a:lnTo>
-                  <a:lnTo>
-                    <a:pt x="6016292" y="767967"/>
-                  </a:lnTo>
-                  <a:lnTo>
-                    <a:pt x="5944669" y="760029"/>
-                  </a:lnTo>
-                  <a:lnTo>
-                    <a:pt x="5873047" y="751795"/>
-                  </a:lnTo>
-                  <a:lnTo>
-                    <a:pt x="5801424" y="743254"/>
-                  </a:lnTo>
-                  <a:lnTo>
-                    <a:pt x="5729802" y="734395"/>
-                  </a:lnTo>
-                  <a:lnTo>
-                    <a:pt x="5658179" y="725206"/>
-                  </a:lnTo>
-                  <a:lnTo>
-                    <a:pt x="5586557" y="715675"/>
-                  </a:lnTo>
-                  <a:lnTo>
-                    <a:pt x="5514934" y="705789"/>
-                  </a:lnTo>
-                  <a:lnTo>
-                    <a:pt x="5443311" y="695534"/>
-                  </a:lnTo>
-                  <a:lnTo>
-                    <a:pt x="5371689" y="684898"/>
-                  </a:lnTo>
-                  <a:lnTo>
-                    <a:pt x="5300066" y="673866"/>
-                  </a:lnTo>
-                  <a:lnTo>
-                    <a:pt x="5228444" y="662422"/>
-                  </a:lnTo>
-                  <a:lnTo>
-                    <a:pt x="5156821" y="650553"/>
-                  </a:lnTo>
-                  <a:lnTo>
-                    <a:pt x="5085199" y="638241"/>
-                  </a:lnTo>
-                  <a:lnTo>
-                    <a:pt x="5013576" y="625471"/>
-                  </a:lnTo>
-                  <a:lnTo>
-                    <a:pt x="4941954" y="612225"/>
-                  </a:lnTo>
-                  <a:lnTo>
-                    <a:pt x="4870331" y="598486"/>
-                  </a:lnTo>
-                  <a:lnTo>
-                    <a:pt x="4798709" y="584235"/>
-                  </a:lnTo>
-                  <a:lnTo>
-                    <a:pt x="4727086" y="569454"/>
-                  </a:lnTo>
-                  <a:lnTo>
-                    <a:pt x="4655464" y="554122"/>
-                  </a:lnTo>
-                  <a:lnTo>
-                    <a:pt x="4583841" y="538218"/>
-                  </a:lnTo>
-                  <a:lnTo>
-                    <a:pt x="4512219" y="521723"/>
-                  </a:lnTo>
-                  <a:lnTo>
-                    <a:pt x="4440596" y="504613"/>
-                  </a:lnTo>
-                  <a:lnTo>
-                    <a:pt x="4368974" y="486866"/>
-                  </a:lnTo>
-                  <a:lnTo>
-                    <a:pt x="4297351" y="468458"/>
-                  </a:lnTo>
-                  <a:lnTo>
-                    <a:pt x="4225729" y="449364"/>
-                  </a:lnTo>
-                  <a:lnTo>
-                    <a:pt x="4154106" y="429559"/>
-                  </a:lnTo>
-                  <a:lnTo>
-                    <a:pt x="4082483" y="409017"/>
-                  </a:lnTo>
-                  <a:lnTo>
-                    <a:pt x="4010861" y="387709"/>
-                  </a:lnTo>
-                  <a:lnTo>
-                    <a:pt x="3939238" y="365608"/>
-                  </a:lnTo>
-                  <a:lnTo>
-                    <a:pt x="3867616" y="342683"/>
-                  </a:lnTo>
-                  <a:lnTo>
-                    <a:pt x="3795993" y="318905"/>
-                  </a:lnTo>
-                  <a:lnTo>
-                    <a:pt x="3724371" y="294241"/>
-                  </a:lnTo>
-                  <a:lnTo>
-                    <a:pt x="3652748" y="268659"/>
-                  </a:lnTo>
-                  <a:lnTo>
-                    <a:pt x="3581126" y="242123"/>
-                  </a:lnTo>
-                  <a:lnTo>
-                    <a:pt x="3509503" y="214600"/>
-                  </a:lnTo>
-                  <a:lnTo>
-                    <a:pt x="3437881" y="186051"/>
-                  </a:lnTo>
-                  <a:lnTo>
-                    <a:pt x="3366258" y="156439"/>
-                  </a:lnTo>
-                  <a:lnTo>
-                    <a:pt x="3294636" y="149140"/>
-                  </a:lnTo>
-                  <a:lnTo>
-                    <a:pt x="3223013" y="146152"/>
-                  </a:lnTo>
-                  <a:lnTo>
-                    <a:pt x="3151391" y="143154"/>
-                  </a:lnTo>
-                  <a:lnTo>
-                    <a:pt x="3079768" y="140145"/>
-                  </a:lnTo>
-                  <a:lnTo>
-                    <a:pt x="3008146" y="137125"/>
-                  </a:lnTo>
-                  <a:lnTo>
-                    <a:pt x="2936523" y="134094"/>
-                  </a:lnTo>
-                  <a:lnTo>
-                    <a:pt x="2864901" y="131052"/>
-                  </a:lnTo>
-                  <a:lnTo>
-                    <a:pt x="2793278" y="128000"/>
-                  </a:lnTo>
-                  <a:lnTo>
-                    <a:pt x="2721655" y="124936"/>
-                  </a:lnTo>
-                  <a:lnTo>
-                    <a:pt x="2650033" y="121862"/>
-                  </a:lnTo>
-                  <a:lnTo>
-                    <a:pt x="2578410" y="118776"/>
-                  </a:lnTo>
-                  <a:lnTo>
-                    <a:pt x="2506788" y="115680"/>
-                  </a:lnTo>
-                  <a:lnTo>
-                    <a:pt x="2435165" y="112572"/>
-                  </a:lnTo>
-                  <a:lnTo>
-                    <a:pt x="2363543" y="109453"/>
-                  </a:lnTo>
-                  <a:lnTo>
-                    <a:pt x="2291920" y="106323"/>
-                  </a:lnTo>
-                  <a:lnTo>
-                    <a:pt x="2220298" y="103182"/>
-                  </a:lnTo>
-                  <a:lnTo>
-                    <a:pt x="2148675" y="100029"/>
-                  </a:lnTo>
-                  <a:lnTo>
-                    <a:pt x="2077053" y="96865"/>
-                  </a:lnTo>
-                  <a:lnTo>
-                    <a:pt x="2005430" y="93690"/>
-                  </a:lnTo>
-                  <a:lnTo>
-                    <a:pt x="1933808" y="90503"/>
-                  </a:lnTo>
-                  <a:lnTo>
-                    <a:pt x="1862185" y="87305"/>
-                  </a:lnTo>
-                  <a:lnTo>
-                    <a:pt x="1790563" y="84096"/>
-                  </a:lnTo>
-                  <a:lnTo>
-                    <a:pt x="1718940" y="80874"/>
-                  </a:lnTo>
-                  <a:lnTo>
-                    <a:pt x="1647318" y="77642"/>
-                  </a:lnTo>
-                  <a:lnTo>
-                    <a:pt x="1575695" y="74397"/>
-                  </a:lnTo>
-                  <a:lnTo>
-                    <a:pt x="1504073" y="71141"/>
-                  </a:lnTo>
-                  <a:lnTo>
-                    <a:pt x="1432450" y="67874"/>
-                  </a:lnTo>
-                  <a:lnTo>
-                    <a:pt x="1360827" y="64594"/>
-                  </a:lnTo>
-                  <a:lnTo>
-                    <a:pt x="1289205" y="61303"/>
-                  </a:lnTo>
-                  <a:lnTo>
-                    <a:pt x="1217582" y="58000"/>
-                  </a:lnTo>
-                  <a:lnTo>
-                    <a:pt x="1145960" y="54685"/>
-                  </a:lnTo>
-                  <a:lnTo>
-                    <a:pt x="1074337" y="51359"/>
-                  </a:lnTo>
-                  <a:lnTo>
-                    <a:pt x="1002715" y="48020"/>
-                  </a:lnTo>
-                  <a:lnTo>
-                    <a:pt x="931092" y="44669"/>
-                  </a:lnTo>
-                  <a:lnTo>
-                    <a:pt x="859470" y="41307"/>
-                  </a:lnTo>
-                  <a:lnTo>
-                    <a:pt x="787847" y="37932"/>
-                  </a:lnTo>
-                  <a:lnTo>
-                    <a:pt x="716225" y="34545"/>
-                  </a:lnTo>
-                  <a:lnTo>
-                    <a:pt x="644602" y="31146"/>
-                  </a:lnTo>
-                  <a:lnTo>
-                    <a:pt x="572980" y="27734"/>
-                  </a:lnTo>
-                  <a:lnTo>
-                    <a:pt x="501357" y="24311"/>
-                  </a:lnTo>
-                  <a:lnTo>
-                    <a:pt x="429735" y="20875"/>
-                  </a:lnTo>
-                  <a:lnTo>
-                    <a:pt x="358112" y="17427"/>
-                  </a:lnTo>
-                  <a:lnTo>
-                    <a:pt x="286490" y="13966"/>
-                  </a:lnTo>
-                  <a:lnTo>
-                    <a:pt x="214867" y="10493"/>
-                  </a:lnTo>
-                  <a:lnTo>
-                    <a:pt x="143245" y="7008"/>
-                  </a:lnTo>
-                  <a:lnTo>
-                    <a:pt x="71622" y="3510"/>
-                  </a:lnTo>
-                  <a:lnTo>
-                    <a:pt x="0" y="0"/>
+                    <a:pt x="28003" y="18368"/>
+                  </a:lnTo>
+                  <a:lnTo>
+                    <a:pt x="98348" y="62852"/>
+                  </a:lnTo>
+                  <a:lnTo>
+                    <a:pt x="168692" y="105738"/>
+                  </a:lnTo>
+                  <a:lnTo>
+                    <a:pt x="239037" y="147084"/>
+                  </a:lnTo>
+                  <a:lnTo>
+                    <a:pt x="309381" y="186946"/>
+                  </a:lnTo>
+                  <a:lnTo>
+                    <a:pt x="379726" y="225377"/>
+                  </a:lnTo>
+                  <a:lnTo>
+                    <a:pt x="450070" y="262427"/>
+                  </a:lnTo>
+                  <a:lnTo>
+                    <a:pt x="520415" y="298147"/>
+                  </a:lnTo>
+                  <a:lnTo>
+                    <a:pt x="590759" y="332585"/>
+                  </a:lnTo>
+                  <a:lnTo>
+                    <a:pt x="661104" y="365786"/>
+                  </a:lnTo>
+                  <a:lnTo>
+                    <a:pt x="731448" y="397794"/>
+                  </a:lnTo>
+                  <a:lnTo>
+                    <a:pt x="801793" y="428654"/>
+                  </a:lnTo>
+                  <a:lnTo>
+                    <a:pt x="872137" y="458405"/>
+                  </a:lnTo>
+                  <a:lnTo>
+                    <a:pt x="942482" y="487088"/>
+                  </a:lnTo>
+                  <a:lnTo>
+                    <a:pt x="1012826" y="514741"/>
+                  </a:lnTo>
+                  <a:lnTo>
+                    <a:pt x="1083171" y="541401"/>
+                  </a:lnTo>
+                  <a:lnTo>
+                    <a:pt x="1153515" y="567104"/>
+                  </a:lnTo>
+                  <a:lnTo>
+                    <a:pt x="1223860" y="591884"/>
+                  </a:lnTo>
+                  <a:lnTo>
+                    <a:pt x="1294204" y="615774"/>
+                  </a:lnTo>
+                  <a:lnTo>
+                    <a:pt x="1364549" y="638806"/>
+                  </a:lnTo>
+                  <a:lnTo>
+                    <a:pt x="1434893" y="661011"/>
+                  </a:lnTo>
+                  <a:lnTo>
+                    <a:pt x="1505238" y="682419"/>
+                  </a:lnTo>
+                  <a:lnTo>
+                    <a:pt x="1575582" y="703058"/>
+                  </a:lnTo>
+                  <a:lnTo>
+                    <a:pt x="1645927" y="722956"/>
+                  </a:lnTo>
+                  <a:lnTo>
+                    <a:pt x="1716271" y="742140"/>
+                  </a:lnTo>
+                  <a:lnTo>
+                    <a:pt x="1786616" y="760634"/>
+                  </a:lnTo>
+                  <a:lnTo>
+                    <a:pt x="1856960" y="778465"/>
+                  </a:lnTo>
+                  <a:lnTo>
+                    <a:pt x="1927305" y="795655"/>
+                  </a:lnTo>
+                  <a:lnTo>
+                    <a:pt x="1997649" y="812228"/>
+                  </a:lnTo>
+                  <a:lnTo>
+                    <a:pt x="2067994" y="828206"/>
+                  </a:lnTo>
+                  <a:lnTo>
+                    <a:pt x="2138338" y="843611"/>
+                  </a:lnTo>
+                  <a:lnTo>
+                    <a:pt x="2208683" y="858462"/>
+                  </a:lnTo>
+                  <a:lnTo>
+                    <a:pt x="2279027" y="872780"/>
+                  </a:lnTo>
+                  <a:lnTo>
+                    <a:pt x="2349372" y="886583"/>
+                  </a:lnTo>
+                  <a:lnTo>
+                    <a:pt x="2419716" y="899891"/>
+                  </a:lnTo>
+                  <a:lnTo>
+                    <a:pt x="2490061" y="912722"/>
+                  </a:lnTo>
+                  <a:lnTo>
+                    <a:pt x="2560405" y="925091"/>
+                  </a:lnTo>
+                  <a:lnTo>
+                    <a:pt x="2630750" y="937017"/>
+                  </a:lnTo>
+                  <a:lnTo>
+                    <a:pt x="2701094" y="948514"/>
+                  </a:lnTo>
+                  <a:lnTo>
+                    <a:pt x="2771439" y="958038"/>
+                  </a:lnTo>
+                  <a:lnTo>
+                    <a:pt x="2841783" y="959108"/>
+                  </a:lnTo>
+                  <a:lnTo>
+                    <a:pt x="2912128" y="960175"/>
+                  </a:lnTo>
+                  <a:lnTo>
+                    <a:pt x="2982472" y="961238"/>
+                  </a:lnTo>
+                  <a:lnTo>
+                    <a:pt x="3052817" y="962297"/>
+                  </a:lnTo>
+                  <a:lnTo>
+                    <a:pt x="3123161" y="963352"/>
+                  </a:lnTo>
+                  <a:lnTo>
+                    <a:pt x="3193506" y="964403"/>
+                  </a:lnTo>
+                  <a:lnTo>
+                    <a:pt x="3263850" y="965451"/>
+                  </a:lnTo>
+                  <a:lnTo>
+                    <a:pt x="3334195" y="966495"/>
+                  </a:lnTo>
+                  <a:lnTo>
+                    <a:pt x="3404539" y="967535"/>
+                  </a:lnTo>
+                  <a:lnTo>
+                    <a:pt x="3474883" y="968572"/>
+                  </a:lnTo>
+                  <a:lnTo>
+                    <a:pt x="3545228" y="969604"/>
+                  </a:lnTo>
+                  <a:lnTo>
+                    <a:pt x="3615572" y="970633"/>
+                  </a:lnTo>
+                  <a:lnTo>
+                    <a:pt x="3685917" y="971659"/>
+                  </a:lnTo>
+                  <a:lnTo>
+                    <a:pt x="3756261" y="972681"/>
+                  </a:lnTo>
+                  <a:lnTo>
+                    <a:pt x="3826606" y="973699"/>
+                  </a:lnTo>
+                  <a:lnTo>
+                    <a:pt x="3896950" y="974713"/>
+                  </a:lnTo>
+                  <a:lnTo>
+                    <a:pt x="3967295" y="975724"/>
+                  </a:lnTo>
+                  <a:lnTo>
+                    <a:pt x="4037639" y="976731"/>
+                  </a:lnTo>
+                  <a:lnTo>
+                    <a:pt x="4107984" y="977734"/>
+                  </a:lnTo>
+                  <a:lnTo>
+                    <a:pt x="4178328" y="978734"/>
+                  </a:lnTo>
+                  <a:lnTo>
+                    <a:pt x="4248673" y="979731"/>
+                  </a:lnTo>
+                  <a:lnTo>
+                    <a:pt x="4319017" y="980724"/>
+                  </a:lnTo>
+                  <a:lnTo>
+                    <a:pt x="4389362" y="981713"/>
+                  </a:lnTo>
+                  <a:lnTo>
+                    <a:pt x="4459706" y="982699"/>
+                  </a:lnTo>
+                  <a:lnTo>
+                    <a:pt x="4530051" y="983681"/>
+                  </a:lnTo>
+                  <a:lnTo>
+                    <a:pt x="4600395" y="984660"/>
+                  </a:lnTo>
+                  <a:lnTo>
+                    <a:pt x="4670740" y="985635"/>
+                  </a:lnTo>
+                  <a:lnTo>
+                    <a:pt x="4741084" y="986606"/>
+                  </a:lnTo>
+                  <a:lnTo>
+                    <a:pt x="4811429" y="987575"/>
+                  </a:lnTo>
+                  <a:lnTo>
+                    <a:pt x="4881773" y="988539"/>
+                  </a:lnTo>
+                  <a:lnTo>
+                    <a:pt x="4952118" y="989501"/>
+                  </a:lnTo>
+                  <a:lnTo>
+                    <a:pt x="5022462" y="990459"/>
+                  </a:lnTo>
+                  <a:lnTo>
+                    <a:pt x="5092807" y="991413"/>
+                  </a:lnTo>
+                  <a:lnTo>
+                    <a:pt x="5163151" y="992364"/>
+                  </a:lnTo>
+                  <a:lnTo>
+                    <a:pt x="5233496" y="993312"/>
+                  </a:lnTo>
+                  <a:lnTo>
+                    <a:pt x="5303840" y="994256"/>
+                  </a:lnTo>
+                  <a:lnTo>
+                    <a:pt x="5374185" y="995197"/>
+                  </a:lnTo>
+                  <a:lnTo>
+                    <a:pt x="5444529" y="996134"/>
+                  </a:lnTo>
+                  <a:lnTo>
+                    <a:pt x="5514874" y="997068"/>
+                  </a:lnTo>
+                  <a:lnTo>
+                    <a:pt x="5585218" y="997999"/>
+                  </a:lnTo>
+                  <a:lnTo>
+                    <a:pt x="5655563" y="998927"/>
+                  </a:lnTo>
+                  <a:lnTo>
+                    <a:pt x="5725907" y="999851"/>
+                  </a:lnTo>
+                  <a:lnTo>
+                    <a:pt x="5796252" y="1000772"/>
+                  </a:lnTo>
+                  <a:lnTo>
+                    <a:pt x="5866596" y="1001689"/>
+                  </a:lnTo>
+                  <a:lnTo>
+                    <a:pt x="5936941" y="1002603"/>
+                  </a:lnTo>
+                  <a:lnTo>
+                    <a:pt x="6007285" y="1003514"/>
+                  </a:lnTo>
+                  <a:lnTo>
+                    <a:pt x="6077630" y="1004422"/>
+                  </a:lnTo>
+                  <a:lnTo>
+                    <a:pt x="6147974" y="1005327"/>
+                  </a:lnTo>
+                  <a:lnTo>
+                    <a:pt x="6218319" y="1006228"/>
+                  </a:lnTo>
+                  <a:lnTo>
+                    <a:pt x="6288663" y="1007126"/>
+                  </a:lnTo>
+                  <a:lnTo>
+                    <a:pt x="6359008" y="1008021"/>
+                  </a:lnTo>
+                  <a:lnTo>
+                    <a:pt x="6429352" y="1008912"/>
                   </a:lnTo>
                 </a:path>
               </a:pathLst>
@@ -4198,312 +3908,637 @@
           </p:nvSpPr>
           <p:spPr>
             <a:xfrm>
-              <a:off x="1172049" y="3432971"/>
-              <a:ext cx="7090630" cy="1833191"/>
+              <a:off x="1235312" y="3046235"/>
+              <a:ext cx="6964104" cy="309616"/>
             </a:xfrm>
             <a:custGeom>
               <a:avLst/>
               <a:pathLst>
-                <a:path w="7090630" h="1833191">
+                <a:path w="6964104" h="309616">
+                  <a:moveTo>
+                    <a:pt x="6964104" y="309616"/>
+                  </a:moveTo>
+                  <a:lnTo>
+                    <a:pt x="6893760" y="307960"/>
+                  </a:lnTo>
+                  <a:lnTo>
+                    <a:pt x="6823415" y="306243"/>
+                  </a:lnTo>
+                  <a:lnTo>
+                    <a:pt x="6753071" y="304462"/>
+                  </a:lnTo>
+                  <a:lnTo>
+                    <a:pt x="6682726" y="302615"/>
+                  </a:lnTo>
+                  <a:lnTo>
+                    <a:pt x="6612382" y="300699"/>
+                  </a:lnTo>
+                  <a:lnTo>
+                    <a:pt x="6542037" y="298712"/>
+                  </a:lnTo>
+                  <a:lnTo>
+                    <a:pt x="6471693" y="296650"/>
+                  </a:lnTo>
+                  <a:lnTo>
+                    <a:pt x="6401348" y="294512"/>
+                  </a:lnTo>
+                  <a:lnTo>
+                    <a:pt x="6331004" y="292294"/>
+                  </a:lnTo>
+                  <a:lnTo>
+                    <a:pt x="6260659" y="289994"/>
+                  </a:lnTo>
+                  <a:lnTo>
+                    <a:pt x="6190315" y="287608"/>
+                  </a:lnTo>
+                  <a:lnTo>
+                    <a:pt x="6119970" y="285133"/>
+                  </a:lnTo>
+                  <a:lnTo>
+                    <a:pt x="6049626" y="282566"/>
+                  </a:lnTo>
+                  <a:lnTo>
+                    <a:pt x="5979281" y="279903"/>
+                  </a:lnTo>
+                  <a:lnTo>
+                    <a:pt x="5908937" y="277141"/>
+                  </a:lnTo>
+                  <a:lnTo>
+                    <a:pt x="5838592" y="274276"/>
+                  </a:lnTo>
+                  <a:lnTo>
+                    <a:pt x="5768248" y="271305"/>
+                  </a:lnTo>
+                  <a:lnTo>
+                    <a:pt x="5697903" y="268222"/>
+                  </a:lnTo>
+                  <a:lnTo>
+                    <a:pt x="5627559" y="265025"/>
+                  </a:lnTo>
+                  <a:lnTo>
+                    <a:pt x="5557214" y="261709"/>
+                  </a:lnTo>
+                  <a:lnTo>
+                    <a:pt x="5486870" y="258270"/>
+                  </a:lnTo>
+                  <a:lnTo>
+                    <a:pt x="5416525" y="254702"/>
+                  </a:lnTo>
+                  <a:lnTo>
+                    <a:pt x="5346181" y="251002"/>
+                  </a:lnTo>
+                  <a:lnTo>
+                    <a:pt x="5275836" y="247163"/>
+                  </a:lnTo>
+                  <a:lnTo>
+                    <a:pt x="5205492" y="243182"/>
+                  </a:lnTo>
+                  <a:lnTo>
+                    <a:pt x="5135147" y="239052"/>
+                  </a:lnTo>
+                  <a:lnTo>
+                    <a:pt x="5064803" y="234769"/>
+                  </a:lnTo>
+                  <a:lnTo>
+                    <a:pt x="4994458" y="230326"/>
+                  </a:lnTo>
+                  <a:lnTo>
+                    <a:pt x="4924114" y="225717"/>
+                  </a:lnTo>
+                  <a:lnTo>
+                    <a:pt x="4853769" y="220937"/>
+                  </a:lnTo>
+                  <a:lnTo>
+                    <a:pt x="4783425" y="215979"/>
+                  </a:lnTo>
+                  <a:lnTo>
+                    <a:pt x="4713080" y="210836"/>
+                  </a:lnTo>
+                  <a:lnTo>
+                    <a:pt x="4642736" y="205502"/>
+                  </a:lnTo>
+                  <a:lnTo>
+                    <a:pt x="4572391" y="199969"/>
+                  </a:lnTo>
+                  <a:lnTo>
+                    <a:pt x="4502047" y="194230"/>
+                  </a:lnTo>
+                  <a:lnTo>
+                    <a:pt x="4431702" y="188277"/>
+                  </a:lnTo>
+                  <a:lnTo>
+                    <a:pt x="4361358" y="182103"/>
+                  </a:lnTo>
+                  <a:lnTo>
+                    <a:pt x="4291013" y="175698"/>
+                  </a:lnTo>
+                  <a:lnTo>
+                    <a:pt x="4220669" y="169055"/>
+                  </a:lnTo>
+                  <a:lnTo>
+                    <a:pt x="4150324" y="162165"/>
+                  </a:lnTo>
+                  <a:lnTo>
+                    <a:pt x="4079980" y="155017"/>
+                  </a:lnTo>
+                  <a:lnTo>
+                    <a:pt x="4009635" y="147604"/>
+                  </a:lnTo>
+                  <a:lnTo>
+                    <a:pt x="3939291" y="139915"/>
+                  </a:lnTo>
+                  <a:lnTo>
+                    <a:pt x="3868946" y="131939"/>
+                  </a:lnTo>
+                  <a:lnTo>
+                    <a:pt x="3798602" y="123666"/>
+                  </a:lnTo>
+                  <a:lnTo>
+                    <a:pt x="3728257" y="115085"/>
+                  </a:lnTo>
+                  <a:lnTo>
+                    <a:pt x="3657913" y="106184"/>
+                  </a:lnTo>
+                  <a:lnTo>
+                    <a:pt x="3587569" y="96952"/>
+                  </a:lnTo>
+                  <a:lnTo>
+                    <a:pt x="3517224" y="87376"/>
+                  </a:lnTo>
+                  <a:lnTo>
+                    <a:pt x="3446880" y="77444"/>
+                  </a:lnTo>
+                  <a:lnTo>
+                    <a:pt x="3376535" y="67141"/>
+                  </a:lnTo>
+                  <a:lnTo>
+                    <a:pt x="3306191" y="56455"/>
+                  </a:lnTo>
+                  <a:lnTo>
+                    <a:pt x="3235846" y="53821"/>
+                  </a:lnTo>
+                  <a:lnTo>
+                    <a:pt x="3165502" y="52742"/>
+                  </a:lnTo>
+                  <a:lnTo>
+                    <a:pt x="3095157" y="51660"/>
+                  </a:lnTo>
+                  <a:lnTo>
+                    <a:pt x="3024813" y="50575"/>
+                  </a:lnTo>
+                  <a:lnTo>
+                    <a:pt x="2954468" y="49485"/>
+                  </a:lnTo>
+                  <a:lnTo>
+                    <a:pt x="2884124" y="48391"/>
+                  </a:lnTo>
+                  <a:lnTo>
+                    <a:pt x="2813779" y="47293"/>
+                  </a:lnTo>
+                  <a:lnTo>
+                    <a:pt x="2743435" y="46192"/>
+                  </a:lnTo>
+                  <a:lnTo>
+                    <a:pt x="2673090" y="45086"/>
+                  </a:lnTo>
+                  <a:lnTo>
+                    <a:pt x="2602746" y="43977"/>
+                  </a:lnTo>
+                  <a:lnTo>
+                    <a:pt x="2532401" y="42863"/>
+                  </a:lnTo>
+                  <a:lnTo>
+                    <a:pt x="2462057" y="41746"/>
+                  </a:lnTo>
+                  <a:lnTo>
+                    <a:pt x="2391712" y="40624"/>
+                  </a:lnTo>
+                  <a:lnTo>
+                    <a:pt x="2321368" y="39499"/>
+                  </a:lnTo>
+                  <a:lnTo>
+                    <a:pt x="2251023" y="38369"/>
+                  </a:lnTo>
+                  <a:lnTo>
+                    <a:pt x="2180679" y="37236"/>
+                  </a:lnTo>
+                  <a:lnTo>
+                    <a:pt x="2110334" y="36098"/>
+                  </a:lnTo>
+                  <a:lnTo>
+                    <a:pt x="2039990" y="34956"/>
+                  </a:lnTo>
+                  <a:lnTo>
+                    <a:pt x="1969645" y="33810"/>
+                  </a:lnTo>
+                  <a:lnTo>
+                    <a:pt x="1899301" y="32660"/>
+                  </a:lnTo>
+                  <a:lnTo>
+                    <a:pt x="1828956" y="31506"/>
+                  </a:lnTo>
+                  <a:lnTo>
+                    <a:pt x="1758612" y="30348"/>
+                  </a:lnTo>
+                  <a:lnTo>
+                    <a:pt x="1688267" y="29185"/>
+                  </a:lnTo>
+                  <a:lnTo>
+                    <a:pt x="1617923" y="28019"/>
+                  </a:lnTo>
+                  <a:lnTo>
+                    <a:pt x="1547578" y="26848"/>
+                  </a:lnTo>
+                  <a:lnTo>
+                    <a:pt x="1477234" y="25673"/>
+                  </a:lnTo>
+                  <a:lnTo>
+                    <a:pt x="1406889" y="24494"/>
+                  </a:lnTo>
+                  <a:lnTo>
+                    <a:pt x="1336545" y="23310"/>
+                  </a:lnTo>
+                  <a:lnTo>
+                    <a:pt x="1266200" y="22123"/>
+                  </a:lnTo>
+                  <a:lnTo>
+                    <a:pt x="1195856" y="20931"/>
+                  </a:lnTo>
+                  <a:lnTo>
+                    <a:pt x="1125511" y="19734"/>
+                  </a:lnTo>
+                  <a:lnTo>
+                    <a:pt x="1055167" y="18534"/>
+                  </a:lnTo>
+                  <a:lnTo>
+                    <a:pt x="984822" y="17329"/>
+                  </a:lnTo>
+                  <a:lnTo>
+                    <a:pt x="914478" y="16120"/>
+                  </a:lnTo>
+                  <a:lnTo>
+                    <a:pt x="844133" y="14906"/>
+                  </a:lnTo>
+                  <a:lnTo>
+                    <a:pt x="773789" y="13688"/>
+                  </a:lnTo>
+                  <a:lnTo>
+                    <a:pt x="703444" y="12466"/>
+                  </a:lnTo>
+                  <a:lnTo>
+                    <a:pt x="633100" y="11239"/>
+                  </a:lnTo>
+                  <a:lnTo>
+                    <a:pt x="562755" y="10008"/>
+                  </a:lnTo>
+                  <a:lnTo>
+                    <a:pt x="492411" y="8773"/>
+                  </a:lnTo>
+                  <a:lnTo>
+                    <a:pt x="422066" y="7533"/>
+                  </a:lnTo>
+                  <a:lnTo>
+                    <a:pt x="351722" y="6289"/>
+                  </a:lnTo>
+                  <a:lnTo>
+                    <a:pt x="281377" y="5040"/>
+                  </a:lnTo>
+                  <a:lnTo>
+                    <a:pt x="211033" y="3787"/>
+                  </a:lnTo>
+                  <a:lnTo>
+                    <a:pt x="140688" y="2529"/>
+                  </a:lnTo>
+                  <a:lnTo>
+                    <a:pt x="70344" y="1266"/>
+                  </a:lnTo>
+                  <a:lnTo>
+                    <a:pt x="0" y="0"/>
+                  </a:lnTo>
+                </a:path>
+              </a:pathLst>
+            </a:custGeom>
+          </p:spPr>
+          <p:txBody>
+            <a:bodyPr/>
+            <a:lstStyle/>
+            <a:p/>
+          </p:txBody>
+        </p:sp>
+        <p:sp>
+          <p:nvSpPr>
+            <p:cNvPr id="24" name="pl24"/>
+            <p:cNvSpPr/>
+            <p:nvPr/>
+          </p:nvSpPr>
+          <p:spPr>
+            <a:xfrm>
+              <a:off x="1235312" y="2633692"/>
+              <a:ext cx="6964104" cy="661555"/>
+            </a:xfrm>
+            <a:custGeom>
+              <a:avLst/>
+              <a:pathLst>
+                <a:path w="6964104" h="661555">
                   <a:moveTo>
                     <a:pt x="0" y="0"/>
                   </a:moveTo>
                   <a:lnTo>
-                    <a:pt x="71622" y="42222"/>
-                  </a:lnTo>
-                  <a:lnTo>
-                    <a:pt x="143245" y="83606"/>
-                  </a:lnTo>
-                  <a:lnTo>
-                    <a:pt x="214867" y="124166"/>
-                  </a:lnTo>
-                  <a:lnTo>
-                    <a:pt x="286490" y="163921"/>
-                  </a:lnTo>
-                  <a:lnTo>
-                    <a:pt x="358112" y="202885"/>
-                  </a:lnTo>
-                  <a:lnTo>
-                    <a:pt x="429735" y="241075"/>
-                  </a:lnTo>
-                  <a:lnTo>
-                    <a:pt x="501357" y="278506"/>
-                  </a:lnTo>
-                  <a:lnTo>
-                    <a:pt x="572980" y="315193"/>
-                  </a:lnTo>
-                  <a:lnTo>
-                    <a:pt x="644602" y="351151"/>
-                  </a:lnTo>
-                  <a:lnTo>
-                    <a:pt x="716225" y="386394"/>
-                  </a:lnTo>
-                  <a:lnTo>
-                    <a:pt x="787847" y="420937"/>
-                  </a:lnTo>
-                  <a:lnTo>
-                    <a:pt x="859470" y="454793"/>
-                  </a:lnTo>
-                  <a:lnTo>
-                    <a:pt x="931092" y="487976"/>
-                  </a:lnTo>
-                  <a:lnTo>
-                    <a:pt x="1002715" y="520499"/>
-                  </a:lnTo>
-                  <a:lnTo>
-                    <a:pt x="1074337" y="552376"/>
-                  </a:lnTo>
-                  <a:lnTo>
-                    <a:pt x="1145960" y="583620"/>
-                  </a:lnTo>
-                  <a:lnTo>
-                    <a:pt x="1217582" y="614242"/>
-                  </a:lnTo>
-                  <a:lnTo>
-                    <a:pt x="1289205" y="644256"/>
-                  </a:lnTo>
-                  <a:lnTo>
-                    <a:pt x="1360827" y="673673"/>
-                  </a:lnTo>
-                  <a:lnTo>
-                    <a:pt x="1432450" y="702506"/>
-                  </a:lnTo>
-                  <a:lnTo>
-                    <a:pt x="1504073" y="730765"/>
-                  </a:lnTo>
-                  <a:lnTo>
-                    <a:pt x="1575695" y="758463"/>
-                  </a:lnTo>
-                  <a:lnTo>
-                    <a:pt x="1647318" y="785610"/>
-                  </a:lnTo>
-                  <a:lnTo>
-                    <a:pt x="1718940" y="812218"/>
-                  </a:lnTo>
-                  <a:lnTo>
-                    <a:pt x="1790563" y="838297"/>
-                  </a:lnTo>
-                  <a:lnTo>
-                    <a:pt x="1862185" y="863857"/>
-                  </a:lnTo>
-                  <a:lnTo>
-                    <a:pt x="1933808" y="888910"/>
-                  </a:lnTo>
-                  <a:lnTo>
-                    <a:pt x="2005430" y="913464"/>
-                  </a:lnTo>
-                  <a:lnTo>
-                    <a:pt x="2077053" y="937530"/>
-                  </a:lnTo>
-                  <a:lnTo>
-                    <a:pt x="2148675" y="961118"/>
-                  </a:lnTo>
-                  <a:lnTo>
-                    <a:pt x="2220298" y="984238"/>
-                  </a:lnTo>
-                  <a:lnTo>
-                    <a:pt x="2291920" y="1006897"/>
-                  </a:lnTo>
-                  <a:lnTo>
-                    <a:pt x="2363543" y="1029107"/>
-                  </a:lnTo>
-                  <a:lnTo>
-                    <a:pt x="2435165" y="1050874"/>
-                  </a:lnTo>
-                  <a:lnTo>
-                    <a:pt x="2506788" y="1072210"/>
-                  </a:lnTo>
-                  <a:lnTo>
-                    <a:pt x="2578410" y="1093121"/>
-                  </a:lnTo>
-                  <a:lnTo>
-                    <a:pt x="2650033" y="1113616"/>
-                  </a:lnTo>
-                  <a:lnTo>
-                    <a:pt x="2721655" y="1133704"/>
-                  </a:lnTo>
-                  <a:lnTo>
-                    <a:pt x="2793278" y="1153393"/>
-                  </a:lnTo>
-                  <a:lnTo>
-                    <a:pt x="2864901" y="1172691"/>
-                  </a:lnTo>
-                  <a:lnTo>
-                    <a:pt x="2936523" y="1191605"/>
-                  </a:lnTo>
-                  <a:lnTo>
-                    <a:pt x="3008146" y="1210143"/>
-                  </a:lnTo>
-                  <a:lnTo>
-                    <a:pt x="3079768" y="1228312"/>
-                  </a:lnTo>
-                  <a:lnTo>
-                    <a:pt x="3151391" y="1246121"/>
-                  </a:lnTo>
-                  <a:lnTo>
-                    <a:pt x="3223013" y="1263575"/>
-                  </a:lnTo>
-                  <a:lnTo>
-                    <a:pt x="3294636" y="1280683"/>
-                  </a:lnTo>
-                  <a:lnTo>
-                    <a:pt x="3366258" y="1297450"/>
-                  </a:lnTo>
-                  <a:lnTo>
-                    <a:pt x="3437881" y="1313884"/>
-                  </a:lnTo>
-                  <a:lnTo>
-                    <a:pt x="3509503" y="1329992"/>
-                  </a:lnTo>
-                  <a:lnTo>
-                    <a:pt x="3581126" y="1345779"/>
-                  </a:lnTo>
-                  <a:lnTo>
-                    <a:pt x="3652748" y="1361253"/>
-                  </a:lnTo>
-                  <a:lnTo>
-                    <a:pt x="3724371" y="1376419"/>
-                  </a:lnTo>
-                  <a:lnTo>
-                    <a:pt x="3795993" y="1391284"/>
-                  </a:lnTo>
-                  <a:lnTo>
-                    <a:pt x="3867616" y="1405853"/>
-                  </a:lnTo>
-                  <a:lnTo>
-                    <a:pt x="3939238" y="1420132"/>
-                  </a:lnTo>
-                  <a:lnTo>
-                    <a:pt x="4010861" y="1434128"/>
-                  </a:lnTo>
-                  <a:lnTo>
-                    <a:pt x="4082483" y="1447846"/>
-                  </a:lnTo>
-                  <a:lnTo>
-                    <a:pt x="4154106" y="1461291"/>
-                  </a:lnTo>
-                  <a:lnTo>
-                    <a:pt x="4225729" y="1474468"/>
-                  </a:lnTo>
-                  <a:lnTo>
-                    <a:pt x="4297351" y="1487384"/>
-                  </a:lnTo>
-                  <a:lnTo>
-                    <a:pt x="4368974" y="1500043"/>
-                  </a:lnTo>
-                  <a:lnTo>
-                    <a:pt x="4440596" y="1512451"/>
-                  </a:lnTo>
-                  <a:lnTo>
-                    <a:pt x="4512219" y="1524611"/>
-                  </a:lnTo>
-                  <a:lnTo>
-                    <a:pt x="4583841" y="1536531"/>
-                  </a:lnTo>
-                  <a:lnTo>
-                    <a:pt x="4655464" y="1548213"/>
-                  </a:lnTo>
-                  <a:lnTo>
-                    <a:pt x="4727086" y="1559663"/>
-                  </a:lnTo>
-                  <a:lnTo>
-                    <a:pt x="4798709" y="1570885"/>
-                  </a:lnTo>
-                  <a:lnTo>
-                    <a:pt x="4870331" y="1581884"/>
-                  </a:lnTo>
-                  <a:lnTo>
-                    <a:pt x="4941954" y="1592665"/>
-                  </a:lnTo>
-                  <a:lnTo>
-                    <a:pt x="5013576" y="1603232"/>
-                  </a:lnTo>
-                  <a:lnTo>
-                    <a:pt x="5085199" y="1613588"/>
-                  </a:lnTo>
-                  <a:lnTo>
-                    <a:pt x="5156821" y="1623739"/>
-                  </a:lnTo>
-                  <a:lnTo>
-                    <a:pt x="5228444" y="1633688"/>
-                  </a:lnTo>
-                  <a:lnTo>
-                    <a:pt x="5300066" y="1643439"/>
-                  </a:lnTo>
-                  <a:lnTo>
-                    <a:pt x="5371689" y="1652996"/>
-                  </a:lnTo>
-                  <a:lnTo>
-                    <a:pt x="5443311" y="1662363"/>
-                  </a:lnTo>
-                  <a:lnTo>
-                    <a:pt x="5514934" y="1671544"/>
-                  </a:lnTo>
-                  <a:lnTo>
-                    <a:pt x="5586557" y="1680543"/>
-                  </a:lnTo>
-                  <a:lnTo>
-                    <a:pt x="5658179" y="1689363"/>
-                  </a:lnTo>
-                  <a:lnTo>
-                    <a:pt x="5729802" y="1698007"/>
-                  </a:lnTo>
-                  <a:lnTo>
-                    <a:pt x="5801424" y="1706480"/>
-                  </a:lnTo>
-                  <a:lnTo>
-                    <a:pt x="5873047" y="1714784"/>
-                  </a:lnTo>
-                  <a:lnTo>
-                    <a:pt x="5944669" y="1722923"/>
-                  </a:lnTo>
-                  <a:lnTo>
-                    <a:pt x="6016292" y="1730901"/>
-                  </a:lnTo>
-                  <a:lnTo>
-                    <a:pt x="6087914" y="1738720"/>
-                  </a:lnTo>
-                  <a:lnTo>
-                    <a:pt x="6159537" y="1746383"/>
-                  </a:lnTo>
-                  <a:lnTo>
-                    <a:pt x="6231159" y="1753894"/>
-                  </a:lnTo>
-                  <a:lnTo>
-                    <a:pt x="6302782" y="1761256"/>
-                  </a:lnTo>
-                  <a:lnTo>
-                    <a:pt x="6374404" y="1768472"/>
-                  </a:lnTo>
-                  <a:lnTo>
-                    <a:pt x="6446027" y="1775544"/>
-                  </a:lnTo>
-                  <a:lnTo>
-                    <a:pt x="6517649" y="1782475"/>
-                  </a:lnTo>
-                  <a:lnTo>
-                    <a:pt x="6589272" y="1789269"/>
-                  </a:lnTo>
-                  <a:lnTo>
-                    <a:pt x="6660894" y="1795928"/>
-                  </a:lnTo>
-                  <a:lnTo>
-                    <a:pt x="6732517" y="1802454"/>
-                  </a:lnTo>
-                  <a:lnTo>
-                    <a:pt x="6804139" y="1808851"/>
-                  </a:lnTo>
-                  <a:lnTo>
-                    <a:pt x="6875762" y="1815120"/>
-                  </a:lnTo>
-                  <a:lnTo>
-                    <a:pt x="6947385" y="1821265"/>
-                  </a:lnTo>
-                  <a:lnTo>
-                    <a:pt x="7019007" y="1827288"/>
-                  </a:lnTo>
-                  <a:lnTo>
-                    <a:pt x="7090630" y="1833191"/>
+                    <a:pt x="70344" y="15237"/>
+                  </a:lnTo>
+                  <a:lnTo>
+                    <a:pt x="140688" y="30171"/>
+                  </a:lnTo>
+                  <a:lnTo>
+                    <a:pt x="211033" y="44808"/>
+                  </a:lnTo>
+                  <a:lnTo>
+                    <a:pt x="281377" y="59155"/>
+                  </a:lnTo>
+                  <a:lnTo>
+                    <a:pt x="351722" y="73216"/>
+                  </a:lnTo>
+                  <a:lnTo>
+                    <a:pt x="422066" y="86998"/>
+                  </a:lnTo>
+                  <a:lnTo>
+                    <a:pt x="492411" y="100506"/>
+                  </a:lnTo>
+                  <a:lnTo>
+                    <a:pt x="562755" y="113746"/>
+                  </a:lnTo>
+                  <a:lnTo>
+                    <a:pt x="633100" y="126722"/>
+                  </a:lnTo>
+                  <a:lnTo>
+                    <a:pt x="703444" y="139440"/>
+                  </a:lnTo>
+                  <a:lnTo>
+                    <a:pt x="773789" y="151906"/>
+                  </a:lnTo>
+                  <a:lnTo>
+                    <a:pt x="844133" y="164124"/>
+                  </a:lnTo>
+                  <a:lnTo>
+                    <a:pt x="914478" y="176099"/>
+                  </a:lnTo>
+                  <a:lnTo>
+                    <a:pt x="984822" y="187836"/>
+                  </a:lnTo>
+                  <a:lnTo>
+                    <a:pt x="1055167" y="199339"/>
+                  </a:lnTo>
+                  <a:lnTo>
+                    <a:pt x="1125511" y="210614"/>
+                  </a:lnTo>
+                  <a:lnTo>
+                    <a:pt x="1195856" y="221665"/>
+                  </a:lnTo>
+                  <a:lnTo>
+                    <a:pt x="1266200" y="232497"/>
+                  </a:lnTo>
+                  <a:lnTo>
+                    <a:pt x="1336545" y="243113"/>
+                  </a:lnTo>
+                  <a:lnTo>
+                    <a:pt x="1406889" y="253517"/>
+                  </a:lnTo>
+                  <a:lnTo>
+                    <a:pt x="1477234" y="263716"/>
+                  </a:lnTo>
+                  <a:lnTo>
+                    <a:pt x="1547578" y="273711"/>
+                  </a:lnTo>
+                  <a:lnTo>
+                    <a:pt x="1617923" y="283508"/>
+                  </a:lnTo>
+                  <a:lnTo>
+                    <a:pt x="1688267" y="293110"/>
+                  </a:lnTo>
+                  <a:lnTo>
+                    <a:pt x="1758612" y="302521"/>
+                  </a:lnTo>
+                  <a:lnTo>
+                    <a:pt x="1828956" y="311745"/>
+                  </a:lnTo>
+                  <a:lnTo>
+                    <a:pt x="1899301" y="320786"/>
+                  </a:lnTo>
+                  <a:lnTo>
+                    <a:pt x="1969645" y="329647"/>
+                  </a:lnTo>
+                  <a:lnTo>
+                    <a:pt x="2039990" y="338332"/>
+                  </a:lnTo>
+                  <a:lnTo>
+                    <a:pt x="2110334" y="346845"/>
+                  </a:lnTo>
+                  <a:lnTo>
+                    <a:pt x="2180679" y="355188"/>
+                  </a:lnTo>
+                  <a:lnTo>
+                    <a:pt x="2251023" y="363365"/>
+                  </a:lnTo>
+                  <a:lnTo>
+                    <a:pt x="2321368" y="371380"/>
+                  </a:lnTo>
+                  <a:lnTo>
+                    <a:pt x="2391712" y="379236"/>
+                  </a:lnTo>
+                  <a:lnTo>
+                    <a:pt x="2462057" y="386935"/>
+                  </a:lnTo>
+                  <a:lnTo>
+                    <a:pt x="2532401" y="394481"/>
+                  </a:lnTo>
+                  <a:lnTo>
+                    <a:pt x="2602746" y="401878"/>
+                  </a:lnTo>
+                  <a:lnTo>
+                    <a:pt x="2673090" y="409127"/>
+                  </a:lnTo>
+                  <a:lnTo>
+                    <a:pt x="2743435" y="416232"/>
+                  </a:lnTo>
+                  <a:lnTo>
+                    <a:pt x="2813779" y="423196"/>
+                  </a:lnTo>
+                  <a:lnTo>
+                    <a:pt x="2884124" y="430022"/>
+                  </a:lnTo>
+                  <a:lnTo>
+                    <a:pt x="2954468" y="436712"/>
+                  </a:lnTo>
+                  <a:lnTo>
+                    <a:pt x="3024813" y="443269"/>
+                  </a:lnTo>
+                  <a:lnTo>
+                    <a:pt x="3095157" y="449695"/>
+                  </a:lnTo>
+                  <a:lnTo>
+                    <a:pt x="3165502" y="455994"/>
+                  </a:lnTo>
+                  <a:lnTo>
+                    <a:pt x="3235846" y="462168"/>
+                  </a:lnTo>
+                  <a:lnTo>
+                    <a:pt x="3306191" y="468219"/>
+                  </a:lnTo>
+                  <a:lnTo>
+                    <a:pt x="3376535" y="474150"/>
+                  </a:lnTo>
+                  <a:lnTo>
+                    <a:pt x="3446880" y="479963"/>
+                  </a:lnTo>
+                  <a:lnTo>
+                    <a:pt x="3517224" y="485660"/>
+                  </a:lnTo>
+                  <a:lnTo>
+                    <a:pt x="3587569" y="491244"/>
+                  </a:lnTo>
+                  <a:lnTo>
+                    <a:pt x="3657913" y="496717"/>
+                  </a:lnTo>
+                  <a:lnTo>
+                    <a:pt x="3728257" y="502081"/>
+                  </a:lnTo>
+                  <a:lnTo>
+                    <a:pt x="3798602" y="507339"/>
+                  </a:lnTo>
+                  <a:lnTo>
+                    <a:pt x="3868946" y="512492"/>
+                  </a:lnTo>
+                  <a:lnTo>
+                    <a:pt x="3939291" y="517543"/>
+                  </a:lnTo>
+                  <a:lnTo>
+                    <a:pt x="4009635" y="522493"/>
+                  </a:lnTo>
+                  <a:lnTo>
+                    <a:pt x="4079980" y="527345"/>
+                  </a:lnTo>
+                  <a:lnTo>
+                    <a:pt x="4150324" y="532101"/>
+                  </a:lnTo>
+                  <a:lnTo>
+                    <a:pt x="4220669" y="536762"/>
+                  </a:lnTo>
+                  <a:lnTo>
+                    <a:pt x="4291013" y="541330"/>
+                  </a:lnTo>
+                  <a:lnTo>
+                    <a:pt x="4361358" y="545808"/>
+                  </a:lnTo>
+                  <a:lnTo>
+                    <a:pt x="4431702" y="550196"/>
+                  </a:lnTo>
+                  <a:lnTo>
+                    <a:pt x="4502047" y="554497"/>
+                  </a:lnTo>
+                  <a:lnTo>
+                    <a:pt x="4572391" y="558713"/>
+                  </a:lnTo>
+                  <a:lnTo>
+                    <a:pt x="4642736" y="562845"/>
+                  </a:lnTo>
+                  <a:lnTo>
+                    <a:pt x="4713080" y="566895"/>
+                  </a:lnTo>
+                  <a:lnTo>
+                    <a:pt x="4783425" y="570865"/>
+                  </a:lnTo>
+                  <a:lnTo>
+                    <a:pt x="4853769" y="574755"/>
+                  </a:lnTo>
+                  <a:lnTo>
+                    <a:pt x="4924114" y="578568"/>
+                  </a:lnTo>
+                  <a:lnTo>
+                    <a:pt x="4994458" y="582306"/>
+                  </a:lnTo>
+                  <a:lnTo>
+                    <a:pt x="5064803" y="585969"/>
+                  </a:lnTo>
+                  <a:lnTo>
+                    <a:pt x="5135147" y="589559"/>
+                  </a:lnTo>
+                  <a:lnTo>
+                    <a:pt x="5205492" y="593078"/>
+                  </a:lnTo>
+                  <a:lnTo>
+                    <a:pt x="5275836" y="596527"/>
+                  </a:lnTo>
+                  <a:lnTo>
+                    <a:pt x="5346181" y="599907"/>
+                  </a:lnTo>
+                  <a:lnTo>
+                    <a:pt x="5416525" y="603221"/>
+                  </a:lnTo>
+                  <a:lnTo>
+                    <a:pt x="5486870" y="606468"/>
+                  </a:lnTo>
+                  <a:lnTo>
+                    <a:pt x="5557214" y="609651"/>
+                  </a:lnTo>
+                  <a:lnTo>
+                    <a:pt x="5627559" y="612771"/>
+                  </a:lnTo>
+                  <a:lnTo>
+                    <a:pt x="5697903" y="615828"/>
+                  </a:lnTo>
+                  <a:lnTo>
+                    <a:pt x="5768248" y="618825"/>
+                  </a:lnTo>
+                  <a:lnTo>
+                    <a:pt x="5838592" y="621762"/>
+                  </a:lnTo>
+                  <a:lnTo>
+                    <a:pt x="5908937" y="624641"/>
+                  </a:lnTo>
+                  <a:lnTo>
+                    <a:pt x="5979281" y="627463"/>
+                  </a:lnTo>
+                  <a:lnTo>
+                    <a:pt x="6049626" y="630228"/>
+                  </a:lnTo>
+                  <a:lnTo>
+                    <a:pt x="6119970" y="632939"/>
+                  </a:lnTo>
+                  <a:lnTo>
+                    <a:pt x="6190315" y="635596"/>
+                  </a:lnTo>
+                  <a:lnTo>
+                    <a:pt x="6260659" y="638199"/>
+                  </a:lnTo>
+                  <a:lnTo>
+                    <a:pt x="6331004" y="640752"/>
+                  </a:lnTo>
+                  <a:lnTo>
+                    <a:pt x="6401348" y="643253"/>
+                  </a:lnTo>
+                  <a:lnTo>
+                    <a:pt x="6471693" y="645705"/>
+                  </a:lnTo>
+                  <a:lnTo>
+                    <a:pt x="6542037" y="648108"/>
+                  </a:lnTo>
+                  <a:lnTo>
+                    <a:pt x="6612382" y="650463"/>
+                  </a:lnTo>
+                  <a:lnTo>
+                    <a:pt x="6682726" y="652771"/>
+                  </a:lnTo>
+                  <a:lnTo>
+                    <a:pt x="6753071" y="655034"/>
+                  </a:lnTo>
+                  <a:lnTo>
+                    <a:pt x="6823415" y="657251"/>
+                  </a:lnTo>
+                  <a:lnTo>
+                    <a:pt x="6893760" y="659425"/>
+                  </a:lnTo>
+                  <a:lnTo>
+                    <a:pt x="6964104" y="661555"/>
                   </a:lnTo>
                 </a:path>
               </a:pathLst>
@@ -4526,27 +4561,27 @@
         </p:sp>
         <p:sp>
           <p:nvSpPr>
-            <p:cNvPr id="24" name="pl24"/>
+            <p:cNvPr id="25" name="pl25"/>
             <p:cNvSpPr/>
             <p:nvPr/>
           </p:nvSpPr>
           <p:spPr>
             <a:xfrm>
-              <a:off x="817517" y="4727786"/>
-              <a:ext cx="7799693" cy="0"/>
+              <a:off x="887106" y="3100960"/>
+              <a:ext cx="7660515" cy="0"/>
             </a:xfrm>
             <a:custGeom>
               <a:avLst/>
               <a:pathLst>
-                <a:path w="7799693" h="0">
+                <a:path w="7660515" h="0">
                   <a:moveTo>
                     <a:pt x="0" y="0"/>
                   </a:moveTo>
                   <a:lnTo>
-                    <a:pt x="7799693" y="0"/>
-                  </a:lnTo>
-                  <a:lnTo>
-                    <a:pt x="7799693" y="0"/>
+                    <a:pt x="7660515" y="0"/>
+                  </a:lnTo>
+                  <a:lnTo>
+                    <a:pt x="7660515" y="0"/>
                   </a:lnTo>
                 </a:path>
               </a:pathLst>
@@ -4569,21 +4604,21 @@
         </p:sp>
         <p:sp>
           <p:nvSpPr>
-            <p:cNvPr id="25" name="pl25"/>
+            <p:cNvPr id="26" name="pl26"/>
             <p:cNvSpPr/>
             <p:nvPr/>
           </p:nvSpPr>
           <p:spPr>
             <a:xfrm>
-              <a:off x="4526955" y="2073503"/>
-              <a:ext cx="0" cy="3649639"/>
+              <a:off x="4530353" y="2143092"/>
+              <a:ext cx="0" cy="1317069"/>
             </a:xfrm>
             <a:custGeom>
               <a:avLst/>
               <a:pathLst>
-                <a:path w="0" h="3649639">
+                <a:path w="0" h="1317069">
                   <a:moveTo>
-                    <a:pt x="0" y="3649639"/>
+                    <a:pt x="0" y="1317069"/>
                   </a:moveTo>
                   <a:lnTo>
                     <a:pt x="0" y="0"/>
@@ -4612,13 +4647,13 @@
         </p:sp>
         <p:sp>
           <p:nvSpPr>
-            <p:cNvPr id="26" name="tx26"/>
+            <p:cNvPr id="27" name="tx27"/>
             <p:cNvSpPr/>
             <p:nvPr/>
           </p:nvSpPr>
           <p:spPr>
             <a:xfrm>
-              <a:off x="692708" y="5517199"/>
+              <a:off x="762297" y="3360243"/>
               <a:ext cx="62179" cy="80101"/>
             </a:xfrm>
             <a:prstGeom prst="rect">
@@ -4658,13 +4693,13 @@
         </p:sp>
         <p:sp>
           <p:nvSpPr>
-            <p:cNvPr id="27" name="tx27"/>
+            <p:cNvPr id="28" name="tx28"/>
             <p:cNvSpPr/>
             <p:nvPr/>
           </p:nvSpPr>
           <p:spPr>
             <a:xfrm>
-              <a:off x="692708" y="4687735"/>
+              <a:off x="762297" y="3060909"/>
               <a:ext cx="62179" cy="80101"/>
             </a:xfrm>
             <a:prstGeom prst="rect">
@@ -4704,13 +4739,13 @@
         </p:sp>
         <p:sp>
           <p:nvSpPr>
-            <p:cNvPr id="28" name="tx28"/>
+            <p:cNvPr id="29" name="tx29"/>
             <p:cNvSpPr/>
             <p:nvPr/>
           </p:nvSpPr>
           <p:spPr>
             <a:xfrm>
-              <a:off x="692708" y="3858272"/>
+              <a:off x="762297" y="2761575"/>
               <a:ext cx="62179" cy="80101"/>
             </a:xfrm>
             <a:prstGeom prst="rect">
@@ -4750,13 +4785,13 @@
         </p:sp>
         <p:sp>
           <p:nvSpPr>
-            <p:cNvPr id="29" name="tx29"/>
+            <p:cNvPr id="30" name="tx30"/>
             <p:cNvSpPr/>
             <p:nvPr/>
           </p:nvSpPr>
           <p:spPr>
             <a:xfrm>
-              <a:off x="692708" y="3028808"/>
+              <a:off x="762297" y="2462242"/>
               <a:ext cx="62179" cy="80101"/>
             </a:xfrm>
             <a:prstGeom prst="rect">
@@ -4796,13 +4831,13 @@
         </p:sp>
         <p:sp>
           <p:nvSpPr>
-            <p:cNvPr id="30" name="tx30"/>
+            <p:cNvPr id="31" name="tx31"/>
             <p:cNvSpPr/>
             <p:nvPr/>
           </p:nvSpPr>
           <p:spPr>
             <a:xfrm>
-              <a:off x="692708" y="2199345"/>
+              <a:off x="762297" y="2162908"/>
               <a:ext cx="62179" cy="80101"/>
             </a:xfrm>
             <a:prstGeom prst="rect">
@@ -4842,13 +4877,13 @@
         </p:sp>
         <p:sp>
           <p:nvSpPr>
-            <p:cNvPr id="31" name="tx31"/>
+            <p:cNvPr id="32" name="tx32"/>
             <p:cNvSpPr/>
             <p:nvPr/>
           </p:nvSpPr>
           <p:spPr>
             <a:xfrm>
-              <a:off x="2421884" y="5785772"/>
+              <a:off x="2461403" y="3522791"/>
               <a:ext cx="161574" cy="80101"/>
             </a:xfrm>
             <a:prstGeom prst="rect">
@@ -4888,13 +4923,13 @@
         </p:sp>
         <p:sp>
           <p:nvSpPr>
-            <p:cNvPr id="32" name="tx32"/>
+            <p:cNvPr id="33" name="tx33"/>
             <p:cNvSpPr/>
             <p:nvPr/>
           </p:nvSpPr>
           <p:spPr>
             <a:xfrm>
-              <a:off x="4542539" y="5785772"/>
+              <a:off x="4545104" y="3522791"/>
               <a:ext cx="62179" cy="80101"/>
             </a:xfrm>
             <a:prstGeom prst="rect">
@@ -4934,13 +4969,13 @@
         </p:sp>
         <p:sp>
           <p:nvSpPr>
-            <p:cNvPr id="33" name="tx33"/>
+            <p:cNvPr id="34" name="tx34"/>
             <p:cNvSpPr/>
             <p:nvPr/>
           </p:nvSpPr>
           <p:spPr>
             <a:xfrm>
-              <a:off x="6582407" y="5785772"/>
+              <a:off x="6548017" y="3522791"/>
               <a:ext cx="124358" cy="80101"/>
             </a:xfrm>
             <a:prstGeom prst="rect">
@@ -4980,13 +5015,13 @@
         </p:sp>
         <p:sp>
           <p:nvSpPr>
-            <p:cNvPr id="34" name="tx34"/>
+            <p:cNvPr id="35" name="tx35"/>
             <p:cNvSpPr/>
             <p:nvPr/>
           </p:nvSpPr>
           <p:spPr>
             <a:xfrm>
-              <a:off x="2928340" y="5925448"/>
+              <a:off x="2928340" y="3662467"/>
               <a:ext cx="3578047" cy="100218"/>
             </a:xfrm>
             <a:prstGeom prst="rect">
@@ -5026,13 +5061,13 @@
         </p:sp>
         <p:sp>
           <p:nvSpPr>
-            <p:cNvPr id="35" name="tx35"/>
+            <p:cNvPr id="36" name="tx36"/>
             <p:cNvSpPr/>
             <p:nvPr/>
           </p:nvSpPr>
           <p:spPr>
             <a:xfrm rot="-5400000">
-              <a:off x="68446" y="3848213"/>
+              <a:off x="138035" y="2751517"/>
               <a:ext cx="1016904" cy="100218"/>
             </a:xfrm>
             <a:prstGeom prst="rect">
@@ -5072,13 +5107,13 @@
         </p:sp>
         <p:sp>
           <p:nvSpPr>
-            <p:cNvPr id="36" name="tx36"/>
+            <p:cNvPr id="37" name="tx37"/>
             <p:cNvSpPr/>
             <p:nvPr/>
           </p:nvSpPr>
           <p:spPr>
             <a:xfrm>
-              <a:off x="817517" y="1896563"/>
+              <a:off x="887106" y="1966152"/>
               <a:ext cx="6985375" cy="82021"/>
             </a:xfrm>
             <a:prstGeom prst="rect">
@@ -5118,13 +5153,3704 @@
         </p:sp>
         <p:sp>
           <p:nvSpPr>
-            <p:cNvPr id="37" name="tx37"/>
+            <p:cNvPr id="38" name="tx38"/>
             <p:cNvSpPr/>
             <p:nvPr/>
           </p:nvSpPr>
           <p:spPr>
             <a:xfrm>
-              <a:off x="817517" y="1669789"/>
+              <a:off x="887106" y="1739378"/>
+              <a:ext cx="1936790" cy="120152"/>
+            </a:xfrm>
+            <a:prstGeom prst="rect">
+              <a:avLst/>
+            </a:prstGeom>
+            <a:noFill/>
+          </p:spPr>
+          <p:txBody>
+            <a:bodyPr lIns="0" rIns="0" tIns="0" bIns="0" anchorCtr="1" anchor="ctr" wrap="none"/>
+            <a:lstStyle/>
+            <a:p>
+              <a:pPr algn="l" marL="0" marR="0" indent="0">
+                <a:lnSpc>
+                  <a:spcPts val="1320"/>
+                </a:lnSpc>
+                <a:spcBef>
+                  <a:spcPts val="0"/>
+                </a:spcBef>
+                <a:spcAft>
+                  <a:spcPts val="0"/>
+                </a:spcAft>
+              </a:pPr>
+              <a:r>
+                <a:rPr sz="1320">
+                  <a:solidFill>
+                    <a:srgbClr val="000000">
+                      <a:alpha val="100000"/>
+                    </a:srgbClr>
+                  </a:solidFill>
+                  <a:latin typeface="Helvetica"/>
+                  <a:cs typeface="Helvetica"/>
+                </a:rPr>
+                <a:t>AKI Grade 2 (Carboplatin)</a:t>
+              </a:r>
+            </a:p>
+          </p:txBody>
+        </p:sp>
+        <p:sp>
+          <p:nvSpPr>
+            <p:cNvPr id="39" name="pl39"/>
+            <p:cNvSpPr/>
+            <p:nvPr/>
+          </p:nvSpPr>
+          <p:spPr>
+            <a:xfrm>
+              <a:off x="887106" y="5444019"/>
+              <a:ext cx="7660515" cy="0"/>
+            </a:xfrm>
+            <a:custGeom>
+              <a:avLst/>
+              <a:pathLst>
+                <a:path w="7660515" h="0">
+                  <a:moveTo>
+                    <a:pt x="0" y="0"/>
+                  </a:moveTo>
+                  <a:lnTo>
+                    <a:pt x="7660515" y="0"/>
+                  </a:lnTo>
+                  <a:lnTo>
+                    <a:pt x="7660515" y="0"/>
+                  </a:lnTo>
+                </a:path>
+              </a:pathLst>
+            </a:custGeom>
+            <a:ln w="6775" cap="flat">
+              <a:solidFill>
+                <a:srgbClr val="EBEBEB">
+                  <a:alpha val="100000"/>
+                </a:srgbClr>
+              </a:solidFill>
+              <a:prstDash val="solid"/>
+              <a:round/>
+            </a:ln>
+          </p:spPr>
+          <p:txBody>
+            <a:bodyPr/>
+            <a:lstStyle/>
+            <a:p/>
+          </p:txBody>
+        </p:sp>
+        <p:sp>
+          <p:nvSpPr>
+            <p:cNvPr id="40" name="pl40"/>
+            <p:cNvSpPr/>
+            <p:nvPr/>
+          </p:nvSpPr>
+          <p:spPr>
+            <a:xfrm>
+              <a:off x="887106" y="5144686"/>
+              <a:ext cx="7660515" cy="0"/>
+            </a:xfrm>
+            <a:custGeom>
+              <a:avLst/>
+              <a:pathLst>
+                <a:path w="7660515" h="0">
+                  <a:moveTo>
+                    <a:pt x="0" y="0"/>
+                  </a:moveTo>
+                  <a:lnTo>
+                    <a:pt x="7660515" y="0"/>
+                  </a:lnTo>
+                  <a:lnTo>
+                    <a:pt x="7660515" y="0"/>
+                  </a:lnTo>
+                </a:path>
+              </a:pathLst>
+            </a:custGeom>
+            <a:ln w="6775" cap="flat">
+              <a:solidFill>
+                <a:srgbClr val="EBEBEB">
+                  <a:alpha val="100000"/>
+                </a:srgbClr>
+              </a:solidFill>
+              <a:prstDash val="solid"/>
+              <a:round/>
+            </a:ln>
+          </p:spPr>
+          <p:txBody>
+            <a:bodyPr/>
+            <a:lstStyle/>
+            <a:p/>
+          </p:txBody>
+        </p:sp>
+        <p:sp>
+          <p:nvSpPr>
+            <p:cNvPr id="41" name="pl41"/>
+            <p:cNvSpPr/>
+            <p:nvPr/>
+          </p:nvSpPr>
+          <p:spPr>
+            <a:xfrm>
+              <a:off x="887106" y="4845352"/>
+              <a:ext cx="7660515" cy="0"/>
+            </a:xfrm>
+            <a:custGeom>
+              <a:avLst/>
+              <a:pathLst>
+                <a:path w="7660515" h="0">
+                  <a:moveTo>
+                    <a:pt x="0" y="0"/>
+                  </a:moveTo>
+                  <a:lnTo>
+                    <a:pt x="7660515" y="0"/>
+                  </a:lnTo>
+                  <a:lnTo>
+                    <a:pt x="7660515" y="0"/>
+                  </a:lnTo>
+                </a:path>
+              </a:pathLst>
+            </a:custGeom>
+            <a:ln w="6775" cap="flat">
+              <a:solidFill>
+                <a:srgbClr val="EBEBEB">
+                  <a:alpha val="100000"/>
+                </a:srgbClr>
+              </a:solidFill>
+              <a:prstDash val="solid"/>
+              <a:round/>
+            </a:ln>
+          </p:spPr>
+          <p:txBody>
+            <a:bodyPr/>
+            <a:lstStyle/>
+            <a:p/>
+          </p:txBody>
+        </p:sp>
+        <p:sp>
+          <p:nvSpPr>
+            <p:cNvPr id="42" name="pl42"/>
+            <p:cNvSpPr/>
+            <p:nvPr/>
+          </p:nvSpPr>
+          <p:spPr>
+            <a:xfrm>
+              <a:off x="887106" y="4546018"/>
+              <a:ext cx="7660515" cy="0"/>
+            </a:xfrm>
+            <a:custGeom>
+              <a:avLst/>
+              <a:pathLst>
+                <a:path w="7660515" h="0">
+                  <a:moveTo>
+                    <a:pt x="0" y="0"/>
+                  </a:moveTo>
+                  <a:lnTo>
+                    <a:pt x="7660515" y="0"/>
+                  </a:lnTo>
+                  <a:lnTo>
+                    <a:pt x="7660515" y="0"/>
+                  </a:lnTo>
+                </a:path>
+              </a:pathLst>
+            </a:custGeom>
+            <a:ln w="6775" cap="flat">
+              <a:solidFill>
+                <a:srgbClr val="EBEBEB">
+                  <a:alpha val="100000"/>
+                </a:srgbClr>
+              </a:solidFill>
+              <a:prstDash val="solid"/>
+              <a:round/>
+            </a:ln>
+          </p:spPr>
+          <p:txBody>
+            <a:bodyPr/>
+            <a:lstStyle/>
+            <a:p/>
+          </p:txBody>
+        </p:sp>
+        <p:sp>
+          <p:nvSpPr>
+            <p:cNvPr id="43" name="pl43"/>
+            <p:cNvSpPr/>
+            <p:nvPr/>
+          </p:nvSpPr>
+          <p:spPr>
+            <a:xfrm>
+              <a:off x="914987" y="4336484"/>
+              <a:ext cx="0" cy="1317069"/>
+            </a:xfrm>
+            <a:custGeom>
+              <a:avLst/>
+              <a:pathLst>
+                <a:path w="0" h="1317069">
+                  <a:moveTo>
+                    <a:pt x="0" y="1317069"/>
+                  </a:moveTo>
+                  <a:lnTo>
+                    <a:pt x="0" y="0"/>
+                  </a:lnTo>
+                  <a:lnTo>
+                    <a:pt x="0" y="0"/>
+                  </a:lnTo>
+                </a:path>
+              </a:pathLst>
+            </a:custGeom>
+            <a:ln w="6775" cap="flat">
+              <a:solidFill>
+                <a:srgbClr val="EBEBEB">
+                  <a:alpha val="100000"/>
+                </a:srgbClr>
+              </a:solidFill>
+              <a:prstDash val="solid"/>
+              <a:round/>
+            </a:ln>
+          </p:spPr>
+          <p:txBody>
+            <a:bodyPr/>
+            <a:lstStyle/>
+            <a:p/>
+          </p:txBody>
+        </p:sp>
+        <p:sp>
+          <p:nvSpPr>
+            <p:cNvPr id="44" name="pl44"/>
+            <p:cNvSpPr/>
+            <p:nvPr/>
+          </p:nvSpPr>
+          <p:spPr>
+            <a:xfrm>
+              <a:off x="1728588" y="4336484"/>
+              <a:ext cx="0" cy="1317069"/>
+            </a:xfrm>
+            <a:custGeom>
+              <a:avLst/>
+              <a:pathLst>
+                <a:path w="0" h="1317069">
+                  <a:moveTo>
+                    <a:pt x="0" y="1317069"/>
+                  </a:moveTo>
+                  <a:lnTo>
+                    <a:pt x="0" y="0"/>
+                  </a:lnTo>
+                  <a:lnTo>
+                    <a:pt x="0" y="0"/>
+                  </a:lnTo>
+                </a:path>
+              </a:pathLst>
+            </a:custGeom>
+            <a:ln w="6775" cap="flat">
+              <a:solidFill>
+                <a:srgbClr val="EBEBEB">
+                  <a:alpha val="100000"/>
+                </a:srgbClr>
+              </a:solidFill>
+              <a:prstDash val="solid"/>
+              <a:round/>
+            </a:ln>
+          </p:spPr>
+          <p:txBody>
+            <a:bodyPr/>
+            <a:lstStyle/>
+            <a:p/>
+          </p:txBody>
+        </p:sp>
+        <p:sp>
+          <p:nvSpPr>
+            <p:cNvPr id="45" name="pl45"/>
+            <p:cNvSpPr/>
+            <p:nvPr/>
+          </p:nvSpPr>
+          <p:spPr>
+            <a:xfrm>
+              <a:off x="2542190" y="4336484"/>
+              <a:ext cx="0" cy="1317069"/>
+            </a:xfrm>
+            <a:custGeom>
+              <a:avLst/>
+              <a:pathLst>
+                <a:path w="0" h="1317069">
+                  <a:moveTo>
+                    <a:pt x="0" y="1317069"/>
+                  </a:moveTo>
+                  <a:lnTo>
+                    <a:pt x="0" y="0"/>
+                  </a:lnTo>
+                  <a:lnTo>
+                    <a:pt x="0" y="0"/>
+                  </a:lnTo>
+                </a:path>
+              </a:pathLst>
+            </a:custGeom>
+            <a:ln w="6775" cap="flat">
+              <a:solidFill>
+                <a:srgbClr val="EBEBEB">
+                  <a:alpha val="100000"/>
+                </a:srgbClr>
+              </a:solidFill>
+              <a:prstDash val="solid"/>
+              <a:round/>
+            </a:ln>
+          </p:spPr>
+          <p:txBody>
+            <a:bodyPr/>
+            <a:lstStyle/>
+            <a:p/>
+          </p:txBody>
+        </p:sp>
+        <p:sp>
+          <p:nvSpPr>
+            <p:cNvPr id="46" name="pl46"/>
+            <p:cNvSpPr/>
+            <p:nvPr/>
+          </p:nvSpPr>
+          <p:spPr>
+            <a:xfrm>
+              <a:off x="3355791" y="4336484"/>
+              <a:ext cx="0" cy="1317069"/>
+            </a:xfrm>
+            <a:custGeom>
+              <a:avLst/>
+              <a:pathLst>
+                <a:path w="0" h="1317069">
+                  <a:moveTo>
+                    <a:pt x="0" y="1317069"/>
+                  </a:moveTo>
+                  <a:lnTo>
+                    <a:pt x="0" y="0"/>
+                  </a:lnTo>
+                  <a:lnTo>
+                    <a:pt x="0" y="0"/>
+                  </a:lnTo>
+                </a:path>
+              </a:pathLst>
+            </a:custGeom>
+            <a:ln w="6775" cap="flat">
+              <a:solidFill>
+                <a:srgbClr val="EBEBEB">
+                  <a:alpha val="100000"/>
+                </a:srgbClr>
+              </a:solidFill>
+              <a:prstDash val="solid"/>
+              <a:round/>
+            </a:ln>
+          </p:spPr>
+          <p:txBody>
+            <a:bodyPr/>
+            <a:lstStyle/>
+            <a:p/>
+          </p:txBody>
+        </p:sp>
+        <p:sp>
+          <p:nvSpPr>
+            <p:cNvPr id="47" name="pl47"/>
+            <p:cNvSpPr/>
+            <p:nvPr/>
+          </p:nvSpPr>
+          <p:spPr>
+            <a:xfrm>
+              <a:off x="4169393" y="4336484"/>
+              <a:ext cx="0" cy="1317069"/>
+            </a:xfrm>
+            <a:custGeom>
+              <a:avLst/>
+              <a:pathLst>
+                <a:path w="0" h="1317069">
+                  <a:moveTo>
+                    <a:pt x="0" y="1317069"/>
+                  </a:moveTo>
+                  <a:lnTo>
+                    <a:pt x="0" y="0"/>
+                  </a:lnTo>
+                  <a:lnTo>
+                    <a:pt x="0" y="0"/>
+                  </a:lnTo>
+                </a:path>
+              </a:pathLst>
+            </a:custGeom>
+            <a:ln w="6775" cap="flat">
+              <a:solidFill>
+                <a:srgbClr val="EBEBEB">
+                  <a:alpha val="100000"/>
+                </a:srgbClr>
+              </a:solidFill>
+              <a:prstDash val="solid"/>
+              <a:round/>
+            </a:ln>
+          </p:spPr>
+          <p:txBody>
+            <a:bodyPr/>
+            <a:lstStyle/>
+            <a:p/>
+          </p:txBody>
+        </p:sp>
+        <p:sp>
+          <p:nvSpPr>
+            <p:cNvPr id="48" name="pl48"/>
+            <p:cNvSpPr/>
+            <p:nvPr/>
+          </p:nvSpPr>
+          <p:spPr>
+            <a:xfrm>
+              <a:off x="4982994" y="4336484"/>
+              <a:ext cx="0" cy="1317069"/>
+            </a:xfrm>
+            <a:custGeom>
+              <a:avLst/>
+              <a:pathLst>
+                <a:path w="0" h="1317069">
+                  <a:moveTo>
+                    <a:pt x="0" y="1317069"/>
+                  </a:moveTo>
+                  <a:lnTo>
+                    <a:pt x="0" y="0"/>
+                  </a:lnTo>
+                  <a:lnTo>
+                    <a:pt x="0" y="0"/>
+                  </a:lnTo>
+                </a:path>
+              </a:pathLst>
+            </a:custGeom>
+            <a:ln w="6775" cap="flat">
+              <a:solidFill>
+                <a:srgbClr val="EBEBEB">
+                  <a:alpha val="100000"/>
+                </a:srgbClr>
+              </a:solidFill>
+              <a:prstDash val="solid"/>
+              <a:round/>
+            </a:ln>
+          </p:spPr>
+          <p:txBody>
+            <a:bodyPr/>
+            <a:lstStyle/>
+            <a:p/>
+          </p:txBody>
+        </p:sp>
+        <p:sp>
+          <p:nvSpPr>
+            <p:cNvPr id="49" name="pl49"/>
+            <p:cNvSpPr/>
+            <p:nvPr/>
+          </p:nvSpPr>
+          <p:spPr>
+            <a:xfrm>
+              <a:off x="5796595" y="4336484"/>
+              <a:ext cx="0" cy="1317069"/>
+            </a:xfrm>
+            <a:custGeom>
+              <a:avLst/>
+              <a:pathLst>
+                <a:path w="0" h="1317069">
+                  <a:moveTo>
+                    <a:pt x="0" y="1317069"/>
+                  </a:moveTo>
+                  <a:lnTo>
+                    <a:pt x="0" y="0"/>
+                  </a:lnTo>
+                  <a:lnTo>
+                    <a:pt x="0" y="0"/>
+                  </a:lnTo>
+                </a:path>
+              </a:pathLst>
+            </a:custGeom>
+            <a:ln w="6775" cap="flat">
+              <a:solidFill>
+                <a:srgbClr val="EBEBEB">
+                  <a:alpha val="100000"/>
+                </a:srgbClr>
+              </a:solidFill>
+              <a:prstDash val="solid"/>
+              <a:round/>
+            </a:ln>
+          </p:spPr>
+          <p:txBody>
+            <a:bodyPr/>
+            <a:lstStyle/>
+            <a:p/>
+          </p:txBody>
+        </p:sp>
+        <p:sp>
+          <p:nvSpPr>
+            <p:cNvPr id="50" name="pl50"/>
+            <p:cNvSpPr/>
+            <p:nvPr/>
+          </p:nvSpPr>
+          <p:spPr>
+            <a:xfrm>
+              <a:off x="6610197" y="4336484"/>
+              <a:ext cx="0" cy="1317069"/>
+            </a:xfrm>
+            <a:custGeom>
+              <a:avLst/>
+              <a:pathLst>
+                <a:path w="0" h="1317069">
+                  <a:moveTo>
+                    <a:pt x="0" y="1317069"/>
+                  </a:moveTo>
+                  <a:lnTo>
+                    <a:pt x="0" y="0"/>
+                  </a:lnTo>
+                  <a:lnTo>
+                    <a:pt x="0" y="0"/>
+                  </a:lnTo>
+                </a:path>
+              </a:pathLst>
+            </a:custGeom>
+            <a:ln w="6775" cap="flat">
+              <a:solidFill>
+                <a:srgbClr val="EBEBEB">
+                  <a:alpha val="100000"/>
+                </a:srgbClr>
+              </a:solidFill>
+              <a:prstDash val="solid"/>
+              <a:round/>
+            </a:ln>
+          </p:spPr>
+          <p:txBody>
+            <a:bodyPr/>
+            <a:lstStyle/>
+            <a:p/>
+          </p:txBody>
+        </p:sp>
+        <p:sp>
+          <p:nvSpPr>
+            <p:cNvPr id="51" name="pl51"/>
+            <p:cNvSpPr/>
+            <p:nvPr/>
+          </p:nvSpPr>
+          <p:spPr>
+            <a:xfrm>
+              <a:off x="7423798" y="4336484"/>
+              <a:ext cx="0" cy="1317069"/>
+            </a:xfrm>
+            <a:custGeom>
+              <a:avLst/>
+              <a:pathLst>
+                <a:path w="0" h="1317069">
+                  <a:moveTo>
+                    <a:pt x="0" y="1317069"/>
+                  </a:moveTo>
+                  <a:lnTo>
+                    <a:pt x="0" y="0"/>
+                  </a:lnTo>
+                  <a:lnTo>
+                    <a:pt x="0" y="0"/>
+                  </a:lnTo>
+                </a:path>
+              </a:pathLst>
+            </a:custGeom>
+            <a:ln w="6775" cap="flat">
+              <a:solidFill>
+                <a:srgbClr val="EBEBEB">
+                  <a:alpha val="100000"/>
+                </a:srgbClr>
+              </a:solidFill>
+              <a:prstDash val="solid"/>
+              <a:round/>
+            </a:ln>
+          </p:spPr>
+          <p:txBody>
+            <a:bodyPr/>
+            <a:lstStyle/>
+            <a:p/>
+          </p:txBody>
+        </p:sp>
+        <p:sp>
+          <p:nvSpPr>
+            <p:cNvPr id="52" name="pl52"/>
+            <p:cNvSpPr/>
+            <p:nvPr/>
+          </p:nvSpPr>
+          <p:spPr>
+            <a:xfrm>
+              <a:off x="8237399" y="4336484"/>
+              <a:ext cx="0" cy="1317069"/>
+            </a:xfrm>
+            <a:custGeom>
+              <a:avLst/>
+              <a:pathLst>
+                <a:path w="0" h="1317069">
+                  <a:moveTo>
+                    <a:pt x="0" y="1317069"/>
+                  </a:moveTo>
+                  <a:lnTo>
+                    <a:pt x="0" y="0"/>
+                  </a:lnTo>
+                  <a:lnTo>
+                    <a:pt x="0" y="0"/>
+                  </a:lnTo>
+                </a:path>
+              </a:pathLst>
+            </a:custGeom>
+            <a:ln w="6775" cap="flat">
+              <a:solidFill>
+                <a:srgbClr val="EBEBEB">
+                  <a:alpha val="100000"/>
+                </a:srgbClr>
+              </a:solidFill>
+              <a:prstDash val="solid"/>
+              <a:round/>
+            </a:ln>
+          </p:spPr>
+          <p:txBody>
+            <a:bodyPr/>
+            <a:lstStyle/>
+            <a:p/>
+          </p:txBody>
+        </p:sp>
+        <p:sp>
+          <p:nvSpPr>
+            <p:cNvPr id="53" name="pl53"/>
+            <p:cNvSpPr/>
+            <p:nvPr/>
+          </p:nvSpPr>
+          <p:spPr>
+            <a:xfrm>
+              <a:off x="887106" y="5593686"/>
+              <a:ext cx="7660515" cy="0"/>
+            </a:xfrm>
+            <a:custGeom>
+              <a:avLst/>
+              <a:pathLst>
+                <a:path w="7660515" h="0">
+                  <a:moveTo>
+                    <a:pt x="0" y="0"/>
+                  </a:moveTo>
+                  <a:lnTo>
+                    <a:pt x="7660515" y="0"/>
+                  </a:lnTo>
+                  <a:lnTo>
+                    <a:pt x="7660515" y="0"/>
+                  </a:lnTo>
+                </a:path>
+              </a:pathLst>
+            </a:custGeom>
+            <a:ln w="13550" cap="flat">
+              <a:solidFill>
+                <a:srgbClr val="EBEBEB">
+                  <a:alpha val="100000"/>
+                </a:srgbClr>
+              </a:solidFill>
+              <a:prstDash val="solid"/>
+              <a:round/>
+            </a:ln>
+          </p:spPr>
+          <p:txBody>
+            <a:bodyPr/>
+            <a:lstStyle/>
+            <a:p/>
+          </p:txBody>
+        </p:sp>
+        <p:sp>
+          <p:nvSpPr>
+            <p:cNvPr id="54" name="pl54"/>
+            <p:cNvSpPr/>
+            <p:nvPr/>
+          </p:nvSpPr>
+          <p:spPr>
+            <a:xfrm>
+              <a:off x="887106" y="5294352"/>
+              <a:ext cx="7660515" cy="0"/>
+            </a:xfrm>
+            <a:custGeom>
+              <a:avLst/>
+              <a:pathLst>
+                <a:path w="7660515" h="0">
+                  <a:moveTo>
+                    <a:pt x="0" y="0"/>
+                  </a:moveTo>
+                  <a:lnTo>
+                    <a:pt x="7660515" y="0"/>
+                  </a:lnTo>
+                  <a:lnTo>
+                    <a:pt x="7660515" y="0"/>
+                  </a:lnTo>
+                </a:path>
+              </a:pathLst>
+            </a:custGeom>
+            <a:ln w="13550" cap="flat">
+              <a:solidFill>
+                <a:srgbClr val="EBEBEB">
+                  <a:alpha val="100000"/>
+                </a:srgbClr>
+              </a:solidFill>
+              <a:prstDash val="solid"/>
+              <a:round/>
+            </a:ln>
+          </p:spPr>
+          <p:txBody>
+            <a:bodyPr/>
+            <a:lstStyle/>
+            <a:p/>
+          </p:txBody>
+        </p:sp>
+        <p:sp>
+          <p:nvSpPr>
+            <p:cNvPr id="55" name="pl55"/>
+            <p:cNvSpPr/>
+            <p:nvPr/>
+          </p:nvSpPr>
+          <p:spPr>
+            <a:xfrm>
+              <a:off x="887106" y="4995019"/>
+              <a:ext cx="7660515" cy="0"/>
+            </a:xfrm>
+            <a:custGeom>
+              <a:avLst/>
+              <a:pathLst>
+                <a:path w="7660515" h="0">
+                  <a:moveTo>
+                    <a:pt x="0" y="0"/>
+                  </a:moveTo>
+                  <a:lnTo>
+                    <a:pt x="7660515" y="0"/>
+                  </a:lnTo>
+                  <a:lnTo>
+                    <a:pt x="7660515" y="0"/>
+                  </a:lnTo>
+                </a:path>
+              </a:pathLst>
+            </a:custGeom>
+            <a:ln w="13550" cap="flat">
+              <a:solidFill>
+                <a:srgbClr val="EBEBEB">
+                  <a:alpha val="100000"/>
+                </a:srgbClr>
+              </a:solidFill>
+              <a:prstDash val="solid"/>
+              <a:round/>
+            </a:ln>
+          </p:spPr>
+          <p:txBody>
+            <a:bodyPr/>
+            <a:lstStyle/>
+            <a:p/>
+          </p:txBody>
+        </p:sp>
+        <p:sp>
+          <p:nvSpPr>
+            <p:cNvPr id="56" name="pl56"/>
+            <p:cNvSpPr/>
+            <p:nvPr/>
+          </p:nvSpPr>
+          <p:spPr>
+            <a:xfrm>
+              <a:off x="887106" y="4695685"/>
+              <a:ext cx="7660515" cy="0"/>
+            </a:xfrm>
+            <a:custGeom>
+              <a:avLst/>
+              <a:pathLst>
+                <a:path w="7660515" h="0">
+                  <a:moveTo>
+                    <a:pt x="0" y="0"/>
+                  </a:moveTo>
+                  <a:lnTo>
+                    <a:pt x="7660515" y="0"/>
+                  </a:lnTo>
+                  <a:lnTo>
+                    <a:pt x="7660515" y="0"/>
+                  </a:lnTo>
+                </a:path>
+              </a:pathLst>
+            </a:custGeom>
+            <a:ln w="13550" cap="flat">
+              <a:solidFill>
+                <a:srgbClr val="EBEBEB">
+                  <a:alpha val="100000"/>
+                </a:srgbClr>
+              </a:solidFill>
+              <a:prstDash val="solid"/>
+              <a:round/>
+            </a:ln>
+          </p:spPr>
+          <p:txBody>
+            <a:bodyPr/>
+            <a:lstStyle/>
+            <a:p/>
+          </p:txBody>
+        </p:sp>
+        <p:sp>
+          <p:nvSpPr>
+            <p:cNvPr id="57" name="pl57"/>
+            <p:cNvSpPr/>
+            <p:nvPr/>
+          </p:nvSpPr>
+          <p:spPr>
+            <a:xfrm>
+              <a:off x="887106" y="4396351"/>
+              <a:ext cx="7660515" cy="0"/>
+            </a:xfrm>
+            <a:custGeom>
+              <a:avLst/>
+              <a:pathLst>
+                <a:path w="7660515" h="0">
+                  <a:moveTo>
+                    <a:pt x="0" y="0"/>
+                  </a:moveTo>
+                  <a:lnTo>
+                    <a:pt x="7660515" y="0"/>
+                  </a:lnTo>
+                  <a:lnTo>
+                    <a:pt x="7660515" y="0"/>
+                  </a:lnTo>
+                </a:path>
+              </a:pathLst>
+            </a:custGeom>
+            <a:ln w="13550" cap="flat">
+              <a:solidFill>
+                <a:srgbClr val="EBEBEB">
+                  <a:alpha val="100000"/>
+                </a:srgbClr>
+              </a:solidFill>
+              <a:prstDash val="solid"/>
+              <a:round/>
+            </a:ln>
+          </p:spPr>
+          <p:txBody>
+            <a:bodyPr/>
+            <a:lstStyle/>
+            <a:p/>
+          </p:txBody>
+        </p:sp>
+        <p:sp>
+          <p:nvSpPr>
+            <p:cNvPr id="58" name="pl58"/>
+            <p:cNvSpPr/>
+            <p:nvPr/>
+          </p:nvSpPr>
+          <p:spPr>
+            <a:xfrm>
+              <a:off x="1321788" y="4336484"/>
+              <a:ext cx="0" cy="1317069"/>
+            </a:xfrm>
+            <a:custGeom>
+              <a:avLst/>
+              <a:pathLst>
+                <a:path w="0" h="1317069">
+                  <a:moveTo>
+                    <a:pt x="0" y="1317069"/>
+                  </a:moveTo>
+                  <a:lnTo>
+                    <a:pt x="0" y="0"/>
+                  </a:lnTo>
+                  <a:lnTo>
+                    <a:pt x="0" y="0"/>
+                  </a:lnTo>
+                </a:path>
+              </a:pathLst>
+            </a:custGeom>
+            <a:ln w="13550" cap="flat">
+              <a:solidFill>
+                <a:srgbClr val="EBEBEB">
+                  <a:alpha val="100000"/>
+                </a:srgbClr>
+              </a:solidFill>
+              <a:prstDash val="solid"/>
+              <a:round/>
+            </a:ln>
+          </p:spPr>
+          <p:txBody>
+            <a:bodyPr/>
+            <a:lstStyle/>
+            <a:p/>
+          </p:txBody>
+        </p:sp>
+        <p:sp>
+          <p:nvSpPr>
+            <p:cNvPr id="59" name="pl59"/>
+            <p:cNvSpPr/>
+            <p:nvPr/>
+          </p:nvSpPr>
+          <p:spPr>
+            <a:xfrm>
+              <a:off x="2135389" y="4336484"/>
+              <a:ext cx="0" cy="1317069"/>
+            </a:xfrm>
+            <a:custGeom>
+              <a:avLst/>
+              <a:pathLst>
+                <a:path w="0" h="1317069">
+                  <a:moveTo>
+                    <a:pt x="0" y="1317069"/>
+                  </a:moveTo>
+                  <a:lnTo>
+                    <a:pt x="0" y="0"/>
+                  </a:lnTo>
+                  <a:lnTo>
+                    <a:pt x="0" y="0"/>
+                  </a:lnTo>
+                </a:path>
+              </a:pathLst>
+            </a:custGeom>
+            <a:ln w="13550" cap="flat">
+              <a:solidFill>
+                <a:srgbClr val="EBEBEB">
+                  <a:alpha val="100000"/>
+                </a:srgbClr>
+              </a:solidFill>
+              <a:prstDash val="solid"/>
+              <a:round/>
+            </a:ln>
+          </p:spPr>
+          <p:txBody>
+            <a:bodyPr/>
+            <a:lstStyle/>
+            <a:p/>
+          </p:txBody>
+        </p:sp>
+        <p:sp>
+          <p:nvSpPr>
+            <p:cNvPr id="60" name="pl60"/>
+            <p:cNvSpPr/>
+            <p:nvPr/>
+          </p:nvSpPr>
+          <p:spPr>
+            <a:xfrm>
+              <a:off x="2948991" y="4336484"/>
+              <a:ext cx="0" cy="1317069"/>
+            </a:xfrm>
+            <a:custGeom>
+              <a:avLst/>
+              <a:pathLst>
+                <a:path w="0" h="1317069">
+                  <a:moveTo>
+                    <a:pt x="0" y="1317069"/>
+                  </a:moveTo>
+                  <a:lnTo>
+                    <a:pt x="0" y="0"/>
+                  </a:lnTo>
+                  <a:lnTo>
+                    <a:pt x="0" y="0"/>
+                  </a:lnTo>
+                </a:path>
+              </a:pathLst>
+            </a:custGeom>
+            <a:ln w="13550" cap="flat">
+              <a:solidFill>
+                <a:srgbClr val="EBEBEB">
+                  <a:alpha val="100000"/>
+                </a:srgbClr>
+              </a:solidFill>
+              <a:prstDash val="solid"/>
+              <a:round/>
+            </a:ln>
+          </p:spPr>
+          <p:txBody>
+            <a:bodyPr/>
+            <a:lstStyle/>
+            <a:p/>
+          </p:txBody>
+        </p:sp>
+        <p:sp>
+          <p:nvSpPr>
+            <p:cNvPr id="61" name="pl61"/>
+            <p:cNvSpPr/>
+            <p:nvPr/>
+          </p:nvSpPr>
+          <p:spPr>
+            <a:xfrm>
+              <a:off x="3762592" y="4336484"/>
+              <a:ext cx="0" cy="1317069"/>
+            </a:xfrm>
+            <a:custGeom>
+              <a:avLst/>
+              <a:pathLst>
+                <a:path w="0" h="1317069">
+                  <a:moveTo>
+                    <a:pt x="0" y="1317069"/>
+                  </a:moveTo>
+                  <a:lnTo>
+                    <a:pt x="0" y="0"/>
+                  </a:lnTo>
+                  <a:lnTo>
+                    <a:pt x="0" y="0"/>
+                  </a:lnTo>
+                </a:path>
+              </a:pathLst>
+            </a:custGeom>
+            <a:ln w="13550" cap="flat">
+              <a:solidFill>
+                <a:srgbClr val="EBEBEB">
+                  <a:alpha val="100000"/>
+                </a:srgbClr>
+              </a:solidFill>
+              <a:prstDash val="solid"/>
+              <a:round/>
+            </a:ln>
+          </p:spPr>
+          <p:txBody>
+            <a:bodyPr/>
+            <a:lstStyle/>
+            <a:p/>
+          </p:txBody>
+        </p:sp>
+        <p:sp>
+          <p:nvSpPr>
+            <p:cNvPr id="62" name="pl62"/>
+            <p:cNvSpPr/>
+            <p:nvPr/>
+          </p:nvSpPr>
+          <p:spPr>
+            <a:xfrm>
+              <a:off x="4576193" y="4336484"/>
+              <a:ext cx="0" cy="1317069"/>
+            </a:xfrm>
+            <a:custGeom>
+              <a:avLst/>
+              <a:pathLst>
+                <a:path w="0" h="1317069">
+                  <a:moveTo>
+                    <a:pt x="0" y="1317069"/>
+                  </a:moveTo>
+                  <a:lnTo>
+                    <a:pt x="0" y="0"/>
+                  </a:lnTo>
+                  <a:lnTo>
+                    <a:pt x="0" y="0"/>
+                  </a:lnTo>
+                </a:path>
+              </a:pathLst>
+            </a:custGeom>
+            <a:ln w="13550" cap="flat">
+              <a:solidFill>
+                <a:srgbClr val="EBEBEB">
+                  <a:alpha val="100000"/>
+                </a:srgbClr>
+              </a:solidFill>
+              <a:prstDash val="solid"/>
+              <a:round/>
+            </a:ln>
+          </p:spPr>
+          <p:txBody>
+            <a:bodyPr/>
+            <a:lstStyle/>
+            <a:p/>
+          </p:txBody>
+        </p:sp>
+        <p:sp>
+          <p:nvSpPr>
+            <p:cNvPr id="63" name="pl63"/>
+            <p:cNvSpPr/>
+            <p:nvPr/>
+          </p:nvSpPr>
+          <p:spPr>
+            <a:xfrm>
+              <a:off x="5389795" y="4336484"/>
+              <a:ext cx="0" cy="1317069"/>
+            </a:xfrm>
+            <a:custGeom>
+              <a:avLst/>
+              <a:pathLst>
+                <a:path w="0" h="1317069">
+                  <a:moveTo>
+                    <a:pt x="0" y="1317069"/>
+                  </a:moveTo>
+                  <a:lnTo>
+                    <a:pt x="0" y="0"/>
+                  </a:lnTo>
+                  <a:lnTo>
+                    <a:pt x="0" y="0"/>
+                  </a:lnTo>
+                </a:path>
+              </a:pathLst>
+            </a:custGeom>
+            <a:ln w="13550" cap="flat">
+              <a:solidFill>
+                <a:srgbClr val="EBEBEB">
+                  <a:alpha val="100000"/>
+                </a:srgbClr>
+              </a:solidFill>
+              <a:prstDash val="solid"/>
+              <a:round/>
+            </a:ln>
+          </p:spPr>
+          <p:txBody>
+            <a:bodyPr/>
+            <a:lstStyle/>
+            <a:p/>
+          </p:txBody>
+        </p:sp>
+        <p:sp>
+          <p:nvSpPr>
+            <p:cNvPr id="64" name="pl64"/>
+            <p:cNvSpPr/>
+            <p:nvPr/>
+          </p:nvSpPr>
+          <p:spPr>
+            <a:xfrm>
+              <a:off x="6203396" y="4336484"/>
+              <a:ext cx="0" cy="1317069"/>
+            </a:xfrm>
+            <a:custGeom>
+              <a:avLst/>
+              <a:pathLst>
+                <a:path w="0" h="1317069">
+                  <a:moveTo>
+                    <a:pt x="0" y="1317069"/>
+                  </a:moveTo>
+                  <a:lnTo>
+                    <a:pt x="0" y="0"/>
+                  </a:lnTo>
+                  <a:lnTo>
+                    <a:pt x="0" y="0"/>
+                  </a:lnTo>
+                </a:path>
+              </a:pathLst>
+            </a:custGeom>
+            <a:ln w="13550" cap="flat">
+              <a:solidFill>
+                <a:srgbClr val="EBEBEB">
+                  <a:alpha val="100000"/>
+                </a:srgbClr>
+              </a:solidFill>
+              <a:prstDash val="solid"/>
+              <a:round/>
+            </a:ln>
+          </p:spPr>
+          <p:txBody>
+            <a:bodyPr/>
+            <a:lstStyle/>
+            <a:p/>
+          </p:txBody>
+        </p:sp>
+        <p:sp>
+          <p:nvSpPr>
+            <p:cNvPr id="65" name="pl65"/>
+            <p:cNvSpPr/>
+            <p:nvPr/>
+          </p:nvSpPr>
+          <p:spPr>
+            <a:xfrm>
+              <a:off x="7016997" y="4336484"/>
+              <a:ext cx="0" cy="1317069"/>
+            </a:xfrm>
+            <a:custGeom>
+              <a:avLst/>
+              <a:pathLst>
+                <a:path w="0" h="1317069">
+                  <a:moveTo>
+                    <a:pt x="0" y="1317069"/>
+                  </a:moveTo>
+                  <a:lnTo>
+                    <a:pt x="0" y="0"/>
+                  </a:lnTo>
+                  <a:lnTo>
+                    <a:pt x="0" y="0"/>
+                  </a:lnTo>
+                </a:path>
+              </a:pathLst>
+            </a:custGeom>
+            <a:ln w="13550" cap="flat">
+              <a:solidFill>
+                <a:srgbClr val="EBEBEB">
+                  <a:alpha val="100000"/>
+                </a:srgbClr>
+              </a:solidFill>
+              <a:prstDash val="solid"/>
+              <a:round/>
+            </a:ln>
+          </p:spPr>
+          <p:txBody>
+            <a:bodyPr/>
+            <a:lstStyle/>
+            <a:p/>
+          </p:txBody>
+        </p:sp>
+        <p:sp>
+          <p:nvSpPr>
+            <p:cNvPr id="66" name="pl66"/>
+            <p:cNvSpPr/>
+            <p:nvPr/>
+          </p:nvSpPr>
+          <p:spPr>
+            <a:xfrm>
+              <a:off x="7830599" y="4336484"/>
+              <a:ext cx="0" cy="1317069"/>
+            </a:xfrm>
+            <a:custGeom>
+              <a:avLst/>
+              <a:pathLst>
+                <a:path w="0" h="1317069">
+                  <a:moveTo>
+                    <a:pt x="0" y="1317069"/>
+                  </a:moveTo>
+                  <a:lnTo>
+                    <a:pt x="0" y="0"/>
+                  </a:lnTo>
+                  <a:lnTo>
+                    <a:pt x="0" y="0"/>
+                  </a:lnTo>
+                </a:path>
+              </a:pathLst>
+            </a:custGeom>
+            <a:ln w="13550" cap="flat">
+              <a:solidFill>
+                <a:srgbClr val="EBEBEB">
+                  <a:alpha val="100000"/>
+                </a:srgbClr>
+              </a:solidFill>
+              <a:prstDash val="solid"/>
+              <a:round/>
+            </a:ln>
+          </p:spPr>
+          <p:txBody>
+            <a:bodyPr/>
+            <a:lstStyle/>
+            <a:p/>
+          </p:txBody>
+        </p:sp>
+        <p:sp>
+          <p:nvSpPr>
+            <p:cNvPr id="67" name="pg67"/>
+            <p:cNvSpPr/>
+            <p:nvPr/>
+          </p:nvSpPr>
+          <p:spPr>
+            <a:xfrm>
+              <a:off x="1235312" y="4336484"/>
+              <a:ext cx="6964104" cy="1212759"/>
+            </a:xfrm>
+            <a:custGeom>
+              <a:avLst/>
+              <a:pathLst>
+                <a:path w="6964104" h="1212759">
+                  <a:moveTo>
+                    <a:pt x="534751" y="0"/>
+                  </a:moveTo>
+                  <a:lnTo>
+                    <a:pt x="562755" y="18368"/>
+                  </a:lnTo>
+                  <a:lnTo>
+                    <a:pt x="633100" y="62852"/>
+                  </a:lnTo>
+                  <a:lnTo>
+                    <a:pt x="703444" y="105738"/>
+                  </a:lnTo>
+                  <a:lnTo>
+                    <a:pt x="773789" y="147084"/>
+                  </a:lnTo>
+                  <a:lnTo>
+                    <a:pt x="844133" y="186946"/>
+                  </a:lnTo>
+                  <a:lnTo>
+                    <a:pt x="914478" y="225377"/>
+                  </a:lnTo>
+                  <a:lnTo>
+                    <a:pt x="984822" y="262427"/>
+                  </a:lnTo>
+                  <a:lnTo>
+                    <a:pt x="1055167" y="298147"/>
+                  </a:lnTo>
+                  <a:lnTo>
+                    <a:pt x="1125511" y="332585"/>
+                  </a:lnTo>
+                  <a:lnTo>
+                    <a:pt x="1195856" y="365786"/>
+                  </a:lnTo>
+                  <a:lnTo>
+                    <a:pt x="1266200" y="397794"/>
+                  </a:lnTo>
+                  <a:lnTo>
+                    <a:pt x="1336545" y="428654"/>
+                  </a:lnTo>
+                  <a:lnTo>
+                    <a:pt x="1406889" y="458405"/>
+                  </a:lnTo>
+                  <a:lnTo>
+                    <a:pt x="1477234" y="487088"/>
+                  </a:lnTo>
+                  <a:lnTo>
+                    <a:pt x="1547578" y="514741"/>
+                  </a:lnTo>
+                  <a:lnTo>
+                    <a:pt x="1617923" y="541401"/>
+                  </a:lnTo>
+                  <a:lnTo>
+                    <a:pt x="1688267" y="567104"/>
+                  </a:lnTo>
+                  <a:lnTo>
+                    <a:pt x="1758612" y="591884"/>
+                  </a:lnTo>
+                  <a:lnTo>
+                    <a:pt x="1828956" y="615774"/>
+                  </a:lnTo>
+                  <a:lnTo>
+                    <a:pt x="1899301" y="638806"/>
+                  </a:lnTo>
+                  <a:lnTo>
+                    <a:pt x="1969645" y="661011"/>
+                  </a:lnTo>
+                  <a:lnTo>
+                    <a:pt x="2039990" y="682419"/>
+                  </a:lnTo>
+                  <a:lnTo>
+                    <a:pt x="2110334" y="703058"/>
+                  </a:lnTo>
+                  <a:lnTo>
+                    <a:pt x="2180679" y="722956"/>
+                  </a:lnTo>
+                  <a:lnTo>
+                    <a:pt x="2251023" y="742140"/>
+                  </a:lnTo>
+                  <a:lnTo>
+                    <a:pt x="2321368" y="760634"/>
+                  </a:lnTo>
+                  <a:lnTo>
+                    <a:pt x="2391712" y="778465"/>
+                  </a:lnTo>
+                  <a:lnTo>
+                    <a:pt x="2462057" y="795655"/>
+                  </a:lnTo>
+                  <a:lnTo>
+                    <a:pt x="2532401" y="812228"/>
+                  </a:lnTo>
+                  <a:lnTo>
+                    <a:pt x="2602746" y="828206"/>
+                  </a:lnTo>
+                  <a:lnTo>
+                    <a:pt x="2673090" y="843611"/>
+                  </a:lnTo>
+                  <a:lnTo>
+                    <a:pt x="2743435" y="858462"/>
+                  </a:lnTo>
+                  <a:lnTo>
+                    <a:pt x="2813779" y="872780"/>
+                  </a:lnTo>
+                  <a:lnTo>
+                    <a:pt x="2884124" y="886583"/>
+                  </a:lnTo>
+                  <a:lnTo>
+                    <a:pt x="2954468" y="899891"/>
+                  </a:lnTo>
+                  <a:lnTo>
+                    <a:pt x="3024813" y="912722"/>
+                  </a:lnTo>
+                  <a:lnTo>
+                    <a:pt x="3095157" y="925091"/>
+                  </a:lnTo>
+                  <a:lnTo>
+                    <a:pt x="3165502" y="937017"/>
+                  </a:lnTo>
+                  <a:lnTo>
+                    <a:pt x="3235846" y="948514"/>
+                  </a:lnTo>
+                  <a:lnTo>
+                    <a:pt x="3306191" y="958038"/>
+                  </a:lnTo>
+                  <a:lnTo>
+                    <a:pt x="3376535" y="959108"/>
+                  </a:lnTo>
+                  <a:lnTo>
+                    <a:pt x="3446880" y="960175"/>
+                  </a:lnTo>
+                  <a:lnTo>
+                    <a:pt x="3517224" y="961238"/>
+                  </a:lnTo>
+                  <a:lnTo>
+                    <a:pt x="3587569" y="962297"/>
+                  </a:lnTo>
+                  <a:lnTo>
+                    <a:pt x="3657913" y="963352"/>
+                  </a:lnTo>
+                  <a:lnTo>
+                    <a:pt x="3728257" y="964403"/>
+                  </a:lnTo>
+                  <a:lnTo>
+                    <a:pt x="3798602" y="965451"/>
+                  </a:lnTo>
+                  <a:lnTo>
+                    <a:pt x="3868946" y="966495"/>
+                  </a:lnTo>
+                  <a:lnTo>
+                    <a:pt x="3939291" y="967535"/>
+                  </a:lnTo>
+                  <a:lnTo>
+                    <a:pt x="4009635" y="968572"/>
+                  </a:lnTo>
+                  <a:lnTo>
+                    <a:pt x="4079980" y="969604"/>
+                  </a:lnTo>
+                  <a:lnTo>
+                    <a:pt x="4150324" y="970633"/>
+                  </a:lnTo>
+                  <a:lnTo>
+                    <a:pt x="4220669" y="971659"/>
+                  </a:lnTo>
+                  <a:lnTo>
+                    <a:pt x="4291013" y="972681"/>
+                  </a:lnTo>
+                  <a:lnTo>
+                    <a:pt x="4361358" y="973699"/>
+                  </a:lnTo>
+                  <a:lnTo>
+                    <a:pt x="4431702" y="974713"/>
+                  </a:lnTo>
+                  <a:lnTo>
+                    <a:pt x="4502047" y="975724"/>
+                  </a:lnTo>
+                  <a:lnTo>
+                    <a:pt x="4572391" y="976731"/>
+                  </a:lnTo>
+                  <a:lnTo>
+                    <a:pt x="4642736" y="977734"/>
+                  </a:lnTo>
+                  <a:lnTo>
+                    <a:pt x="4713080" y="978734"/>
+                  </a:lnTo>
+                  <a:lnTo>
+                    <a:pt x="4783425" y="979731"/>
+                  </a:lnTo>
+                  <a:lnTo>
+                    <a:pt x="4853769" y="980724"/>
+                  </a:lnTo>
+                  <a:lnTo>
+                    <a:pt x="4924114" y="981713"/>
+                  </a:lnTo>
+                  <a:lnTo>
+                    <a:pt x="4994458" y="982699"/>
+                  </a:lnTo>
+                  <a:lnTo>
+                    <a:pt x="5064803" y="983681"/>
+                  </a:lnTo>
+                  <a:lnTo>
+                    <a:pt x="5135147" y="984660"/>
+                  </a:lnTo>
+                  <a:lnTo>
+                    <a:pt x="5205492" y="985635"/>
+                  </a:lnTo>
+                  <a:lnTo>
+                    <a:pt x="5275836" y="986606"/>
+                  </a:lnTo>
+                  <a:lnTo>
+                    <a:pt x="5346181" y="987575"/>
+                  </a:lnTo>
+                  <a:lnTo>
+                    <a:pt x="5416525" y="988539"/>
+                  </a:lnTo>
+                  <a:lnTo>
+                    <a:pt x="5486870" y="989501"/>
+                  </a:lnTo>
+                  <a:lnTo>
+                    <a:pt x="5557214" y="990459"/>
+                  </a:lnTo>
+                  <a:lnTo>
+                    <a:pt x="5627559" y="991413"/>
+                  </a:lnTo>
+                  <a:lnTo>
+                    <a:pt x="5697903" y="992364"/>
+                  </a:lnTo>
+                  <a:lnTo>
+                    <a:pt x="5768248" y="993312"/>
+                  </a:lnTo>
+                  <a:lnTo>
+                    <a:pt x="5838592" y="994256"/>
+                  </a:lnTo>
+                  <a:lnTo>
+                    <a:pt x="5908937" y="995197"/>
+                  </a:lnTo>
+                  <a:lnTo>
+                    <a:pt x="5979281" y="996134"/>
+                  </a:lnTo>
+                  <a:lnTo>
+                    <a:pt x="6049626" y="997068"/>
+                  </a:lnTo>
+                  <a:lnTo>
+                    <a:pt x="6119970" y="997999"/>
+                  </a:lnTo>
+                  <a:lnTo>
+                    <a:pt x="6190315" y="998927"/>
+                  </a:lnTo>
+                  <a:lnTo>
+                    <a:pt x="6260659" y="999851"/>
+                  </a:lnTo>
+                  <a:lnTo>
+                    <a:pt x="6331004" y="1000772"/>
+                  </a:lnTo>
+                  <a:lnTo>
+                    <a:pt x="6401348" y="1001689"/>
+                  </a:lnTo>
+                  <a:lnTo>
+                    <a:pt x="6471693" y="1002603"/>
+                  </a:lnTo>
+                  <a:lnTo>
+                    <a:pt x="6542037" y="1003514"/>
+                  </a:lnTo>
+                  <a:lnTo>
+                    <a:pt x="6612382" y="1004422"/>
+                  </a:lnTo>
+                  <a:lnTo>
+                    <a:pt x="6682726" y="1005327"/>
+                  </a:lnTo>
+                  <a:lnTo>
+                    <a:pt x="6753071" y="1006228"/>
+                  </a:lnTo>
+                  <a:lnTo>
+                    <a:pt x="6823415" y="1007126"/>
+                  </a:lnTo>
+                  <a:lnTo>
+                    <a:pt x="6893760" y="1008021"/>
+                  </a:lnTo>
+                  <a:lnTo>
+                    <a:pt x="6964104" y="1008912"/>
+                  </a:lnTo>
+                  <a:lnTo>
+                    <a:pt x="6964104" y="1212759"/>
+                  </a:lnTo>
+                  <a:lnTo>
+                    <a:pt x="6893760" y="1211103"/>
+                  </a:lnTo>
+                  <a:lnTo>
+                    <a:pt x="6823415" y="1209386"/>
+                  </a:lnTo>
+                  <a:lnTo>
+                    <a:pt x="6753071" y="1207605"/>
+                  </a:lnTo>
+                  <a:lnTo>
+                    <a:pt x="6682726" y="1205758"/>
+                  </a:lnTo>
+                  <a:lnTo>
+                    <a:pt x="6612382" y="1203842"/>
+                  </a:lnTo>
+                  <a:lnTo>
+                    <a:pt x="6542037" y="1201855"/>
+                  </a:lnTo>
+                  <a:lnTo>
+                    <a:pt x="6471693" y="1199793"/>
+                  </a:lnTo>
+                  <a:lnTo>
+                    <a:pt x="6401348" y="1197655"/>
+                  </a:lnTo>
+                  <a:lnTo>
+                    <a:pt x="6331004" y="1195437"/>
+                  </a:lnTo>
+                  <a:lnTo>
+                    <a:pt x="6260659" y="1193137"/>
+                  </a:lnTo>
+                  <a:lnTo>
+                    <a:pt x="6190315" y="1190751"/>
+                  </a:lnTo>
+                  <a:lnTo>
+                    <a:pt x="6119970" y="1188276"/>
+                  </a:lnTo>
+                  <a:lnTo>
+                    <a:pt x="6049626" y="1185709"/>
+                  </a:lnTo>
+                  <a:lnTo>
+                    <a:pt x="5979281" y="1183046"/>
+                  </a:lnTo>
+                  <a:lnTo>
+                    <a:pt x="5908937" y="1180284"/>
+                  </a:lnTo>
+                  <a:lnTo>
+                    <a:pt x="5838592" y="1177419"/>
+                  </a:lnTo>
+                  <a:lnTo>
+                    <a:pt x="5768248" y="1174448"/>
+                  </a:lnTo>
+                  <a:lnTo>
+                    <a:pt x="5697903" y="1171365"/>
+                  </a:lnTo>
+                  <a:lnTo>
+                    <a:pt x="5627559" y="1168169"/>
+                  </a:lnTo>
+                  <a:lnTo>
+                    <a:pt x="5557214" y="1164852"/>
+                  </a:lnTo>
+                  <a:lnTo>
+                    <a:pt x="5486870" y="1161413"/>
+                  </a:lnTo>
+                  <a:lnTo>
+                    <a:pt x="5416525" y="1157845"/>
+                  </a:lnTo>
+                  <a:lnTo>
+                    <a:pt x="5346181" y="1154145"/>
+                  </a:lnTo>
+                  <a:lnTo>
+                    <a:pt x="5275836" y="1150306"/>
+                  </a:lnTo>
+                  <a:lnTo>
+                    <a:pt x="5205492" y="1146325"/>
+                  </a:lnTo>
+                  <a:lnTo>
+                    <a:pt x="5135147" y="1142195"/>
+                  </a:lnTo>
+                  <a:lnTo>
+                    <a:pt x="5064803" y="1137912"/>
+                  </a:lnTo>
+                  <a:lnTo>
+                    <a:pt x="4994458" y="1133469"/>
+                  </a:lnTo>
+                  <a:lnTo>
+                    <a:pt x="4924114" y="1128860"/>
+                  </a:lnTo>
+                  <a:lnTo>
+                    <a:pt x="4853769" y="1124080"/>
+                  </a:lnTo>
+                  <a:lnTo>
+                    <a:pt x="4783425" y="1119122"/>
+                  </a:lnTo>
+                  <a:lnTo>
+                    <a:pt x="4713080" y="1113980"/>
+                  </a:lnTo>
+                  <a:lnTo>
+                    <a:pt x="4642736" y="1108645"/>
+                  </a:lnTo>
+                  <a:lnTo>
+                    <a:pt x="4572391" y="1103112"/>
+                  </a:lnTo>
+                  <a:lnTo>
+                    <a:pt x="4502047" y="1097373"/>
+                  </a:lnTo>
+                  <a:lnTo>
+                    <a:pt x="4431702" y="1091420"/>
+                  </a:lnTo>
+                  <a:lnTo>
+                    <a:pt x="4361358" y="1085246"/>
+                  </a:lnTo>
+                  <a:lnTo>
+                    <a:pt x="4291013" y="1078841"/>
+                  </a:lnTo>
+                  <a:lnTo>
+                    <a:pt x="4220669" y="1072198"/>
+                  </a:lnTo>
+                  <a:lnTo>
+                    <a:pt x="4150324" y="1065308"/>
+                  </a:lnTo>
+                  <a:lnTo>
+                    <a:pt x="4079980" y="1058160"/>
+                  </a:lnTo>
+                  <a:lnTo>
+                    <a:pt x="4009635" y="1050747"/>
+                  </a:lnTo>
+                  <a:lnTo>
+                    <a:pt x="3939291" y="1043058"/>
+                  </a:lnTo>
+                  <a:lnTo>
+                    <a:pt x="3868946" y="1035082"/>
+                  </a:lnTo>
+                  <a:lnTo>
+                    <a:pt x="3798602" y="1026809"/>
+                  </a:lnTo>
+                  <a:lnTo>
+                    <a:pt x="3728257" y="1018228"/>
+                  </a:lnTo>
+                  <a:lnTo>
+                    <a:pt x="3657913" y="1009327"/>
+                  </a:lnTo>
+                  <a:lnTo>
+                    <a:pt x="3587569" y="1000095"/>
+                  </a:lnTo>
+                  <a:lnTo>
+                    <a:pt x="3517224" y="990519"/>
+                  </a:lnTo>
+                  <a:lnTo>
+                    <a:pt x="3446880" y="980587"/>
+                  </a:lnTo>
+                  <a:lnTo>
+                    <a:pt x="3376535" y="970284"/>
+                  </a:lnTo>
+                  <a:lnTo>
+                    <a:pt x="3306191" y="959598"/>
+                  </a:lnTo>
+                  <a:lnTo>
+                    <a:pt x="3235846" y="956964"/>
+                  </a:lnTo>
+                  <a:lnTo>
+                    <a:pt x="3165502" y="955886"/>
+                  </a:lnTo>
+                  <a:lnTo>
+                    <a:pt x="3095157" y="954803"/>
+                  </a:lnTo>
+                  <a:lnTo>
+                    <a:pt x="3024813" y="953718"/>
+                  </a:lnTo>
+                  <a:lnTo>
+                    <a:pt x="2954468" y="952628"/>
+                  </a:lnTo>
+                  <a:lnTo>
+                    <a:pt x="2884124" y="951534"/>
+                  </a:lnTo>
+                  <a:lnTo>
+                    <a:pt x="2813779" y="950436"/>
+                  </a:lnTo>
+                  <a:lnTo>
+                    <a:pt x="2743435" y="949335"/>
+                  </a:lnTo>
+                  <a:lnTo>
+                    <a:pt x="2673090" y="948229"/>
+                  </a:lnTo>
+                  <a:lnTo>
+                    <a:pt x="2602746" y="947120"/>
+                  </a:lnTo>
+                  <a:lnTo>
+                    <a:pt x="2532401" y="946006"/>
+                  </a:lnTo>
+                  <a:lnTo>
+                    <a:pt x="2462057" y="944889"/>
+                  </a:lnTo>
+                  <a:lnTo>
+                    <a:pt x="2391712" y="943767"/>
+                  </a:lnTo>
+                  <a:lnTo>
+                    <a:pt x="2321368" y="942642"/>
+                  </a:lnTo>
+                  <a:lnTo>
+                    <a:pt x="2251023" y="941512"/>
+                  </a:lnTo>
+                  <a:lnTo>
+                    <a:pt x="2180679" y="940379"/>
+                  </a:lnTo>
+                  <a:lnTo>
+                    <a:pt x="2110334" y="939241"/>
+                  </a:lnTo>
+                  <a:lnTo>
+                    <a:pt x="2039990" y="938099"/>
+                  </a:lnTo>
+                  <a:lnTo>
+                    <a:pt x="1969645" y="936953"/>
+                  </a:lnTo>
+                  <a:lnTo>
+                    <a:pt x="1899301" y="935803"/>
+                  </a:lnTo>
+                  <a:lnTo>
+                    <a:pt x="1828956" y="934649"/>
+                  </a:lnTo>
+                  <a:lnTo>
+                    <a:pt x="1758612" y="933491"/>
+                  </a:lnTo>
+                  <a:lnTo>
+                    <a:pt x="1688267" y="932328"/>
+                  </a:lnTo>
+                  <a:lnTo>
+                    <a:pt x="1617923" y="931162"/>
+                  </a:lnTo>
+                  <a:lnTo>
+                    <a:pt x="1547578" y="929991"/>
+                  </a:lnTo>
+                  <a:lnTo>
+                    <a:pt x="1477234" y="928816"/>
+                  </a:lnTo>
+                  <a:lnTo>
+                    <a:pt x="1406889" y="927637"/>
+                  </a:lnTo>
+                  <a:lnTo>
+                    <a:pt x="1336545" y="926453"/>
+                  </a:lnTo>
+                  <a:lnTo>
+                    <a:pt x="1266200" y="925266"/>
+                  </a:lnTo>
+                  <a:lnTo>
+                    <a:pt x="1195856" y="924074"/>
+                  </a:lnTo>
+                  <a:lnTo>
+                    <a:pt x="1125511" y="922877"/>
+                  </a:lnTo>
+                  <a:lnTo>
+                    <a:pt x="1055167" y="921677"/>
+                  </a:lnTo>
+                  <a:lnTo>
+                    <a:pt x="984822" y="920472"/>
+                  </a:lnTo>
+                  <a:lnTo>
+                    <a:pt x="914478" y="919263"/>
+                  </a:lnTo>
+                  <a:lnTo>
+                    <a:pt x="844133" y="918049"/>
+                  </a:lnTo>
+                  <a:lnTo>
+                    <a:pt x="773789" y="916831"/>
+                  </a:lnTo>
+                  <a:lnTo>
+                    <a:pt x="703444" y="915609"/>
+                  </a:lnTo>
+                  <a:lnTo>
+                    <a:pt x="633100" y="914382"/>
+                  </a:lnTo>
+                  <a:lnTo>
+                    <a:pt x="562755" y="913151"/>
+                  </a:lnTo>
+                  <a:lnTo>
+                    <a:pt x="492411" y="911916"/>
+                  </a:lnTo>
+                  <a:lnTo>
+                    <a:pt x="422066" y="910676"/>
+                  </a:lnTo>
+                  <a:lnTo>
+                    <a:pt x="351722" y="909432"/>
+                  </a:lnTo>
+                  <a:lnTo>
+                    <a:pt x="281377" y="908183"/>
+                  </a:lnTo>
+                  <a:lnTo>
+                    <a:pt x="211033" y="906930"/>
+                  </a:lnTo>
+                  <a:lnTo>
+                    <a:pt x="140688" y="905672"/>
+                  </a:lnTo>
+                  <a:lnTo>
+                    <a:pt x="70344" y="904409"/>
+                  </a:lnTo>
+                  <a:lnTo>
+                    <a:pt x="0" y="903143"/>
+                  </a:lnTo>
+                  <a:close/>
+                </a:path>
+              </a:pathLst>
+            </a:custGeom>
+            <a:solidFill>
+              <a:srgbClr val="FF8C00">
+                <a:alpha val="20000"/>
+              </a:srgbClr>
+            </a:solidFill>
+          </p:spPr>
+          <p:txBody>
+            <a:bodyPr/>
+            <a:lstStyle/>
+            <a:p/>
+          </p:txBody>
+        </p:sp>
+        <p:sp>
+          <p:nvSpPr>
+            <p:cNvPr id="68" name="pl68"/>
+            <p:cNvSpPr/>
+            <p:nvPr/>
+          </p:nvSpPr>
+          <p:spPr>
+            <a:xfrm>
+              <a:off x="1770064" y="4336484"/>
+              <a:ext cx="6429352" cy="1008912"/>
+            </a:xfrm>
+            <a:custGeom>
+              <a:avLst/>
+              <a:pathLst>
+                <a:path w="6429352" h="1008912">
+                  <a:moveTo>
+                    <a:pt x="0" y="0"/>
+                  </a:moveTo>
+                  <a:lnTo>
+                    <a:pt x="28003" y="18368"/>
+                  </a:lnTo>
+                  <a:lnTo>
+                    <a:pt x="98348" y="62852"/>
+                  </a:lnTo>
+                  <a:lnTo>
+                    <a:pt x="168692" y="105738"/>
+                  </a:lnTo>
+                  <a:lnTo>
+                    <a:pt x="239037" y="147084"/>
+                  </a:lnTo>
+                  <a:lnTo>
+                    <a:pt x="309381" y="186946"/>
+                  </a:lnTo>
+                  <a:lnTo>
+                    <a:pt x="379726" y="225377"/>
+                  </a:lnTo>
+                  <a:lnTo>
+                    <a:pt x="450070" y="262427"/>
+                  </a:lnTo>
+                  <a:lnTo>
+                    <a:pt x="520415" y="298147"/>
+                  </a:lnTo>
+                  <a:lnTo>
+                    <a:pt x="590759" y="332585"/>
+                  </a:lnTo>
+                  <a:lnTo>
+                    <a:pt x="661104" y="365786"/>
+                  </a:lnTo>
+                  <a:lnTo>
+                    <a:pt x="731448" y="397794"/>
+                  </a:lnTo>
+                  <a:lnTo>
+                    <a:pt x="801793" y="428654"/>
+                  </a:lnTo>
+                  <a:lnTo>
+                    <a:pt x="872137" y="458405"/>
+                  </a:lnTo>
+                  <a:lnTo>
+                    <a:pt x="942482" y="487088"/>
+                  </a:lnTo>
+                  <a:lnTo>
+                    <a:pt x="1012826" y="514741"/>
+                  </a:lnTo>
+                  <a:lnTo>
+                    <a:pt x="1083171" y="541401"/>
+                  </a:lnTo>
+                  <a:lnTo>
+                    <a:pt x="1153515" y="567104"/>
+                  </a:lnTo>
+                  <a:lnTo>
+                    <a:pt x="1223860" y="591884"/>
+                  </a:lnTo>
+                  <a:lnTo>
+                    <a:pt x="1294204" y="615774"/>
+                  </a:lnTo>
+                  <a:lnTo>
+                    <a:pt x="1364549" y="638806"/>
+                  </a:lnTo>
+                  <a:lnTo>
+                    <a:pt x="1434893" y="661011"/>
+                  </a:lnTo>
+                  <a:lnTo>
+                    <a:pt x="1505238" y="682419"/>
+                  </a:lnTo>
+                  <a:lnTo>
+                    <a:pt x="1575582" y="703058"/>
+                  </a:lnTo>
+                  <a:lnTo>
+                    <a:pt x="1645927" y="722956"/>
+                  </a:lnTo>
+                  <a:lnTo>
+                    <a:pt x="1716271" y="742140"/>
+                  </a:lnTo>
+                  <a:lnTo>
+                    <a:pt x="1786616" y="760634"/>
+                  </a:lnTo>
+                  <a:lnTo>
+                    <a:pt x="1856960" y="778465"/>
+                  </a:lnTo>
+                  <a:lnTo>
+                    <a:pt x="1927305" y="795655"/>
+                  </a:lnTo>
+                  <a:lnTo>
+                    <a:pt x="1997649" y="812228"/>
+                  </a:lnTo>
+                  <a:lnTo>
+                    <a:pt x="2067994" y="828206"/>
+                  </a:lnTo>
+                  <a:lnTo>
+                    <a:pt x="2138338" y="843611"/>
+                  </a:lnTo>
+                  <a:lnTo>
+                    <a:pt x="2208683" y="858462"/>
+                  </a:lnTo>
+                  <a:lnTo>
+                    <a:pt x="2279027" y="872780"/>
+                  </a:lnTo>
+                  <a:lnTo>
+                    <a:pt x="2349372" y="886583"/>
+                  </a:lnTo>
+                  <a:lnTo>
+                    <a:pt x="2419716" y="899891"/>
+                  </a:lnTo>
+                  <a:lnTo>
+                    <a:pt x="2490061" y="912722"/>
+                  </a:lnTo>
+                  <a:lnTo>
+                    <a:pt x="2560405" y="925091"/>
+                  </a:lnTo>
+                  <a:lnTo>
+                    <a:pt x="2630750" y="937017"/>
+                  </a:lnTo>
+                  <a:lnTo>
+                    <a:pt x="2701094" y="948514"/>
+                  </a:lnTo>
+                  <a:lnTo>
+                    <a:pt x="2771439" y="958038"/>
+                  </a:lnTo>
+                  <a:lnTo>
+                    <a:pt x="2841783" y="959108"/>
+                  </a:lnTo>
+                  <a:lnTo>
+                    <a:pt x="2912128" y="960175"/>
+                  </a:lnTo>
+                  <a:lnTo>
+                    <a:pt x="2982472" y="961238"/>
+                  </a:lnTo>
+                  <a:lnTo>
+                    <a:pt x="3052817" y="962297"/>
+                  </a:lnTo>
+                  <a:lnTo>
+                    <a:pt x="3123161" y="963352"/>
+                  </a:lnTo>
+                  <a:lnTo>
+                    <a:pt x="3193506" y="964403"/>
+                  </a:lnTo>
+                  <a:lnTo>
+                    <a:pt x="3263850" y="965451"/>
+                  </a:lnTo>
+                  <a:lnTo>
+                    <a:pt x="3334195" y="966495"/>
+                  </a:lnTo>
+                  <a:lnTo>
+                    <a:pt x="3404539" y="967535"/>
+                  </a:lnTo>
+                  <a:lnTo>
+                    <a:pt x="3474883" y="968572"/>
+                  </a:lnTo>
+                  <a:lnTo>
+                    <a:pt x="3545228" y="969604"/>
+                  </a:lnTo>
+                  <a:lnTo>
+                    <a:pt x="3615572" y="970633"/>
+                  </a:lnTo>
+                  <a:lnTo>
+                    <a:pt x="3685917" y="971659"/>
+                  </a:lnTo>
+                  <a:lnTo>
+                    <a:pt x="3756261" y="972681"/>
+                  </a:lnTo>
+                  <a:lnTo>
+                    <a:pt x="3826606" y="973699"/>
+                  </a:lnTo>
+                  <a:lnTo>
+                    <a:pt x="3896950" y="974713"/>
+                  </a:lnTo>
+                  <a:lnTo>
+                    <a:pt x="3967295" y="975724"/>
+                  </a:lnTo>
+                  <a:lnTo>
+                    <a:pt x="4037639" y="976731"/>
+                  </a:lnTo>
+                  <a:lnTo>
+                    <a:pt x="4107984" y="977734"/>
+                  </a:lnTo>
+                  <a:lnTo>
+                    <a:pt x="4178328" y="978734"/>
+                  </a:lnTo>
+                  <a:lnTo>
+                    <a:pt x="4248673" y="979731"/>
+                  </a:lnTo>
+                  <a:lnTo>
+                    <a:pt x="4319017" y="980724"/>
+                  </a:lnTo>
+                  <a:lnTo>
+                    <a:pt x="4389362" y="981713"/>
+                  </a:lnTo>
+                  <a:lnTo>
+                    <a:pt x="4459706" y="982699"/>
+                  </a:lnTo>
+                  <a:lnTo>
+                    <a:pt x="4530051" y="983681"/>
+                  </a:lnTo>
+                  <a:lnTo>
+                    <a:pt x="4600395" y="984660"/>
+                  </a:lnTo>
+                  <a:lnTo>
+                    <a:pt x="4670740" y="985635"/>
+                  </a:lnTo>
+                  <a:lnTo>
+                    <a:pt x="4741084" y="986606"/>
+                  </a:lnTo>
+                  <a:lnTo>
+                    <a:pt x="4811429" y="987575"/>
+                  </a:lnTo>
+                  <a:lnTo>
+                    <a:pt x="4881773" y="988539"/>
+                  </a:lnTo>
+                  <a:lnTo>
+                    <a:pt x="4952118" y="989501"/>
+                  </a:lnTo>
+                  <a:lnTo>
+                    <a:pt x="5022462" y="990459"/>
+                  </a:lnTo>
+                  <a:lnTo>
+                    <a:pt x="5092807" y="991413"/>
+                  </a:lnTo>
+                  <a:lnTo>
+                    <a:pt x="5163151" y="992364"/>
+                  </a:lnTo>
+                  <a:lnTo>
+                    <a:pt x="5233496" y="993312"/>
+                  </a:lnTo>
+                  <a:lnTo>
+                    <a:pt x="5303840" y="994256"/>
+                  </a:lnTo>
+                  <a:lnTo>
+                    <a:pt x="5374185" y="995197"/>
+                  </a:lnTo>
+                  <a:lnTo>
+                    <a:pt x="5444529" y="996134"/>
+                  </a:lnTo>
+                  <a:lnTo>
+                    <a:pt x="5514874" y="997068"/>
+                  </a:lnTo>
+                  <a:lnTo>
+                    <a:pt x="5585218" y="997999"/>
+                  </a:lnTo>
+                  <a:lnTo>
+                    <a:pt x="5655563" y="998927"/>
+                  </a:lnTo>
+                  <a:lnTo>
+                    <a:pt x="5725907" y="999851"/>
+                  </a:lnTo>
+                  <a:lnTo>
+                    <a:pt x="5796252" y="1000772"/>
+                  </a:lnTo>
+                  <a:lnTo>
+                    <a:pt x="5866596" y="1001689"/>
+                  </a:lnTo>
+                  <a:lnTo>
+                    <a:pt x="5936941" y="1002603"/>
+                  </a:lnTo>
+                  <a:lnTo>
+                    <a:pt x="6007285" y="1003514"/>
+                  </a:lnTo>
+                  <a:lnTo>
+                    <a:pt x="6077630" y="1004422"/>
+                  </a:lnTo>
+                  <a:lnTo>
+                    <a:pt x="6147974" y="1005327"/>
+                  </a:lnTo>
+                  <a:lnTo>
+                    <a:pt x="6218319" y="1006228"/>
+                  </a:lnTo>
+                  <a:lnTo>
+                    <a:pt x="6288663" y="1007126"/>
+                  </a:lnTo>
+                  <a:lnTo>
+                    <a:pt x="6359008" y="1008021"/>
+                  </a:lnTo>
+                  <a:lnTo>
+                    <a:pt x="6429352" y="1008912"/>
+                  </a:lnTo>
+                </a:path>
+              </a:pathLst>
+            </a:custGeom>
+          </p:spPr>
+          <p:txBody>
+            <a:bodyPr/>
+            <a:lstStyle/>
+            <a:p/>
+          </p:txBody>
+        </p:sp>
+        <p:sp>
+          <p:nvSpPr>
+            <p:cNvPr id="69" name="pl69"/>
+            <p:cNvSpPr/>
+            <p:nvPr/>
+          </p:nvSpPr>
+          <p:spPr>
+            <a:xfrm>
+              <a:off x="1235312" y="5239627"/>
+              <a:ext cx="6964104" cy="309616"/>
+            </a:xfrm>
+            <a:custGeom>
+              <a:avLst/>
+              <a:pathLst>
+                <a:path w="6964104" h="309616">
+                  <a:moveTo>
+                    <a:pt x="6964104" y="309616"/>
+                  </a:moveTo>
+                  <a:lnTo>
+                    <a:pt x="6893760" y="307960"/>
+                  </a:lnTo>
+                  <a:lnTo>
+                    <a:pt x="6823415" y="306243"/>
+                  </a:lnTo>
+                  <a:lnTo>
+                    <a:pt x="6753071" y="304462"/>
+                  </a:lnTo>
+                  <a:lnTo>
+                    <a:pt x="6682726" y="302615"/>
+                  </a:lnTo>
+                  <a:lnTo>
+                    <a:pt x="6612382" y="300699"/>
+                  </a:lnTo>
+                  <a:lnTo>
+                    <a:pt x="6542037" y="298712"/>
+                  </a:lnTo>
+                  <a:lnTo>
+                    <a:pt x="6471693" y="296650"/>
+                  </a:lnTo>
+                  <a:lnTo>
+                    <a:pt x="6401348" y="294512"/>
+                  </a:lnTo>
+                  <a:lnTo>
+                    <a:pt x="6331004" y="292294"/>
+                  </a:lnTo>
+                  <a:lnTo>
+                    <a:pt x="6260659" y="289994"/>
+                  </a:lnTo>
+                  <a:lnTo>
+                    <a:pt x="6190315" y="287608"/>
+                  </a:lnTo>
+                  <a:lnTo>
+                    <a:pt x="6119970" y="285133"/>
+                  </a:lnTo>
+                  <a:lnTo>
+                    <a:pt x="6049626" y="282566"/>
+                  </a:lnTo>
+                  <a:lnTo>
+                    <a:pt x="5979281" y="279903"/>
+                  </a:lnTo>
+                  <a:lnTo>
+                    <a:pt x="5908937" y="277141"/>
+                  </a:lnTo>
+                  <a:lnTo>
+                    <a:pt x="5838592" y="274276"/>
+                  </a:lnTo>
+                  <a:lnTo>
+                    <a:pt x="5768248" y="271305"/>
+                  </a:lnTo>
+                  <a:lnTo>
+                    <a:pt x="5697903" y="268222"/>
+                  </a:lnTo>
+                  <a:lnTo>
+                    <a:pt x="5627559" y="265025"/>
+                  </a:lnTo>
+                  <a:lnTo>
+                    <a:pt x="5557214" y="261709"/>
+                  </a:lnTo>
+                  <a:lnTo>
+                    <a:pt x="5486870" y="258270"/>
+                  </a:lnTo>
+                  <a:lnTo>
+                    <a:pt x="5416525" y="254702"/>
+                  </a:lnTo>
+                  <a:lnTo>
+                    <a:pt x="5346181" y="251002"/>
+                  </a:lnTo>
+                  <a:lnTo>
+                    <a:pt x="5275836" y="247163"/>
+                  </a:lnTo>
+                  <a:lnTo>
+                    <a:pt x="5205492" y="243182"/>
+                  </a:lnTo>
+                  <a:lnTo>
+                    <a:pt x="5135147" y="239052"/>
+                  </a:lnTo>
+                  <a:lnTo>
+                    <a:pt x="5064803" y="234769"/>
+                  </a:lnTo>
+                  <a:lnTo>
+                    <a:pt x="4994458" y="230326"/>
+                  </a:lnTo>
+                  <a:lnTo>
+                    <a:pt x="4924114" y="225717"/>
+                  </a:lnTo>
+                  <a:lnTo>
+                    <a:pt x="4853769" y="220937"/>
+                  </a:lnTo>
+                  <a:lnTo>
+                    <a:pt x="4783425" y="215979"/>
+                  </a:lnTo>
+                  <a:lnTo>
+                    <a:pt x="4713080" y="210836"/>
+                  </a:lnTo>
+                  <a:lnTo>
+                    <a:pt x="4642736" y="205502"/>
+                  </a:lnTo>
+                  <a:lnTo>
+                    <a:pt x="4572391" y="199969"/>
+                  </a:lnTo>
+                  <a:lnTo>
+                    <a:pt x="4502047" y="194230"/>
+                  </a:lnTo>
+                  <a:lnTo>
+                    <a:pt x="4431702" y="188277"/>
+                  </a:lnTo>
+                  <a:lnTo>
+                    <a:pt x="4361358" y="182103"/>
+                  </a:lnTo>
+                  <a:lnTo>
+                    <a:pt x="4291013" y="175698"/>
+                  </a:lnTo>
+                  <a:lnTo>
+                    <a:pt x="4220669" y="169055"/>
+                  </a:lnTo>
+                  <a:lnTo>
+                    <a:pt x="4150324" y="162165"/>
+                  </a:lnTo>
+                  <a:lnTo>
+                    <a:pt x="4079980" y="155017"/>
+                  </a:lnTo>
+                  <a:lnTo>
+                    <a:pt x="4009635" y="147604"/>
+                  </a:lnTo>
+                  <a:lnTo>
+                    <a:pt x="3939291" y="139915"/>
+                  </a:lnTo>
+                  <a:lnTo>
+                    <a:pt x="3868946" y="131939"/>
+                  </a:lnTo>
+                  <a:lnTo>
+                    <a:pt x="3798602" y="123666"/>
+                  </a:lnTo>
+                  <a:lnTo>
+                    <a:pt x="3728257" y="115085"/>
+                  </a:lnTo>
+                  <a:lnTo>
+                    <a:pt x="3657913" y="106184"/>
+                  </a:lnTo>
+                  <a:lnTo>
+                    <a:pt x="3587569" y="96952"/>
+                  </a:lnTo>
+                  <a:lnTo>
+                    <a:pt x="3517224" y="87376"/>
+                  </a:lnTo>
+                  <a:lnTo>
+                    <a:pt x="3446880" y="77444"/>
+                  </a:lnTo>
+                  <a:lnTo>
+                    <a:pt x="3376535" y="67141"/>
+                  </a:lnTo>
+                  <a:lnTo>
+                    <a:pt x="3306191" y="56455"/>
+                  </a:lnTo>
+                  <a:lnTo>
+                    <a:pt x="3235846" y="53821"/>
+                  </a:lnTo>
+                  <a:lnTo>
+                    <a:pt x="3165502" y="52742"/>
+                  </a:lnTo>
+                  <a:lnTo>
+                    <a:pt x="3095157" y="51660"/>
+                  </a:lnTo>
+                  <a:lnTo>
+                    <a:pt x="3024813" y="50575"/>
+                  </a:lnTo>
+                  <a:lnTo>
+                    <a:pt x="2954468" y="49485"/>
+                  </a:lnTo>
+                  <a:lnTo>
+                    <a:pt x="2884124" y="48391"/>
+                  </a:lnTo>
+                  <a:lnTo>
+                    <a:pt x="2813779" y="47293"/>
+                  </a:lnTo>
+                  <a:lnTo>
+                    <a:pt x="2743435" y="46192"/>
+                  </a:lnTo>
+                  <a:lnTo>
+                    <a:pt x="2673090" y="45086"/>
+                  </a:lnTo>
+                  <a:lnTo>
+                    <a:pt x="2602746" y="43977"/>
+                  </a:lnTo>
+                  <a:lnTo>
+                    <a:pt x="2532401" y="42863"/>
+                  </a:lnTo>
+                  <a:lnTo>
+                    <a:pt x="2462057" y="41746"/>
+                  </a:lnTo>
+                  <a:lnTo>
+                    <a:pt x="2391712" y="40624"/>
+                  </a:lnTo>
+                  <a:lnTo>
+                    <a:pt x="2321368" y="39499"/>
+                  </a:lnTo>
+                  <a:lnTo>
+                    <a:pt x="2251023" y="38369"/>
+                  </a:lnTo>
+                  <a:lnTo>
+                    <a:pt x="2180679" y="37236"/>
+                  </a:lnTo>
+                  <a:lnTo>
+                    <a:pt x="2110334" y="36098"/>
+                  </a:lnTo>
+                  <a:lnTo>
+                    <a:pt x="2039990" y="34956"/>
+                  </a:lnTo>
+                  <a:lnTo>
+                    <a:pt x="1969645" y="33810"/>
+                  </a:lnTo>
+                  <a:lnTo>
+                    <a:pt x="1899301" y="32660"/>
+                  </a:lnTo>
+                  <a:lnTo>
+                    <a:pt x="1828956" y="31506"/>
+                  </a:lnTo>
+                  <a:lnTo>
+                    <a:pt x="1758612" y="30348"/>
+                  </a:lnTo>
+                  <a:lnTo>
+                    <a:pt x="1688267" y="29185"/>
+                  </a:lnTo>
+                  <a:lnTo>
+                    <a:pt x="1617923" y="28019"/>
+                  </a:lnTo>
+                  <a:lnTo>
+                    <a:pt x="1547578" y="26848"/>
+                  </a:lnTo>
+                  <a:lnTo>
+                    <a:pt x="1477234" y="25673"/>
+                  </a:lnTo>
+                  <a:lnTo>
+                    <a:pt x="1406889" y="24494"/>
+                  </a:lnTo>
+                  <a:lnTo>
+                    <a:pt x="1336545" y="23310"/>
+                  </a:lnTo>
+                  <a:lnTo>
+                    <a:pt x="1266200" y="22123"/>
+                  </a:lnTo>
+                  <a:lnTo>
+                    <a:pt x="1195856" y="20931"/>
+                  </a:lnTo>
+                  <a:lnTo>
+                    <a:pt x="1125511" y="19734"/>
+                  </a:lnTo>
+                  <a:lnTo>
+                    <a:pt x="1055167" y="18534"/>
+                  </a:lnTo>
+                  <a:lnTo>
+                    <a:pt x="984822" y="17329"/>
+                  </a:lnTo>
+                  <a:lnTo>
+                    <a:pt x="914478" y="16120"/>
+                  </a:lnTo>
+                  <a:lnTo>
+                    <a:pt x="844133" y="14906"/>
+                  </a:lnTo>
+                  <a:lnTo>
+                    <a:pt x="773789" y="13688"/>
+                  </a:lnTo>
+                  <a:lnTo>
+                    <a:pt x="703444" y="12466"/>
+                  </a:lnTo>
+                  <a:lnTo>
+                    <a:pt x="633100" y="11239"/>
+                  </a:lnTo>
+                  <a:lnTo>
+                    <a:pt x="562755" y="10008"/>
+                  </a:lnTo>
+                  <a:lnTo>
+                    <a:pt x="492411" y="8773"/>
+                  </a:lnTo>
+                  <a:lnTo>
+                    <a:pt x="422066" y="7533"/>
+                  </a:lnTo>
+                  <a:lnTo>
+                    <a:pt x="351722" y="6289"/>
+                  </a:lnTo>
+                  <a:lnTo>
+                    <a:pt x="281377" y="5040"/>
+                  </a:lnTo>
+                  <a:lnTo>
+                    <a:pt x="211033" y="3787"/>
+                  </a:lnTo>
+                  <a:lnTo>
+                    <a:pt x="140688" y="2529"/>
+                  </a:lnTo>
+                  <a:lnTo>
+                    <a:pt x="70344" y="1266"/>
+                  </a:lnTo>
+                  <a:lnTo>
+                    <a:pt x="0" y="0"/>
+                  </a:lnTo>
+                </a:path>
+              </a:pathLst>
+            </a:custGeom>
+          </p:spPr>
+          <p:txBody>
+            <a:bodyPr/>
+            <a:lstStyle/>
+            <a:p/>
+          </p:txBody>
+        </p:sp>
+        <p:sp>
+          <p:nvSpPr>
+            <p:cNvPr id="70" name="pl70"/>
+            <p:cNvSpPr/>
+            <p:nvPr/>
+          </p:nvSpPr>
+          <p:spPr>
+            <a:xfrm>
+              <a:off x="1235312" y="4827084"/>
+              <a:ext cx="6964104" cy="661555"/>
+            </a:xfrm>
+            <a:custGeom>
+              <a:avLst/>
+              <a:pathLst>
+                <a:path w="6964104" h="661555">
+                  <a:moveTo>
+                    <a:pt x="0" y="0"/>
+                  </a:moveTo>
+                  <a:lnTo>
+                    <a:pt x="70344" y="15237"/>
+                  </a:lnTo>
+                  <a:lnTo>
+                    <a:pt x="140688" y="30171"/>
+                  </a:lnTo>
+                  <a:lnTo>
+                    <a:pt x="211033" y="44808"/>
+                  </a:lnTo>
+                  <a:lnTo>
+                    <a:pt x="281377" y="59155"/>
+                  </a:lnTo>
+                  <a:lnTo>
+                    <a:pt x="351722" y="73216"/>
+                  </a:lnTo>
+                  <a:lnTo>
+                    <a:pt x="422066" y="86998"/>
+                  </a:lnTo>
+                  <a:lnTo>
+                    <a:pt x="492411" y="100506"/>
+                  </a:lnTo>
+                  <a:lnTo>
+                    <a:pt x="562755" y="113746"/>
+                  </a:lnTo>
+                  <a:lnTo>
+                    <a:pt x="633100" y="126722"/>
+                  </a:lnTo>
+                  <a:lnTo>
+                    <a:pt x="703444" y="139440"/>
+                  </a:lnTo>
+                  <a:lnTo>
+                    <a:pt x="773789" y="151906"/>
+                  </a:lnTo>
+                  <a:lnTo>
+                    <a:pt x="844133" y="164124"/>
+                  </a:lnTo>
+                  <a:lnTo>
+                    <a:pt x="914478" y="176099"/>
+                  </a:lnTo>
+                  <a:lnTo>
+                    <a:pt x="984822" y="187836"/>
+                  </a:lnTo>
+                  <a:lnTo>
+                    <a:pt x="1055167" y="199339"/>
+                  </a:lnTo>
+                  <a:lnTo>
+                    <a:pt x="1125511" y="210614"/>
+                  </a:lnTo>
+                  <a:lnTo>
+                    <a:pt x="1195856" y="221665"/>
+                  </a:lnTo>
+                  <a:lnTo>
+                    <a:pt x="1266200" y="232497"/>
+                  </a:lnTo>
+                  <a:lnTo>
+                    <a:pt x="1336545" y="243113"/>
+                  </a:lnTo>
+                  <a:lnTo>
+                    <a:pt x="1406889" y="253517"/>
+                  </a:lnTo>
+                  <a:lnTo>
+                    <a:pt x="1477234" y="263716"/>
+                  </a:lnTo>
+                  <a:lnTo>
+                    <a:pt x="1547578" y="273711"/>
+                  </a:lnTo>
+                  <a:lnTo>
+                    <a:pt x="1617923" y="283508"/>
+                  </a:lnTo>
+                  <a:lnTo>
+                    <a:pt x="1688267" y="293110"/>
+                  </a:lnTo>
+                  <a:lnTo>
+                    <a:pt x="1758612" y="302521"/>
+                  </a:lnTo>
+                  <a:lnTo>
+                    <a:pt x="1828956" y="311745"/>
+                  </a:lnTo>
+                  <a:lnTo>
+                    <a:pt x="1899301" y="320786"/>
+                  </a:lnTo>
+                  <a:lnTo>
+                    <a:pt x="1969645" y="329647"/>
+                  </a:lnTo>
+                  <a:lnTo>
+                    <a:pt x="2039990" y="338332"/>
+                  </a:lnTo>
+                  <a:lnTo>
+                    <a:pt x="2110334" y="346845"/>
+                  </a:lnTo>
+                  <a:lnTo>
+                    <a:pt x="2180679" y="355188"/>
+                  </a:lnTo>
+                  <a:lnTo>
+                    <a:pt x="2251023" y="363365"/>
+                  </a:lnTo>
+                  <a:lnTo>
+                    <a:pt x="2321368" y="371380"/>
+                  </a:lnTo>
+                  <a:lnTo>
+                    <a:pt x="2391712" y="379236"/>
+                  </a:lnTo>
+                  <a:lnTo>
+                    <a:pt x="2462057" y="386935"/>
+                  </a:lnTo>
+                  <a:lnTo>
+                    <a:pt x="2532401" y="394481"/>
+                  </a:lnTo>
+                  <a:lnTo>
+                    <a:pt x="2602746" y="401878"/>
+                  </a:lnTo>
+                  <a:lnTo>
+                    <a:pt x="2673090" y="409127"/>
+                  </a:lnTo>
+                  <a:lnTo>
+                    <a:pt x="2743435" y="416232"/>
+                  </a:lnTo>
+                  <a:lnTo>
+                    <a:pt x="2813779" y="423196"/>
+                  </a:lnTo>
+                  <a:lnTo>
+                    <a:pt x="2884124" y="430022"/>
+                  </a:lnTo>
+                  <a:lnTo>
+                    <a:pt x="2954468" y="436712"/>
+                  </a:lnTo>
+                  <a:lnTo>
+                    <a:pt x="3024813" y="443269"/>
+                  </a:lnTo>
+                  <a:lnTo>
+                    <a:pt x="3095157" y="449695"/>
+                  </a:lnTo>
+                  <a:lnTo>
+                    <a:pt x="3165502" y="455994"/>
+                  </a:lnTo>
+                  <a:lnTo>
+                    <a:pt x="3235846" y="462168"/>
+                  </a:lnTo>
+                  <a:lnTo>
+                    <a:pt x="3306191" y="468219"/>
+                  </a:lnTo>
+                  <a:lnTo>
+                    <a:pt x="3376535" y="474150"/>
+                  </a:lnTo>
+                  <a:lnTo>
+                    <a:pt x="3446880" y="479963"/>
+                  </a:lnTo>
+                  <a:lnTo>
+                    <a:pt x="3517224" y="485660"/>
+                  </a:lnTo>
+                  <a:lnTo>
+                    <a:pt x="3587569" y="491244"/>
+                  </a:lnTo>
+                  <a:lnTo>
+                    <a:pt x="3657913" y="496717"/>
+                  </a:lnTo>
+                  <a:lnTo>
+                    <a:pt x="3728257" y="502081"/>
+                  </a:lnTo>
+                  <a:lnTo>
+                    <a:pt x="3798602" y="507339"/>
+                  </a:lnTo>
+                  <a:lnTo>
+                    <a:pt x="3868946" y="512492"/>
+                  </a:lnTo>
+                  <a:lnTo>
+                    <a:pt x="3939291" y="517543"/>
+                  </a:lnTo>
+                  <a:lnTo>
+                    <a:pt x="4009635" y="522493"/>
+                  </a:lnTo>
+                  <a:lnTo>
+                    <a:pt x="4079980" y="527345"/>
+                  </a:lnTo>
+                  <a:lnTo>
+                    <a:pt x="4150324" y="532101"/>
+                  </a:lnTo>
+                  <a:lnTo>
+                    <a:pt x="4220669" y="536762"/>
+                  </a:lnTo>
+                  <a:lnTo>
+                    <a:pt x="4291013" y="541330"/>
+                  </a:lnTo>
+                  <a:lnTo>
+                    <a:pt x="4361358" y="545808"/>
+                  </a:lnTo>
+                  <a:lnTo>
+                    <a:pt x="4431702" y="550196"/>
+                  </a:lnTo>
+                  <a:lnTo>
+                    <a:pt x="4502047" y="554497"/>
+                  </a:lnTo>
+                  <a:lnTo>
+                    <a:pt x="4572391" y="558713"/>
+                  </a:lnTo>
+                  <a:lnTo>
+                    <a:pt x="4642736" y="562845"/>
+                  </a:lnTo>
+                  <a:lnTo>
+                    <a:pt x="4713080" y="566895"/>
+                  </a:lnTo>
+                  <a:lnTo>
+                    <a:pt x="4783425" y="570865"/>
+                  </a:lnTo>
+                  <a:lnTo>
+                    <a:pt x="4853769" y="574755"/>
+                  </a:lnTo>
+                  <a:lnTo>
+                    <a:pt x="4924114" y="578568"/>
+                  </a:lnTo>
+                  <a:lnTo>
+                    <a:pt x="4994458" y="582306"/>
+                  </a:lnTo>
+                  <a:lnTo>
+                    <a:pt x="5064803" y="585969"/>
+                  </a:lnTo>
+                  <a:lnTo>
+                    <a:pt x="5135147" y="589559"/>
+                  </a:lnTo>
+                  <a:lnTo>
+                    <a:pt x="5205492" y="593078"/>
+                  </a:lnTo>
+                  <a:lnTo>
+                    <a:pt x="5275836" y="596527"/>
+                  </a:lnTo>
+                  <a:lnTo>
+                    <a:pt x="5346181" y="599907"/>
+                  </a:lnTo>
+                  <a:lnTo>
+                    <a:pt x="5416525" y="603221"/>
+                  </a:lnTo>
+                  <a:lnTo>
+                    <a:pt x="5486870" y="606468"/>
+                  </a:lnTo>
+                  <a:lnTo>
+                    <a:pt x="5557214" y="609651"/>
+                  </a:lnTo>
+                  <a:lnTo>
+                    <a:pt x="5627559" y="612771"/>
+                  </a:lnTo>
+                  <a:lnTo>
+                    <a:pt x="5697903" y="615828"/>
+                  </a:lnTo>
+                  <a:lnTo>
+                    <a:pt x="5768248" y="618825"/>
+                  </a:lnTo>
+                  <a:lnTo>
+                    <a:pt x="5838592" y="621762"/>
+                  </a:lnTo>
+                  <a:lnTo>
+                    <a:pt x="5908937" y="624641"/>
+                  </a:lnTo>
+                  <a:lnTo>
+                    <a:pt x="5979281" y="627463"/>
+                  </a:lnTo>
+                  <a:lnTo>
+                    <a:pt x="6049626" y="630228"/>
+                  </a:lnTo>
+                  <a:lnTo>
+                    <a:pt x="6119970" y="632939"/>
+                  </a:lnTo>
+                  <a:lnTo>
+                    <a:pt x="6190315" y="635596"/>
+                  </a:lnTo>
+                  <a:lnTo>
+                    <a:pt x="6260659" y="638199"/>
+                  </a:lnTo>
+                  <a:lnTo>
+                    <a:pt x="6331004" y="640752"/>
+                  </a:lnTo>
+                  <a:lnTo>
+                    <a:pt x="6401348" y="643253"/>
+                  </a:lnTo>
+                  <a:lnTo>
+                    <a:pt x="6471693" y="645705"/>
+                  </a:lnTo>
+                  <a:lnTo>
+                    <a:pt x="6542037" y="648108"/>
+                  </a:lnTo>
+                  <a:lnTo>
+                    <a:pt x="6612382" y="650463"/>
+                  </a:lnTo>
+                  <a:lnTo>
+                    <a:pt x="6682726" y="652771"/>
+                  </a:lnTo>
+                  <a:lnTo>
+                    <a:pt x="6753071" y="655034"/>
+                  </a:lnTo>
+                  <a:lnTo>
+                    <a:pt x="6823415" y="657251"/>
+                  </a:lnTo>
+                  <a:lnTo>
+                    <a:pt x="6893760" y="659425"/>
+                  </a:lnTo>
+                  <a:lnTo>
+                    <a:pt x="6964104" y="661555"/>
+                  </a:lnTo>
+                </a:path>
+              </a:pathLst>
+            </a:custGeom>
+            <a:ln w="27101" cap="flat">
+              <a:solidFill>
+                <a:srgbClr val="FF8C00">
+                  <a:alpha val="100000"/>
+                </a:srgbClr>
+              </a:solidFill>
+              <a:prstDash val="solid"/>
+              <a:round/>
+            </a:ln>
+          </p:spPr>
+          <p:txBody>
+            <a:bodyPr/>
+            <a:lstStyle/>
+            <a:p/>
+          </p:txBody>
+        </p:sp>
+        <p:sp>
+          <p:nvSpPr>
+            <p:cNvPr id="71" name="pl71"/>
+            <p:cNvSpPr/>
+            <p:nvPr/>
+          </p:nvSpPr>
+          <p:spPr>
+            <a:xfrm>
+              <a:off x="887106" y="5294352"/>
+              <a:ext cx="7660515" cy="0"/>
+            </a:xfrm>
+            <a:custGeom>
+              <a:avLst/>
+              <a:pathLst>
+                <a:path w="7660515" h="0">
+                  <a:moveTo>
+                    <a:pt x="0" y="0"/>
+                  </a:moveTo>
+                  <a:lnTo>
+                    <a:pt x="7660515" y="0"/>
+                  </a:lnTo>
+                  <a:lnTo>
+                    <a:pt x="7660515" y="0"/>
+                  </a:lnTo>
+                </a:path>
+              </a:pathLst>
+            </a:custGeom>
+            <a:ln w="13550" cap="flat">
+              <a:solidFill>
+                <a:srgbClr val="7F7F7F">
+                  <a:alpha val="100000"/>
+                </a:srgbClr>
+              </a:solidFill>
+              <a:prstDash val="dash"/>
+              <a:round/>
+            </a:ln>
+          </p:spPr>
+          <p:txBody>
+            <a:bodyPr/>
+            <a:lstStyle/>
+            <a:p/>
+          </p:txBody>
+        </p:sp>
+        <p:sp>
+          <p:nvSpPr>
+            <p:cNvPr id="72" name="pl72"/>
+            <p:cNvSpPr/>
+            <p:nvPr/>
+          </p:nvSpPr>
+          <p:spPr>
+            <a:xfrm>
+              <a:off x="4530353" y="4336484"/>
+              <a:ext cx="0" cy="1317069"/>
+            </a:xfrm>
+            <a:custGeom>
+              <a:avLst/>
+              <a:pathLst>
+                <a:path w="0" h="1317069">
+                  <a:moveTo>
+                    <a:pt x="0" y="1317069"/>
+                  </a:moveTo>
+                  <a:lnTo>
+                    <a:pt x="0" y="0"/>
+                  </a:lnTo>
+                  <a:lnTo>
+                    <a:pt x="0" y="0"/>
+                  </a:lnTo>
+                </a:path>
+              </a:pathLst>
+            </a:custGeom>
+            <a:ln w="13550" cap="flat">
+              <a:solidFill>
+                <a:srgbClr val="666666">
+                  <a:alpha val="100000"/>
+                </a:srgbClr>
+              </a:solidFill>
+              <a:prstDash val="dot"/>
+              <a:round/>
+            </a:ln>
+          </p:spPr>
+          <p:txBody>
+            <a:bodyPr/>
+            <a:lstStyle/>
+            <a:p/>
+          </p:txBody>
+        </p:sp>
+        <p:sp>
+          <p:nvSpPr>
+            <p:cNvPr id="73" name="tx73"/>
+            <p:cNvSpPr/>
+            <p:nvPr/>
+          </p:nvSpPr>
+          <p:spPr>
+            <a:xfrm>
+              <a:off x="762297" y="5553636"/>
+              <a:ext cx="62179" cy="80101"/>
+            </a:xfrm>
+            <a:prstGeom prst="rect">
+              <a:avLst/>
+            </a:prstGeom>
+            <a:noFill/>
+          </p:spPr>
+          <p:txBody>
+            <a:bodyPr lIns="0" rIns="0" tIns="0" bIns="0" anchorCtr="1" anchor="ctr" wrap="none"/>
+            <a:lstStyle/>
+            <a:p>
+              <a:pPr algn="l" marL="0" marR="0" indent="0">
+                <a:lnSpc>
+                  <a:spcPts val="880"/>
+                </a:lnSpc>
+                <a:spcBef>
+                  <a:spcPts val="0"/>
+                </a:spcBef>
+                <a:spcAft>
+                  <a:spcPts val="0"/>
+                </a:spcAft>
+              </a:pPr>
+              <a:r>
+                <a:rPr sz="880">
+                  <a:solidFill>
+                    <a:srgbClr val="4D4D4D">
+                      <a:alpha val="100000"/>
+                    </a:srgbClr>
+                  </a:solidFill>
+                  <a:latin typeface="Helvetica"/>
+                  <a:cs typeface="Helvetica"/>
+                </a:rPr>
+                <a:t>0</a:t>
+              </a:r>
+            </a:p>
+          </p:txBody>
+        </p:sp>
+        <p:sp>
+          <p:nvSpPr>
+            <p:cNvPr id="74" name="tx74"/>
+            <p:cNvSpPr/>
+            <p:nvPr/>
+          </p:nvSpPr>
+          <p:spPr>
+            <a:xfrm>
+              <a:off x="762297" y="5254302"/>
+              <a:ext cx="62179" cy="80101"/>
+            </a:xfrm>
+            <a:prstGeom prst="rect">
+              <a:avLst/>
+            </a:prstGeom>
+            <a:noFill/>
+          </p:spPr>
+          <p:txBody>
+            <a:bodyPr lIns="0" rIns="0" tIns="0" bIns="0" anchorCtr="1" anchor="ctr" wrap="none"/>
+            <a:lstStyle/>
+            <a:p>
+              <a:pPr algn="l" marL="0" marR="0" indent="0">
+                <a:lnSpc>
+                  <a:spcPts val="880"/>
+                </a:lnSpc>
+                <a:spcBef>
+                  <a:spcPts val="0"/>
+                </a:spcBef>
+                <a:spcAft>
+                  <a:spcPts val="0"/>
+                </a:spcAft>
+              </a:pPr>
+              <a:r>
+                <a:rPr sz="880">
+                  <a:solidFill>
+                    <a:srgbClr val="4D4D4D">
+                      <a:alpha val="100000"/>
+                    </a:srgbClr>
+                  </a:solidFill>
+                  <a:latin typeface="Helvetica"/>
+                  <a:cs typeface="Helvetica"/>
+                </a:rPr>
+                <a:t>1</a:t>
+              </a:r>
+            </a:p>
+          </p:txBody>
+        </p:sp>
+        <p:sp>
+          <p:nvSpPr>
+            <p:cNvPr id="75" name="tx75"/>
+            <p:cNvSpPr/>
+            <p:nvPr/>
+          </p:nvSpPr>
+          <p:spPr>
+            <a:xfrm>
+              <a:off x="762297" y="4954968"/>
+              <a:ext cx="62179" cy="80101"/>
+            </a:xfrm>
+            <a:prstGeom prst="rect">
+              <a:avLst/>
+            </a:prstGeom>
+            <a:noFill/>
+          </p:spPr>
+          <p:txBody>
+            <a:bodyPr lIns="0" rIns="0" tIns="0" bIns="0" anchorCtr="1" anchor="ctr" wrap="none"/>
+            <a:lstStyle/>
+            <a:p>
+              <a:pPr algn="l" marL="0" marR="0" indent="0">
+                <a:lnSpc>
+                  <a:spcPts val="880"/>
+                </a:lnSpc>
+                <a:spcBef>
+                  <a:spcPts val="0"/>
+                </a:spcBef>
+                <a:spcAft>
+                  <a:spcPts val="0"/>
+                </a:spcAft>
+              </a:pPr>
+              <a:r>
+                <a:rPr sz="880">
+                  <a:solidFill>
+                    <a:srgbClr val="4D4D4D">
+                      <a:alpha val="100000"/>
+                    </a:srgbClr>
+                  </a:solidFill>
+                  <a:latin typeface="Helvetica"/>
+                  <a:cs typeface="Helvetica"/>
+                </a:rPr>
+                <a:t>2</a:t>
+              </a:r>
+            </a:p>
+          </p:txBody>
+        </p:sp>
+        <p:sp>
+          <p:nvSpPr>
+            <p:cNvPr id="76" name="tx76"/>
+            <p:cNvSpPr/>
+            <p:nvPr/>
+          </p:nvSpPr>
+          <p:spPr>
+            <a:xfrm>
+              <a:off x="762297" y="4655634"/>
+              <a:ext cx="62179" cy="80101"/>
+            </a:xfrm>
+            <a:prstGeom prst="rect">
+              <a:avLst/>
+            </a:prstGeom>
+            <a:noFill/>
+          </p:spPr>
+          <p:txBody>
+            <a:bodyPr lIns="0" rIns="0" tIns="0" bIns="0" anchorCtr="1" anchor="ctr" wrap="none"/>
+            <a:lstStyle/>
+            <a:p>
+              <a:pPr algn="l" marL="0" marR="0" indent="0">
+                <a:lnSpc>
+                  <a:spcPts val="880"/>
+                </a:lnSpc>
+                <a:spcBef>
+                  <a:spcPts val="0"/>
+                </a:spcBef>
+                <a:spcAft>
+                  <a:spcPts val="0"/>
+                </a:spcAft>
+              </a:pPr>
+              <a:r>
+                <a:rPr sz="880">
+                  <a:solidFill>
+                    <a:srgbClr val="4D4D4D">
+                      <a:alpha val="100000"/>
+                    </a:srgbClr>
+                  </a:solidFill>
+                  <a:latin typeface="Helvetica"/>
+                  <a:cs typeface="Helvetica"/>
+                </a:rPr>
+                <a:t>3</a:t>
+              </a:r>
+            </a:p>
+          </p:txBody>
+        </p:sp>
+        <p:sp>
+          <p:nvSpPr>
+            <p:cNvPr id="77" name="tx77"/>
+            <p:cNvSpPr/>
+            <p:nvPr/>
+          </p:nvSpPr>
+          <p:spPr>
+            <a:xfrm>
+              <a:off x="762297" y="4356300"/>
+              <a:ext cx="62179" cy="80101"/>
+            </a:xfrm>
+            <a:prstGeom prst="rect">
+              <a:avLst/>
+            </a:prstGeom>
+            <a:noFill/>
+          </p:spPr>
+          <p:txBody>
+            <a:bodyPr lIns="0" rIns="0" tIns="0" bIns="0" anchorCtr="1" anchor="ctr" wrap="none"/>
+            <a:lstStyle/>
+            <a:p>
+              <a:pPr algn="l" marL="0" marR="0" indent="0">
+                <a:lnSpc>
+                  <a:spcPts val="880"/>
+                </a:lnSpc>
+                <a:spcBef>
+                  <a:spcPts val="0"/>
+                </a:spcBef>
+                <a:spcAft>
+                  <a:spcPts val="0"/>
+                </a:spcAft>
+              </a:pPr>
+              <a:r>
+                <a:rPr sz="880">
+                  <a:solidFill>
+                    <a:srgbClr val="4D4D4D">
+                      <a:alpha val="100000"/>
+                    </a:srgbClr>
+                  </a:solidFill>
+                  <a:latin typeface="Helvetica"/>
+                  <a:cs typeface="Helvetica"/>
+                </a:rPr>
+                <a:t>4</a:t>
+              </a:r>
+            </a:p>
+          </p:txBody>
+        </p:sp>
+        <p:sp>
+          <p:nvSpPr>
+            <p:cNvPr id="78" name="tx78"/>
+            <p:cNvSpPr/>
+            <p:nvPr/>
+          </p:nvSpPr>
+          <p:spPr>
+            <a:xfrm>
+              <a:off x="1241001" y="5716183"/>
+              <a:ext cx="161574" cy="80101"/>
+            </a:xfrm>
+            <a:prstGeom prst="rect">
+              <a:avLst/>
+            </a:prstGeom>
+            <a:noFill/>
+          </p:spPr>
+          <p:txBody>
+            <a:bodyPr lIns="0" rIns="0" tIns="0" bIns="0" anchorCtr="1" anchor="ctr" wrap="none"/>
+            <a:lstStyle/>
+            <a:p>
+              <a:pPr algn="l" marL="0" marR="0" indent="0">
+                <a:lnSpc>
+                  <a:spcPts val="880"/>
+                </a:lnSpc>
+                <a:spcBef>
+                  <a:spcPts val="0"/>
+                </a:spcBef>
+                <a:spcAft>
+                  <a:spcPts val="0"/>
+                </a:spcAft>
+              </a:pPr>
+              <a:r>
+                <a:rPr sz="880">
+                  <a:solidFill>
+                    <a:srgbClr val="4D4D4D">
+                      <a:alpha val="100000"/>
+                    </a:srgbClr>
+                  </a:solidFill>
+                  <a:latin typeface="Helvetica"/>
+                  <a:cs typeface="Helvetica"/>
+                </a:rPr>
+                <a:t>-40</a:t>
+              </a:r>
+            </a:p>
+          </p:txBody>
+        </p:sp>
+        <p:sp>
+          <p:nvSpPr>
+            <p:cNvPr id="79" name="tx79"/>
+            <p:cNvSpPr/>
+            <p:nvPr/>
+          </p:nvSpPr>
+          <p:spPr>
+            <a:xfrm>
+              <a:off x="2054602" y="5716183"/>
+              <a:ext cx="161574" cy="80101"/>
+            </a:xfrm>
+            <a:prstGeom prst="rect">
+              <a:avLst/>
+            </a:prstGeom>
+            <a:noFill/>
+          </p:spPr>
+          <p:txBody>
+            <a:bodyPr lIns="0" rIns="0" tIns="0" bIns="0" anchorCtr="1" anchor="ctr" wrap="none"/>
+            <a:lstStyle/>
+            <a:p>
+              <a:pPr algn="l" marL="0" marR="0" indent="0">
+                <a:lnSpc>
+                  <a:spcPts val="880"/>
+                </a:lnSpc>
+                <a:spcBef>
+                  <a:spcPts val="0"/>
+                </a:spcBef>
+                <a:spcAft>
+                  <a:spcPts val="0"/>
+                </a:spcAft>
+              </a:pPr>
+              <a:r>
+                <a:rPr sz="880">
+                  <a:solidFill>
+                    <a:srgbClr val="4D4D4D">
+                      <a:alpha val="100000"/>
+                    </a:srgbClr>
+                  </a:solidFill>
+                  <a:latin typeface="Helvetica"/>
+                  <a:cs typeface="Helvetica"/>
+                </a:rPr>
+                <a:t>-30</a:t>
+              </a:r>
+            </a:p>
+          </p:txBody>
+        </p:sp>
+        <p:sp>
+          <p:nvSpPr>
+            <p:cNvPr id="80" name="tx80"/>
+            <p:cNvSpPr/>
+            <p:nvPr/>
+          </p:nvSpPr>
+          <p:spPr>
+            <a:xfrm>
+              <a:off x="2868203" y="5716183"/>
+              <a:ext cx="161574" cy="80101"/>
+            </a:xfrm>
+            <a:prstGeom prst="rect">
+              <a:avLst/>
+            </a:prstGeom>
+            <a:noFill/>
+          </p:spPr>
+          <p:txBody>
+            <a:bodyPr lIns="0" rIns="0" tIns="0" bIns="0" anchorCtr="1" anchor="ctr" wrap="none"/>
+            <a:lstStyle/>
+            <a:p>
+              <a:pPr algn="l" marL="0" marR="0" indent="0">
+                <a:lnSpc>
+                  <a:spcPts val="880"/>
+                </a:lnSpc>
+                <a:spcBef>
+                  <a:spcPts val="0"/>
+                </a:spcBef>
+                <a:spcAft>
+                  <a:spcPts val="0"/>
+                </a:spcAft>
+              </a:pPr>
+              <a:r>
+                <a:rPr sz="880">
+                  <a:solidFill>
+                    <a:srgbClr val="4D4D4D">
+                      <a:alpha val="100000"/>
+                    </a:srgbClr>
+                  </a:solidFill>
+                  <a:latin typeface="Helvetica"/>
+                  <a:cs typeface="Helvetica"/>
+                </a:rPr>
+                <a:t>-20</a:t>
+              </a:r>
+            </a:p>
+          </p:txBody>
+        </p:sp>
+        <p:sp>
+          <p:nvSpPr>
+            <p:cNvPr id="81" name="tx81"/>
+            <p:cNvSpPr/>
+            <p:nvPr/>
+          </p:nvSpPr>
+          <p:spPr>
+            <a:xfrm>
+              <a:off x="3681805" y="5716183"/>
+              <a:ext cx="161574" cy="80101"/>
+            </a:xfrm>
+            <a:prstGeom prst="rect">
+              <a:avLst/>
+            </a:prstGeom>
+            <a:noFill/>
+          </p:spPr>
+          <p:txBody>
+            <a:bodyPr lIns="0" rIns="0" tIns="0" bIns="0" anchorCtr="1" anchor="ctr" wrap="none"/>
+            <a:lstStyle/>
+            <a:p>
+              <a:pPr algn="l" marL="0" marR="0" indent="0">
+                <a:lnSpc>
+                  <a:spcPts val="880"/>
+                </a:lnSpc>
+                <a:spcBef>
+                  <a:spcPts val="0"/>
+                </a:spcBef>
+                <a:spcAft>
+                  <a:spcPts val="0"/>
+                </a:spcAft>
+              </a:pPr>
+              <a:r>
+                <a:rPr sz="880">
+                  <a:solidFill>
+                    <a:srgbClr val="4D4D4D">
+                      <a:alpha val="100000"/>
+                    </a:srgbClr>
+                  </a:solidFill>
+                  <a:latin typeface="Helvetica"/>
+                  <a:cs typeface="Helvetica"/>
+                </a:rPr>
+                <a:t>-10</a:t>
+              </a:r>
+            </a:p>
+          </p:txBody>
+        </p:sp>
+        <p:sp>
+          <p:nvSpPr>
+            <p:cNvPr id="82" name="tx82"/>
+            <p:cNvSpPr/>
+            <p:nvPr/>
+          </p:nvSpPr>
+          <p:spPr>
+            <a:xfrm>
+              <a:off x="4545104" y="5716183"/>
+              <a:ext cx="62179" cy="80101"/>
+            </a:xfrm>
+            <a:prstGeom prst="rect">
+              <a:avLst/>
+            </a:prstGeom>
+            <a:noFill/>
+          </p:spPr>
+          <p:txBody>
+            <a:bodyPr lIns="0" rIns="0" tIns="0" bIns="0" anchorCtr="1" anchor="ctr" wrap="none"/>
+            <a:lstStyle/>
+            <a:p>
+              <a:pPr algn="l" marL="0" marR="0" indent="0">
+                <a:lnSpc>
+                  <a:spcPts val="880"/>
+                </a:lnSpc>
+                <a:spcBef>
+                  <a:spcPts val="0"/>
+                </a:spcBef>
+                <a:spcAft>
+                  <a:spcPts val="0"/>
+                </a:spcAft>
+              </a:pPr>
+              <a:r>
+                <a:rPr sz="880">
+                  <a:solidFill>
+                    <a:srgbClr val="4D4D4D">
+                      <a:alpha val="100000"/>
+                    </a:srgbClr>
+                  </a:solidFill>
+                  <a:latin typeface="Helvetica"/>
+                  <a:cs typeface="Helvetica"/>
+                </a:rPr>
+                <a:t>0</a:t>
+              </a:r>
+            </a:p>
+          </p:txBody>
+        </p:sp>
+        <p:sp>
+          <p:nvSpPr>
+            <p:cNvPr id="83" name="tx83"/>
+            <p:cNvSpPr/>
+            <p:nvPr/>
+          </p:nvSpPr>
+          <p:spPr>
+            <a:xfrm>
+              <a:off x="5327615" y="5716183"/>
+              <a:ext cx="124358" cy="80101"/>
+            </a:xfrm>
+            <a:prstGeom prst="rect">
+              <a:avLst/>
+            </a:prstGeom>
+            <a:noFill/>
+          </p:spPr>
+          <p:txBody>
+            <a:bodyPr lIns="0" rIns="0" tIns="0" bIns="0" anchorCtr="1" anchor="ctr" wrap="none"/>
+            <a:lstStyle/>
+            <a:p>
+              <a:pPr algn="l" marL="0" marR="0" indent="0">
+                <a:lnSpc>
+                  <a:spcPts val="880"/>
+                </a:lnSpc>
+                <a:spcBef>
+                  <a:spcPts val="0"/>
+                </a:spcBef>
+                <a:spcAft>
+                  <a:spcPts val="0"/>
+                </a:spcAft>
+              </a:pPr>
+              <a:r>
+                <a:rPr sz="880">
+                  <a:solidFill>
+                    <a:srgbClr val="4D4D4D">
+                      <a:alpha val="100000"/>
+                    </a:srgbClr>
+                  </a:solidFill>
+                  <a:latin typeface="Helvetica"/>
+                  <a:cs typeface="Helvetica"/>
+                </a:rPr>
+                <a:t>10</a:t>
+              </a:r>
+            </a:p>
+          </p:txBody>
+        </p:sp>
+        <p:sp>
+          <p:nvSpPr>
+            <p:cNvPr id="84" name="tx84"/>
+            <p:cNvSpPr/>
+            <p:nvPr/>
+          </p:nvSpPr>
+          <p:spPr>
+            <a:xfrm>
+              <a:off x="6141217" y="5716183"/>
+              <a:ext cx="124358" cy="80101"/>
+            </a:xfrm>
+            <a:prstGeom prst="rect">
+              <a:avLst/>
+            </a:prstGeom>
+            <a:noFill/>
+          </p:spPr>
+          <p:txBody>
+            <a:bodyPr lIns="0" rIns="0" tIns="0" bIns="0" anchorCtr="1" anchor="ctr" wrap="none"/>
+            <a:lstStyle/>
+            <a:p>
+              <a:pPr algn="l" marL="0" marR="0" indent="0">
+                <a:lnSpc>
+                  <a:spcPts val="880"/>
+                </a:lnSpc>
+                <a:spcBef>
+                  <a:spcPts val="0"/>
+                </a:spcBef>
+                <a:spcAft>
+                  <a:spcPts val="0"/>
+                </a:spcAft>
+              </a:pPr>
+              <a:r>
+                <a:rPr sz="880">
+                  <a:solidFill>
+                    <a:srgbClr val="4D4D4D">
+                      <a:alpha val="100000"/>
+                    </a:srgbClr>
+                  </a:solidFill>
+                  <a:latin typeface="Helvetica"/>
+                  <a:cs typeface="Helvetica"/>
+                </a:rPr>
+                <a:t>20</a:t>
+              </a:r>
+            </a:p>
+          </p:txBody>
+        </p:sp>
+        <p:sp>
+          <p:nvSpPr>
+            <p:cNvPr id="85" name="tx85"/>
+            <p:cNvSpPr/>
+            <p:nvPr/>
+          </p:nvSpPr>
+          <p:spPr>
+            <a:xfrm>
+              <a:off x="6954818" y="5716183"/>
+              <a:ext cx="124358" cy="80101"/>
+            </a:xfrm>
+            <a:prstGeom prst="rect">
+              <a:avLst/>
+            </a:prstGeom>
+            <a:noFill/>
+          </p:spPr>
+          <p:txBody>
+            <a:bodyPr lIns="0" rIns="0" tIns="0" bIns="0" anchorCtr="1" anchor="ctr" wrap="none"/>
+            <a:lstStyle/>
+            <a:p>
+              <a:pPr algn="l" marL="0" marR="0" indent="0">
+                <a:lnSpc>
+                  <a:spcPts val="880"/>
+                </a:lnSpc>
+                <a:spcBef>
+                  <a:spcPts val="0"/>
+                </a:spcBef>
+                <a:spcAft>
+                  <a:spcPts val="0"/>
+                </a:spcAft>
+              </a:pPr>
+              <a:r>
+                <a:rPr sz="880">
+                  <a:solidFill>
+                    <a:srgbClr val="4D4D4D">
+                      <a:alpha val="100000"/>
+                    </a:srgbClr>
+                  </a:solidFill>
+                  <a:latin typeface="Helvetica"/>
+                  <a:cs typeface="Helvetica"/>
+                </a:rPr>
+                <a:t>30</a:t>
+              </a:r>
+            </a:p>
+          </p:txBody>
+        </p:sp>
+        <p:sp>
+          <p:nvSpPr>
+            <p:cNvPr id="86" name="tx86"/>
+            <p:cNvSpPr/>
+            <p:nvPr/>
+          </p:nvSpPr>
+          <p:spPr>
+            <a:xfrm>
+              <a:off x="7768419" y="5716183"/>
+              <a:ext cx="124358" cy="80101"/>
+            </a:xfrm>
+            <a:prstGeom prst="rect">
+              <a:avLst/>
+            </a:prstGeom>
+            <a:noFill/>
+          </p:spPr>
+          <p:txBody>
+            <a:bodyPr lIns="0" rIns="0" tIns="0" bIns="0" anchorCtr="1" anchor="ctr" wrap="none"/>
+            <a:lstStyle/>
+            <a:p>
+              <a:pPr algn="l" marL="0" marR="0" indent="0">
+                <a:lnSpc>
+                  <a:spcPts val="880"/>
+                </a:lnSpc>
+                <a:spcBef>
+                  <a:spcPts val="0"/>
+                </a:spcBef>
+                <a:spcAft>
+                  <a:spcPts val="0"/>
+                </a:spcAft>
+              </a:pPr>
+              <a:r>
+                <a:rPr sz="880">
+                  <a:solidFill>
+                    <a:srgbClr val="4D4D4D">
+                      <a:alpha val="100000"/>
+                    </a:srgbClr>
+                  </a:solidFill>
+                  <a:latin typeface="Helvetica"/>
+                  <a:cs typeface="Helvetica"/>
+                </a:rPr>
+                <a:t>40</a:t>
+              </a:r>
+            </a:p>
+          </p:txBody>
+        </p:sp>
+        <p:sp>
+          <p:nvSpPr>
+            <p:cNvPr id="87" name="tx87"/>
+            <p:cNvSpPr/>
+            <p:nvPr/>
+          </p:nvSpPr>
+          <p:spPr>
+            <a:xfrm>
+              <a:off x="2928340" y="5855859"/>
+              <a:ext cx="3578047" cy="100218"/>
+            </a:xfrm>
+            <a:prstGeom prst="rect">
+              <a:avLst/>
+            </a:prstGeom>
+            <a:noFill/>
+          </p:spPr>
+          <p:txBody>
+            <a:bodyPr lIns="0" rIns="0" tIns="0" bIns="0" anchorCtr="1" anchor="ctr" wrap="none"/>
+            <a:lstStyle/>
+            <a:p>
+              <a:pPr algn="l" marL="0" marR="0" indent="0">
+                <a:lnSpc>
+                  <a:spcPts val="1100"/>
+                </a:lnSpc>
+                <a:spcBef>
+                  <a:spcPts val="0"/>
+                </a:spcBef>
+                <a:spcAft>
+                  <a:spcPts val="0"/>
+                </a:spcAft>
+              </a:pPr>
+              <a:r>
+                <a:rPr sz="1100">
+                  <a:solidFill>
+                    <a:srgbClr val="000000">
+                      <a:alpha val="100000"/>
+                    </a:srgbClr>
+                  </a:solidFill>
+                  <a:latin typeface="Helvetica"/>
+                  <a:cs typeface="Helvetica"/>
+                </a:rPr>
+                <a:t>eGFR difference (%): 100 × (CKD-EPI Cr-Cys − CG) / CG</a:t>
+              </a:r>
+            </a:p>
+          </p:txBody>
+        </p:sp>
+        <p:sp>
+          <p:nvSpPr>
+            <p:cNvPr id="88" name="tx88"/>
+            <p:cNvSpPr/>
+            <p:nvPr/>
+          </p:nvSpPr>
+          <p:spPr>
+            <a:xfrm rot="-5400000">
+              <a:off x="138035" y="4944909"/>
+              <a:ext cx="1016904" cy="100218"/>
+            </a:xfrm>
+            <a:prstGeom prst="rect">
+              <a:avLst/>
+            </a:prstGeom>
+            <a:noFill/>
+          </p:spPr>
+          <p:txBody>
+            <a:bodyPr lIns="0" rIns="0" tIns="0" bIns="0" anchorCtr="1" anchor="ctr" wrap="none"/>
+            <a:lstStyle/>
+            <a:p>
+              <a:pPr algn="l" marL="0" marR="0" indent="0">
+                <a:lnSpc>
+                  <a:spcPts val="1100"/>
+                </a:lnSpc>
+                <a:spcBef>
+                  <a:spcPts val="0"/>
+                </a:spcBef>
+                <a:spcAft>
+                  <a:spcPts val="0"/>
+                </a:spcAft>
+              </a:pPr>
+              <a:r>
+                <a:rPr sz="1100">
+                  <a:solidFill>
+                    <a:srgbClr val="000000">
+                      <a:alpha val="100000"/>
+                    </a:srgbClr>
+                  </a:solidFill>
+                  <a:latin typeface="Helvetica"/>
+                  <a:cs typeface="Helvetica"/>
+                </a:rPr>
+                <a:t>subHR (95% CI)</a:t>
+              </a:r>
+            </a:p>
+          </p:txBody>
+        </p:sp>
+        <p:sp>
+          <p:nvSpPr>
+            <p:cNvPr id="89" name="tx89"/>
+            <p:cNvSpPr/>
+            <p:nvPr/>
+          </p:nvSpPr>
+          <p:spPr>
+            <a:xfrm>
+              <a:off x="887106" y="4159544"/>
+              <a:ext cx="6985375" cy="82021"/>
+            </a:xfrm>
+            <a:prstGeom prst="rect">
+              <a:avLst/>
+            </a:prstGeom>
+            <a:noFill/>
+          </p:spPr>
+          <p:txBody>
+            <a:bodyPr lIns="0" rIns="0" tIns="0" bIns="0" anchorCtr="1" anchor="ctr" wrap="none"/>
+            <a:lstStyle/>
+            <a:p>
+              <a:pPr algn="l" marL="0" marR="0" indent="0">
+                <a:lnSpc>
+                  <a:spcPts val="900"/>
+                </a:lnSpc>
+                <a:spcBef>
+                  <a:spcPts val="0"/>
+                </a:spcBef>
+                <a:spcAft>
+                  <a:spcPts val="0"/>
+                </a:spcAft>
+              </a:pPr>
+              <a:r>
+                <a:rPr sz="900">
+                  <a:solidFill>
+                    <a:srgbClr val="404040">
+                      <a:alpha val="100000"/>
+                    </a:srgbClr>
+                  </a:solidFill>
+                  <a:latin typeface="Helvetica"/>
+                  <a:cs typeface="Helvetica"/>
+                </a:rPr>
+                <a:t>subHR per 10 % decline: 1.26 (1.04-1.53), p_Bonf = 0.102 (n = 6)  |  per IQR decline (Δ = 29.9 %): 2.00 (1.13-3.54)  |  IQR: [-15.0, 14.9] %</a:t>
+              </a:r>
+            </a:p>
+          </p:txBody>
+        </p:sp>
+        <p:sp>
+          <p:nvSpPr>
+            <p:cNvPr id="90" name="tx90"/>
+            <p:cNvSpPr/>
+            <p:nvPr/>
+          </p:nvSpPr>
+          <p:spPr>
+            <a:xfrm>
+              <a:off x="887106" y="3932770"/>
               <a:ext cx="1936790" cy="120152"/>
             </a:xfrm>
             <a:prstGeom prst="rect">
